--- a/decks/Chem_02_Electrolytes-Osmolality-Acid-Base.pptx
+++ b/decks/Chem_02_Electrolytes-Osmolality-Acid-Base.pptx
@@ -26,9 +26,13 @@
     <p:sldId id="274" r:id="rId20"/>
     <p:sldId id="275" r:id="rId21"/>
     <p:sldId id="276" r:id="rId22"/>
+    <p:sldId id="277" r:id="rId23"/>
+    <p:sldId id="278" r:id="rId24"/>
+    <p:sldId id="279" r:id="rId25"/>
+    <p:sldId id="280" r:id="rId26"/>
   </p:sldIdLst>
   <p:notesMasterIdLst>
-    <p:notesMasterId r:id="rId23"/>
+    <p:notesMasterId r:id="rId27"/>
   </p:notesMasterIdLst>
   <p:sldSz cx="12191695" cy="6858000"/>
   <p:notesSz cx="6858000" cy="12191695"/>
@@ -1690,6 +1694,358 @@
             <a:fld id="{F7021451-1387-4CA6-816F-3879F97B5CBC}" type="slidenum">
               <a:rPr lang="en-US"/>
               <a:t>21</a:t>
+            </a:fld>
+            <a:endParaRPr lang="en-US"/>
+          </a:p>
+        </p:txBody>
+      </p:sp>
+    </p:spTree>
+    <p:extLst>
+      <p:ext uri="{BB962C8B-B14F-4D97-AF65-F5344CB8AC3E}">
+        <p14:creationId xmlns:p14="http://schemas.microsoft.com/office/powerpoint/2010/main" val="1024086991"/>
+      </p:ext>
+    </p:extLst>
+  </p:cSld>
+  <p:clrMapOvr>
+    <a:masterClrMapping/>
+  </p:clrMapOvr>
+</p:notes>
+</file>
+
+<file path=ppt/notesSlides/notesSlide22.xml><?xml version="1.0" encoding="utf-8"?>
+<p:notes xmlns:a="http://schemas.openxmlformats.org/drawingml/2006/main" xmlns:r="http://schemas.openxmlformats.org/officeDocument/2006/relationships" xmlns:p="http://schemas.openxmlformats.org/presentationml/2006/main">
+  <p:cSld>
+    <p:spTree>
+      <p:nvGrpSpPr>
+        <p:cNvPr id="1" name=""/>
+        <p:cNvGrpSpPr/>
+        <p:nvPr/>
+      </p:nvGrpSpPr>
+      <p:grpSpPr>
+        <a:xfrm>
+          <a:off x="0" y="0"/>
+          <a:ext cx="0" cy="0"/>
+          <a:chOff x="0" y="0"/>
+          <a:chExt cx="0" cy="0"/>
+        </a:xfrm>
+      </p:grpSpPr>
+      <p:sp>
+        <p:nvSpPr>
+          <p:cNvPr id="2" name="Slide Image Placeholder 1"/>
+          <p:cNvSpPr>
+            <a:spLocks noGrp="1" noRot="1" noChangeAspect="1"/>
+          </p:cNvSpPr>
+          <p:nvPr>
+            <p:ph type="sldImg"/>
+          </p:nvPr>
+        </p:nvSpPr>
+        <p:spPr/>
+      </p:sp>
+      <p:sp>
+        <p:nvSpPr>
+          <p:cNvPr id="3" name="Notes Placeholder 2"/>
+          <p:cNvSpPr>
+            <a:spLocks noGrp="1"/>
+          </p:cNvSpPr>
+          <p:nvPr>
+            <p:ph type="body" idx="1"/>
+          </p:nvPr>
+        </p:nvSpPr>
+        <p:spPr/>
+        <p:txBody>
+          <a:bodyPr/>
+          <a:lstStyle/>
+          <a:p>
+            <a:r>
+              <a:rPr lang="en-US" dirty="0"/>
+              <a:t/>
+            </a:r>
+            <a:endParaRPr lang="en-US" dirty="0"/>
+          </a:p>
+        </p:txBody>
+      </p:sp>
+      <p:sp>
+        <p:nvSpPr>
+          <p:cNvPr id="4" name="Slide Number Placeholder 3"/>
+          <p:cNvSpPr>
+            <a:spLocks noGrp="1"/>
+          </p:cNvSpPr>
+          <p:nvPr>
+            <p:ph type="sldNum" sz="quarter" idx="10"/>
+          </p:nvPr>
+        </p:nvSpPr>
+        <p:spPr/>
+        <p:txBody>
+          <a:bodyPr/>
+          <a:lstStyle/>
+          <a:p>
+            <a:fld id="{F7021451-1387-4CA6-816F-3879F97B5CBC}" type="slidenum">
+              <a:rPr lang="en-US"/>
+              <a:t>22</a:t>
+            </a:fld>
+            <a:endParaRPr lang="en-US"/>
+          </a:p>
+        </p:txBody>
+      </p:sp>
+    </p:spTree>
+    <p:extLst>
+      <p:ext uri="{BB962C8B-B14F-4D97-AF65-F5344CB8AC3E}">
+        <p14:creationId xmlns:p14="http://schemas.microsoft.com/office/powerpoint/2010/main" val="1024086991"/>
+      </p:ext>
+    </p:extLst>
+  </p:cSld>
+  <p:clrMapOvr>
+    <a:masterClrMapping/>
+  </p:clrMapOvr>
+</p:notes>
+</file>
+
+<file path=ppt/notesSlides/notesSlide23.xml><?xml version="1.0" encoding="utf-8"?>
+<p:notes xmlns:a="http://schemas.openxmlformats.org/drawingml/2006/main" xmlns:r="http://schemas.openxmlformats.org/officeDocument/2006/relationships" xmlns:p="http://schemas.openxmlformats.org/presentationml/2006/main">
+  <p:cSld>
+    <p:spTree>
+      <p:nvGrpSpPr>
+        <p:cNvPr id="1" name=""/>
+        <p:cNvGrpSpPr/>
+        <p:nvPr/>
+      </p:nvGrpSpPr>
+      <p:grpSpPr>
+        <a:xfrm>
+          <a:off x="0" y="0"/>
+          <a:ext cx="0" cy="0"/>
+          <a:chOff x="0" y="0"/>
+          <a:chExt cx="0" cy="0"/>
+        </a:xfrm>
+      </p:grpSpPr>
+      <p:sp>
+        <p:nvSpPr>
+          <p:cNvPr id="2" name="Slide Image Placeholder 1"/>
+          <p:cNvSpPr>
+            <a:spLocks noGrp="1" noRot="1" noChangeAspect="1"/>
+          </p:cNvSpPr>
+          <p:nvPr>
+            <p:ph type="sldImg"/>
+          </p:nvPr>
+        </p:nvSpPr>
+        <p:spPr/>
+      </p:sp>
+      <p:sp>
+        <p:nvSpPr>
+          <p:cNvPr id="3" name="Notes Placeholder 2"/>
+          <p:cNvSpPr>
+            <a:spLocks noGrp="1"/>
+          </p:cNvSpPr>
+          <p:nvPr>
+            <p:ph type="body" idx="1"/>
+          </p:nvPr>
+        </p:nvSpPr>
+        <p:spPr/>
+        <p:txBody>
+          <a:bodyPr/>
+          <a:lstStyle/>
+          <a:p>
+            <a:r>
+              <a:rPr lang="en-US" dirty="0"/>
+              <a:t/>
+            </a:r>
+            <a:endParaRPr lang="en-US" dirty="0"/>
+          </a:p>
+        </p:txBody>
+      </p:sp>
+      <p:sp>
+        <p:nvSpPr>
+          <p:cNvPr id="4" name="Slide Number Placeholder 3"/>
+          <p:cNvSpPr>
+            <a:spLocks noGrp="1"/>
+          </p:cNvSpPr>
+          <p:nvPr>
+            <p:ph type="sldNum" sz="quarter" idx="10"/>
+          </p:nvPr>
+        </p:nvSpPr>
+        <p:spPr/>
+        <p:txBody>
+          <a:bodyPr/>
+          <a:lstStyle/>
+          <a:p>
+            <a:fld id="{F7021451-1387-4CA6-816F-3879F97B5CBC}" type="slidenum">
+              <a:rPr lang="en-US"/>
+              <a:t>23</a:t>
+            </a:fld>
+            <a:endParaRPr lang="en-US"/>
+          </a:p>
+        </p:txBody>
+      </p:sp>
+    </p:spTree>
+    <p:extLst>
+      <p:ext uri="{BB962C8B-B14F-4D97-AF65-F5344CB8AC3E}">
+        <p14:creationId xmlns:p14="http://schemas.microsoft.com/office/powerpoint/2010/main" val="1024086991"/>
+      </p:ext>
+    </p:extLst>
+  </p:cSld>
+  <p:clrMapOvr>
+    <a:masterClrMapping/>
+  </p:clrMapOvr>
+</p:notes>
+</file>
+
+<file path=ppt/notesSlides/notesSlide24.xml><?xml version="1.0" encoding="utf-8"?>
+<p:notes xmlns:a="http://schemas.openxmlformats.org/drawingml/2006/main" xmlns:r="http://schemas.openxmlformats.org/officeDocument/2006/relationships" xmlns:p="http://schemas.openxmlformats.org/presentationml/2006/main">
+  <p:cSld>
+    <p:spTree>
+      <p:nvGrpSpPr>
+        <p:cNvPr id="1" name=""/>
+        <p:cNvGrpSpPr/>
+        <p:nvPr/>
+      </p:nvGrpSpPr>
+      <p:grpSpPr>
+        <a:xfrm>
+          <a:off x="0" y="0"/>
+          <a:ext cx="0" cy="0"/>
+          <a:chOff x="0" y="0"/>
+          <a:chExt cx="0" cy="0"/>
+        </a:xfrm>
+      </p:grpSpPr>
+      <p:sp>
+        <p:nvSpPr>
+          <p:cNvPr id="2" name="Slide Image Placeholder 1"/>
+          <p:cNvSpPr>
+            <a:spLocks noGrp="1" noRot="1" noChangeAspect="1"/>
+          </p:cNvSpPr>
+          <p:nvPr>
+            <p:ph type="sldImg"/>
+          </p:nvPr>
+        </p:nvSpPr>
+        <p:spPr/>
+      </p:sp>
+      <p:sp>
+        <p:nvSpPr>
+          <p:cNvPr id="3" name="Notes Placeholder 2"/>
+          <p:cNvSpPr>
+            <a:spLocks noGrp="1"/>
+          </p:cNvSpPr>
+          <p:nvPr>
+            <p:ph type="body" idx="1"/>
+          </p:nvPr>
+        </p:nvSpPr>
+        <p:spPr/>
+        <p:txBody>
+          <a:bodyPr/>
+          <a:lstStyle/>
+          <a:p>
+            <a:r>
+              <a:rPr lang="en-US" dirty="0"/>
+              <a:t/>
+            </a:r>
+            <a:endParaRPr lang="en-US" dirty="0"/>
+          </a:p>
+        </p:txBody>
+      </p:sp>
+      <p:sp>
+        <p:nvSpPr>
+          <p:cNvPr id="4" name="Slide Number Placeholder 3"/>
+          <p:cNvSpPr>
+            <a:spLocks noGrp="1"/>
+          </p:cNvSpPr>
+          <p:nvPr>
+            <p:ph type="sldNum" sz="quarter" idx="10"/>
+          </p:nvPr>
+        </p:nvSpPr>
+        <p:spPr/>
+        <p:txBody>
+          <a:bodyPr/>
+          <a:lstStyle/>
+          <a:p>
+            <a:fld id="{F7021451-1387-4CA6-816F-3879F97B5CBC}" type="slidenum">
+              <a:rPr lang="en-US"/>
+              <a:t>24</a:t>
+            </a:fld>
+            <a:endParaRPr lang="en-US"/>
+          </a:p>
+        </p:txBody>
+      </p:sp>
+    </p:spTree>
+    <p:extLst>
+      <p:ext uri="{BB962C8B-B14F-4D97-AF65-F5344CB8AC3E}">
+        <p14:creationId xmlns:p14="http://schemas.microsoft.com/office/powerpoint/2010/main" val="1024086991"/>
+      </p:ext>
+    </p:extLst>
+  </p:cSld>
+  <p:clrMapOvr>
+    <a:masterClrMapping/>
+  </p:clrMapOvr>
+</p:notes>
+</file>
+
+<file path=ppt/notesSlides/notesSlide25.xml><?xml version="1.0" encoding="utf-8"?>
+<p:notes xmlns:a="http://schemas.openxmlformats.org/drawingml/2006/main" xmlns:r="http://schemas.openxmlformats.org/officeDocument/2006/relationships" xmlns:p="http://schemas.openxmlformats.org/presentationml/2006/main">
+  <p:cSld>
+    <p:spTree>
+      <p:nvGrpSpPr>
+        <p:cNvPr id="1" name=""/>
+        <p:cNvGrpSpPr/>
+        <p:nvPr/>
+      </p:nvGrpSpPr>
+      <p:grpSpPr>
+        <a:xfrm>
+          <a:off x="0" y="0"/>
+          <a:ext cx="0" cy="0"/>
+          <a:chOff x="0" y="0"/>
+          <a:chExt cx="0" cy="0"/>
+        </a:xfrm>
+      </p:grpSpPr>
+      <p:sp>
+        <p:nvSpPr>
+          <p:cNvPr id="2" name="Slide Image Placeholder 1"/>
+          <p:cNvSpPr>
+            <a:spLocks noGrp="1" noRot="1" noChangeAspect="1"/>
+          </p:cNvSpPr>
+          <p:nvPr>
+            <p:ph type="sldImg"/>
+          </p:nvPr>
+        </p:nvSpPr>
+        <p:spPr/>
+      </p:sp>
+      <p:sp>
+        <p:nvSpPr>
+          <p:cNvPr id="3" name="Notes Placeholder 2"/>
+          <p:cNvSpPr>
+            <a:spLocks noGrp="1"/>
+          </p:cNvSpPr>
+          <p:nvPr>
+            <p:ph type="body" idx="1"/>
+          </p:nvPr>
+        </p:nvSpPr>
+        <p:spPr/>
+        <p:txBody>
+          <a:bodyPr/>
+          <a:lstStyle/>
+          <a:p>
+            <a:r>
+              <a:rPr lang="en-US" dirty="0"/>
+              <a:t/>
+            </a:r>
+            <a:endParaRPr lang="en-US" dirty="0"/>
+          </a:p>
+        </p:txBody>
+      </p:sp>
+      <p:sp>
+        <p:nvSpPr>
+          <p:cNvPr id="4" name="Slide Number Placeholder 3"/>
+          <p:cNvSpPr>
+            <a:spLocks noGrp="1"/>
+          </p:cNvSpPr>
+          <p:nvPr>
+            <p:ph type="sldNum" sz="quarter" idx="10"/>
+          </p:nvPr>
+        </p:nvSpPr>
+        <p:spPr/>
+        <p:txBody>
+          <a:bodyPr/>
+          <a:lstStyle/>
+          <a:p>
+            <a:fld id="{F7021451-1387-4CA6-816F-3879F97B5CBC}" type="slidenum">
+              <a:rPr lang="en-US"/>
+              <a:t>25</a:t>
             </a:fld>
             <a:endParaRPr lang="en-US"/>
           </a:p>
@@ -2893,7 +3249,7 @@
                 <a:ea typeface="Calibri" pitchFamily="34" charset="-122"/>
                 <a:cs typeface="Calibri" pitchFamily="34" charset="-120"/>
               </a:rPr>
-              <a:t>Tonicity, Gaps, and a Stepwise Interpretation</a:t>
+              <a:t>Tonicity, Gaps, Compensation, and Mixed Disorders</a:t>
             </a:r>
             <a:endParaRPr lang="en-US" sz="1900" dirty="0"/>
           </a:p>
@@ -3723,7 +4079,7 @@
                           <a:ea typeface="Calibri" pitchFamily="34" charset="-122"/>
                           <a:cs typeface="Calibri" pitchFamily="34" charset="-120"/>
                         </a:rPr>
-                        <a:t>PaCO₂ rises ~0.7 mmHg per 1 mmol/L HCO₃</a:t>
+                        <a:t>PaCO₂ ↑ ~0.7 mmHg per 1 mmol/L HCO₃</a:t>
                       </a:r>
                       <a:endParaRPr lang="en-US" sz="1100" dirty="0">
                         <a:latin typeface="Calibri" charset="0"/>
@@ -3929,7 +4285,7 @@
                           <a:ea typeface="Calibri" pitchFamily="34" charset="-122"/>
                           <a:cs typeface="Calibri" pitchFamily="34" charset="-120"/>
                         </a:rPr>
-                        <a:t>HCO₃ ↑ (acute ~1, chronic ~3.5 per 10 PaCO₂)</a:t>
+                        <a:t>HCO₃ ↑ ~1 (acute) / ~3.5 (chronic) per 10 PaCO₂</a:t>
                       </a:r>
                       <a:endParaRPr lang="en-US" sz="1100" dirty="0">
                         <a:latin typeface="Calibri" charset="0"/>
@@ -4135,7 +4491,7 @@
                           <a:ea typeface="Calibri" pitchFamily="34" charset="-122"/>
                           <a:cs typeface="Calibri" pitchFamily="34" charset="-120"/>
                         </a:rPr>
-                        <a:t>HCO₃ ↓ (acute ~2, chronic ~4–5 per 10 PaCO₂)</a:t>
+                        <a:t>HCO₃ ↓ ~2 (acute) / ~4–5 (chronic) per 10 PaCO₂</a:t>
                       </a:r>
                       <a:endParaRPr lang="en-US" sz="1100" dirty="0">
                         <a:latin typeface="Calibri" charset="0"/>
@@ -4440,7 +4796,7 @@
                 <a:ea typeface="Calibri" pitchFamily="34" charset="-122"/>
                 <a:cs typeface="Calibri" pitchFamily="34" charset="-120"/>
               </a:rPr>
-              <a:t>High vs Normal Anion Gap &amp; the Delta-Delta</a:t>
+              <a:t>High vs Normal Gap &amp; the Delta-Delta</a:t>
             </a:r>
             <a:endParaRPr lang="en-US" sz="3000" dirty="0"/>
           </a:p>
@@ -4508,7 +4864,7 @@
                 <a:ea typeface="Calibri" pitchFamily="34" charset="-122"/>
                 <a:cs typeface="Calibri" pitchFamily="34" charset="-120"/>
               </a:rPr>
-              <a:t>HIGH ANION GAP ACIDOSIS (MUDPILES)</a:t>
+              <a:t>HIGH ANION GAP (GOLD MARK / MUDPILES)</a:t>
             </a:r>
             <a:endParaRPr lang="en-US" sz="1200" dirty="0"/>
           </a:p>
@@ -4551,7 +4907,7 @@
                 <a:ea typeface="Calibri" pitchFamily="34" charset="-122"/>
                 <a:cs typeface="Calibri" pitchFamily="34" charset="-120"/>
               </a:rPr>
-              <a:t>Methanol, Uremia, DKA, Propylene glycol, Iron/INH, Lactate, Ethylene glycol, Salicylates.</a:t>
+              <a:t>Glycols, Oxoproline, L-lactate, D-lactate, Methanol, Aspirin, Renal failure, Ketoacidosis.</a:t>
             </a:r>
             <a:endParaRPr lang="en-US" sz="1250" dirty="0"/>
           </a:p>
@@ -4614,7 +4970,7 @@
                 <a:ea typeface="Calibri" pitchFamily="34" charset="-122"/>
                 <a:cs typeface="Calibri" pitchFamily="34" charset="-120"/>
               </a:rPr>
-              <a:t>Salicylate classically causes a mixed high-gap acidosis + respiratory alkalosis.</a:t>
+              <a:t>Salicylate → mixed high-gap acidosis + respiratory alkalosis.</a:t>
             </a:r>
             <a:endParaRPr lang="en-US" sz="1250" dirty="0"/>
           </a:p>
@@ -4725,7 +5081,7 @@
                 <a:ea typeface="Calibri" pitchFamily="34" charset="-122"/>
                 <a:cs typeface="Calibri" pitchFamily="34" charset="-120"/>
               </a:rPr>
-              <a:t>Normal (hyperchloremic) gap: GI bicarbonate loss (diarrhea) or renal tubular acidosis.</a:t>
+              <a:t>Normal (hyperchloremic) gap: GI bicarbonate loss (diarrhea) or RTA.</a:t>
             </a:r>
             <a:endParaRPr lang="en-US" sz="1250" dirty="0"/>
           </a:p>
@@ -4767,7 +5123,7 @@
                 <a:ea typeface="Calibri" pitchFamily="34" charset="-122"/>
                 <a:cs typeface="Calibri" pitchFamily="34" charset="-120"/>
               </a:rPr>
-              <a:t>Δgap ≪ ΔHCO₃ → coexisting normal-gap acidosis; Δgap ≫ ΔHCO₃ → coexisting metabolic alkalosis.</a:t>
+              <a:t>Δgap ≪ ΔHCO₃ → added normal-gap acidosis; Δgap ≫ ΔHCO₃ → added metabolic alkalosis.</a:t>
             </a:r>
             <a:endParaRPr lang="en-US" sz="1250" dirty="0"/>
           </a:p>
@@ -4911,6 +5267,1389 @@
 <file path=ppt/slides/slide12.xml><?xml version="1.0" encoding="utf-8"?>
 <p:sld xmlns:a="http://schemas.openxmlformats.org/drawingml/2006/main" xmlns:r="http://schemas.openxmlformats.org/officeDocument/2006/relationships" xmlns:p="http://schemas.openxmlformats.org/presentationml/2006/main">
   <p:cSld name="Slide 12">
+    <p:bg>
+      <p:bgPr>
+        <a:solidFill>
+          <a:srgbClr val="FFFFFF"/>
+        </a:solidFill>
+      </p:bgPr>
+    </p:bg>
+    <p:spTree>
+      <p:nvGrpSpPr>
+        <p:cNvPr id="1" name=""/>
+        <p:cNvGrpSpPr/>
+        <p:nvPr/>
+      </p:nvGrpSpPr>
+      <p:grpSpPr>
+        <a:xfrm>
+          <a:off x="0" y="0"/>
+          <a:ext cx="0" cy="0"/>
+          <a:chOff x="0" y="0"/>
+          <a:chExt cx="0" cy="0"/>
+        </a:xfrm>
+      </p:grpSpPr>
+      <p:sp>
+        <p:nvSpPr>
+          <p:cNvPr id="2" name="Text 0"/>
+          <p:cNvSpPr/>
+          <p:nvPr/>
+        </p:nvSpPr>
+        <p:spPr>
+          <a:xfrm>
+            <a:off x="566928" y="329184"/>
+            <a:ext cx="10515600" cy="310896"/>
+          </a:xfrm>
+          <a:prstGeom prst="rect">
+            <a:avLst/>
+          </a:prstGeom>
+          <a:noFill/>
+          <a:ln/>
+        </p:spPr>
+        <p:txBody>
+          <a:bodyPr wrap="square" lIns="0" tIns="0" rIns="0" bIns="0" rtlCol="0" anchor="ctr"/>
+          <a:lstStyle/>
+          <a:p>
+            <a:pPr algn="l" indent="0" marL="0">
+              <a:buNone/>
+            </a:pPr>
+            <a:r>
+              <a:rPr lang="en-US" sz="1100" b="1" spc="150" kern="0" dirty="0">
+                <a:solidFill>
+                  <a:srgbClr val="1565C0"/>
+                </a:solidFill>
+                <a:latin typeface="Calibri" pitchFamily="34" charset="0"/>
+                <a:ea typeface="Calibri" pitchFamily="34" charset="-122"/>
+                <a:cs typeface="Calibri" pitchFamily="34" charset="-120"/>
+              </a:rPr>
+              <a:t>CLINICAL CHEMISTRY   ·   RENAL TUBULAR ACIDOSIS</a:t>
+            </a:r>
+            <a:endParaRPr lang="en-US" sz="1100" dirty="0"/>
+          </a:p>
+        </p:txBody>
+      </p:sp>
+      <p:sp>
+        <p:nvSpPr>
+          <p:cNvPr id="3" name="Text 1"/>
+          <p:cNvSpPr/>
+          <p:nvPr/>
+        </p:nvSpPr>
+        <p:spPr>
+          <a:xfrm>
+            <a:off x="566928" y="713232"/>
+            <a:ext cx="11064240" cy="749808"/>
+          </a:xfrm>
+          <a:prstGeom prst="rect">
+            <a:avLst/>
+          </a:prstGeom>
+          <a:noFill/>
+          <a:ln/>
+        </p:spPr>
+        <p:txBody>
+          <a:bodyPr wrap="square" lIns="0" tIns="0" rIns="0" bIns="0" rtlCol="0" anchor="ctr"/>
+          <a:lstStyle/>
+          <a:p>
+            <a:pPr algn="l" indent="0" marL="0">
+              <a:buNone/>
+            </a:pPr>
+            <a:r>
+              <a:rPr lang="en-US" sz="3000" b="1" dirty="0">
+                <a:solidFill>
+                  <a:srgbClr val="0E3A5F"/>
+                </a:solidFill>
+                <a:latin typeface="Calibri" pitchFamily="34" charset="0"/>
+                <a:ea typeface="Calibri" pitchFamily="34" charset="-122"/>
+                <a:cs typeface="Calibri" pitchFamily="34" charset="-120"/>
+              </a:rPr>
+              <a:t>Normal-Gap Acidosis: The RTAs</a:t>
+            </a:r>
+            <a:endParaRPr lang="en-US" sz="3000" dirty="0"/>
+          </a:p>
+        </p:txBody>
+      </p:sp>
+      <p:graphicFrame>
+        <p:nvGraphicFramePr>
+          <p:cNvPr id="13" name="Table 0"/>
+          <p:cNvGraphicFramePr>
+            <a:graphicFrameLocks noGrp="1"/>
+          </p:cNvGraphicFramePr>
+          <p:nvPr>
+            <p:extLst>
+              <p:ext uri="{D42A27DB-BD31-4B8C-83A1-F6EECF244321}">
+                <p14:modId xmlns:p14="http://schemas.microsoft.com/office/powerpoint/2010/main" val="1579011935"/>
+              </p:ext>
+            </p:extLst>
+          </p:nvPr>
+        </p:nvGraphicFramePr>
+        <p:xfrm>
+          <a:off x="566928" y="1463040"/>
+          <a:ext cx="11057839" cy="914400"/>
+        </p:xfrm>
+        <a:graphic>
+          <a:graphicData uri="http://schemas.openxmlformats.org/drawingml/2006/table">
+            <a:tbl>
+              <a:tblPr/>
+              <a:tblGrid>
+                <a:gridCol w="1828800"/>
+                <a:gridCol w="4572000"/>
+                <a:gridCol w="2286000"/>
+                <a:gridCol w="2368296"/>
+              </a:tblGrid>
+              <a:tr h="548640">
+                <a:tc>
+                  <a:txBody>
+                    <a:bodyPr/>
+                    <a:lstStyle/>
+                    <a:p>
+                      <a:pPr algn="ctr" indent="0" marL="0">
+                        <a:buNone/>
+                      </a:pPr>
+                      <a:r>
+                        <a:rPr lang="en-US" sz="1200" b="1" dirty="0">
+                          <a:solidFill>
+                            <a:srgbClr val="FFFFFF"/>
+                          </a:solidFill>
+                          <a:latin typeface="Calibri" pitchFamily="34" charset="0"/>
+                          <a:ea typeface="Calibri" pitchFamily="34" charset="-122"/>
+                          <a:cs typeface="Calibri" pitchFamily="34" charset="-120"/>
+                        </a:rPr>
+                        <a:t>Type</a:t>
+                      </a:r>
+                      <a:endParaRPr lang="en-US" sz="1200" dirty="0">
+                        <a:latin typeface="Calibri" charset="0"/>
+                        <a:ea typeface="Calibri" charset="0"/>
+                        <a:cs typeface="Calibri" charset="0"/>
+                      </a:endParaRPr>
+                    </a:p>
+                  </a:txBody>
+                  <a:tcPr marL="91440" marR="91440" marT="45720" marB="45720" anchor="ctr">
+                    <a:lnL w="9525" cap="flat" cmpd="sng" algn="ctr">
+                      <a:solidFill>
+                        <a:srgbClr val="DCE4EC"/>
+                      </a:solidFill>
+                      <a:prstDash val="solid"/>
+                      <a:round/>
+                      <a:headEnd type="none" w="med" len="med"/>
+                      <a:tailEnd type="none" w="med" len="med"/>
+                    </a:lnL>
+                    <a:lnR w="9525" cap="flat" cmpd="sng" algn="ctr">
+                      <a:solidFill>
+                        <a:srgbClr val="DCE4EC"/>
+                      </a:solidFill>
+                      <a:prstDash val="solid"/>
+                      <a:round/>
+                      <a:headEnd type="none" w="med" len="med"/>
+                      <a:tailEnd type="none" w="med" len="med"/>
+                    </a:lnR>
+                    <a:lnT w="9525" cap="flat" cmpd="sng" algn="ctr">
+                      <a:solidFill>
+                        <a:srgbClr val="DCE4EC"/>
+                      </a:solidFill>
+                      <a:prstDash val="solid"/>
+                      <a:round/>
+                      <a:headEnd type="none" w="med" len="med"/>
+                      <a:tailEnd type="none" w="med" len="med"/>
+                    </a:lnT>
+                    <a:lnB w="9525" cap="flat" cmpd="sng" algn="ctr">
+                      <a:solidFill>
+                        <a:srgbClr val="DCE4EC"/>
+                      </a:solidFill>
+                      <a:prstDash val="solid"/>
+                      <a:round/>
+                      <a:headEnd type="none" w="med" len="med"/>
+                      <a:tailEnd type="none" w="med" len="med"/>
+                    </a:lnB>
+                    <a:solidFill>
+                      <a:srgbClr val="1565C0"/>
+                    </a:solidFill>
+                  </a:tcPr>
+                </a:tc>
+                <a:tc>
+                  <a:txBody>
+                    <a:bodyPr/>
+                    <a:lstStyle/>
+                    <a:p>
+                      <a:pPr algn="ctr" indent="0" marL="0">
+                        <a:buNone/>
+                      </a:pPr>
+                      <a:r>
+                        <a:rPr lang="en-US" sz="1200" b="1" dirty="0">
+                          <a:solidFill>
+                            <a:srgbClr val="FFFFFF"/>
+                          </a:solidFill>
+                          <a:latin typeface="Calibri" pitchFamily="34" charset="0"/>
+                          <a:ea typeface="Calibri" pitchFamily="34" charset="-122"/>
+                          <a:cs typeface="Calibri" pitchFamily="34" charset="-120"/>
+                        </a:rPr>
+                        <a:t>Defect</a:t>
+                      </a:r>
+                      <a:endParaRPr lang="en-US" sz="1200" dirty="0">
+                        <a:latin typeface="Calibri" charset="0"/>
+                        <a:ea typeface="Calibri" charset="0"/>
+                        <a:cs typeface="Calibri" charset="0"/>
+                      </a:endParaRPr>
+                    </a:p>
+                  </a:txBody>
+                  <a:tcPr marL="91440" marR="91440" marT="45720" marB="45720" anchor="ctr">
+                    <a:lnL w="9525" cap="flat" cmpd="sng" algn="ctr">
+                      <a:solidFill>
+                        <a:srgbClr val="DCE4EC"/>
+                      </a:solidFill>
+                      <a:prstDash val="solid"/>
+                      <a:round/>
+                      <a:headEnd type="none" w="med" len="med"/>
+                      <a:tailEnd type="none" w="med" len="med"/>
+                    </a:lnL>
+                    <a:lnR w="9525" cap="flat" cmpd="sng" algn="ctr">
+                      <a:solidFill>
+                        <a:srgbClr val="DCE4EC"/>
+                      </a:solidFill>
+                      <a:prstDash val="solid"/>
+                      <a:round/>
+                      <a:headEnd type="none" w="med" len="med"/>
+                      <a:tailEnd type="none" w="med" len="med"/>
+                    </a:lnR>
+                    <a:lnT w="9525" cap="flat" cmpd="sng" algn="ctr">
+                      <a:solidFill>
+                        <a:srgbClr val="DCE4EC"/>
+                      </a:solidFill>
+                      <a:prstDash val="solid"/>
+                      <a:round/>
+                      <a:headEnd type="none" w="med" len="med"/>
+                      <a:tailEnd type="none" w="med" len="med"/>
+                    </a:lnT>
+                    <a:lnB w="9525" cap="flat" cmpd="sng" algn="ctr">
+                      <a:solidFill>
+                        <a:srgbClr val="DCE4EC"/>
+                      </a:solidFill>
+                      <a:prstDash val="solid"/>
+                      <a:round/>
+                      <a:headEnd type="none" w="med" len="med"/>
+                      <a:tailEnd type="none" w="med" len="med"/>
+                    </a:lnB>
+                    <a:solidFill>
+                      <a:srgbClr val="1565C0"/>
+                    </a:solidFill>
+                  </a:tcPr>
+                </a:tc>
+                <a:tc>
+                  <a:txBody>
+                    <a:bodyPr/>
+                    <a:lstStyle/>
+                    <a:p>
+                      <a:pPr algn="ctr" indent="0" marL="0">
+                        <a:buNone/>
+                      </a:pPr>
+                      <a:r>
+                        <a:rPr lang="en-US" sz="1200" b="1" dirty="0">
+                          <a:solidFill>
+                            <a:srgbClr val="FFFFFF"/>
+                          </a:solidFill>
+                          <a:latin typeface="Calibri" pitchFamily="34" charset="0"/>
+                          <a:ea typeface="Calibri" pitchFamily="34" charset="-122"/>
+                          <a:cs typeface="Calibri" pitchFamily="34" charset="-120"/>
+                        </a:rPr>
+                        <a:t>Serum K⁺</a:t>
+                      </a:r>
+                      <a:endParaRPr lang="en-US" sz="1200" dirty="0">
+                        <a:latin typeface="Calibri" charset="0"/>
+                        <a:ea typeface="Calibri" charset="0"/>
+                        <a:cs typeface="Calibri" charset="0"/>
+                      </a:endParaRPr>
+                    </a:p>
+                  </a:txBody>
+                  <a:tcPr marL="91440" marR="91440" marT="45720" marB="45720" anchor="ctr">
+                    <a:lnL w="9525" cap="flat" cmpd="sng" algn="ctr">
+                      <a:solidFill>
+                        <a:srgbClr val="DCE4EC"/>
+                      </a:solidFill>
+                      <a:prstDash val="solid"/>
+                      <a:round/>
+                      <a:headEnd type="none" w="med" len="med"/>
+                      <a:tailEnd type="none" w="med" len="med"/>
+                    </a:lnL>
+                    <a:lnR w="9525" cap="flat" cmpd="sng" algn="ctr">
+                      <a:solidFill>
+                        <a:srgbClr val="DCE4EC"/>
+                      </a:solidFill>
+                      <a:prstDash val="solid"/>
+                      <a:round/>
+                      <a:headEnd type="none" w="med" len="med"/>
+                      <a:tailEnd type="none" w="med" len="med"/>
+                    </a:lnR>
+                    <a:lnT w="9525" cap="flat" cmpd="sng" algn="ctr">
+                      <a:solidFill>
+                        <a:srgbClr val="DCE4EC"/>
+                      </a:solidFill>
+                      <a:prstDash val="solid"/>
+                      <a:round/>
+                      <a:headEnd type="none" w="med" len="med"/>
+                      <a:tailEnd type="none" w="med" len="med"/>
+                    </a:lnT>
+                    <a:lnB w="9525" cap="flat" cmpd="sng" algn="ctr">
+                      <a:solidFill>
+                        <a:srgbClr val="DCE4EC"/>
+                      </a:solidFill>
+                      <a:prstDash val="solid"/>
+                      <a:round/>
+                      <a:headEnd type="none" w="med" len="med"/>
+                      <a:tailEnd type="none" w="med" len="med"/>
+                    </a:lnB>
+                    <a:solidFill>
+                      <a:srgbClr val="1565C0"/>
+                    </a:solidFill>
+                  </a:tcPr>
+                </a:tc>
+                <a:tc>
+                  <a:txBody>
+                    <a:bodyPr/>
+                    <a:lstStyle/>
+                    <a:p>
+                      <a:pPr algn="ctr" indent="0" marL="0">
+                        <a:buNone/>
+                      </a:pPr>
+                      <a:r>
+                        <a:rPr lang="en-US" sz="1200" b="1" dirty="0">
+                          <a:solidFill>
+                            <a:srgbClr val="FFFFFF"/>
+                          </a:solidFill>
+                          <a:latin typeface="Calibri" pitchFamily="34" charset="0"/>
+                          <a:ea typeface="Calibri" pitchFamily="34" charset="-122"/>
+                          <a:cs typeface="Calibri" pitchFamily="34" charset="-120"/>
+                        </a:rPr>
+                        <a:t>Urine pH</a:t>
+                      </a:r>
+                      <a:endParaRPr lang="en-US" sz="1200" dirty="0">
+                        <a:latin typeface="Calibri" charset="0"/>
+                        <a:ea typeface="Calibri" charset="0"/>
+                        <a:cs typeface="Calibri" charset="0"/>
+                      </a:endParaRPr>
+                    </a:p>
+                  </a:txBody>
+                  <a:tcPr marL="91440" marR="91440" marT="45720" marB="45720" anchor="ctr">
+                    <a:lnL w="9525" cap="flat" cmpd="sng" algn="ctr">
+                      <a:solidFill>
+                        <a:srgbClr val="DCE4EC"/>
+                      </a:solidFill>
+                      <a:prstDash val="solid"/>
+                      <a:round/>
+                      <a:headEnd type="none" w="med" len="med"/>
+                      <a:tailEnd type="none" w="med" len="med"/>
+                    </a:lnL>
+                    <a:lnR w="9525" cap="flat" cmpd="sng" algn="ctr">
+                      <a:solidFill>
+                        <a:srgbClr val="DCE4EC"/>
+                      </a:solidFill>
+                      <a:prstDash val="solid"/>
+                      <a:round/>
+                      <a:headEnd type="none" w="med" len="med"/>
+                      <a:tailEnd type="none" w="med" len="med"/>
+                    </a:lnR>
+                    <a:lnT w="9525" cap="flat" cmpd="sng" algn="ctr">
+                      <a:solidFill>
+                        <a:srgbClr val="DCE4EC"/>
+                      </a:solidFill>
+                      <a:prstDash val="solid"/>
+                      <a:round/>
+                      <a:headEnd type="none" w="med" len="med"/>
+                      <a:tailEnd type="none" w="med" len="med"/>
+                    </a:lnT>
+                    <a:lnB w="9525" cap="flat" cmpd="sng" algn="ctr">
+                      <a:solidFill>
+                        <a:srgbClr val="DCE4EC"/>
+                      </a:solidFill>
+                      <a:prstDash val="solid"/>
+                      <a:round/>
+                      <a:headEnd type="none" w="med" len="med"/>
+                      <a:tailEnd type="none" w="med" len="med"/>
+                    </a:lnB>
+                    <a:solidFill>
+                      <a:srgbClr val="1565C0"/>
+                    </a:solidFill>
+                  </a:tcPr>
+                </a:tc>
+              </a:tr>
+              <a:tr h="548640">
+                <a:tc>
+                  <a:txBody>
+                    <a:bodyPr/>
+                    <a:lstStyle/>
+                    <a:p>
+                      <a:pPr algn="l" indent="0" marL="0">
+                        <a:buNone/>
+                      </a:pPr>
+                      <a:r>
+                        <a:rPr lang="en-US" sz="1100" b="1" dirty="0">
+                          <a:solidFill>
+                            <a:srgbClr val="1B2A38"/>
+                          </a:solidFill>
+                          <a:latin typeface="Calibri" pitchFamily="34" charset="0"/>
+                          <a:ea typeface="Calibri" pitchFamily="34" charset="-122"/>
+                          <a:cs typeface="Calibri" pitchFamily="34" charset="-120"/>
+                        </a:rPr>
+                        <a:t>Type 1 (distal)</a:t>
+                      </a:r>
+                      <a:endParaRPr lang="en-US" sz="1100" dirty="0">
+                        <a:latin typeface="Calibri" charset="0"/>
+                        <a:ea typeface="Calibri" charset="0"/>
+                        <a:cs typeface="Calibri" charset="0"/>
+                      </a:endParaRPr>
+                    </a:p>
+                  </a:txBody>
+                  <a:tcPr marL="91440" marR="91440" marT="45720" marB="45720" anchor="ctr">
+                    <a:lnL w="9525" cap="flat" cmpd="sng" algn="ctr">
+                      <a:solidFill>
+                        <a:srgbClr val="DCE4EC"/>
+                      </a:solidFill>
+                      <a:prstDash val="solid"/>
+                      <a:round/>
+                      <a:headEnd type="none" w="med" len="med"/>
+                      <a:tailEnd type="none" w="med" len="med"/>
+                    </a:lnL>
+                    <a:lnR w="9525" cap="flat" cmpd="sng" algn="ctr">
+                      <a:solidFill>
+                        <a:srgbClr val="DCE4EC"/>
+                      </a:solidFill>
+                      <a:prstDash val="solid"/>
+                      <a:round/>
+                      <a:headEnd type="none" w="med" len="med"/>
+                      <a:tailEnd type="none" w="med" len="med"/>
+                    </a:lnR>
+                    <a:lnT w="9525" cap="flat" cmpd="sng" algn="ctr">
+                      <a:solidFill>
+                        <a:srgbClr val="DCE4EC"/>
+                      </a:solidFill>
+                      <a:prstDash val="solid"/>
+                      <a:round/>
+                      <a:headEnd type="none" w="med" len="med"/>
+                      <a:tailEnd type="none" w="med" len="med"/>
+                    </a:lnT>
+                    <a:lnB w="9525" cap="flat" cmpd="sng" algn="ctr">
+                      <a:solidFill>
+                        <a:srgbClr val="DCE4EC"/>
+                      </a:solidFill>
+                      <a:prstDash val="solid"/>
+                      <a:round/>
+                      <a:headEnd type="none" w="med" len="med"/>
+                      <a:tailEnd type="none" w="med" len="med"/>
+                    </a:lnB>
+                    <a:solidFill>
+                      <a:srgbClr val="F3F7FA"/>
+                    </a:solidFill>
+                  </a:tcPr>
+                </a:tc>
+                <a:tc>
+                  <a:txBody>
+                    <a:bodyPr/>
+                    <a:lstStyle/>
+                    <a:p>
+                      <a:pPr algn="ctr" indent="0" marL="0">
+                        <a:buNone/>
+                      </a:pPr>
+                      <a:r>
+                        <a:rPr lang="en-US" sz="1100" dirty="0">
+                          <a:solidFill>
+                            <a:srgbClr val="33444F"/>
+                          </a:solidFill>
+                          <a:latin typeface="Calibri" pitchFamily="34" charset="0"/>
+                          <a:ea typeface="Calibri" pitchFamily="34" charset="-122"/>
+                          <a:cs typeface="Calibri" pitchFamily="34" charset="-120"/>
+                        </a:rPr>
+                        <a:t>Impaired distal H⁺ secretion</a:t>
+                      </a:r>
+                      <a:endParaRPr lang="en-US" sz="1100" dirty="0">
+                        <a:latin typeface="Calibri" charset="0"/>
+                        <a:ea typeface="Calibri" charset="0"/>
+                        <a:cs typeface="Calibri" charset="0"/>
+                      </a:endParaRPr>
+                    </a:p>
+                  </a:txBody>
+                  <a:tcPr marL="91440" marR="91440" marT="45720" marB="45720" anchor="ctr">
+                    <a:lnL w="9525" cap="flat" cmpd="sng" algn="ctr">
+                      <a:solidFill>
+                        <a:srgbClr val="DCE4EC"/>
+                      </a:solidFill>
+                      <a:prstDash val="solid"/>
+                      <a:round/>
+                      <a:headEnd type="none" w="med" len="med"/>
+                      <a:tailEnd type="none" w="med" len="med"/>
+                    </a:lnL>
+                    <a:lnR w="9525" cap="flat" cmpd="sng" algn="ctr">
+                      <a:solidFill>
+                        <a:srgbClr val="DCE4EC"/>
+                      </a:solidFill>
+                      <a:prstDash val="solid"/>
+                      <a:round/>
+                      <a:headEnd type="none" w="med" len="med"/>
+                      <a:tailEnd type="none" w="med" len="med"/>
+                    </a:lnR>
+                    <a:lnT w="9525" cap="flat" cmpd="sng" algn="ctr">
+                      <a:solidFill>
+                        <a:srgbClr val="DCE4EC"/>
+                      </a:solidFill>
+                      <a:prstDash val="solid"/>
+                      <a:round/>
+                      <a:headEnd type="none" w="med" len="med"/>
+                      <a:tailEnd type="none" w="med" len="med"/>
+                    </a:lnT>
+                    <a:lnB w="9525" cap="flat" cmpd="sng" algn="ctr">
+                      <a:solidFill>
+                        <a:srgbClr val="DCE4EC"/>
+                      </a:solidFill>
+                      <a:prstDash val="solid"/>
+                      <a:round/>
+                      <a:headEnd type="none" w="med" len="med"/>
+                      <a:tailEnd type="none" w="med" len="med"/>
+                    </a:lnB>
+                    <a:solidFill>
+                      <a:srgbClr val="F3F7FA"/>
+                    </a:solidFill>
+                  </a:tcPr>
+                </a:tc>
+                <a:tc>
+                  <a:txBody>
+                    <a:bodyPr/>
+                    <a:lstStyle/>
+                    <a:p>
+                      <a:pPr algn="ctr" indent="0" marL="0">
+                        <a:buNone/>
+                      </a:pPr>
+                      <a:r>
+                        <a:rPr lang="en-US" sz="1100" dirty="0">
+                          <a:solidFill>
+                            <a:srgbClr val="33444F"/>
+                          </a:solidFill>
+                          <a:latin typeface="Calibri" pitchFamily="34" charset="0"/>
+                          <a:ea typeface="Calibri" pitchFamily="34" charset="-122"/>
+                          <a:cs typeface="Calibri" pitchFamily="34" charset="-120"/>
+                        </a:rPr>
+                        <a:t>Low</a:t>
+                      </a:r>
+                      <a:endParaRPr lang="en-US" sz="1100" dirty="0">
+                        <a:latin typeface="Calibri" charset="0"/>
+                        <a:ea typeface="Calibri" charset="0"/>
+                        <a:cs typeface="Calibri" charset="0"/>
+                      </a:endParaRPr>
+                    </a:p>
+                  </a:txBody>
+                  <a:tcPr marL="91440" marR="91440" marT="45720" marB="45720" anchor="ctr">
+                    <a:lnL w="9525" cap="flat" cmpd="sng" algn="ctr">
+                      <a:solidFill>
+                        <a:srgbClr val="DCE4EC"/>
+                      </a:solidFill>
+                      <a:prstDash val="solid"/>
+                      <a:round/>
+                      <a:headEnd type="none" w="med" len="med"/>
+                      <a:tailEnd type="none" w="med" len="med"/>
+                    </a:lnL>
+                    <a:lnR w="9525" cap="flat" cmpd="sng" algn="ctr">
+                      <a:solidFill>
+                        <a:srgbClr val="DCE4EC"/>
+                      </a:solidFill>
+                      <a:prstDash val="solid"/>
+                      <a:round/>
+                      <a:headEnd type="none" w="med" len="med"/>
+                      <a:tailEnd type="none" w="med" len="med"/>
+                    </a:lnR>
+                    <a:lnT w="9525" cap="flat" cmpd="sng" algn="ctr">
+                      <a:solidFill>
+                        <a:srgbClr val="DCE4EC"/>
+                      </a:solidFill>
+                      <a:prstDash val="solid"/>
+                      <a:round/>
+                      <a:headEnd type="none" w="med" len="med"/>
+                      <a:tailEnd type="none" w="med" len="med"/>
+                    </a:lnT>
+                    <a:lnB w="9525" cap="flat" cmpd="sng" algn="ctr">
+                      <a:solidFill>
+                        <a:srgbClr val="DCE4EC"/>
+                      </a:solidFill>
+                      <a:prstDash val="solid"/>
+                      <a:round/>
+                      <a:headEnd type="none" w="med" len="med"/>
+                      <a:tailEnd type="none" w="med" len="med"/>
+                    </a:lnB>
+                    <a:solidFill>
+                      <a:srgbClr val="F3F7FA"/>
+                    </a:solidFill>
+                  </a:tcPr>
+                </a:tc>
+                <a:tc>
+                  <a:txBody>
+                    <a:bodyPr/>
+                    <a:lstStyle/>
+                    <a:p>
+                      <a:pPr algn="ctr" indent="0" marL="0">
+                        <a:buNone/>
+                      </a:pPr>
+                      <a:r>
+                        <a:rPr lang="en-US" sz="1100" dirty="0">
+                          <a:solidFill>
+                            <a:srgbClr val="33444F"/>
+                          </a:solidFill>
+                          <a:latin typeface="Calibri" pitchFamily="34" charset="0"/>
+                          <a:ea typeface="Calibri" pitchFamily="34" charset="-122"/>
+                          <a:cs typeface="Calibri" pitchFamily="34" charset="-120"/>
+                        </a:rPr>
+                        <a:t>&amp;gt; 5.5 (inappropriately high)</a:t>
+                      </a:r>
+                      <a:endParaRPr lang="en-US" sz="1100" dirty="0">
+                        <a:latin typeface="Calibri" charset="0"/>
+                        <a:ea typeface="Calibri" charset="0"/>
+                        <a:cs typeface="Calibri" charset="0"/>
+                      </a:endParaRPr>
+                    </a:p>
+                  </a:txBody>
+                  <a:tcPr marL="91440" marR="91440" marT="45720" marB="45720" anchor="ctr">
+                    <a:lnL w="9525" cap="flat" cmpd="sng" algn="ctr">
+                      <a:solidFill>
+                        <a:srgbClr val="DCE4EC"/>
+                      </a:solidFill>
+                      <a:prstDash val="solid"/>
+                      <a:round/>
+                      <a:headEnd type="none" w="med" len="med"/>
+                      <a:tailEnd type="none" w="med" len="med"/>
+                    </a:lnL>
+                    <a:lnR w="9525" cap="flat" cmpd="sng" algn="ctr">
+                      <a:solidFill>
+                        <a:srgbClr val="DCE4EC"/>
+                      </a:solidFill>
+                      <a:prstDash val="solid"/>
+                      <a:round/>
+                      <a:headEnd type="none" w="med" len="med"/>
+                      <a:tailEnd type="none" w="med" len="med"/>
+                    </a:lnR>
+                    <a:lnT w="9525" cap="flat" cmpd="sng" algn="ctr">
+                      <a:solidFill>
+                        <a:srgbClr val="DCE4EC"/>
+                      </a:solidFill>
+                      <a:prstDash val="solid"/>
+                      <a:round/>
+                      <a:headEnd type="none" w="med" len="med"/>
+                      <a:tailEnd type="none" w="med" len="med"/>
+                    </a:lnT>
+                    <a:lnB w="9525" cap="flat" cmpd="sng" algn="ctr">
+                      <a:solidFill>
+                        <a:srgbClr val="DCE4EC"/>
+                      </a:solidFill>
+                      <a:prstDash val="solid"/>
+                      <a:round/>
+                      <a:headEnd type="none" w="med" len="med"/>
+                      <a:tailEnd type="none" w="med" len="med"/>
+                    </a:lnB>
+                    <a:solidFill>
+                      <a:srgbClr val="F3F7FA"/>
+                    </a:solidFill>
+                  </a:tcPr>
+                </a:tc>
+              </a:tr>
+              <a:tr h="548640">
+                <a:tc>
+                  <a:txBody>
+                    <a:bodyPr/>
+                    <a:lstStyle/>
+                    <a:p>
+                      <a:pPr algn="l" indent="0" marL="0">
+                        <a:buNone/>
+                      </a:pPr>
+                      <a:r>
+                        <a:rPr lang="en-US" sz="1100" b="1" dirty="0">
+                          <a:solidFill>
+                            <a:srgbClr val="1B2A38"/>
+                          </a:solidFill>
+                          <a:latin typeface="Calibri" pitchFamily="34" charset="0"/>
+                          <a:ea typeface="Calibri" pitchFamily="34" charset="-122"/>
+                          <a:cs typeface="Calibri" pitchFamily="34" charset="-120"/>
+                        </a:rPr>
+                        <a:t>Type 2 (proximal)</a:t>
+                      </a:r>
+                      <a:endParaRPr lang="en-US" sz="1100" dirty="0">
+                        <a:latin typeface="Calibri" charset="0"/>
+                        <a:ea typeface="Calibri" charset="0"/>
+                        <a:cs typeface="Calibri" charset="0"/>
+                      </a:endParaRPr>
+                    </a:p>
+                  </a:txBody>
+                  <a:tcPr marL="91440" marR="91440" marT="45720" marB="45720" anchor="ctr">
+                    <a:lnL w="9525" cap="flat" cmpd="sng" algn="ctr">
+                      <a:solidFill>
+                        <a:srgbClr val="DCE4EC"/>
+                      </a:solidFill>
+                      <a:prstDash val="solid"/>
+                      <a:round/>
+                      <a:headEnd type="none" w="med" len="med"/>
+                      <a:tailEnd type="none" w="med" len="med"/>
+                    </a:lnL>
+                    <a:lnR w="9525" cap="flat" cmpd="sng" algn="ctr">
+                      <a:solidFill>
+                        <a:srgbClr val="DCE4EC"/>
+                      </a:solidFill>
+                      <a:prstDash val="solid"/>
+                      <a:round/>
+                      <a:headEnd type="none" w="med" len="med"/>
+                      <a:tailEnd type="none" w="med" len="med"/>
+                    </a:lnR>
+                    <a:lnT w="9525" cap="flat" cmpd="sng" algn="ctr">
+                      <a:solidFill>
+                        <a:srgbClr val="DCE4EC"/>
+                      </a:solidFill>
+                      <a:prstDash val="solid"/>
+                      <a:round/>
+                      <a:headEnd type="none" w="med" len="med"/>
+                      <a:tailEnd type="none" w="med" len="med"/>
+                    </a:lnT>
+                    <a:lnB w="9525" cap="flat" cmpd="sng" algn="ctr">
+                      <a:solidFill>
+                        <a:srgbClr val="DCE4EC"/>
+                      </a:solidFill>
+                      <a:prstDash val="solid"/>
+                      <a:round/>
+                      <a:headEnd type="none" w="med" len="med"/>
+                      <a:tailEnd type="none" w="med" len="med"/>
+                    </a:lnB>
+                    <a:solidFill>
+                      <a:srgbClr val="FFFFFF"/>
+                    </a:solidFill>
+                  </a:tcPr>
+                </a:tc>
+                <a:tc>
+                  <a:txBody>
+                    <a:bodyPr/>
+                    <a:lstStyle/>
+                    <a:p>
+                      <a:pPr algn="ctr" indent="0" marL="0">
+                        <a:buNone/>
+                      </a:pPr>
+                      <a:r>
+                        <a:rPr lang="en-US" sz="1100" dirty="0">
+                          <a:solidFill>
+                            <a:srgbClr val="33444F"/>
+                          </a:solidFill>
+                          <a:latin typeface="Calibri" pitchFamily="34" charset="0"/>
+                          <a:ea typeface="Calibri" pitchFamily="34" charset="-122"/>
+                          <a:cs typeface="Calibri" pitchFamily="34" charset="-120"/>
+                        </a:rPr>
+                        <a:t>Impaired HCO₃ reabsorption</a:t>
+                      </a:r>
+                      <a:endParaRPr lang="en-US" sz="1100" dirty="0">
+                        <a:latin typeface="Calibri" charset="0"/>
+                        <a:ea typeface="Calibri" charset="0"/>
+                        <a:cs typeface="Calibri" charset="0"/>
+                      </a:endParaRPr>
+                    </a:p>
+                  </a:txBody>
+                  <a:tcPr marL="91440" marR="91440" marT="45720" marB="45720" anchor="ctr">
+                    <a:lnL w="9525" cap="flat" cmpd="sng" algn="ctr">
+                      <a:solidFill>
+                        <a:srgbClr val="DCE4EC"/>
+                      </a:solidFill>
+                      <a:prstDash val="solid"/>
+                      <a:round/>
+                      <a:headEnd type="none" w="med" len="med"/>
+                      <a:tailEnd type="none" w="med" len="med"/>
+                    </a:lnL>
+                    <a:lnR w="9525" cap="flat" cmpd="sng" algn="ctr">
+                      <a:solidFill>
+                        <a:srgbClr val="DCE4EC"/>
+                      </a:solidFill>
+                      <a:prstDash val="solid"/>
+                      <a:round/>
+                      <a:headEnd type="none" w="med" len="med"/>
+                      <a:tailEnd type="none" w="med" len="med"/>
+                    </a:lnR>
+                    <a:lnT w="9525" cap="flat" cmpd="sng" algn="ctr">
+                      <a:solidFill>
+                        <a:srgbClr val="DCE4EC"/>
+                      </a:solidFill>
+                      <a:prstDash val="solid"/>
+                      <a:round/>
+                      <a:headEnd type="none" w="med" len="med"/>
+                      <a:tailEnd type="none" w="med" len="med"/>
+                    </a:lnT>
+                    <a:lnB w="9525" cap="flat" cmpd="sng" algn="ctr">
+                      <a:solidFill>
+                        <a:srgbClr val="DCE4EC"/>
+                      </a:solidFill>
+                      <a:prstDash val="solid"/>
+                      <a:round/>
+                      <a:headEnd type="none" w="med" len="med"/>
+                      <a:tailEnd type="none" w="med" len="med"/>
+                    </a:lnB>
+                    <a:solidFill>
+                      <a:srgbClr val="FFFFFF"/>
+                    </a:solidFill>
+                  </a:tcPr>
+                </a:tc>
+                <a:tc>
+                  <a:txBody>
+                    <a:bodyPr/>
+                    <a:lstStyle/>
+                    <a:p>
+                      <a:pPr algn="ctr" indent="0" marL="0">
+                        <a:buNone/>
+                      </a:pPr>
+                      <a:r>
+                        <a:rPr lang="en-US" sz="1100" dirty="0">
+                          <a:solidFill>
+                            <a:srgbClr val="33444F"/>
+                          </a:solidFill>
+                          <a:latin typeface="Calibri" pitchFamily="34" charset="0"/>
+                          <a:ea typeface="Calibri" pitchFamily="34" charset="-122"/>
+                          <a:cs typeface="Calibri" pitchFamily="34" charset="-120"/>
+                        </a:rPr>
+                        <a:t>Low</a:t>
+                      </a:r>
+                      <a:endParaRPr lang="en-US" sz="1100" dirty="0">
+                        <a:latin typeface="Calibri" charset="0"/>
+                        <a:ea typeface="Calibri" charset="0"/>
+                        <a:cs typeface="Calibri" charset="0"/>
+                      </a:endParaRPr>
+                    </a:p>
+                  </a:txBody>
+                  <a:tcPr marL="91440" marR="91440" marT="45720" marB="45720" anchor="ctr">
+                    <a:lnL w="9525" cap="flat" cmpd="sng" algn="ctr">
+                      <a:solidFill>
+                        <a:srgbClr val="DCE4EC"/>
+                      </a:solidFill>
+                      <a:prstDash val="solid"/>
+                      <a:round/>
+                      <a:headEnd type="none" w="med" len="med"/>
+                      <a:tailEnd type="none" w="med" len="med"/>
+                    </a:lnL>
+                    <a:lnR w="9525" cap="flat" cmpd="sng" algn="ctr">
+                      <a:solidFill>
+                        <a:srgbClr val="DCE4EC"/>
+                      </a:solidFill>
+                      <a:prstDash val="solid"/>
+                      <a:round/>
+                      <a:headEnd type="none" w="med" len="med"/>
+                      <a:tailEnd type="none" w="med" len="med"/>
+                    </a:lnR>
+                    <a:lnT w="9525" cap="flat" cmpd="sng" algn="ctr">
+                      <a:solidFill>
+                        <a:srgbClr val="DCE4EC"/>
+                      </a:solidFill>
+                      <a:prstDash val="solid"/>
+                      <a:round/>
+                      <a:headEnd type="none" w="med" len="med"/>
+                      <a:tailEnd type="none" w="med" len="med"/>
+                    </a:lnT>
+                    <a:lnB w="9525" cap="flat" cmpd="sng" algn="ctr">
+                      <a:solidFill>
+                        <a:srgbClr val="DCE4EC"/>
+                      </a:solidFill>
+                      <a:prstDash val="solid"/>
+                      <a:round/>
+                      <a:headEnd type="none" w="med" len="med"/>
+                      <a:tailEnd type="none" w="med" len="med"/>
+                    </a:lnB>
+                    <a:solidFill>
+                      <a:srgbClr val="FFFFFF"/>
+                    </a:solidFill>
+                  </a:tcPr>
+                </a:tc>
+                <a:tc>
+                  <a:txBody>
+                    <a:bodyPr/>
+                    <a:lstStyle/>
+                    <a:p>
+                      <a:pPr algn="ctr" indent="0" marL="0">
+                        <a:buNone/>
+                      </a:pPr>
+                      <a:r>
+                        <a:rPr lang="en-US" sz="1100" dirty="0">
+                          <a:solidFill>
+                            <a:srgbClr val="33444F"/>
+                          </a:solidFill>
+                          <a:latin typeface="Calibri" pitchFamily="34" charset="0"/>
+                          <a:ea typeface="Calibri" pitchFamily="34" charset="-122"/>
+                          <a:cs typeface="Calibri" pitchFamily="34" charset="-120"/>
+                        </a:rPr>
+                        <a:t>Variable (&amp;lt; 5.5 once depleted)</a:t>
+                      </a:r>
+                      <a:endParaRPr lang="en-US" sz="1100" dirty="0">
+                        <a:latin typeface="Calibri" charset="0"/>
+                        <a:ea typeface="Calibri" charset="0"/>
+                        <a:cs typeface="Calibri" charset="0"/>
+                      </a:endParaRPr>
+                    </a:p>
+                  </a:txBody>
+                  <a:tcPr marL="91440" marR="91440" marT="45720" marB="45720" anchor="ctr">
+                    <a:lnL w="9525" cap="flat" cmpd="sng" algn="ctr">
+                      <a:solidFill>
+                        <a:srgbClr val="DCE4EC"/>
+                      </a:solidFill>
+                      <a:prstDash val="solid"/>
+                      <a:round/>
+                      <a:headEnd type="none" w="med" len="med"/>
+                      <a:tailEnd type="none" w="med" len="med"/>
+                    </a:lnL>
+                    <a:lnR w="9525" cap="flat" cmpd="sng" algn="ctr">
+                      <a:solidFill>
+                        <a:srgbClr val="DCE4EC"/>
+                      </a:solidFill>
+                      <a:prstDash val="solid"/>
+                      <a:round/>
+                      <a:headEnd type="none" w="med" len="med"/>
+                      <a:tailEnd type="none" w="med" len="med"/>
+                    </a:lnR>
+                    <a:lnT w="9525" cap="flat" cmpd="sng" algn="ctr">
+                      <a:solidFill>
+                        <a:srgbClr val="DCE4EC"/>
+                      </a:solidFill>
+                      <a:prstDash val="solid"/>
+                      <a:round/>
+                      <a:headEnd type="none" w="med" len="med"/>
+                      <a:tailEnd type="none" w="med" len="med"/>
+                    </a:lnT>
+                    <a:lnB w="9525" cap="flat" cmpd="sng" algn="ctr">
+                      <a:solidFill>
+                        <a:srgbClr val="DCE4EC"/>
+                      </a:solidFill>
+                      <a:prstDash val="solid"/>
+                      <a:round/>
+                      <a:headEnd type="none" w="med" len="med"/>
+                      <a:tailEnd type="none" w="med" len="med"/>
+                    </a:lnB>
+                    <a:solidFill>
+                      <a:srgbClr val="FFFFFF"/>
+                    </a:solidFill>
+                  </a:tcPr>
+                </a:tc>
+              </a:tr>
+              <a:tr h="548640">
+                <a:tc>
+                  <a:txBody>
+                    <a:bodyPr/>
+                    <a:lstStyle/>
+                    <a:p>
+                      <a:pPr algn="l" indent="0" marL="0">
+                        <a:buNone/>
+                      </a:pPr>
+                      <a:r>
+                        <a:rPr lang="en-US" sz="1100" b="1" dirty="0">
+                          <a:solidFill>
+                            <a:srgbClr val="1B2A38"/>
+                          </a:solidFill>
+                          <a:latin typeface="Calibri" pitchFamily="34" charset="0"/>
+                          <a:ea typeface="Calibri" pitchFamily="34" charset="-122"/>
+                          <a:cs typeface="Calibri" pitchFamily="34" charset="-120"/>
+                        </a:rPr>
+                        <a:t>Type 4</a:t>
+                      </a:r>
+                      <a:endParaRPr lang="en-US" sz="1100" dirty="0">
+                        <a:latin typeface="Calibri" charset="0"/>
+                        <a:ea typeface="Calibri" charset="0"/>
+                        <a:cs typeface="Calibri" charset="0"/>
+                      </a:endParaRPr>
+                    </a:p>
+                  </a:txBody>
+                  <a:tcPr marL="91440" marR="91440" marT="45720" marB="45720" anchor="ctr">
+                    <a:lnL w="9525" cap="flat" cmpd="sng" algn="ctr">
+                      <a:solidFill>
+                        <a:srgbClr val="DCE4EC"/>
+                      </a:solidFill>
+                      <a:prstDash val="solid"/>
+                      <a:round/>
+                      <a:headEnd type="none" w="med" len="med"/>
+                      <a:tailEnd type="none" w="med" len="med"/>
+                    </a:lnL>
+                    <a:lnR w="9525" cap="flat" cmpd="sng" algn="ctr">
+                      <a:solidFill>
+                        <a:srgbClr val="DCE4EC"/>
+                      </a:solidFill>
+                      <a:prstDash val="solid"/>
+                      <a:round/>
+                      <a:headEnd type="none" w="med" len="med"/>
+                      <a:tailEnd type="none" w="med" len="med"/>
+                    </a:lnR>
+                    <a:lnT w="9525" cap="flat" cmpd="sng" algn="ctr">
+                      <a:solidFill>
+                        <a:srgbClr val="DCE4EC"/>
+                      </a:solidFill>
+                      <a:prstDash val="solid"/>
+                      <a:round/>
+                      <a:headEnd type="none" w="med" len="med"/>
+                      <a:tailEnd type="none" w="med" len="med"/>
+                    </a:lnT>
+                    <a:lnB w="9525" cap="flat" cmpd="sng" algn="ctr">
+                      <a:solidFill>
+                        <a:srgbClr val="DCE4EC"/>
+                      </a:solidFill>
+                      <a:prstDash val="solid"/>
+                      <a:round/>
+                      <a:headEnd type="none" w="med" len="med"/>
+                      <a:tailEnd type="none" w="med" len="med"/>
+                    </a:lnB>
+                    <a:solidFill>
+                      <a:srgbClr val="F3F7FA"/>
+                    </a:solidFill>
+                  </a:tcPr>
+                </a:tc>
+                <a:tc>
+                  <a:txBody>
+                    <a:bodyPr/>
+                    <a:lstStyle/>
+                    <a:p>
+                      <a:pPr algn="ctr" indent="0" marL="0">
+                        <a:buNone/>
+                      </a:pPr>
+                      <a:r>
+                        <a:rPr lang="en-US" sz="1100" dirty="0">
+                          <a:solidFill>
+                            <a:srgbClr val="33444F"/>
+                          </a:solidFill>
+                          <a:latin typeface="Calibri" pitchFamily="34" charset="0"/>
+                          <a:ea typeface="Calibri" pitchFamily="34" charset="-122"/>
+                          <a:cs typeface="Calibri" pitchFamily="34" charset="-120"/>
+                        </a:rPr>
+                        <a:t>Aldosterone deficiency/resistance</a:t>
+                      </a:r>
+                      <a:endParaRPr lang="en-US" sz="1100" dirty="0">
+                        <a:latin typeface="Calibri" charset="0"/>
+                        <a:ea typeface="Calibri" charset="0"/>
+                        <a:cs typeface="Calibri" charset="0"/>
+                      </a:endParaRPr>
+                    </a:p>
+                  </a:txBody>
+                  <a:tcPr marL="91440" marR="91440" marT="45720" marB="45720" anchor="ctr">
+                    <a:lnL w="9525" cap="flat" cmpd="sng" algn="ctr">
+                      <a:solidFill>
+                        <a:srgbClr val="DCE4EC"/>
+                      </a:solidFill>
+                      <a:prstDash val="solid"/>
+                      <a:round/>
+                      <a:headEnd type="none" w="med" len="med"/>
+                      <a:tailEnd type="none" w="med" len="med"/>
+                    </a:lnL>
+                    <a:lnR w="9525" cap="flat" cmpd="sng" algn="ctr">
+                      <a:solidFill>
+                        <a:srgbClr val="DCE4EC"/>
+                      </a:solidFill>
+                      <a:prstDash val="solid"/>
+                      <a:round/>
+                      <a:headEnd type="none" w="med" len="med"/>
+                      <a:tailEnd type="none" w="med" len="med"/>
+                    </a:lnR>
+                    <a:lnT w="9525" cap="flat" cmpd="sng" algn="ctr">
+                      <a:solidFill>
+                        <a:srgbClr val="DCE4EC"/>
+                      </a:solidFill>
+                      <a:prstDash val="solid"/>
+                      <a:round/>
+                      <a:headEnd type="none" w="med" len="med"/>
+                      <a:tailEnd type="none" w="med" len="med"/>
+                    </a:lnT>
+                    <a:lnB w="9525" cap="flat" cmpd="sng" algn="ctr">
+                      <a:solidFill>
+                        <a:srgbClr val="DCE4EC"/>
+                      </a:solidFill>
+                      <a:prstDash val="solid"/>
+                      <a:round/>
+                      <a:headEnd type="none" w="med" len="med"/>
+                      <a:tailEnd type="none" w="med" len="med"/>
+                    </a:lnB>
+                    <a:solidFill>
+                      <a:srgbClr val="F3F7FA"/>
+                    </a:solidFill>
+                  </a:tcPr>
+                </a:tc>
+                <a:tc>
+                  <a:txBody>
+                    <a:bodyPr/>
+                    <a:lstStyle/>
+                    <a:p>
+                      <a:pPr algn="ctr" indent="0" marL="0">
+                        <a:buNone/>
+                      </a:pPr>
+                      <a:r>
+                        <a:rPr lang="en-US" sz="1100" dirty="0">
+                          <a:solidFill>
+                            <a:srgbClr val="33444F"/>
+                          </a:solidFill>
+                          <a:latin typeface="Calibri" pitchFamily="34" charset="0"/>
+                          <a:ea typeface="Calibri" pitchFamily="34" charset="-122"/>
+                          <a:cs typeface="Calibri" pitchFamily="34" charset="-120"/>
+                        </a:rPr>
+                        <a:t>High</a:t>
+                      </a:r>
+                      <a:endParaRPr lang="en-US" sz="1100" dirty="0">
+                        <a:latin typeface="Calibri" charset="0"/>
+                        <a:ea typeface="Calibri" charset="0"/>
+                        <a:cs typeface="Calibri" charset="0"/>
+                      </a:endParaRPr>
+                    </a:p>
+                  </a:txBody>
+                  <a:tcPr marL="91440" marR="91440" marT="45720" marB="45720" anchor="ctr">
+                    <a:lnL w="9525" cap="flat" cmpd="sng" algn="ctr">
+                      <a:solidFill>
+                        <a:srgbClr val="DCE4EC"/>
+                      </a:solidFill>
+                      <a:prstDash val="solid"/>
+                      <a:round/>
+                      <a:headEnd type="none" w="med" len="med"/>
+                      <a:tailEnd type="none" w="med" len="med"/>
+                    </a:lnL>
+                    <a:lnR w="9525" cap="flat" cmpd="sng" algn="ctr">
+                      <a:solidFill>
+                        <a:srgbClr val="DCE4EC"/>
+                      </a:solidFill>
+                      <a:prstDash val="solid"/>
+                      <a:round/>
+                      <a:headEnd type="none" w="med" len="med"/>
+                      <a:tailEnd type="none" w="med" len="med"/>
+                    </a:lnR>
+                    <a:lnT w="9525" cap="flat" cmpd="sng" algn="ctr">
+                      <a:solidFill>
+                        <a:srgbClr val="DCE4EC"/>
+                      </a:solidFill>
+                      <a:prstDash val="solid"/>
+                      <a:round/>
+                      <a:headEnd type="none" w="med" len="med"/>
+                      <a:tailEnd type="none" w="med" len="med"/>
+                    </a:lnT>
+                    <a:lnB w="9525" cap="flat" cmpd="sng" algn="ctr">
+                      <a:solidFill>
+                        <a:srgbClr val="DCE4EC"/>
+                      </a:solidFill>
+                      <a:prstDash val="solid"/>
+                      <a:round/>
+                      <a:headEnd type="none" w="med" len="med"/>
+                      <a:tailEnd type="none" w="med" len="med"/>
+                    </a:lnB>
+                    <a:solidFill>
+                      <a:srgbClr val="F3F7FA"/>
+                    </a:solidFill>
+                  </a:tcPr>
+                </a:tc>
+                <a:tc>
+                  <a:txBody>
+                    <a:bodyPr/>
+                    <a:lstStyle/>
+                    <a:p>
+                      <a:pPr algn="ctr" indent="0" marL="0">
+                        <a:buNone/>
+                      </a:pPr>
+                      <a:r>
+                        <a:rPr lang="en-US" sz="1100" dirty="0">
+                          <a:solidFill>
+                            <a:srgbClr val="33444F"/>
+                          </a:solidFill>
+                          <a:latin typeface="Calibri" pitchFamily="34" charset="0"/>
+                          <a:ea typeface="Calibri" pitchFamily="34" charset="-122"/>
+                          <a:cs typeface="Calibri" pitchFamily="34" charset="-120"/>
+                        </a:rPr>
+                        <a:t>&amp;lt; 5.5</a:t>
+                      </a:r>
+                      <a:endParaRPr lang="en-US" sz="1100" dirty="0">
+                        <a:latin typeface="Calibri" charset="0"/>
+                        <a:ea typeface="Calibri" charset="0"/>
+                        <a:cs typeface="Calibri" charset="0"/>
+                      </a:endParaRPr>
+                    </a:p>
+                  </a:txBody>
+                  <a:tcPr marL="91440" marR="91440" marT="45720" marB="45720" anchor="ctr">
+                    <a:lnL w="9525" cap="flat" cmpd="sng" algn="ctr">
+                      <a:solidFill>
+                        <a:srgbClr val="DCE4EC"/>
+                      </a:solidFill>
+                      <a:prstDash val="solid"/>
+                      <a:round/>
+                      <a:headEnd type="none" w="med" len="med"/>
+                      <a:tailEnd type="none" w="med" len="med"/>
+                    </a:lnL>
+                    <a:lnR w="9525" cap="flat" cmpd="sng" algn="ctr">
+                      <a:solidFill>
+                        <a:srgbClr val="DCE4EC"/>
+                      </a:solidFill>
+                      <a:prstDash val="solid"/>
+                      <a:round/>
+                      <a:headEnd type="none" w="med" len="med"/>
+                      <a:tailEnd type="none" w="med" len="med"/>
+                    </a:lnR>
+                    <a:lnT w="9525" cap="flat" cmpd="sng" algn="ctr">
+                      <a:solidFill>
+                        <a:srgbClr val="DCE4EC"/>
+                      </a:solidFill>
+                      <a:prstDash val="solid"/>
+                      <a:round/>
+                      <a:headEnd type="none" w="med" len="med"/>
+                      <a:tailEnd type="none" w="med" len="med"/>
+                    </a:lnT>
+                    <a:lnB w="9525" cap="flat" cmpd="sng" algn="ctr">
+                      <a:solidFill>
+                        <a:srgbClr val="DCE4EC"/>
+                      </a:solidFill>
+                      <a:prstDash val="solid"/>
+                      <a:round/>
+                      <a:headEnd type="none" w="med" len="med"/>
+                      <a:tailEnd type="none" w="med" len="med"/>
+                    </a:lnB>
+                    <a:solidFill>
+                      <a:srgbClr val="F3F7FA"/>
+                    </a:solidFill>
+                  </a:tcPr>
+                </a:tc>
+              </a:tr>
+            </a:tbl>
+          </a:graphicData>
+        </a:graphic>
+      </p:graphicFrame>
+      <p:sp>
+        <p:nvSpPr>
+          <p:cNvPr id="5" name="Text 2"/>
+          <p:cNvSpPr/>
+          <p:nvPr/>
+        </p:nvSpPr>
+        <p:spPr>
+          <a:xfrm>
+            <a:off x="566928" y="6016752"/>
+            <a:ext cx="11057839" cy="365760"/>
+          </a:xfrm>
+          <a:prstGeom prst="rect">
+            <a:avLst/>
+          </a:prstGeom>
+          <a:noFill/>
+          <a:ln/>
+        </p:spPr>
+        <p:txBody>
+          <a:bodyPr wrap="square" lIns="0" tIns="0" rIns="0" bIns="0" rtlCol="0" anchor="ctr"/>
+          <a:lstStyle/>
+          <a:p>
+            <a:pPr algn="l" indent="0" marL="0">
+              <a:buNone/>
+            </a:pPr>
+            <a:r>
+              <a:rPr lang="en-US" sz="1050" i="1" dirty="0">
+                <a:solidFill>
+                  <a:srgbClr val="6B7B8A"/>
+                </a:solidFill>
+                <a:latin typeface="Calibri" pitchFamily="34" charset="0"/>
+                <a:ea typeface="Calibri" pitchFamily="34" charset="-122"/>
+                <a:cs typeface="Calibri" pitchFamily="34" charset="-120"/>
+              </a:rPr>
+              <a:t>Serum potassium and urine pH separate the RTAs; type 4 (hyperkalemic) is the most common in adults (e.g., diabetic nephropathy).</a:t>
+            </a:r>
+            <a:endParaRPr lang="en-US" sz="1050" dirty="0"/>
+          </a:p>
+        </p:txBody>
+      </p:sp>
+      <p:sp>
+        <p:nvSpPr>
+          <p:cNvPr id="6" name="Text 3"/>
+          <p:cNvSpPr/>
+          <p:nvPr/>
+        </p:nvSpPr>
+        <p:spPr>
+          <a:xfrm>
+            <a:off x="566928" y="6473952"/>
+            <a:ext cx="7772400" cy="274320"/>
+          </a:xfrm>
+          <a:prstGeom prst="rect">
+            <a:avLst/>
+          </a:prstGeom>
+          <a:noFill/>
+          <a:ln/>
+        </p:spPr>
+        <p:txBody>
+          <a:bodyPr wrap="square" lIns="0" tIns="0" rIns="0" bIns="0" rtlCol="0" anchor="ctr"/>
+          <a:lstStyle/>
+          <a:p>
+            <a:pPr algn="l" indent="0" marL="0">
+              <a:buNone/>
+            </a:pPr>
+            <a:r>
+              <a:rPr lang="en-US" sz="850" dirty="0">
+                <a:solidFill>
+                  <a:srgbClr val="9AA8B4"/>
+                </a:solidFill>
+                <a:latin typeface="Calibri" pitchFamily="34" charset="0"/>
+                <a:ea typeface="Calibri" pitchFamily="34" charset="-122"/>
+                <a:cs typeface="Calibri" pitchFamily="34" charset="-120"/>
+              </a:rPr>
+              <a:t>Makassed General Hospital  ·  Department of Laboratory Medicine</a:t>
+            </a:r>
+            <a:endParaRPr lang="en-US" sz="850" dirty="0"/>
+          </a:p>
+        </p:txBody>
+      </p:sp>
+      <p:sp>
+        <p:nvSpPr>
+          <p:cNvPr id="7" name="Text 4"/>
+          <p:cNvSpPr/>
+          <p:nvPr/>
+        </p:nvSpPr>
+        <p:spPr>
+          <a:xfrm>
+            <a:off x="9814255" y="6473952"/>
+            <a:ext cx="1828800" cy="274320"/>
+          </a:xfrm>
+          <a:prstGeom prst="rect">
+            <a:avLst/>
+          </a:prstGeom>
+          <a:noFill/>
+          <a:ln/>
+        </p:spPr>
+        <p:txBody>
+          <a:bodyPr wrap="square" lIns="0" tIns="0" rIns="0" bIns="0" rtlCol="0" anchor="ctr"/>
+          <a:lstStyle/>
+          <a:p>
+            <a:pPr algn="r" indent="0" marL="0">
+              <a:buNone/>
+            </a:pPr>
+            <a:r>
+              <a:rPr lang="en-US" sz="850" dirty="0">
+                <a:solidFill>
+                  <a:srgbClr val="9AA8B4"/>
+                </a:solidFill>
+                <a:latin typeface="Calibri" pitchFamily="34" charset="0"/>
+                <a:ea typeface="Calibri" pitchFamily="34" charset="-122"/>
+                <a:cs typeface="Calibri" pitchFamily="34" charset="-120"/>
+              </a:rPr>
+              <a:t>CP Lecture Series</a:t>
+            </a:r>
+            <a:pPr algn="r" indent="0" marL="0">
+              <a:buNone/>
+            </a:pPr>
+            <a:r>
+              <a:rPr lang="en-US" sz="850" dirty="0">
+                <a:solidFill>
+                  <a:srgbClr val="DCE4EC"/>
+                </a:solidFill>
+                <a:latin typeface="Calibri" pitchFamily="34" charset="0"/>
+                <a:ea typeface="Calibri" pitchFamily="34" charset="-122"/>
+                <a:cs typeface="Calibri" pitchFamily="34" charset="-120"/>
+              </a:rPr>
+              <a:t>   ·   </a:t>
+            </a:r>
+            <a:pPr algn="r" indent="0" marL="0">
+              <a:buNone/>
+            </a:pPr>
+            <a:r>
+              <a:rPr lang="en-US" sz="850" b="1" dirty="0">
+                <a:solidFill>
+                  <a:srgbClr val="1565C0"/>
+                </a:solidFill>
+                <a:latin typeface="Calibri" pitchFamily="34" charset="0"/>
+                <a:ea typeface="Calibri" pitchFamily="34" charset="-122"/>
+                <a:cs typeface="Calibri" pitchFamily="34" charset="-120"/>
+              </a:rPr>
+              <a:t>10</a:t>
+            </a:r>
+            <a:endParaRPr lang="en-US" sz="850" dirty="0"/>
+          </a:p>
+        </p:txBody>
+      </p:sp>
+    </p:spTree>
+  </p:cSld>
+  <p:clrMapOvr>
+    <a:masterClrMapping/>
+  </p:clrMapOvr>
+</p:sld>
+</file>
+
+<file path=ppt/slides/slide13.xml><?xml version="1.0" encoding="utf-8"?>
+<p:sld xmlns:a="http://schemas.openxmlformats.org/drawingml/2006/main" xmlns:r="http://schemas.openxmlformats.org/officeDocument/2006/relationships" xmlns:p="http://schemas.openxmlformats.org/presentationml/2006/main">
+  <p:cSld name="Slide 13">
     <p:bg>
       <p:bgPr>
         <a:solidFill>
@@ -5090,439 +6829,6 @@
               <a:t>Cases &amp; Board Review</a:t>
             </a:r>
             <a:endParaRPr lang="en-US" sz="3800" dirty="0"/>
-          </a:p>
-        </p:txBody>
-      </p:sp>
-    </p:spTree>
-  </p:cSld>
-  <p:clrMapOvr>
-    <a:masterClrMapping/>
-  </p:clrMapOvr>
-</p:sld>
-</file>
-
-<file path=ppt/slides/slide13.xml><?xml version="1.0" encoding="utf-8"?>
-<p:sld xmlns:a="http://schemas.openxmlformats.org/drawingml/2006/main" xmlns:r="http://schemas.openxmlformats.org/officeDocument/2006/relationships" xmlns:p="http://schemas.openxmlformats.org/presentationml/2006/main">
-  <p:cSld name="Slide 13">
-    <p:bg>
-      <p:bgPr>
-        <a:solidFill>
-          <a:srgbClr val="FFFFFF"/>
-        </a:solidFill>
-      </p:bgPr>
-    </p:bg>
-    <p:spTree>
-      <p:nvGrpSpPr>
-        <p:cNvPr id="1" name=""/>
-        <p:cNvGrpSpPr/>
-        <p:nvPr/>
-      </p:nvGrpSpPr>
-      <p:grpSpPr>
-        <a:xfrm>
-          <a:off x="0" y="0"/>
-          <a:ext cx="0" cy="0"/>
-          <a:chOff x="0" y="0"/>
-          <a:chExt cx="0" cy="0"/>
-        </a:xfrm>
-      </p:grpSpPr>
-      <p:sp>
-        <p:nvSpPr>
-          <p:cNvPr id="2" name="Text 0"/>
-          <p:cNvSpPr/>
-          <p:nvPr/>
-        </p:nvSpPr>
-        <p:spPr>
-          <a:xfrm>
-            <a:off x="566928" y="329184"/>
-            <a:ext cx="10515600" cy="310896"/>
-          </a:xfrm>
-          <a:prstGeom prst="rect">
-            <a:avLst/>
-          </a:prstGeom>
-          <a:noFill/>
-          <a:ln/>
-        </p:spPr>
-        <p:txBody>
-          <a:bodyPr wrap="square" lIns="0" tIns="0" rIns="0" bIns="0" rtlCol="0" anchor="ctr"/>
-          <a:lstStyle/>
-          <a:p>
-            <a:pPr algn="l" indent="0" marL="0">
-              <a:buNone/>
-            </a:pPr>
-            <a:r>
-              <a:rPr lang="en-US" sz="1100" b="1" spc="150" kern="0" dirty="0">
-                <a:solidFill>
-                  <a:srgbClr val="1565C0"/>
-                </a:solidFill>
-                <a:latin typeface="Calibri" pitchFamily="34" charset="0"/>
-                <a:ea typeface="Calibri" pitchFamily="34" charset="-122"/>
-                <a:cs typeface="Calibri" pitchFamily="34" charset="-120"/>
-              </a:rPr>
-              <a:t>CLINICAL CHEMISTRY   ·   CASE 1</a:t>
-            </a:r>
-            <a:endParaRPr lang="en-US" sz="1100" dirty="0"/>
-          </a:p>
-        </p:txBody>
-      </p:sp>
-      <p:sp>
-        <p:nvSpPr>
-          <p:cNvPr id="3" name="Text 1"/>
-          <p:cNvSpPr/>
-          <p:nvPr/>
-        </p:nvSpPr>
-        <p:spPr>
-          <a:xfrm>
-            <a:off x="566928" y="713232"/>
-            <a:ext cx="11064240" cy="749808"/>
-          </a:xfrm>
-          <a:prstGeom prst="rect">
-            <a:avLst/>
-          </a:prstGeom>
-          <a:noFill/>
-          <a:ln/>
-        </p:spPr>
-        <p:txBody>
-          <a:bodyPr wrap="square" lIns="0" tIns="0" rIns="0" bIns="0" rtlCol="0" anchor="ctr"/>
-          <a:lstStyle/>
-          <a:p>
-            <a:pPr algn="l" indent="0" marL="0">
-              <a:buNone/>
-            </a:pPr>
-            <a:r>
-              <a:rPr lang="en-US" sz="3000" b="1" dirty="0">
-                <a:solidFill>
-                  <a:srgbClr val="0E3A5F"/>
-                </a:solidFill>
-                <a:latin typeface="Calibri" pitchFamily="34" charset="0"/>
-                <a:ea typeface="Calibri" pitchFamily="34" charset="-122"/>
-                <a:cs typeface="Calibri" pitchFamily="34" charset="-120"/>
-              </a:rPr>
-              <a:t>Case 1</a:t>
-            </a:r>
-            <a:endParaRPr lang="en-US" sz="3000" dirty="0"/>
-          </a:p>
-        </p:txBody>
-      </p:sp>
-      <p:sp>
-        <p:nvSpPr>
-          <p:cNvPr id="4" name="Shape 2"/>
-          <p:cNvSpPr/>
-          <p:nvPr/>
-        </p:nvSpPr>
-        <p:spPr>
-          <a:xfrm>
-            <a:off x="566928" y="1517904"/>
-            <a:ext cx="11057839" cy="2788920"/>
-          </a:xfrm>
-          <a:prstGeom prst="roundRect">
-            <a:avLst>
-              <a:gd name="adj" fmla="val 2951"/>
-            </a:avLst>
-          </a:prstGeom>
-          <a:solidFill>
-            <a:srgbClr val="E7EFFA"/>
-          </a:solidFill>
-          <a:ln/>
-          <a:effectLst>
-            <a:outerShdw sx="100000" sy="100000" kx="0" ky="0" algn="bl" rotWithShape="0" blurRad="88900" dist="25400" dir="5400000">
-              <a:srgbClr val="22303C">
-                <a:alpha val="12000"/>
-              </a:srgbClr>
-            </a:outerShdw>
-          </a:effectLst>
-        </p:spPr>
-      </p:sp>
-      <p:sp>
-        <p:nvSpPr>
-          <p:cNvPr id="5" name="Text 3"/>
-          <p:cNvSpPr/>
-          <p:nvPr/>
-        </p:nvSpPr>
-        <p:spPr>
-          <a:xfrm>
-            <a:off x="841248" y="1700784"/>
-            <a:ext cx="5486400" cy="292608"/>
-          </a:xfrm>
-          <a:prstGeom prst="rect">
-            <a:avLst/>
-          </a:prstGeom>
-          <a:noFill/>
-          <a:ln/>
-        </p:spPr>
-        <p:txBody>
-          <a:bodyPr wrap="square" lIns="0" tIns="0" rIns="0" bIns="0" rtlCol="0" anchor="ctr"/>
-          <a:lstStyle/>
-          <a:p>
-            <a:pPr indent="0" marL="0">
-              <a:buNone/>
-            </a:pPr>
-            <a:r>
-              <a:rPr lang="en-US" sz="1100" b="1" spc="150" kern="0" dirty="0">
-                <a:solidFill>
-                  <a:srgbClr val="1565C0"/>
-                </a:solidFill>
-                <a:latin typeface="Calibri" pitchFamily="34" charset="0"/>
-                <a:ea typeface="Calibri" pitchFamily="34" charset="-122"/>
-                <a:cs typeface="Calibri" pitchFamily="34" charset="-120"/>
-              </a:rPr>
-              <a:t>CLINICAL VIGNETTE</a:t>
-            </a:r>
-            <a:endParaRPr lang="en-US" sz="1100" dirty="0"/>
-          </a:p>
-        </p:txBody>
-      </p:sp>
-      <p:sp>
-        <p:nvSpPr>
-          <p:cNvPr id="6" name="Text 4"/>
-          <p:cNvSpPr/>
-          <p:nvPr/>
-        </p:nvSpPr>
-        <p:spPr>
-          <a:xfrm>
-            <a:off x="841248" y="2029968"/>
-            <a:ext cx="10509199" cy="2148840"/>
-          </a:xfrm>
-          <a:prstGeom prst="rect">
-            <a:avLst/>
-          </a:prstGeom>
-          <a:noFill/>
-          <a:ln/>
-        </p:spPr>
-        <p:txBody>
-          <a:bodyPr wrap="square" lIns="0" tIns="0" rIns="0" bIns="0" rtlCol="0" anchor="t"/>
-          <a:lstStyle/>
-          <a:p>
-            <a:pPr algn="l" indent="0" marL="0">
-              <a:lnSpc>
-                <a:spcPct val="108000"/>
-              </a:lnSpc>
-              <a:buNone/>
-            </a:pPr>
-            <a:r>
-              <a:rPr lang="en-US" sz="1450" dirty="0">
-                <a:solidFill>
-                  <a:srgbClr val="33444F"/>
-                </a:solidFill>
-                <a:latin typeface="Calibri" pitchFamily="34" charset="0"/>
-                <a:ea typeface="Calibri" pitchFamily="34" charset="-122"/>
-                <a:cs typeface="Calibri" pitchFamily="34" charset="-120"/>
-              </a:rPr>
-              <a:t>An intoxicated patient has a high anion gap metabolic acidosis and a markedly elevated osmolal gap. Ethanol is undetectable. Calcium oxalate crystals are seen in the urine.</a:t>
-            </a:r>
-            <a:endParaRPr lang="en-US" sz="1450" dirty="0"/>
-          </a:p>
-        </p:txBody>
-      </p:sp>
-      <p:sp>
-        <p:nvSpPr>
-          <p:cNvPr id="7" name="Shape 5"/>
-          <p:cNvSpPr/>
-          <p:nvPr/>
-        </p:nvSpPr>
-        <p:spPr>
-          <a:xfrm>
-            <a:off x="566928" y="4553712"/>
-            <a:ext cx="11057839" cy="1325880"/>
-          </a:xfrm>
-          <a:prstGeom prst="roundRect">
-            <a:avLst>
-              <a:gd name="adj" fmla="val 6207"/>
-            </a:avLst>
-          </a:prstGeom>
-          <a:solidFill>
-            <a:srgbClr val="0E3A5F"/>
-          </a:solidFill>
-          <a:ln/>
-          <a:effectLst>
-            <a:outerShdw sx="100000" sy="100000" kx="0" ky="0" algn="bl" rotWithShape="0" blurRad="88900" dist="25400" dir="5400000">
-              <a:srgbClr val="22303C">
-                <a:alpha val="12000"/>
-              </a:srgbClr>
-            </a:outerShdw>
-          </a:effectLst>
-        </p:spPr>
-      </p:sp>
-      <p:sp>
-        <p:nvSpPr>
-          <p:cNvPr id="8" name="Text 6"/>
-          <p:cNvSpPr/>
-          <p:nvPr/>
-        </p:nvSpPr>
-        <p:spPr>
-          <a:xfrm>
-            <a:off x="822960" y="4681728"/>
-            <a:ext cx="640080" cy="960120"/>
-          </a:xfrm>
-          <a:prstGeom prst="rect">
-            <a:avLst/>
-          </a:prstGeom>
-          <a:noFill/>
-          <a:ln/>
-        </p:spPr>
-        <p:txBody>
-          <a:bodyPr wrap="square" lIns="0" tIns="0" rIns="0" bIns="0" rtlCol="0" anchor="ctr"/>
-          <a:lstStyle/>
-          <a:p>
-            <a:pPr algn="ctr" indent="0" marL="0">
-              <a:buNone/>
-            </a:pPr>
-            <a:r>
-              <a:rPr lang="en-US" sz="4000" b="1" dirty="0">
-                <a:solidFill>
-                  <a:srgbClr val="1565C0"/>
-                </a:solidFill>
-                <a:latin typeface="Calibri" pitchFamily="34" charset="0"/>
-                <a:ea typeface="Calibri" pitchFamily="34" charset="-122"/>
-                <a:cs typeface="Calibri" pitchFamily="34" charset="-120"/>
-              </a:rPr>
-              <a:t>?</a:t>
-            </a:r>
-            <a:endParaRPr lang="en-US" sz="4000" dirty="0"/>
-          </a:p>
-        </p:txBody>
-      </p:sp>
-      <p:sp>
-        <p:nvSpPr>
-          <p:cNvPr id="9" name="Text 7"/>
-          <p:cNvSpPr/>
-          <p:nvPr/>
-        </p:nvSpPr>
-        <p:spPr>
-          <a:xfrm>
-            <a:off x="1618488" y="4553712"/>
-            <a:ext cx="9686239" cy="1325880"/>
-          </a:xfrm>
-          <a:prstGeom prst="rect">
-            <a:avLst/>
-          </a:prstGeom>
-          <a:noFill/>
-          <a:ln/>
-        </p:spPr>
-        <p:txBody>
-          <a:bodyPr wrap="square" lIns="0" tIns="0" rIns="0" bIns="0" rtlCol="0" anchor="ctr"/>
-          <a:lstStyle/>
-          <a:p>
-            <a:pPr algn="l" indent="0" marL="0">
-              <a:buNone/>
-            </a:pPr>
-            <a:r>
-              <a:rPr lang="en-US" sz="1500" b="1" dirty="0">
-                <a:solidFill>
-                  <a:srgbClr val="FFFFFF"/>
-                </a:solidFill>
-                <a:latin typeface="Calibri" pitchFamily="34" charset="0"/>
-                <a:ea typeface="Calibri" pitchFamily="34" charset="-122"/>
-                <a:cs typeface="Calibri" pitchFamily="34" charset="-120"/>
-              </a:rPr>
-              <a:t>What is the diagnosis, and why are both gaps elevated?</a:t>
-            </a:r>
-            <a:endParaRPr lang="en-US" sz="1500" dirty="0"/>
-          </a:p>
-        </p:txBody>
-      </p:sp>
-      <p:sp>
-        <p:nvSpPr>
-          <p:cNvPr id="10" name="Text 8"/>
-          <p:cNvSpPr/>
-          <p:nvPr/>
-        </p:nvSpPr>
-        <p:spPr>
-          <a:xfrm>
-            <a:off x="566928" y="6473952"/>
-            <a:ext cx="7772400" cy="274320"/>
-          </a:xfrm>
-          <a:prstGeom prst="rect">
-            <a:avLst/>
-          </a:prstGeom>
-          <a:noFill/>
-          <a:ln/>
-        </p:spPr>
-        <p:txBody>
-          <a:bodyPr wrap="square" lIns="0" tIns="0" rIns="0" bIns="0" rtlCol="0" anchor="ctr"/>
-          <a:lstStyle/>
-          <a:p>
-            <a:pPr algn="l" indent="0" marL="0">
-              <a:buNone/>
-            </a:pPr>
-            <a:r>
-              <a:rPr lang="en-US" sz="850" dirty="0">
-                <a:solidFill>
-                  <a:srgbClr val="9AA8B4"/>
-                </a:solidFill>
-                <a:latin typeface="Calibri" pitchFamily="34" charset="0"/>
-                <a:ea typeface="Calibri" pitchFamily="34" charset="-122"/>
-                <a:cs typeface="Calibri" pitchFamily="34" charset="-120"/>
-              </a:rPr>
-              <a:t>Makassed General Hospital  ·  Department of Laboratory Medicine</a:t>
-            </a:r>
-            <a:endParaRPr lang="en-US" sz="850" dirty="0"/>
-          </a:p>
-        </p:txBody>
-      </p:sp>
-      <p:sp>
-        <p:nvSpPr>
-          <p:cNvPr id="11" name="Text 9"/>
-          <p:cNvSpPr/>
-          <p:nvPr/>
-        </p:nvSpPr>
-        <p:spPr>
-          <a:xfrm>
-            <a:off x="9814255" y="6473952"/>
-            <a:ext cx="1828800" cy="274320"/>
-          </a:xfrm>
-          <a:prstGeom prst="rect">
-            <a:avLst/>
-          </a:prstGeom>
-          <a:noFill/>
-          <a:ln/>
-        </p:spPr>
-        <p:txBody>
-          <a:bodyPr wrap="square" lIns="0" tIns="0" rIns="0" bIns="0" rtlCol="0" anchor="ctr"/>
-          <a:lstStyle/>
-          <a:p>
-            <a:pPr algn="r" indent="0" marL="0">
-              <a:buNone/>
-            </a:pPr>
-            <a:r>
-              <a:rPr lang="en-US" sz="850" dirty="0">
-                <a:solidFill>
-                  <a:srgbClr val="9AA8B4"/>
-                </a:solidFill>
-                <a:latin typeface="Calibri" pitchFamily="34" charset="0"/>
-                <a:ea typeface="Calibri" pitchFamily="34" charset="-122"/>
-                <a:cs typeface="Calibri" pitchFamily="34" charset="-120"/>
-              </a:rPr>
-              <a:t>CP Lecture Series</a:t>
-            </a:r>
-            <a:pPr algn="r" indent="0" marL="0">
-              <a:buNone/>
-            </a:pPr>
-            <a:r>
-              <a:rPr lang="en-US" sz="850" dirty="0">
-                <a:solidFill>
-                  <a:srgbClr val="DCE4EC"/>
-                </a:solidFill>
-                <a:latin typeface="Calibri" pitchFamily="34" charset="0"/>
-                <a:ea typeface="Calibri" pitchFamily="34" charset="-122"/>
-                <a:cs typeface="Calibri" pitchFamily="34" charset="-120"/>
-              </a:rPr>
-              <a:t>   ·   </a:t>
-            </a:r>
-            <a:pPr algn="r" indent="0" marL="0">
-              <a:buNone/>
-            </a:pPr>
-            <a:r>
-              <a:rPr lang="en-US" sz="850" b="1" dirty="0">
-                <a:solidFill>
-                  <a:srgbClr val="1565C0"/>
-                </a:solidFill>
-                <a:latin typeface="Calibri" pitchFamily="34" charset="0"/>
-                <a:ea typeface="Calibri" pitchFamily="34" charset="-122"/>
-                <a:cs typeface="Calibri" pitchFamily="34" charset="-120"/>
-              </a:rPr>
-              <a:t>10</a:t>
-            </a:r>
-            <a:endParaRPr lang="en-US" sz="850" dirty="0"/>
           </a:p>
         </p:txBody>
       </p:sp>
@@ -5591,7 +6897,7 @@
                 <a:ea typeface="Calibri" pitchFamily="34" charset="-122"/>
                 <a:cs typeface="Calibri" pitchFamily="34" charset="-120"/>
               </a:rPr>
-              <a:t>CLINICAL CHEMISTRY   ·   CASE 1  ·  RESOLUTION</a:t>
+              <a:t>CLINICAL CHEMISTRY   ·   CASE 1</a:t>
             </a:r>
             <a:endParaRPr lang="en-US" sz="1100" dirty="0"/>
           </a:p>
@@ -5630,7 +6936,7 @@
                 <a:ea typeface="Calibri" pitchFamily="34" charset="-122"/>
                 <a:cs typeface="Calibri" pitchFamily="34" charset="-120"/>
               </a:rPr>
-              <a:t>Case 1: Ethylene Glycol Toxicity</a:t>
+              <a:t>Case 1</a:t>
             </a:r>
             <a:endParaRPr lang="en-US" sz="3000" dirty="0"/>
           </a:p>
@@ -5638,124 +6944,18 @@
       </p:sp>
       <p:sp>
         <p:nvSpPr>
-          <p:cNvPr id="4" name="Text 2"/>
-          <p:cNvSpPr/>
-          <p:nvPr/>
-        </p:nvSpPr>
-        <p:spPr>
-          <a:xfrm>
-            <a:off x="566928" y="1554480"/>
-            <a:ext cx="6413547" cy="4023360"/>
-          </a:xfrm>
-          <a:prstGeom prst="rect">
-            <a:avLst/>
-          </a:prstGeom>
-          <a:noFill/>
-          <a:ln/>
-        </p:spPr>
-        <p:txBody>
-          <a:bodyPr wrap="square" lIns="0" tIns="0" rIns="0" bIns="0" rtlCol="0" anchor="t"/>
-          <a:lstStyle/>
-          <a:p>
-            <a:pPr algn="l" marL="177800" indent="-177800">
-              <a:spcAft>
-                <a:spcPts val="900"/>
-              </a:spcAft>
-              <a:buSzPct val="100000"/>
-              <a:buChar char="•"/>
-            </a:pPr>
-            <a:r>
-              <a:rPr lang="en-US" sz="1400" b="1" dirty="0">
-                <a:solidFill>
-                  <a:srgbClr val="1B2A38"/>
-                </a:solidFill>
-                <a:latin typeface="Calibri" pitchFamily="34" charset="0"/>
-                <a:ea typeface="Calibri" pitchFamily="34" charset="-122"/>
-                <a:cs typeface="Calibri" pitchFamily="34" charset="-120"/>
-              </a:rPr>
-              <a:t>Ethylene glycol ingestion — a toxic alcohol.</a:t>
-            </a:r>
-            <a:endParaRPr lang="en-US" sz="1400" dirty="0"/>
-          </a:p>
-          <a:p>
-            <a:pPr algn="l" marL="177800" indent="-177800">
-              <a:spcAft>
-                <a:spcPts val="900"/>
-              </a:spcAft>
-              <a:buSzPct val="100000"/>
-              <a:buChar char="•"/>
-            </a:pPr>
-            <a:r>
-              <a:rPr lang="en-US" sz="1400" dirty="0">
-                <a:solidFill>
-                  <a:srgbClr val="33444F"/>
-                </a:solidFill>
-                <a:latin typeface="Calibri" pitchFamily="34" charset="0"/>
-                <a:ea typeface="Calibri" pitchFamily="34" charset="-122"/>
-                <a:cs typeface="Calibri" pitchFamily="34" charset="-120"/>
-              </a:rPr>
-              <a:t>Parent alcohol raises the OSMOLAL gap early; metabolism to acids raises the ANION gap later.</a:t>
-            </a:r>
-            <a:endParaRPr lang="en-US" sz="1400" dirty="0"/>
-          </a:p>
-          <a:p>
-            <a:pPr algn="l" marL="177800" indent="-177800">
-              <a:spcAft>
-                <a:spcPts val="900"/>
-              </a:spcAft>
-              <a:buSzPct val="100000"/>
-              <a:buChar char="•"/>
-            </a:pPr>
-            <a:r>
-              <a:rPr lang="en-US" sz="1400" dirty="0">
-                <a:solidFill>
-                  <a:srgbClr val="33444F"/>
-                </a:solidFill>
-                <a:latin typeface="Calibri" pitchFamily="34" charset="0"/>
-                <a:ea typeface="Calibri" pitchFamily="34" charset="-122"/>
-                <a:cs typeface="Calibri" pitchFamily="34" charset="-120"/>
-              </a:rPr>
-              <a:t>Calcium oxalate crystalluria supports ethylene glycol.</a:t>
-            </a:r>
-            <a:endParaRPr lang="en-US" sz="1400" dirty="0"/>
-          </a:p>
-          <a:p>
-            <a:pPr algn="l" marL="177800" indent="-177800">
-              <a:spcAft>
-                <a:spcPts val="900"/>
-              </a:spcAft>
-              <a:buSzPct val="100000"/>
-              <a:buChar char="•"/>
-            </a:pPr>
-            <a:r>
-              <a:rPr lang="en-US" sz="1400" dirty="0">
-                <a:solidFill>
-                  <a:srgbClr val="33444F"/>
-                </a:solidFill>
-                <a:latin typeface="Calibri" pitchFamily="34" charset="0"/>
-                <a:ea typeface="Calibri" pitchFamily="34" charset="-122"/>
-                <a:cs typeface="Calibri" pitchFamily="34" charset="-120"/>
-              </a:rPr>
-              <a:t>Time-dependent: as the alcohol is metabolized, the osmolal gap falls and the anion gap rises.</a:t>
-            </a:r>
-            <a:endParaRPr lang="en-US" sz="1400" dirty="0"/>
-          </a:p>
-        </p:txBody>
-      </p:sp>
-      <p:sp>
-        <p:nvSpPr>
-          <p:cNvPr id="5" name="Shape 3"/>
-          <p:cNvSpPr/>
-          <p:nvPr/>
-        </p:nvSpPr>
-        <p:spPr>
-          <a:xfrm>
-            <a:off x="7422788" y="1554480"/>
-            <a:ext cx="4201979" cy="3977640"/>
+          <p:cNvPr id="4" name="Shape 2"/>
+          <p:cNvSpPr/>
+          <p:nvPr/>
+        </p:nvSpPr>
+        <p:spPr>
+          <a:xfrm>
+            <a:off x="566928" y="1517904"/>
+            <a:ext cx="11057839" cy="2788920"/>
           </a:xfrm>
           <a:prstGeom prst="roundRect">
             <a:avLst>
-              <a:gd name="adj" fmla="val 2069"/>
+              <a:gd name="adj" fmla="val 2951"/>
             </a:avLst>
           </a:prstGeom>
           <a:solidFill>
@@ -5773,53 +6973,53 @@
       </p:sp>
       <p:sp>
         <p:nvSpPr>
+          <p:cNvPr id="5" name="Text 3"/>
+          <p:cNvSpPr/>
+          <p:nvPr/>
+        </p:nvSpPr>
+        <p:spPr>
+          <a:xfrm>
+            <a:off x="841248" y="1700784"/>
+            <a:ext cx="5486400" cy="292608"/>
+          </a:xfrm>
+          <a:prstGeom prst="rect">
+            <a:avLst/>
+          </a:prstGeom>
+          <a:noFill/>
+          <a:ln/>
+        </p:spPr>
+        <p:txBody>
+          <a:bodyPr wrap="square" lIns="0" tIns="0" rIns="0" bIns="0" rtlCol="0" anchor="ctr"/>
+          <a:lstStyle/>
+          <a:p>
+            <a:pPr indent="0" marL="0">
+              <a:buNone/>
+            </a:pPr>
+            <a:r>
+              <a:rPr lang="en-US" sz="1100" b="1" spc="150" kern="0" dirty="0">
+                <a:solidFill>
+                  <a:srgbClr val="1565C0"/>
+                </a:solidFill>
+                <a:latin typeface="Calibri" pitchFamily="34" charset="0"/>
+                <a:ea typeface="Calibri" pitchFamily="34" charset="-122"/>
+                <a:cs typeface="Calibri" pitchFamily="34" charset="-120"/>
+              </a:rPr>
+              <a:t>CLINICAL VIGNETTE</a:t>
+            </a:r>
+            <a:endParaRPr lang="en-US" sz="1100" dirty="0"/>
+          </a:p>
+        </p:txBody>
+      </p:sp>
+      <p:sp>
+        <p:nvSpPr>
           <p:cNvPr id="6" name="Text 4"/>
           <p:cNvSpPr/>
           <p:nvPr/>
         </p:nvSpPr>
         <p:spPr>
           <a:xfrm>
-            <a:off x="7660532" y="1755648"/>
-            <a:ext cx="3744779" cy="310896"/>
-          </a:xfrm>
-          <a:prstGeom prst="rect">
-            <a:avLst/>
-          </a:prstGeom>
-          <a:noFill/>
-          <a:ln/>
-        </p:spPr>
-        <p:txBody>
-          <a:bodyPr wrap="square" lIns="0" tIns="0" rIns="0" bIns="0" rtlCol="0" anchor="ctr"/>
-          <a:lstStyle/>
-          <a:p>
-            <a:pPr indent="0" marL="0">
-              <a:buNone/>
-            </a:pPr>
-            <a:r>
-              <a:rPr lang="en-US" sz="1100" b="1" spc="140" kern="0" dirty="0">
-                <a:solidFill>
-                  <a:srgbClr val="1565C0"/>
-                </a:solidFill>
-                <a:latin typeface="Calibri" pitchFamily="34" charset="0"/>
-                <a:ea typeface="Calibri" pitchFamily="34" charset="-122"/>
-                <a:cs typeface="Calibri" pitchFamily="34" charset="-120"/>
-              </a:rPr>
-              <a:t>TEACHING POINT</a:t>
-            </a:r>
-            <a:endParaRPr lang="en-US" sz="1100" dirty="0"/>
-          </a:p>
-        </p:txBody>
-      </p:sp>
-      <p:sp>
-        <p:nvSpPr>
-          <p:cNvPr id="7" name="Text 5"/>
-          <p:cNvSpPr/>
-          <p:nvPr/>
-        </p:nvSpPr>
-        <p:spPr>
-          <a:xfrm>
-            <a:off x="7660532" y="2121408"/>
-            <a:ext cx="3726491" cy="3291840"/>
+            <a:off x="841248" y="2029968"/>
+            <a:ext cx="10509199" cy="2148840"/>
           </a:xfrm>
           <a:prstGeom prst="rect">
             <a:avLst/>
@@ -5833,12 +7033,12 @@
           <a:p>
             <a:pPr algn="l" indent="0" marL="0">
               <a:lnSpc>
-                <a:spcPct val="110000"/>
+                <a:spcPct val="108000"/>
               </a:lnSpc>
               <a:buNone/>
             </a:pPr>
             <a:r>
-              <a:rPr lang="en-US" sz="1350" dirty="0">
+              <a:rPr lang="en-US" sz="1450" dirty="0">
                 <a:solidFill>
                   <a:srgbClr val="33444F"/>
                 </a:solidFill>
@@ -5846,15 +7046,122 @@
                 <a:ea typeface="Calibri" pitchFamily="34" charset="-122"/>
                 <a:cs typeface="Calibri" pitchFamily="34" charset="-120"/>
               </a:rPr>
-              <a:t>A combined osmolal + anion gap acidosis is toxic alcohol until proven otherwise — the two gaps evolve in opposite directions over time.</a:t>
-            </a:r>
-            <a:endParaRPr lang="en-US" sz="1350" dirty="0"/>
-          </a:p>
-        </p:txBody>
+              <a:t>An intoxicated patient has a high anion gap metabolic acidosis and a markedly elevated osmolal gap. Ethanol is undetectable. Calcium oxalate crystals are seen in the urine.</a:t>
+            </a:r>
+            <a:endParaRPr lang="en-US" sz="1450" dirty="0"/>
+          </a:p>
+        </p:txBody>
+      </p:sp>
+      <p:sp>
+        <p:nvSpPr>
+          <p:cNvPr id="7" name="Shape 5"/>
+          <p:cNvSpPr/>
+          <p:nvPr/>
+        </p:nvSpPr>
+        <p:spPr>
+          <a:xfrm>
+            <a:off x="566928" y="4553712"/>
+            <a:ext cx="11057839" cy="1325880"/>
+          </a:xfrm>
+          <a:prstGeom prst="roundRect">
+            <a:avLst>
+              <a:gd name="adj" fmla="val 6207"/>
+            </a:avLst>
+          </a:prstGeom>
+          <a:solidFill>
+            <a:srgbClr val="0E3A5F"/>
+          </a:solidFill>
+          <a:ln/>
+          <a:effectLst>
+            <a:outerShdw sx="100000" sy="100000" kx="0" ky="0" algn="bl" rotWithShape="0" blurRad="88900" dist="25400" dir="5400000">
+              <a:srgbClr val="22303C">
+                <a:alpha val="12000"/>
+              </a:srgbClr>
+            </a:outerShdw>
+          </a:effectLst>
+        </p:spPr>
       </p:sp>
       <p:sp>
         <p:nvSpPr>
           <p:cNvPr id="8" name="Text 6"/>
+          <p:cNvSpPr/>
+          <p:nvPr/>
+        </p:nvSpPr>
+        <p:spPr>
+          <a:xfrm>
+            <a:off x="822960" y="4681728"/>
+            <a:ext cx="640080" cy="960120"/>
+          </a:xfrm>
+          <a:prstGeom prst="rect">
+            <a:avLst/>
+          </a:prstGeom>
+          <a:noFill/>
+          <a:ln/>
+        </p:spPr>
+        <p:txBody>
+          <a:bodyPr wrap="square" lIns="0" tIns="0" rIns="0" bIns="0" rtlCol="0" anchor="ctr"/>
+          <a:lstStyle/>
+          <a:p>
+            <a:pPr algn="ctr" indent="0" marL="0">
+              <a:buNone/>
+            </a:pPr>
+            <a:r>
+              <a:rPr lang="en-US" sz="4000" b="1" dirty="0">
+                <a:solidFill>
+                  <a:srgbClr val="1565C0"/>
+                </a:solidFill>
+                <a:latin typeface="Calibri" pitchFamily="34" charset="0"/>
+                <a:ea typeface="Calibri" pitchFamily="34" charset="-122"/>
+                <a:cs typeface="Calibri" pitchFamily="34" charset="-120"/>
+              </a:rPr>
+              <a:t>?</a:t>
+            </a:r>
+            <a:endParaRPr lang="en-US" sz="4000" dirty="0"/>
+          </a:p>
+        </p:txBody>
+      </p:sp>
+      <p:sp>
+        <p:nvSpPr>
+          <p:cNvPr id="9" name="Text 7"/>
+          <p:cNvSpPr/>
+          <p:nvPr/>
+        </p:nvSpPr>
+        <p:spPr>
+          <a:xfrm>
+            <a:off x="1618488" y="4553712"/>
+            <a:ext cx="9686239" cy="1325880"/>
+          </a:xfrm>
+          <a:prstGeom prst="rect">
+            <a:avLst/>
+          </a:prstGeom>
+          <a:noFill/>
+          <a:ln/>
+        </p:spPr>
+        <p:txBody>
+          <a:bodyPr wrap="square" lIns="0" tIns="0" rIns="0" bIns="0" rtlCol="0" anchor="ctr"/>
+          <a:lstStyle/>
+          <a:p>
+            <a:pPr algn="l" indent="0" marL="0">
+              <a:buNone/>
+            </a:pPr>
+            <a:r>
+              <a:rPr lang="en-US" sz="1500" b="1" dirty="0">
+                <a:solidFill>
+                  <a:srgbClr val="FFFFFF"/>
+                </a:solidFill>
+                <a:latin typeface="Calibri" pitchFamily="34" charset="0"/>
+                <a:ea typeface="Calibri" pitchFamily="34" charset="-122"/>
+                <a:cs typeface="Calibri" pitchFamily="34" charset="-120"/>
+              </a:rPr>
+              <a:t>Diagnosis, and why are both gaps elevated?</a:t>
+            </a:r>
+            <a:endParaRPr lang="en-US" sz="1500" dirty="0"/>
+          </a:p>
+        </p:txBody>
+      </p:sp>
+      <p:sp>
+        <p:nvSpPr>
+          <p:cNvPr id="10" name="Text 8"/>
           <p:cNvSpPr/>
           <p:nvPr/>
         </p:nvSpPr>
@@ -5893,7 +7200,7 @@
       </p:sp>
       <p:sp>
         <p:nvSpPr>
-          <p:cNvPr id="9" name="Text 7"/>
+          <p:cNvPr id="11" name="Text 9"/>
           <p:cNvSpPr/>
           <p:nvPr/>
         </p:nvSpPr>
@@ -6023,7 +7330,7 @@
                 <a:ea typeface="Calibri" pitchFamily="34" charset="-122"/>
                 <a:cs typeface="Calibri" pitchFamily="34" charset="-120"/>
               </a:rPr>
-              <a:t>CLINICAL CHEMISTRY   ·   CASE 2</a:t>
+              <a:t>CLINICAL CHEMISTRY   ·   CASE 1  ·  RESOLUTION</a:t>
             </a:r>
             <a:endParaRPr lang="en-US" sz="1100" dirty="0"/>
           </a:p>
@@ -6062,7 +7369,7 @@
                 <a:ea typeface="Calibri" pitchFamily="34" charset="-122"/>
                 <a:cs typeface="Calibri" pitchFamily="34" charset="-120"/>
               </a:rPr>
-              <a:t>Case 2</a:t>
+              <a:t>Case 1: Ethylene Glycol Toxicity</a:t>
             </a:r>
             <a:endParaRPr lang="en-US" sz="3000" dirty="0"/>
           </a:p>
@@ -6070,18 +7377,124 @@
       </p:sp>
       <p:sp>
         <p:nvSpPr>
-          <p:cNvPr id="4" name="Shape 2"/>
-          <p:cNvSpPr/>
-          <p:nvPr/>
-        </p:nvSpPr>
-        <p:spPr>
-          <a:xfrm>
-            <a:off x="566928" y="1517904"/>
-            <a:ext cx="11057839" cy="2788920"/>
+          <p:cNvPr id="4" name="Text 2"/>
+          <p:cNvSpPr/>
+          <p:nvPr/>
+        </p:nvSpPr>
+        <p:spPr>
+          <a:xfrm>
+            <a:off x="566928" y="1554480"/>
+            <a:ext cx="6413547" cy="4023360"/>
+          </a:xfrm>
+          <a:prstGeom prst="rect">
+            <a:avLst/>
+          </a:prstGeom>
+          <a:noFill/>
+          <a:ln/>
+        </p:spPr>
+        <p:txBody>
+          <a:bodyPr wrap="square" lIns="0" tIns="0" rIns="0" bIns="0" rtlCol="0" anchor="t"/>
+          <a:lstStyle/>
+          <a:p>
+            <a:pPr algn="l" marL="177800" indent="-177800">
+              <a:spcAft>
+                <a:spcPts val="900"/>
+              </a:spcAft>
+              <a:buSzPct val="100000"/>
+              <a:buChar char="•"/>
+            </a:pPr>
+            <a:r>
+              <a:rPr lang="en-US" sz="1400" b="1" dirty="0">
+                <a:solidFill>
+                  <a:srgbClr val="1B2A38"/>
+                </a:solidFill>
+                <a:latin typeface="Calibri" pitchFamily="34" charset="0"/>
+                <a:ea typeface="Calibri" pitchFamily="34" charset="-122"/>
+                <a:cs typeface="Calibri" pitchFamily="34" charset="-120"/>
+              </a:rPr>
+              <a:t>Ethylene glycol — a toxic alcohol.</a:t>
+            </a:r>
+            <a:endParaRPr lang="en-US" sz="1400" dirty="0"/>
+          </a:p>
+          <a:p>
+            <a:pPr algn="l" marL="177800" indent="-177800">
+              <a:spcAft>
+                <a:spcPts val="900"/>
+              </a:spcAft>
+              <a:buSzPct val="100000"/>
+              <a:buChar char="•"/>
+            </a:pPr>
+            <a:r>
+              <a:rPr lang="en-US" sz="1400" dirty="0">
+                <a:solidFill>
+                  <a:srgbClr val="33444F"/>
+                </a:solidFill>
+                <a:latin typeface="Calibri" pitchFamily="34" charset="0"/>
+                <a:ea typeface="Calibri" pitchFamily="34" charset="-122"/>
+                <a:cs typeface="Calibri" pitchFamily="34" charset="-120"/>
+              </a:rPr>
+              <a:t>Parent alcohol raises the OSMOLAL gap early; metabolism to acids raises the ANION gap later.</a:t>
+            </a:r>
+            <a:endParaRPr lang="en-US" sz="1400" dirty="0"/>
+          </a:p>
+          <a:p>
+            <a:pPr algn="l" marL="177800" indent="-177800">
+              <a:spcAft>
+                <a:spcPts val="900"/>
+              </a:spcAft>
+              <a:buSzPct val="100000"/>
+              <a:buChar char="•"/>
+            </a:pPr>
+            <a:r>
+              <a:rPr lang="en-US" sz="1400" dirty="0">
+                <a:solidFill>
+                  <a:srgbClr val="33444F"/>
+                </a:solidFill>
+                <a:latin typeface="Calibri" pitchFamily="34" charset="0"/>
+                <a:ea typeface="Calibri" pitchFamily="34" charset="-122"/>
+                <a:cs typeface="Calibri" pitchFamily="34" charset="-120"/>
+              </a:rPr>
+              <a:t>Calcium oxalate crystalluria supports it.</a:t>
+            </a:r>
+            <a:endParaRPr lang="en-US" sz="1400" dirty="0"/>
+          </a:p>
+          <a:p>
+            <a:pPr algn="l" marL="177800" indent="-177800">
+              <a:spcAft>
+                <a:spcPts val="900"/>
+              </a:spcAft>
+              <a:buSzPct val="100000"/>
+              <a:buChar char="•"/>
+            </a:pPr>
+            <a:r>
+              <a:rPr lang="en-US" sz="1400" dirty="0">
+                <a:solidFill>
+                  <a:srgbClr val="33444F"/>
+                </a:solidFill>
+                <a:latin typeface="Calibri" pitchFamily="34" charset="0"/>
+                <a:ea typeface="Calibri" pitchFamily="34" charset="-122"/>
+                <a:cs typeface="Calibri" pitchFamily="34" charset="-120"/>
+              </a:rPr>
+              <a:t>As the alcohol is metabolized, the osmolal gap falls and the anion gap rises.</a:t>
+            </a:r>
+            <a:endParaRPr lang="en-US" sz="1400" dirty="0"/>
+          </a:p>
+        </p:txBody>
+      </p:sp>
+      <p:sp>
+        <p:nvSpPr>
+          <p:cNvPr id="5" name="Shape 3"/>
+          <p:cNvSpPr/>
+          <p:nvPr/>
+        </p:nvSpPr>
+        <p:spPr>
+          <a:xfrm>
+            <a:off x="7422788" y="1554480"/>
+            <a:ext cx="4201979" cy="3977640"/>
           </a:xfrm>
           <a:prstGeom prst="roundRect">
             <a:avLst>
-              <a:gd name="adj" fmla="val 2951"/>
+              <a:gd name="adj" fmla="val 2069"/>
             </a:avLst>
           </a:prstGeom>
           <a:solidFill>
@@ -6099,14 +7512,14 @@
       </p:sp>
       <p:sp>
         <p:nvSpPr>
-          <p:cNvPr id="5" name="Text 3"/>
-          <p:cNvSpPr/>
-          <p:nvPr/>
-        </p:nvSpPr>
-        <p:spPr>
-          <a:xfrm>
-            <a:off x="841248" y="1700784"/>
-            <a:ext cx="5486400" cy="292608"/>
+          <p:cNvPr id="6" name="Text 4"/>
+          <p:cNvSpPr/>
+          <p:nvPr/>
+        </p:nvSpPr>
+        <p:spPr>
+          <a:xfrm>
+            <a:off x="7660532" y="1755648"/>
+            <a:ext cx="3744779" cy="310896"/>
           </a:xfrm>
           <a:prstGeom prst="rect">
             <a:avLst/>
@@ -6122,7 +7535,7 @@
               <a:buNone/>
             </a:pPr>
             <a:r>
-              <a:rPr lang="en-US" sz="1100" b="1" spc="150" kern="0" dirty="0">
+              <a:rPr lang="en-US" sz="1100" b="1" spc="140" kern="0" dirty="0">
                 <a:solidFill>
                   <a:srgbClr val="1565C0"/>
                 </a:solidFill>
@@ -6130,7 +7543,7 @@
                 <a:ea typeface="Calibri" pitchFamily="34" charset="-122"/>
                 <a:cs typeface="Calibri" pitchFamily="34" charset="-120"/>
               </a:rPr>
-              <a:t>CLINICAL VIGNETTE</a:t>
+              <a:t>TEACHING POINT</a:t>
             </a:r>
             <a:endParaRPr lang="en-US" sz="1100" dirty="0"/>
           </a:p>
@@ -6138,14 +7551,14 @@
       </p:sp>
       <p:sp>
         <p:nvSpPr>
-          <p:cNvPr id="6" name="Text 4"/>
-          <p:cNvSpPr/>
-          <p:nvPr/>
-        </p:nvSpPr>
-        <p:spPr>
-          <a:xfrm>
-            <a:off x="841248" y="2029968"/>
-            <a:ext cx="10509199" cy="2148840"/>
+          <p:cNvPr id="7" name="Text 5"/>
+          <p:cNvSpPr/>
+          <p:nvPr/>
+        </p:nvSpPr>
+        <p:spPr>
+          <a:xfrm>
+            <a:off x="7660532" y="2121408"/>
+            <a:ext cx="3726491" cy="3291840"/>
           </a:xfrm>
           <a:prstGeom prst="rect">
             <a:avLst/>
@@ -6159,12 +7572,12 @@
           <a:p>
             <a:pPr algn="l" indent="0" marL="0">
               <a:lnSpc>
-                <a:spcPct val="108000"/>
+                <a:spcPct val="110000"/>
               </a:lnSpc>
               <a:buNone/>
             </a:pPr>
             <a:r>
-              <a:rPr lang="en-US" sz="1450" dirty="0">
+              <a:rPr lang="en-US" sz="1350" dirty="0">
                 <a:solidFill>
                   <a:srgbClr val="33444F"/>
                 </a:solidFill>
@@ -6172,122 +7585,15 @@
                 <a:ea typeface="Calibri" pitchFamily="34" charset="-122"/>
                 <a:cs typeface="Calibri" pitchFamily="34" charset="-120"/>
               </a:rPr>
-              <a:t>A patient with severe hypertriglyceridemia has a sodium of 122 mmol/L by the main chemistry analyzer, but 139 mmol/L on the blood gas analyzer. Serum osmolality is normal.</a:t>
-            </a:r>
-            <a:endParaRPr lang="en-US" sz="1450" dirty="0"/>
-          </a:p>
-        </p:txBody>
-      </p:sp>
-      <p:sp>
-        <p:nvSpPr>
-          <p:cNvPr id="7" name="Shape 5"/>
-          <p:cNvSpPr/>
-          <p:nvPr/>
-        </p:nvSpPr>
-        <p:spPr>
-          <a:xfrm>
-            <a:off x="566928" y="4553712"/>
-            <a:ext cx="11057839" cy="1325880"/>
-          </a:xfrm>
-          <a:prstGeom prst="roundRect">
-            <a:avLst>
-              <a:gd name="adj" fmla="val 6207"/>
-            </a:avLst>
-          </a:prstGeom>
-          <a:solidFill>
-            <a:srgbClr val="0E3A5F"/>
-          </a:solidFill>
-          <a:ln/>
-          <a:effectLst>
-            <a:outerShdw sx="100000" sy="100000" kx="0" ky="0" algn="bl" rotWithShape="0" blurRad="88900" dist="25400" dir="5400000">
-              <a:srgbClr val="22303C">
-                <a:alpha val="12000"/>
-              </a:srgbClr>
-            </a:outerShdw>
-          </a:effectLst>
-        </p:spPr>
+              <a:t>A combined osmolal + anion gap acidosis is toxic alcohol until proven otherwise — the two gaps evolve in opposite directions.</a:t>
+            </a:r>
+            <a:endParaRPr lang="en-US" sz="1350" dirty="0"/>
+          </a:p>
+        </p:txBody>
       </p:sp>
       <p:sp>
         <p:nvSpPr>
           <p:cNvPr id="8" name="Text 6"/>
-          <p:cNvSpPr/>
-          <p:nvPr/>
-        </p:nvSpPr>
-        <p:spPr>
-          <a:xfrm>
-            <a:off x="822960" y="4681728"/>
-            <a:ext cx="640080" cy="960120"/>
-          </a:xfrm>
-          <a:prstGeom prst="rect">
-            <a:avLst/>
-          </a:prstGeom>
-          <a:noFill/>
-          <a:ln/>
-        </p:spPr>
-        <p:txBody>
-          <a:bodyPr wrap="square" lIns="0" tIns="0" rIns="0" bIns="0" rtlCol="0" anchor="ctr"/>
-          <a:lstStyle/>
-          <a:p>
-            <a:pPr algn="ctr" indent="0" marL="0">
-              <a:buNone/>
-            </a:pPr>
-            <a:r>
-              <a:rPr lang="en-US" sz="4000" b="1" dirty="0">
-                <a:solidFill>
-                  <a:srgbClr val="1565C0"/>
-                </a:solidFill>
-                <a:latin typeface="Calibri" pitchFamily="34" charset="0"/>
-                <a:ea typeface="Calibri" pitchFamily="34" charset="-122"/>
-                <a:cs typeface="Calibri" pitchFamily="34" charset="-120"/>
-              </a:rPr>
-              <a:t>?</a:t>
-            </a:r>
-            <a:endParaRPr lang="en-US" sz="4000" dirty="0"/>
-          </a:p>
-        </p:txBody>
-      </p:sp>
-      <p:sp>
-        <p:nvSpPr>
-          <p:cNvPr id="9" name="Text 7"/>
-          <p:cNvSpPr/>
-          <p:nvPr/>
-        </p:nvSpPr>
-        <p:spPr>
-          <a:xfrm>
-            <a:off x="1618488" y="4553712"/>
-            <a:ext cx="9686239" cy="1325880"/>
-          </a:xfrm>
-          <a:prstGeom prst="rect">
-            <a:avLst/>
-          </a:prstGeom>
-          <a:noFill/>
-          <a:ln/>
-        </p:spPr>
-        <p:txBody>
-          <a:bodyPr wrap="square" lIns="0" tIns="0" rIns="0" bIns="0" rtlCol="0" anchor="ctr"/>
-          <a:lstStyle/>
-          <a:p>
-            <a:pPr algn="l" indent="0" marL="0">
-              <a:buNone/>
-            </a:pPr>
-            <a:r>
-              <a:rPr lang="en-US" sz="1500" b="1" dirty="0">
-                <a:solidFill>
-                  <a:srgbClr val="FFFFFF"/>
-                </a:solidFill>
-                <a:latin typeface="Calibri" pitchFamily="34" charset="0"/>
-                <a:ea typeface="Calibri" pitchFamily="34" charset="-122"/>
-                <a:cs typeface="Calibri" pitchFamily="34" charset="-120"/>
-              </a:rPr>
-              <a:t>Which value is correct, and what is the mechanism?</a:t>
-            </a:r>
-            <a:endParaRPr lang="en-US" sz="1500" dirty="0"/>
-          </a:p>
-        </p:txBody>
-      </p:sp>
-      <p:sp>
-        <p:nvSpPr>
-          <p:cNvPr id="10" name="Text 8"/>
           <p:cNvSpPr/>
           <p:nvPr/>
         </p:nvSpPr>
@@ -6326,7 +7632,7 @@
       </p:sp>
       <p:sp>
         <p:nvSpPr>
-          <p:cNvPr id="11" name="Text 9"/>
+          <p:cNvPr id="9" name="Text 7"/>
           <p:cNvSpPr/>
           <p:nvPr/>
         </p:nvSpPr>
@@ -6456,7 +7762,7 @@
                 <a:ea typeface="Calibri" pitchFamily="34" charset="-122"/>
                 <a:cs typeface="Calibri" pitchFamily="34" charset="-120"/>
               </a:rPr>
-              <a:t>CLINICAL CHEMISTRY   ·   CASE 2  ·  RESOLUTION</a:t>
+              <a:t>CLINICAL CHEMISTRY   ·   CASE 2</a:t>
             </a:r>
             <a:endParaRPr lang="en-US" sz="1100" dirty="0"/>
           </a:p>
@@ -6495,7 +7801,7 @@
                 <a:ea typeface="Calibri" pitchFamily="34" charset="-122"/>
                 <a:cs typeface="Calibri" pitchFamily="34" charset="-120"/>
               </a:rPr>
-              <a:t>Case 2: Pseudohyponatremia</a:t>
+              <a:t>Case 2</a:t>
             </a:r>
             <a:endParaRPr lang="en-US" sz="3000" dirty="0"/>
           </a:p>
@@ -6503,124 +7809,18 @@
       </p:sp>
       <p:sp>
         <p:nvSpPr>
-          <p:cNvPr id="4" name="Text 2"/>
-          <p:cNvSpPr/>
-          <p:nvPr/>
-        </p:nvSpPr>
-        <p:spPr>
-          <a:xfrm>
-            <a:off x="566928" y="1554480"/>
-            <a:ext cx="6413547" cy="4023360"/>
-          </a:xfrm>
-          <a:prstGeom prst="rect">
-            <a:avLst/>
-          </a:prstGeom>
-          <a:noFill/>
-          <a:ln/>
-        </p:spPr>
-        <p:txBody>
-          <a:bodyPr wrap="square" lIns="0" tIns="0" rIns="0" bIns="0" rtlCol="0" anchor="t"/>
-          <a:lstStyle/>
-          <a:p>
-            <a:pPr algn="l" marL="177800" indent="-177800">
-              <a:spcAft>
-                <a:spcPts val="900"/>
-              </a:spcAft>
-              <a:buSzPct val="100000"/>
-              <a:buChar char="•"/>
-            </a:pPr>
-            <a:r>
-              <a:rPr lang="en-US" sz="1400" b="1" dirty="0">
-                <a:solidFill>
-                  <a:srgbClr val="1B2A38"/>
-                </a:solidFill>
-                <a:latin typeface="Calibri" pitchFamily="34" charset="0"/>
-                <a:ea typeface="Calibri" pitchFamily="34" charset="-122"/>
-                <a:cs typeface="Calibri" pitchFamily="34" charset="-120"/>
-              </a:rPr>
-              <a:t>Pseudohyponatremia from lipemia — the indirect ISE on the main analyzer is falsely low.</a:t>
-            </a:r>
-            <a:endParaRPr lang="en-US" sz="1400" dirty="0"/>
-          </a:p>
-          <a:p>
-            <a:pPr algn="l" marL="177800" indent="-177800">
-              <a:spcAft>
-                <a:spcPts val="900"/>
-              </a:spcAft>
-              <a:buSzPct val="100000"/>
-              <a:buChar char="•"/>
-            </a:pPr>
-            <a:r>
-              <a:rPr lang="en-US" sz="1400" dirty="0">
-                <a:solidFill>
-                  <a:srgbClr val="33444F"/>
-                </a:solidFill>
-                <a:latin typeface="Calibri" pitchFamily="34" charset="0"/>
-                <a:ea typeface="Calibri" pitchFamily="34" charset="-122"/>
-                <a:cs typeface="Calibri" pitchFamily="34" charset="-120"/>
-              </a:rPr>
-              <a:t>Indirect ISE dilutes the sample and assumes normal plasma water; excess lipid displaces water and lowers the reported sodium.</a:t>
-            </a:r>
-            <a:endParaRPr lang="en-US" sz="1400" dirty="0"/>
-          </a:p>
-          <a:p>
-            <a:pPr algn="l" marL="177800" indent="-177800">
-              <a:spcAft>
-                <a:spcPts val="900"/>
-              </a:spcAft>
-              <a:buSzPct val="100000"/>
-              <a:buChar char="•"/>
-            </a:pPr>
-            <a:r>
-              <a:rPr lang="en-US" sz="1400" dirty="0">
-                <a:solidFill>
-                  <a:srgbClr val="33444F"/>
-                </a:solidFill>
-                <a:latin typeface="Calibri" pitchFamily="34" charset="0"/>
-                <a:ea typeface="Calibri" pitchFamily="34" charset="-122"/>
-                <a:cs typeface="Calibri" pitchFamily="34" charset="-120"/>
-              </a:rPr>
-              <a:t>The blood gas analyzer uses a DIRECT ISE (no dilution) — unaffected, so 139 is correct.</a:t>
-            </a:r>
-            <a:endParaRPr lang="en-US" sz="1400" dirty="0"/>
-          </a:p>
-          <a:p>
-            <a:pPr algn="l" marL="177800" indent="-177800">
-              <a:spcAft>
-                <a:spcPts val="900"/>
-              </a:spcAft>
-              <a:buSzPct val="100000"/>
-              <a:buChar char="•"/>
-            </a:pPr>
-            <a:r>
-              <a:rPr lang="en-US" sz="1400" dirty="0">
-                <a:solidFill>
-                  <a:srgbClr val="33444F"/>
-                </a:solidFill>
-                <a:latin typeface="Calibri" pitchFamily="34" charset="0"/>
-                <a:ea typeface="Calibri" pitchFamily="34" charset="-122"/>
-                <a:cs typeface="Calibri" pitchFamily="34" charset="-120"/>
-              </a:rPr>
-              <a:t>Normal serum osmolality confirms the artifact.</a:t>
-            </a:r>
-            <a:endParaRPr lang="en-US" sz="1400" dirty="0"/>
-          </a:p>
-        </p:txBody>
-      </p:sp>
-      <p:sp>
-        <p:nvSpPr>
-          <p:cNvPr id="5" name="Shape 3"/>
-          <p:cNvSpPr/>
-          <p:nvPr/>
-        </p:nvSpPr>
-        <p:spPr>
-          <a:xfrm>
-            <a:off x="7422788" y="1554480"/>
-            <a:ext cx="4201979" cy="3977640"/>
+          <p:cNvPr id="4" name="Shape 2"/>
+          <p:cNvSpPr/>
+          <p:nvPr/>
+        </p:nvSpPr>
+        <p:spPr>
+          <a:xfrm>
+            <a:off x="566928" y="1517904"/>
+            <a:ext cx="11057839" cy="2788920"/>
           </a:xfrm>
           <a:prstGeom prst="roundRect">
             <a:avLst>
-              <a:gd name="adj" fmla="val 2069"/>
+              <a:gd name="adj" fmla="val 2951"/>
             </a:avLst>
           </a:prstGeom>
           <a:solidFill>
@@ -6638,53 +7838,53 @@
       </p:sp>
       <p:sp>
         <p:nvSpPr>
+          <p:cNvPr id="5" name="Text 3"/>
+          <p:cNvSpPr/>
+          <p:nvPr/>
+        </p:nvSpPr>
+        <p:spPr>
+          <a:xfrm>
+            <a:off x="841248" y="1700784"/>
+            <a:ext cx="5486400" cy="292608"/>
+          </a:xfrm>
+          <a:prstGeom prst="rect">
+            <a:avLst/>
+          </a:prstGeom>
+          <a:noFill/>
+          <a:ln/>
+        </p:spPr>
+        <p:txBody>
+          <a:bodyPr wrap="square" lIns="0" tIns="0" rIns="0" bIns="0" rtlCol="0" anchor="ctr"/>
+          <a:lstStyle/>
+          <a:p>
+            <a:pPr indent="0" marL="0">
+              <a:buNone/>
+            </a:pPr>
+            <a:r>
+              <a:rPr lang="en-US" sz="1100" b="1" spc="150" kern="0" dirty="0">
+                <a:solidFill>
+                  <a:srgbClr val="1565C0"/>
+                </a:solidFill>
+                <a:latin typeface="Calibri" pitchFamily="34" charset="0"/>
+                <a:ea typeface="Calibri" pitchFamily="34" charset="-122"/>
+                <a:cs typeface="Calibri" pitchFamily="34" charset="-120"/>
+              </a:rPr>
+              <a:t>CLINICAL VIGNETTE</a:t>
+            </a:r>
+            <a:endParaRPr lang="en-US" sz="1100" dirty="0"/>
+          </a:p>
+        </p:txBody>
+      </p:sp>
+      <p:sp>
+        <p:nvSpPr>
           <p:cNvPr id="6" name="Text 4"/>
           <p:cNvSpPr/>
           <p:nvPr/>
         </p:nvSpPr>
         <p:spPr>
           <a:xfrm>
-            <a:off x="7660532" y="1755648"/>
-            <a:ext cx="3744779" cy="310896"/>
-          </a:xfrm>
-          <a:prstGeom prst="rect">
-            <a:avLst/>
-          </a:prstGeom>
-          <a:noFill/>
-          <a:ln/>
-        </p:spPr>
-        <p:txBody>
-          <a:bodyPr wrap="square" lIns="0" tIns="0" rIns="0" bIns="0" rtlCol="0" anchor="ctr"/>
-          <a:lstStyle/>
-          <a:p>
-            <a:pPr indent="0" marL="0">
-              <a:buNone/>
-            </a:pPr>
-            <a:r>
-              <a:rPr lang="en-US" sz="1100" b="1" spc="140" kern="0" dirty="0">
-                <a:solidFill>
-                  <a:srgbClr val="1565C0"/>
-                </a:solidFill>
-                <a:latin typeface="Calibri" pitchFamily="34" charset="0"/>
-                <a:ea typeface="Calibri" pitchFamily="34" charset="-122"/>
-                <a:cs typeface="Calibri" pitchFamily="34" charset="-120"/>
-              </a:rPr>
-              <a:t>TEACHING POINT</a:t>
-            </a:r>
-            <a:endParaRPr lang="en-US" sz="1100" dirty="0"/>
-          </a:p>
-        </p:txBody>
-      </p:sp>
-      <p:sp>
-        <p:nvSpPr>
-          <p:cNvPr id="7" name="Text 5"/>
-          <p:cNvSpPr/>
-          <p:nvPr/>
-        </p:nvSpPr>
-        <p:spPr>
-          <a:xfrm>
-            <a:off x="7660532" y="2121408"/>
-            <a:ext cx="3726491" cy="3291840"/>
+            <a:off x="841248" y="2029968"/>
+            <a:ext cx="10509199" cy="2148840"/>
           </a:xfrm>
           <a:prstGeom prst="rect">
             <a:avLst/>
@@ -6698,12 +7898,12 @@
           <a:p>
             <a:pPr algn="l" indent="0" marL="0">
               <a:lnSpc>
-                <a:spcPct val="110000"/>
+                <a:spcPct val="108000"/>
               </a:lnSpc>
               <a:buNone/>
             </a:pPr>
             <a:r>
-              <a:rPr lang="en-US" sz="1350" dirty="0">
+              <a:rPr lang="en-US" sz="1450" dirty="0">
                 <a:solidFill>
                   <a:srgbClr val="33444F"/>
                 </a:solidFill>
@@ -6711,15 +7911,122 @@
                 <a:ea typeface="Calibri" pitchFamily="34" charset="-122"/>
                 <a:cs typeface="Calibri" pitchFamily="34" charset="-120"/>
               </a:rPr>
-              <a:t>Discordant sodium between direct and indirect ISE with lipemia or paraproteinemia = pseudohyponatremia; trust the direct method.</a:t>
-            </a:r>
-            <a:endParaRPr lang="en-US" sz="1350" dirty="0"/>
-          </a:p>
-        </p:txBody>
+              <a:t>A patient with severe hypertriglyceridemia has sodium 122 by the main chemistry analyzer but 139 on the blood gas analyzer; serum osmolality is normal.</a:t>
+            </a:r>
+            <a:endParaRPr lang="en-US" sz="1450" dirty="0"/>
+          </a:p>
+        </p:txBody>
+      </p:sp>
+      <p:sp>
+        <p:nvSpPr>
+          <p:cNvPr id="7" name="Shape 5"/>
+          <p:cNvSpPr/>
+          <p:nvPr/>
+        </p:nvSpPr>
+        <p:spPr>
+          <a:xfrm>
+            <a:off x="566928" y="4553712"/>
+            <a:ext cx="11057839" cy="1325880"/>
+          </a:xfrm>
+          <a:prstGeom prst="roundRect">
+            <a:avLst>
+              <a:gd name="adj" fmla="val 6207"/>
+            </a:avLst>
+          </a:prstGeom>
+          <a:solidFill>
+            <a:srgbClr val="0E3A5F"/>
+          </a:solidFill>
+          <a:ln/>
+          <a:effectLst>
+            <a:outerShdw sx="100000" sy="100000" kx="0" ky="0" algn="bl" rotWithShape="0" blurRad="88900" dist="25400" dir="5400000">
+              <a:srgbClr val="22303C">
+                <a:alpha val="12000"/>
+              </a:srgbClr>
+            </a:outerShdw>
+          </a:effectLst>
+        </p:spPr>
       </p:sp>
       <p:sp>
         <p:nvSpPr>
           <p:cNvPr id="8" name="Text 6"/>
+          <p:cNvSpPr/>
+          <p:nvPr/>
+        </p:nvSpPr>
+        <p:spPr>
+          <a:xfrm>
+            <a:off x="822960" y="4681728"/>
+            <a:ext cx="640080" cy="960120"/>
+          </a:xfrm>
+          <a:prstGeom prst="rect">
+            <a:avLst/>
+          </a:prstGeom>
+          <a:noFill/>
+          <a:ln/>
+        </p:spPr>
+        <p:txBody>
+          <a:bodyPr wrap="square" lIns="0" tIns="0" rIns="0" bIns="0" rtlCol="0" anchor="ctr"/>
+          <a:lstStyle/>
+          <a:p>
+            <a:pPr algn="ctr" indent="0" marL="0">
+              <a:buNone/>
+            </a:pPr>
+            <a:r>
+              <a:rPr lang="en-US" sz="4000" b="1" dirty="0">
+                <a:solidFill>
+                  <a:srgbClr val="1565C0"/>
+                </a:solidFill>
+                <a:latin typeface="Calibri" pitchFamily="34" charset="0"/>
+                <a:ea typeface="Calibri" pitchFamily="34" charset="-122"/>
+                <a:cs typeface="Calibri" pitchFamily="34" charset="-120"/>
+              </a:rPr>
+              <a:t>?</a:t>
+            </a:r>
+            <a:endParaRPr lang="en-US" sz="4000" dirty="0"/>
+          </a:p>
+        </p:txBody>
+      </p:sp>
+      <p:sp>
+        <p:nvSpPr>
+          <p:cNvPr id="9" name="Text 7"/>
+          <p:cNvSpPr/>
+          <p:nvPr/>
+        </p:nvSpPr>
+        <p:spPr>
+          <a:xfrm>
+            <a:off x="1618488" y="4553712"/>
+            <a:ext cx="9686239" cy="1325880"/>
+          </a:xfrm>
+          <a:prstGeom prst="rect">
+            <a:avLst/>
+          </a:prstGeom>
+          <a:noFill/>
+          <a:ln/>
+        </p:spPr>
+        <p:txBody>
+          <a:bodyPr wrap="square" lIns="0" tIns="0" rIns="0" bIns="0" rtlCol="0" anchor="ctr"/>
+          <a:lstStyle/>
+          <a:p>
+            <a:pPr algn="l" indent="0" marL="0">
+              <a:buNone/>
+            </a:pPr>
+            <a:r>
+              <a:rPr lang="en-US" sz="1500" b="1" dirty="0">
+                <a:solidFill>
+                  <a:srgbClr val="FFFFFF"/>
+                </a:solidFill>
+                <a:latin typeface="Calibri" pitchFamily="34" charset="0"/>
+                <a:ea typeface="Calibri" pitchFamily="34" charset="-122"/>
+                <a:cs typeface="Calibri" pitchFamily="34" charset="-120"/>
+              </a:rPr>
+              <a:t>Which value is correct, and what is the mechanism?</a:t>
+            </a:r>
+            <a:endParaRPr lang="en-US" sz="1500" dirty="0"/>
+          </a:p>
+        </p:txBody>
+      </p:sp>
+      <p:sp>
+        <p:nvSpPr>
+          <p:cNvPr id="10" name="Text 8"/>
           <p:cNvSpPr/>
           <p:nvPr/>
         </p:nvSpPr>
@@ -6758,7 +8065,7 @@
       </p:sp>
       <p:sp>
         <p:nvSpPr>
-          <p:cNvPr id="9" name="Text 7"/>
+          <p:cNvPr id="11" name="Text 9"/>
           <p:cNvSpPr/>
           <p:nvPr/>
         </p:nvSpPr>
@@ -6888,7 +8195,7 @@
                 <a:ea typeface="Calibri" pitchFamily="34" charset="-122"/>
                 <a:cs typeface="Calibri" pitchFamily="34" charset="-120"/>
               </a:rPr>
-              <a:t>CLINICAL CHEMISTRY   ·   BOARD REVIEW  ·  Q1</a:t>
+              <a:t>CLINICAL CHEMISTRY   ·   CASE 2  ·  RESOLUTION</a:t>
             </a:r>
             <a:endParaRPr lang="en-US" sz="1100" dirty="0"/>
           </a:p>
@@ -6919,7 +8226,7 @@
               <a:buNone/>
             </a:pPr>
             <a:r>
-              <a:rPr lang="en-US" sz="2600" b="1" dirty="0">
+              <a:rPr lang="en-US" sz="3000" b="1" dirty="0">
                 <a:solidFill>
                   <a:srgbClr val="0E3A5F"/>
                 </a:solidFill>
@@ -6927,9 +8234,9 @@
                 <a:ea typeface="Calibri" pitchFamily="34" charset="-122"/>
                 <a:cs typeface="Calibri" pitchFamily="34" charset="-120"/>
               </a:rPr>
-              <a:t>Board-Style Review</a:t>
-            </a:r>
-            <a:endParaRPr lang="en-US" sz="2600" dirty="0"/>
+              <a:t>Case 2: Pseudohyponatremia</a:t>
+            </a:r>
+            <a:endParaRPr lang="en-US" sz="3000" dirty="0"/>
           </a:p>
         </p:txBody>
       </p:sp>
@@ -6941,8 +8248,8 @@
         </p:nvSpPr>
         <p:spPr>
           <a:xfrm>
-            <a:off x="566928" y="1417320"/>
-            <a:ext cx="11057839" cy="914400"/>
+            <a:off x="566928" y="1554480"/>
+            <a:ext cx="6413547" cy="4023360"/>
           </a:xfrm>
           <a:prstGeom prst="rect">
             <a:avLst/>
@@ -6954,14 +8261,15 @@
           <a:bodyPr wrap="square" lIns="0" tIns="0" rIns="0" bIns="0" rtlCol="0" anchor="t"/>
           <a:lstStyle/>
           <a:p>
-            <a:pPr algn="l" indent="0" marL="0">
-              <a:lnSpc>
-                <a:spcPct val="105000"/>
-              </a:lnSpc>
-              <a:buNone/>
-            </a:pPr>
-            <a:r>
-              <a:rPr lang="en-US" sz="1450" b="1" dirty="0">
+            <a:pPr algn="l" marL="177800" indent="-177800">
+              <a:spcAft>
+                <a:spcPts val="900"/>
+              </a:spcAft>
+              <a:buSzPct val="100000"/>
+              <a:buChar char="•"/>
+            </a:pPr>
+            <a:r>
+              <a:rPr lang="en-US" sz="1400" b="1" dirty="0">
                 <a:solidFill>
                   <a:srgbClr val="1B2A38"/>
                 </a:solidFill>
@@ -6969,41 +8277,20 @@
                 <a:ea typeface="Calibri" pitchFamily="34" charset="-122"/>
                 <a:cs typeface="Calibri" pitchFamily="34" charset="-120"/>
               </a:rPr>
-              <a:t>A patient has metabolic acidosis with HCO₃ 12 mmol/L and PaCO₂ 38 mmHg. Using Winter’s formula, what does this indicate?</a:t>
-            </a:r>
-            <a:endParaRPr lang="en-US" sz="1450" dirty="0"/>
-          </a:p>
-        </p:txBody>
-      </p:sp>
-      <p:sp>
-        <p:nvSpPr>
-          <p:cNvPr id="5" name="Text 3"/>
-          <p:cNvSpPr/>
-          <p:nvPr/>
-        </p:nvSpPr>
-        <p:spPr>
-          <a:xfrm>
-            <a:off x="658368" y="2395728"/>
-            <a:ext cx="6192390" cy="3017520"/>
-          </a:xfrm>
-          <a:prstGeom prst="rect">
-            <a:avLst/>
-          </a:prstGeom>
-          <a:noFill/>
-          <a:ln/>
-        </p:spPr>
-        <p:txBody>
-          <a:bodyPr wrap="square" lIns="0" tIns="0" rIns="0" bIns="0" rtlCol="0" anchor="t"/>
-          <a:lstStyle/>
-          <a:p>
-            <a:pPr algn="l" indent="0" marL="0">
+              <a:t>Pseudohyponatremia from lipemia — the indirect ISE on the main analyzer is falsely low.</a:t>
+            </a:r>
+            <a:endParaRPr lang="en-US" sz="1400" dirty="0"/>
+          </a:p>
+          <a:p>
+            <a:pPr algn="l" marL="177800" indent="-177800">
               <a:spcAft>
-                <a:spcPts val="600"/>
+                <a:spcPts val="900"/>
               </a:spcAft>
-              <a:buNone/>
-            </a:pPr>
-            <a:r>
-              <a:rPr lang="en-US" sz="1350" dirty="0">
+              <a:buSzPct val="100000"/>
+              <a:buChar char="•"/>
+            </a:pPr>
+            <a:r>
+              <a:rPr lang="en-US" sz="1400" dirty="0">
                 <a:solidFill>
                   <a:srgbClr val="33444F"/>
                 </a:solidFill>
@@ -7011,39 +8298,41 @@
                 <a:ea typeface="Calibri" pitchFamily="34" charset="-122"/>
                 <a:cs typeface="Calibri" pitchFamily="34" charset="-120"/>
               </a:rPr>
-              <a:t>A. Appropriate respiratory compensation</a:t>
-            </a:r>
-            <a:endParaRPr lang="en-US" sz="1350" dirty="0"/>
-          </a:p>
-          <a:p>
-            <a:pPr algn="l" indent="0" marL="0">
+              <a:t>Indirect ISE dilutes the sample and assumes normal plasma water; excess lipid displaces water.</a:t>
+            </a:r>
+            <a:endParaRPr lang="en-US" sz="1400" dirty="0"/>
+          </a:p>
+          <a:p>
+            <a:pPr algn="l" marL="177800" indent="-177800">
               <a:spcAft>
-                <a:spcPts val="600"/>
+                <a:spcPts val="900"/>
               </a:spcAft>
-              <a:buNone/>
-            </a:pPr>
-            <a:r>
-              <a:rPr lang="en-US" sz="1350" b="1" dirty="0">
-                <a:solidFill>
-                  <a:srgbClr val="0D4A92"/>
-                </a:solidFill>
-                <a:latin typeface="Calibri" pitchFamily="34" charset="0"/>
-                <a:ea typeface="Calibri" pitchFamily="34" charset="-122"/>
-                <a:cs typeface="Calibri" pitchFamily="34" charset="-120"/>
-              </a:rPr>
-              <a:t>B. A concurrent respiratory acidosis (inadequate compensation)</a:t>
-            </a:r>
-            <a:endParaRPr lang="en-US" sz="1350" dirty="0"/>
-          </a:p>
-          <a:p>
-            <a:pPr algn="l" indent="0" marL="0">
+              <a:buSzPct val="100000"/>
+              <a:buChar char="•"/>
+            </a:pPr>
+            <a:r>
+              <a:rPr lang="en-US" sz="1400" dirty="0">
+                <a:solidFill>
+                  <a:srgbClr val="33444F"/>
+                </a:solidFill>
+                <a:latin typeface="Calibri" pitchFamily="34" charset="0"/>
+                <a:ea typeface="Calibri" pitchFamily="34" charset="-122"/>
+                <a:cs typeface="Calibri" pitchFamily="34" charset="-120"/>
+              </a:rPr>
+              <a:t>The blood gas analyzer uses a DIRECT ISE (no dilution) — so 139 is correct.</a:t>
+            </a:r>
+            <a:endParaRPr lang="en-US" sz="1400" dirty="0"/>
+          </a:p>
+          <a:p>
+            <a:pPr algn="l" marL="177800" indent="-177800">
               <a:spcAft>
-                <a:spcPts val="600"/>
+                <a:spcPts val="900"/>
               </a:spcAft>
-              <a:buNone/>
-            </a:pPr>
-            <a:r>
-              <a:rPr lang="en-US" sz="1350" dirty="0">
+              <a:buSzPct val="100000"/>
+              <a:buChar char="•"/>
+            </a:pPr>
+            <a:r>
+              <a:rPr lang="en-US" sz="1400" dirty="0">
                 <a:solidFill>
                   <a:srgbClr val="33444F"/>
                 </a:solidFill>
@@ -7051,66 +8340,26 @@
                 <a:ea typeface="Calibri" pitchFamily="34" charset="-122"/>
                 <a:cs typeface="Calibri" pitchFamily="34" charset="-120"/>
               </a:rPr>
-              <a:t>C. A concurrent respiratory alkalosis</a:t>
-            </a:r>
-            <a:endParaRPr lang="en-US" sz="1350" dirty="0"/>
-          </a:p>
-          <a:p>
-            <a:pPr algn="l" indent="0" marL="0">
-              <a:spcAft>
-                <a:spcPts val="600"/>
-              </a:spcAft>
-              <a:buNone/>
-            </a:pPr>
-            <a:r>
-              <a:rPr lang="en-US" sz="1350" dirty="0">
-                <a:solidFill>
-                  <a:srgbClr val="33444F"/>
-                </a:solidFill>
-                <a:latin typeface="Calibri" pitchFamily="34" charset="0"/>
-                <a:ea typeface="Calibri" pitchFamily="34" charset="-122"/>
-                <a:cs typeface="Calibri" pitchFamily="34" charset="-120"/>
-              </a:rPr>
-              <a:t>D. Metabolic alkalosis</a:t>
-            </a:r>
-            <a:endParaRPr lang="en-US" sz="1350" dirty="0"/>
-          </a:p>
-          <a:p>
-            <a:pPr algn="l" indent="0" marL="0">
-              <a:spcAft>
-                <a:spcPts val="600"/>
-              </a:spcAft>
-              <a:buNone/>
-            </a:pPr>
-            <a:r>
-              <a:rPr lang="en-US" sz="1350" dirty="0">
-                <a:solidFill>
-                  <a:srgbClr val="33444F"/>
-                </a:solidFill>
-                <a:latin typeface="Calibri" pitchFamily="34" charset="0"/>
-                <a:ea typeface="Calibri" pitchFamily="34" charset="-122"/>
-                <a:cs typeface="Calibri" pitchFamily="34" charset="-120"/>
-              </a:rPr>
-              <a:t>E. No acid-base disorder</a:t>
-            </a:r>
-            <a:endParaRPr lang="en-US" sz="1350" dirty="0"/>
-          </a:p>
-        </p:txBody>
-      </p:sp>
-      <p:sp>
-        <p:nvSpPr>
-          <p:cNvPr id="6" name="Shape 4"/>
-          <p:cNvSpPr/>
-          <p:nvPr/>
-        </p:nvSpPr>
-        <p:spPr>
-          <a:xfrm>
-            <a:off x="7201632" y="2395728"/>
-            <a:ext cx="4423136" cy="3246120"/>
+              <a:t>Normal serum osmolality confirms the artifact.</a:t>
+            </a:r>
+            <a:endParaRPr lang="en-US" sz="1400" dirty="0"/>
+          </a:p>
+        </p:txBody>
+      </p:sp>
+      <p:sp>
+        <p:nvSpPr>
+          <p:cNvPr id="5" name="Shape 3"/>
+          <p:cNvSpPr/>
+          <p:nvPr/>
+        </p:nvSpPr>
+        <p:spPr>
+          <a:xfrm>
+            <a:off x="7422788" y="1554480"/>
+            <a:ext cx="4201979" cy="3977640"/>
           </a:xfrm>
           <a:prstGeom prst="roundRect">
             <a:avLst>
-              <a:gd name="adj" fmla="val 2535"/>
+              <a:gd name="adj" fmla="val 2069"/>
             </a:avLst>
           </a:prstGeom>
           <a:solidFill>
@@ -7128,67 +8377,53 @@
       </p:sp>
       <p:sp>
         <p:nvSpPr>
+          <p:cNvPr id="6" name="Text 4"/>
+          <p:cNvSpPr/>
+          <p:nvPr/>
+        </p:nvSpPr>
+        <p:spPr>
+          <a:xfrm>
+            <a:off x="7660532" y="1755648"/>
+            <a:ext cx="3744779" cy="310896"/>
+          </a:xfrm>
+          <a:prstGeom prst="rect">
+            <a:avLst/>
+          </a:prstGeom>
+          <a:noFill/>
+          <a:ln/>
+        </p:spPr>
+        <p:txBody>
+          <a:bodyPr wrap="square" lIns="0" tIns="0" rIns="0" bIns="0" rtlCol="0" anchor="ctr"/>
+          <a:lstStyle/>
+          <a:p>
+            <a:pPr indent="0" marL="0">
+              <a:buNone/>
+            </a:pPr>
+            <a:r>
+              <a:rPr lang="en-US" sz="1100" b="1" spc="140" kern="0" dirty="0">
+                <a:solidFill>
+                  <a:srgbClr val="1565C0"/>
+                </a:solidFill>
+                <a:latin typeface="Calibri" pitchFamily="34" charset="0"/>
+                <a:ea typeface="Calibri" pitchFamily="34" charset="-122"/>
+                <a:cs typeface="Calibri" pitchFamily="34" charset="-120"/>
+              </a:rPr>
+              <a:t>TEACHING POINT</a:t>
+            </a:r>
+            <a:endParaRPr lang="en-US" sz="1100" dirty="0"/>
+          </a:p>
+        </p:txBody>
+      </p:sp>
+      <p:sp>
+        <p:nvSpPr>
           <p:cNvPr id="7" name="Text 5"/>
           <p:cNvSpPr/>
           <p:nvPr/>
         </p:nvSpPr>
         <p:spPr>
           <a:xfrm>
-            <a:off x="7439376" y="2578608"/>
-            <a:ext cx="3965936" cy="457200"/>
-          </a:xfrm>
-          <a:prstGeom prst="rect">
-            <a:avLst/>
-          </a:prstGeom>
-          <a:noFill/>
-          <a:ln/>
-        </p:spPr>
-        <p:txBody>
-          <a:bodyPr wrap="square" lIns="0" tIns="0" rIns="0" bIns="0" rtlCol="0" anchor="ctr"/>
-          <a:lstStyle/>
-          <a:p>
-            <a:pPr indent="0" marL="0">
-              <a:buNone/>
-            </a:pPr>
-            <a:r>
-              <a:rPr lang="en-US" sz="1500" b="1" dirty="0">
-                <a:solidFill>
-                  <a:srgbClr val="1565C0"/>
-                </a:solidFill>
-                <a:latin typeface="Calibri" pitchFamily="34" charset="0"/>
-                <a:ea typeface="Calibri" pitchFamily="34" charset="-122"/>
-                <a:cs typeface="Calibri" pitchFamily="34" charset="-120"/>
-              </a:rPr>
-              <a:t>ANSWER  </a:t>
-            </a:r>
-            <a:pPr indent="0" marL="0">
-              <a:buNone/>
-            </a:pPr>
-            <a:r>
-              <a:rPr lang="en-US" sz="1500" b="1" dirty="0">
-                <a:solidFill>
-                  <a:srgbClr val="1B2A38"/>
-                </a:solidFill>
-                <a:latin typeface="Calibri" pitchFamily="34" charset="0"/>
-                <a:ea typeface="Calibri" pitchFamily="34" charset="-122"/>
-                <a:cs typeface="Calibri" pitchFamily="34" charset="-120"/>
-              </a:rPr>
-              <a:t>B — Concurrent respiratory acidosis</a:t>
-            </a:r>
-            <a:endParaRPr lang="en-US" sz="1500" dirty="0"/>
-          </a:p>
-        </p:txBody>
-      </p:sp>
-      <p:sp>
-        <p:nvSpPr>
-          <p:cNvPr id="8" name="Text 6"/>
-          <p:cNvSpPr/>
-          <p:nvPr/>
-        </p:nvSpPr>
-        <p:spPr>
-          <a:xfrm>
-            <a:off x="7439376" y="3127248"/>
-            <a:ext cx="3947648" cy="2377440"/>
+            <a:off x="7660532" y="2121408"/>
+            <a:ext cx="3726491" cy="3291840"/>
           </a:xfrm>
           <a:prstGeom prst="rect">
             <a:avLst/>
@@ -7202,12 +8437,12 @@
           <a:p>
             <a:pPr algn="l" indent="0" marL="0">
               <a:lnSpc>
-                <a:spcPct val="108000"/>
+                <a:spcPct val="110000"/>
               </a:lnSpc>
               <a:buNone/>
             </a:pPr>
             <a:r>
-              <a:rPr lang="en-US" sz="1250" dirty="0">
+              <a:rPr lang="en-US" sz="1350" dirty="0">
                 <a:solidFill>
                   <a:srgbClr val="33444F"/>
                 </a:solidFill>
@@ -7215,15 +8450,15 @@
                 <a:ea typeface="Calibri" pitchFamily="34" charset="-122"/>
                 <a:cs typeface="Calibri" pitchFamily="34" charset="-120"/>
               </a:rPr>
-              <a:t>Winter’s predicts PaCO₂ = 1.5×12 + 8 ± 2 = 24–28 mmHg. The actual PaCO₂ of 38 is too high — inadequate compensation means a superimposed respiratory acidosis.</a:t>
-            </a:r>
-            <a:endParaRPr lang="en-US" sz="1250" dirty="0"/>
-          </a:p>
-        </p:txBody>
-      </p:sp>
-      <p:sp>
-        <p:nvSpPr>
-          <p:cNvPr id="9" name="Text 7"/>
+              <a:t>Discordant sodium between direct and indirect ISE with lipemia/paraproteinemia = pseudohyponatremia; trust the direct method.</a:t>
+            </a:r>
+            <a:endParaRPr lang="en-US" sz="1350" dirty="0"/>
+          </a:p>
+        </p:txBody>
+      </p:sp>
+      <p:sp>
+        <p:nvSpPr>
+          <p:cNvPr id="8" name="Text 6"/>
           <p:cNvSpPr/>
           <p:nvPr/>
         </p:nvSpPr>
@@ -7262,7 +8497,7 @@
       </p:sp>
       <p:sp>
         <p:nvSpPr>
-          <p:cNvPr id="10" name="Text 8"/>
+          <p:cNvPr id="9" name="Text 7"/>
           <p:cNvSpPr/>
           <p:nvPr/>
         </p:nvSpPr>
@@ -7392,7 +8627,7 @@
                 <a:ea typeface="Calibri" pitchFamily="34" charset="-122"/>
                 <a:cs typeface="Calibri" pitchFamily="34" charset="-120"/>
               </a:rPr>
-              <a:t>CLINICAL CHEMISTRY   ·   BOARD REVIEW  ·  Q2</a:t>
+              <a:t>CLINICAL CHEMISTRY   ·   CASE 3</a:t>
             </a:r>
             <a:endParaRPr lang="en-US" sz="1100" dirty="0"/>
           </a:p>
@@ -7423,7 +8658,7 @@
               <a:buNone/>
             </a:pPr>
             <a:r>
-              <a:rPr lang="en-US" sz="2600" b="1" dirty="0">
+              <a:rPr lang="en-US" sz="3000" b="1" dirty="0">
                 <a:solidFill>
                   <a:srgbClr val="0E3A5F"/>
                 </a:solidFill>
@@ -7431,190 +8666,26 @@
                 <a:ea typeface="Calibri" pitchFamily="34" charset="-122"/>
                 <a:cs typeface="Calibri" pitchFamily="34" charset="-120"/>
               </a:rPr>
-              <a:t>Board-Style Review</a:t>
-            </a:r>
-            <a:endParaRPr lang="en-US" sz="2600" dirty="0"/>
-          </a:p>
-        </p:txBody>
-      </p:sp>
-      <p:sp>
-        <p:nvSpPr>
-          <p:cNvPr id="4" name="Text 2"/>
-          <p:cNvSpPr/>
-          <p:nvPr/>
-        </p:nvSpPr>
-        <p:spPr>
-          <a:xfrm>
-            <a:off x="566928" y="1417320"/>
-            <a:ext cx="11057839" cy="914400"/>
-          </a:xfrm>
-          <a:prstGeom prst="rect">
-            <a:avLst/>
-          </a:prstGeom>
-          <a:noFill/>
-          <a:ln/>
-        </p:spPr>
-        <p:txBody>
-          <a:bodyPr wrap="square" lIns="0" tIns="0" rIns="0" bIns="0" rtlCol="0" anchor="t"/>
-          <a:lstStyle/>
-          <a:p>
-            <a:pPr algn="l" indent="0" marL="0">
-              <a:lnSpc>
-                <a:spcPct val="105000"/>
-              </a:lnSpc>
-              <a:buNone/>
-            </a:pPr>
-            <a:r>
-              <a:rPr lang="en-US" sz="1450" b="1" dirty="0">
-                <a:solidFill>
-                  <a:srgbClr val="1B2A38"/>
-                </a:solidFill>
-                <a:latin typeface="Calibri" pitchFamily="34" charset="0"/>
-                <a:ea typeface="Calibri" pitchFamily="34" charset="-122"/>
-                <a:cs typeface="Calibri" pitchFamily="34" charset="-120"/>
-              </a:rPr>
-              <a:t>Which laboratory finding most specifically suggests a toxic alcohol ingestion early, before significant metabolism?</a:t>
-            </a:r>
-            <a:endParaRPr lang="en-US" sz="1450" dirty="0"/>
-          </a:p>
-        </p:txBody>
-      </p:sp>
-      <p:sp>
-        <p:nvSpPr>
-          <p:cNvPr id="5" name="Text 3"/>
-          <p:cNvSpPr/>
-          <p:nvPr/>
-        </p:nvSpPr>
-        <p:spPr>
-          <a:xfrm>
-            <a:off x="658368" y="2395728"/>
-            <a:ext cx="6192390" cy="3017520"/>
-          </a:xfrm>
-          <a:prstGeom prst="rect">
-            <a:avLst/>
-          </a:prstGeom>
-          <a:noFill/>
-          <a:ln/>
-        </p:spPr>
-        <p:txBody>
-          <a:bodyPr wrap="square" lIns="0" tIns="0" rIns="0" bIns="0" rtlCol="0" anchor="t"/>
-          <a:lstStyle/>
-          <a:p>
-            <a:pPr algn="l" indent="0" marL="0">
-              <a:spcAft>
-                <a:spcPts val="600"/>
-              </a:spcAft>
-              <a:buNone/>
-            </a:pPr>
-            <a:r>
-              <a:rPr lang="en-US" sz="1350" dirty="0">
-                <a:solidFill>
-                  <a:srgbClr val="33444F"/>
-                </a:solidFill>
-                <a:latin typeface="Calibri" pitchFamily="34" charset="0"/>
-                <a:ea typeface="Calibri" pitchFamily="34" charset="-122"/>
-                <a:cs typeface="Calibri" pitchFamily="34" charset="-120"/>
-              </a:rPr>
-              <a:t>A. High anion gap</a:t>
-            </a:r>
-            <a:endParaRPr lang="en-US" sz="1350" dirty="0"/>
-          </a:p>
-          <a:p>
-            <a:pPr algn="l" indent="0" marL="0">
-              <a:spcAft>
-                <a:spcPts val="600"/>
-              </a:spcAft>
-              <a:buNone/>
-            </a:pPr>
-            <a:r>
-              <a:rPr lang="en-US" sz="1350" b="1" dirty="0">
-                <a:solidFill>
-                  <a:srgbClr val="0D4A92"/>
-                </a:solidFill>
-                <a:latin typeface="Calibri" pitchFamily="34" charset="0"/>
-                <a:ea typeface="Calibri" pitchFamily="34" charset="-122"/>
-                <a:cs typeface="Calibri" pitchFamily="34" charset="-120"/>
-              </a:rPr>
-              <a:t>B. Elevated osmolal gap</a:t>
-            </a:r>
-            <a:endParaRPr lang="en-US" sz="1350" dirty="0"/>
-          </a:p>
-          <a:p>
-            <a:pPr algn="l" indent="0" marL="0">
-              <a:spcAft>
-                <a:spcPts val="600"/>
-              </a:spcAft>
-              <a:buNone/>
-            </a:pPr>
-            <a:r>
-              <a:rPr lang="en-US" sz="1350" dirty="0">
-                <a:solidFill>
-                  <a:srgbClr val="33444F"/>
-                </a:solidFill>
-                <a:latin typeface="Calibri" pitchFamily="34" charset="0"/>
-                <a:ea typeface="Calibri" pitchFamily="34" charset="-122"/>
-                <a:cs typeface="Calibri" pitchFamily="34" charset="-120"/>
-              </a:rPr>
-              <a:t>C. Low bicarbonate</a:t>
-            </a:r>
-            <a:endParaRPr lang="en-US" sz="1350" dirty="0"/>
-          </a:p>
-          <a:p>
-            <a:pPr algn="l" indent="0" marL="0">
-              <a:spcAft>
-                <a:spcPts val="600"/>
-              </a:spcAft>
-              <a:buNone/>
-            </a:pPr>
-            <a:r>
-              <a:rPr lang="en-US" sz="1350" dirty="0">
-                <a:solidFill>
-                  <a:srgbClr val="33444F"/>
-                </a:solidFill>
-                <a:latin typeface="Calibri" pitchFamily="34" charset="0"/>
-                <a:ea typeface="Calibri" pitchFamily="34" charset="-122"/>
-                <a:cs typeface="Calibri" pitchFamily="34" charset="-120"/>
-              </a:rPr>
-              <a:t>D. High lactate</a:t>
-            </a:r>
-            <a:endParaRPr lang="en-US" sz="1350" dirty="0"/>
-          </a:p>
-          <a:p>
-            <a:pPr algn="l" indent="0" marL="0">
-              <a:spcAft>
-                <a:spcPts val="600"/>
-              </a:spcAft>
-              <a:buNone/>
-            </a:pPr>
-            <a:r>
-              <a:rPr lang="en-US" sz="1350" dirty="0">
-                <a:solidFill>
-                  <a:srgbClr val="33444F"/>
-                </a:solidFill>
-                <a:latin typeface="Calibri" pitchFamily="34" charset="0"/>
-                <a:ea typeface="Calibri" pitchFamily="34" charset="-122"/>
-                <a:cs typeface="Calibri" pitchFamily="34" charset="-120"/>
-              </a:rPr>
-              <a:t>E. Ketonuria</a:t>
-            </a:r>
-            <a:endParaRPr lang="en-US" sz="1350" dirty="0"/>
-          </a:p>
-        </p:txBody>
-      </p:sp>
-      <p:sp>
-        <p:nvSpPr>
-          <p:cNvPr id="6" name="Shape 4"/>
-          <p:cNvSpPr/>
-          <p:nvPr/>
-        </p:nvSpPr>
-        <p:spPr>
-          <a:xfrm>
-            <a:off x="7201632" y="2395728"/>
-            <a:ext cx="4423136" cy="3246120"/>
+              <a:t>Case 3</a:t>
+            </a:r>
+            <a:endParaRPr lang="en-US" sz="3000" dirty="0"/>
+          </a:p>
+        </p:txBody>
+      </p:sp>
+      <p:sp>
+        <p:nvSpPr>
+          <p:cNvPr id="4" name="Shape 2"/>
+          <p:cNvSpPr/>
+          <p:nvPr/>
+        </p:nvSpPr>
+        <p:spPr>
+          <a:xfrm>
+            <a:off x="566928" y="1517904"/>
+            <a:ext cx="11057839" cy="2788920"/>
           </a:xfrm>
           <a:prstGeom prst="roundRect">
             <a:avLst>
-              <a:gd name="adj" fmla="val 2535"/>
+              <a:gd name="adj" fmla="val 2951"/>
             </a:avLst>
           </a:prstGeom>
           <a:solidFill>
@@ -7632,14 +8703,14 @@
       </p:sp>
       <p:sp>
         <p:nvSpPr>
-          <p:cNvPr id="7" name="Text 5"/>
-          <p:cNvSpPr/>
-          <p:nvPr/>
-        </p:nvSpPr>
-        <p:spPr>
-          <a:xfrm>
-            <a:off x="7439376" y="2578608"/>
-            <a:ext cx="3965936" cy="457200"/>
+          <p:cNvPr id="5" name="Text 3"/>
+          <p:cNvSpPr/>
+          <p:nvPr/>
+        </p:nvSpPr>
+        <p:spPr>
+          <a:xfrm>
+            <a:off x="841248" y="1700784"/>
+            <a:ext cx="5486400" cy="292608"/>
           </a:xfrm>
           <a:prstGeom prst="rect">
             <a:avLst/>
@@ -7655,7 +8726,7 @@
               <a:buNone/>
             </a:pPr>
             <a:r>
-              <a:rPr lang="en-US" sz="1500" b="1" dirty="0">
+              <a:rPr lang="en-US" sz="1100" b="1" spc="150" kern="0" dirty="0">
                 <a:solidFill>
                   <a:srgbClr val="1565C0"/>
                 </a:solidFill>
@@ -7663,36 +8734,22 @@
                 <a:ea typeface="Calibri" pitchFamily="34" charset="-122"/>
                 <a:cs typeface="Calibri" pitchFamily="34" charset="-120"/>
               </a:rPr>
-              <a:t>ANSWER  </a:t>
-            </a:r>
-            <a:pPr indent="0" marL="0">
-              <a:buNone/>
-            </a:pPr>
-            <a:r>
-              <a:rPr lang="en-US" sz="1500" b="1" dirty="0">
-                <a:solidFill>
-                  <a:srgbClr val="1B2A38"/>
-                </a:solidFill>
-                <a:latin typeface="Calibri" pitchFamily="34" charset="0"/>
-                <a:ea typeface="Calibri" pitchFamily="34" charset="-122"/>
-                <a:cs typeface="Calibri" pitchFamily="34" charset="-120"/>
-              </a:rPr>
-              <a:t>B — Elevated osmolal gap</a:t>
-            </a:r>
-            <a:endParaRPr lang="en-US" sz="1500" dirty="0"/>
-          </a:p>
-        </p:txBody>
-      </p:sp>
-      <p:sp>
-        <p:nvSpPr>
-          <p:cNvPr id="8" name="Text 6"/>
-          <p:cNvSpPr/>
-          <p:nvPr/>
-        </p:nvSpPr>
-        <p:spPr>
-          <a:xfrm>
-            <a:off x="7439376" y="3127248"/>
-            <a:ext cx="3947648" cy="2377440"/>
+              <a:t>CLINICAL VIGNETTE</a:t>
+            </a:r>
+            <a:endParaRPr lang="en-US" sz="1100" dirty="0"/>
+          </a:p>
+        </p:txBody>
+      </p:sp>
+      <p:sp>
+        <p:nvSpPr>
+          <p:cNvPr id="6" name="Text 4"/>
+          <p:cNvSpPr/>
+          <p:nvPr/>
+        </p:nvSpPr>
+        <p:spPr>
+          <a:xfrm>
+            <a:off x="841248" y="2029968"/>
+            <a:ext cx="10509199" cy="2148840"/>
           </a:xfrm>
           <a:prstGeom prst="rect">
             <a:avLst/>
@@ -7711,7 +8768,7 @@
               <a:buNone/>
             </a:pPr>
             <a:r>
-              <a:rPr lang="en-US" sz="1250" dirty="0">
+              <a:rPr lang="en-US" sz="1450" dirty="0">
                 <a:solidFill>
                   <a:srgbClr val="33444F"/>
                 </a:solidFill>
@@ -7719,15 +8776,122 @@
                 <a:ea typeface="Calibri" pitchFamily="34" charset="-122"/>
                 <a:cs typeface="Calibri" pitchFamily="34" charset="-120"/>
               </a:rPr>
-              <a:t>The parent alcohol is osmotically active, raising the osmolal gap early; the anion gap rises later as it is metabolized to acids.</a:t>
-            </a:r>
-            <a:endParaRPr lang="en-US" sz="1250" dirty="0"/>
+              <a:t>A patient with chronic diarrhea has a normal anion gap metabolic acidosis with hypokalemia. Urine pH is appropriately low.</a:t>
+            </a:r>
+            <a:endParaRPr lang="en-US" sz="1450" dirty="0"/>
+          </a:p>
+        </p:txBody>
+      </p:sp>
+      <p:sp>
+        <p:nvSpPr>
+          <p:cNvPr id="7" name="Shape 5"/>
+          <p:cNvSpPr/>
+          <p:nvPr/>
+        </p:nvSpPr>
+        <p:spPr>
+          <a:xfrm>
+            <a:off x="566928" y="4553712"/>
+            <a:ext cx="11057839" cy="1325880"/>
+          </a:xfrm>
+          <a:prstGeom prst="roundRect">
+            <a:avLst>
+              <a:gd name="adj" fmla="val 6207"/>
+            </a:avLst>
+          </a:prstGeom>
+          <a:solidFill>
+            <a:srgbClr val="0E3A5F"/>
+          </a:solidFill>
+          <a:ln/>
+          <a:effectLst>
+            <a:outerShdw sx="100000" sy="100000" kx="0" ky="0" algn="bl" rotWithShape="0" blurRad="88900" dist="25400" dir="5400000">
+              <a:srgbClr val="22303C">
+                <a:alpha val="12000"/>
+              </a:srgbClr>
+            </a:outerShdw>
+          </a:effectLst>
+        </p:spPr>
+      </p:sp>
+      <p:sp>
+        <p:nvSpPr>
+          <p:cNvPr id="8" name="Text 6"/>
+          <p:cNvSpPr/>
+          <p:nvPr/>
+        </p:nvSpPr>
+        <p:spPr>
+          <a:xfrm>
+            <a:off x="822960" y="4681728"/>
+            <a:ext cx="640080" cy="960120"/>
+          </a:xfrm>
+          <a:prstGeom prst="rect">
+            <a:avLst/>
+          </a:prstGeom>
+          <a:noFill/>
+          <a:ln/>
+        </p:spPr>
+        <p:txBody>
+          <a:bodyPr wrap="square" lIns="0" tIns="0" rIns="0" bIns="0" rtlCol="0" anchor="ctr"/>
+          <a:lstStyle/>
+          <a:p>
+            <a:pPr algn="ctr" indent="0" marL="0">
+              <a:buNone/>
+            </a:pPr>
+            <a:r>
+              <a:rPr lang="en-US" sz="4000" b="1" dirty="0">
+                <a:solidFill>
+                  <a:srgbClr val="1565C0"/>
+                </a:solidFill>
+                <a:latin typeface="Calibri" pitchFamily="34" charset="0"/>
+                <a:ea typeface="Calibri" pitchFamily="34" charset="-122"/>
+                <a:cs typeface="Calibri" pitchFamily="34" charset="-120"/>
+              </a:rPr>
+              <a:t>?</a:t>
+            </a:r>
+            <a:endParaRPr lang="en-US" sz="4000" dirty="0"/>
           </a:p>
         </p:txBody>
       </p:sp>
       <p:sp>
         <p:nvSpPr>
           <p:cNvPr id="9" name="Text 7"/>
+          <p:cNvSpPr/>
+          <p:nvPr/>
+        </p:nvSpPr>
+        <p:spPr>
+          <a:xfrm>
+            <a:off x="1618488" y="4553712"/>
+            <a:ext cx="9686239" cy="1325880"/>
+          </a:xfrm>
+          <a:prstGeom prst="rect">
+            <a:avLst/>
+          </a:prstGeom>
+          <a:noFill/>
+          <a:ln/>
+        </p:spPr>
+        <p:txBody>
+          <a:bodyPr wrap="square" lIns="0" tIns="0" rIns="0" bIns="0" rtlCol="0" anchor="ctr"/>
+          <a:lstStyle/>
+          <a:p>
+            <a:pPr algn="l" indent="0" marL="0">
+              <a:buNone/>
+            </a:pPr>
+            <a:r>
+              <a:rPr lang="en-US" sz="1500" b="1" dirty="0">
+                <a:solidFill>
+                  <a:srgbClr val="FFFFFF"/>
+                </a:solidFill>
+                <a:latin typeface="Calibri" pitchFamily="34" charset="0"/>
+                <a:ea typeface="Calibri" pitchFamily="34" charset="-122"/>
+                <a:cs typeface="Calibri" pitchFamily="34" charset="-120"/>
+              </a:rPr>
+              <a:t>What is the acid-base disturbance and the most likely cause?</a:t>
+            </a:r>
+            <a:endParaRPr lang="en-US" sz="1500" dirty="0"/>
+          </a:p>
+        </p:txBody>
+      </p:sp>
+      <p:sp>
+        <p:nvSpPr>
+          <p:cNvPr id="10" name="Text 8"/>
           <p:cNvSpPr/>
           <p:nvPr/>
         </p:nvSpPr>
@@ -7766,7 +8930,7 @@
       </p:sp>
       <p:sp>
         <p:nvSpPr>
-          <p:cNvPr id="10" name="Text 8"/>
+          <p:cNvPr id="11" name="Text 9"/>
           <p:cNvSpPr/>
           <p:nvPr/>
         </p:nvSpPr>
@@ -7896,7 +9060,7 @@
                 <a:ea typeface="Calibri" pitchFamily="34" charset="-122"/>
                 <a:cs typeface="Calibri" pitchFamily="34" charset="-120"/>
               </a:rPr>
-              <a:t>CLINICAL CHEMISTRY   ·   BOARD REVIEW  ·  Q3</a:t>
+              <a:t>CLINICAL CHEMISTRY   ·   CASE 3  ·  RESOLUTION</a:t>
             </a:r>
             <a:endParaRPr lang="en-US" sz="1100" dirty="0"/>
           </a:p>
@@ -7927,7 +9091,7 @@
               <a:buNone/>
             </a:pPr>
             <a:r>
-              <a:rPr lang="en-US" sz="2600" b="1" dirty="0">
+              <a:rPr lang="en-US" sz="3000" b="1" dirty="0">
                 <a:solidFill>
                   <a:srgbClr val="0E3A5F"/>
                 </a:solidFill>
@@ -7935,9 +9099,9 @@
                 <a:ea typeface="Calibri" pitchFamily="34" charset="-122"/>
                 <a:cs typeface="Calibri" pitchFamily="34" charset="-120"/>
               </a:rPr>
-              <a:t>Board-Style Review</a:t>
-            </a:r>
-            <a:endParaRPr lang="en-US" sz="2600" dirty="0"/>
+              <a:t>Case 3: Normal-Gap Acidosis from GI Loss</a:t>
+            </a:r>
+            <a:endParaRPr lang="en-US" sz="3000" dirty="0"/>
           </a:p>
         </p:txBody>
       </p:sp>
@@ -7949,8 +9113,8 @@
         </p:nvSpPr>
         <p:spPr>
           <a:xfrm>
-            <a:off x="566928" y="1417320"/>
-            <a:ext cx="11057839" cy="914400"/>
+            <a:off x="566928" y="1554480"/>
+            <a:ext cx="6413547" cy="4023360"/>
           </a:xfrm>
           <a:prstGeom prst="rect">
             <a:avLst/>
@@ -7962,14 +9126,15 @@
           <a:bodyPr wrap="square" lIns="0" tIns="0" rIns="0" bIns="0" rtlCol="0" anchor="t"/>
           <a:lstStyle/>
           <a:p>
-            <a:pPr algn="l" indent="0" marL="0">
-              <a:lnSpc>
-                <a:spcPct val="105000"/>
-              </a:lnSpc>
-              <a:buNone/>
-            </a:pPr>
-            <a:r>
-              <a:rPr lang="en-US" sz="1450" b="1" dirty="0">
+            <a:pPr algn="l" marL="177800" indent="-177800">
+              <a:spcAft>
+                <a:spcPts val="900"/>
+              </a:spcAft>
+              <a:buSzPct val="100000"/>
+              <a:buChar char="•"/>
+            </a:pPr>
+            <a:r>
+              <a:rPr lang="en-US" sz="1400" b="1" dirty="0">
                 <a:solidFill>
                   <a:srgbClr val="1B2A38"/>
                 </a:solidFill>
@@ -7977,41 +9142,20 @@
                 <a:ea typeface="Calibri" pitchFamily="34" charset="-122"/>
                 <a:cs typeface="Calibri" pitchFamily="34" charset="-120"/>
               </a:rPr>
-              <a:t>A normal anion gap (hyperchloremic) metabolic acidosis is most consistent with:</a:t>
-            </a:r>
-            <a:endParaRPr lang="en-US" sz="1450" dirty="0"/>
-          </a:p>
-        </p:txBody>
-      </p:sp>
-      <p:sp>
-        <p:nvSpPr>
-          <p:cNvPr id="5" name="Text 3"/>
-          <p:cNvSpPr/>
-          <p:nvPr/>
-        </p:nvSpPr>
-        <p:spPr>
-          <a:xfrm>
-            <a:off x="658368" y="2395728"/>
-            <a:ext cx="6192390" cy="3017520"/>
-          </a:xfrm>
-          <a:prstGeom prst="rect">
-            <a:avLst/>
-          </a:prstGeom>
-          <a:noFill/>
-          <a:ln/>
-        </p:spPr>
-        <p:txBody>
-          <a:bodyPr wrap="square" lIns="0" tIns="0" rIns="0" bIns="0" rtlCol="0" anchor="t"/>
-          <a:lstStyle/>
-          <a:p>
-            <a:pPr algn="l" indent="0" marL="0">
+              <a:t>Hyperchloremic (normal-gap) metabolic acidosis from GI bicarbonate loss (diarrhea).</a:t>
+            </a:r>
+            <a:endParaRPr lang="en-US" sz="1400" dirty="0"/>
+          </a:p>
+          <a:p>
+            <a:pPr algn="l" marL="177800" indent="-177800">
               <a:spcAft>
-                <a:spcPts val="600"/>
+                <a:spcPts val="900"/>
               </a:spcAft>
-              <a:buNone/>
-            </a:pPr>
-            <a:r>
-              <a:rPr lang="en-US" sz="1350" dirty="0">
+              <a:buSzPct val="100000"/>
+              <a:buChar char="•"/>
+            </a:pPr>
+            <a:r>
+              <a:rPr lang="en-US" sz="1400" dirty="0">
                 <a:solidFill>
                   <a:srgbClr val="33444F"/>
                 </a:solidFill>
@@ -8019,19 +9163,20 @@
                 <a:ea typeface="Calibri" pitchFamily="34" charset="-122"/>
                 <a:cs typeface="Calibri" pitchFamily="34" charset="-120"/>
               </a:rPr>
-              <a:t>A. Diabetic ketoacidosis</a:t>
-            </a:r>
-            <a:endParaRPr lang="en-US" sz="1350" dirty="0"/>
-          </a:p>
-          <a:p>
-            <a:pPr algn="l" indent="0" marL="0">
+              <a:t>The kidney responds appropriately (low urine pH), arguing against distal RTA.</a:t>
+            </a:r>
+            <a:endParaRPr lang="en-US" sz="1400" dirty="0"/>
+          </a:p>
+          <a:p>
+            <a:pPr algn="l" marL="177800" indent="-177800">
               <a:spcAft>
-                <a:spcPts val="600"/>
+                <a:spcPts val="900"/>
               </a:spcAft>
-              <a:buNone/>
-            </a:pPr>
-            <a:r>
-              <a:rPr lang="en-US" sz="1350" dirty="0">
+              <a:buSzPct val="100000"/>
+              <a:buChar char="•"/>
+            </a:pPr>
+            <a:r>
+              <a:rPr lang="en-US" sz="1400" dirty="0">
                 <a:solidFill>
                   <a:srgbClr val="33444F"/>
                 </a:solidFill>
@@ -8039,39 +9184,20 @@
                 <a:ea typeface="Calibri" pitchFamily="34" charset="-122"/>
                 <a:cs typeface="Calibri" pitchFamily="34" charset="-120"/>
               </a:rPr>
-              <a:t>B. Lactic acidosis</a:t>
-            </a:r>
-            <a:endParaRPr lang="en-US" sz="1350" dirty="0"/>
-          </a:p>
-          <a:p>
-            <a:pPr algn="l" indent="0" marL="0">
+              <a:t>Hypokalemia accompanies GI losses.</a:t>
+            </a:r>
+            <a:endParaRPr lang="en-US" sz="1400" dirty="0"/>
+          </a:p>
+          <a:p>
+            <a:pPr algn="l" marL="177800" indent="-177800">
               <a:spcAft>
-                <a:spcPts val="600"/>
+                <a:spcPts val="900"/>
               </a:spcAft>
-              <a:buNone/>
-            </a:pPr>
-            <a:r>
-              <a:rPr lang="en-US" sz="1350" b="1" dirty="0">
-                <a:solidFill>
-                  <a:srgbClr val="0D4A92"/>
-                </a:solidFill>
-                <a:latin typeface="Calibri" pitchFamily="34" charset="0"/>
-                <a:ea typeface="Calibri" pitchFamily="34" charset="-122"/>
-                <a:cs typeface="Calibri" pitchFamily="34" charset="-120"/>
-              </a:rPr>
-              <a:t>C. Severe diarrhea or renal tubular acidosis</a:t>
-            </a:r>
-            <a:endParaRPr lang="en-US" sz="1350" dirty="0"/>
-          </a:p>
-          <a:p>
-            <a:pPr algn="l" indent="0" marL="0">
-              <a:spcAft>
-                <a:spcPts val="600"/>
-              </a:spcAft>
-              <a:buNone/>
-            </a:pPr>
-            <a:r>
-              <a:rPr lang="en-US" sz="1350" dirty="0">
+              <a:buSzPct val="100000"/>
+              <a:buChar char="•"/>
+            </a:pPr>
+            <a:r>
+              <a:rPr lang="en-US" sz="1400" dirty="0">
                 <a:solidFill>
                   <a:srgbClr val="33444F"/>
                 </a:solidFill>
@@ -8079,46 +9205,26 @@
                 <a:ea typeface="Calibri" pitchFamily="34" charset="-122"/>
                 <a:cs typeface="Calibri" pitchFamily="34" charset="-120"/>
               </a:rPr>
-              <a:t>D. Methanol ingestion</a:t>
-            </a:r>
-            <a:endParaRPr lang="en-US" sz="1350" dirty="0"/>
-          </a:p>
-          <a:p>
-            <a:pPr algn="l" indent="0" marL="0">
-              <a:spcAft>
-                <a:spcPts val="600"/>
-              </a:spcAft>
-              <a:buNone/>
-            </a:pPr>
-            <a:r>
-              <a:rPr lang="en-US" sz="1350" dirty="0">
-                <a:solidFill>
-                  <a:srgbClr val="33444F"/>
-                </a:solidFill>
-                <a:latin typeface="Calibri" pitchFamily="34" charset="0"/>
-                <a:ea typeface="Calibri" pitchFamily="34" charset="-122"/>
-                <a:cs typeface="Calibri" pitchFamily="34" charset="-120"/>
-              </a:rPr>
-              <a:t>E. Salicylate toxicity</a:t>
-            </a:r>
-            <a:endParaRPr lang="en-US" sz="1350" dirty="0"/>
-          </a:p>
-        </p:txBody>
-      </p:sp>
-      <p:sp>
-        <p:nvSpPr>
-          <p:cNvPr id="6" name="Shape 4"/>
-          <p:cNvSpPr/>
-          <p:nvPr/>
-        </p:nvSpPr>
-        <p:spPr>
-          <a:xfrm>
-            <a:off x="7201632" y="2395728"/>
-            <a:ext cx="4423136" cy="3246120"/>
+              <a:t>Contrast with distal (type 1) RTA, where urine pH stays inappropriately high.</a:t>
+            </a:r>
+            <a:endParaRPr lang="en-US" sz="1400" dirty="0"/>
+          </a:p>
+        </p:txBody>
+      </p:sp>
+      <p:sp>
+        <p:nvSpPr>
+          <p:cNvPr id="5" name="Shape 3"/>
+          <p:cNvSpPr/>
+          <p:nvPr/>
+        </p:nvSpPr>
+        <p:spPr>
+          <a:xfrm>
+            <a:off x="7422788" y="1554480"/>
+            <a:ext cx="4201979" cy="3977640"/>
           </a:xfrm>
           <a:prstGeom prst="roundRect">
             <a:avLst>
-              <a:gd name="adj" fmla="val 2535"/>
+              <a:gd name="adj" fmla="val 2069"/>
             </a:avLst>
           </a:prstGeom>
           <a:solidFill>
@@ -8136,67 +9242,53 @@
       </p:sp>
       <p:sp>
         <p:nvSpPr>
+          <p:cNvPr id="6" name="Text 4"/>
+          <p:cNvSpPr/>
+          <p:nvPr/>
+        </p:nvSpPr>
+        <p:spPr>
+          <a:xfrm>
+            <a:off x="7660532" y="1755648"/>
+            <a:ext cx="3744779" cy="310896"/>
+          </a:xfrm>
+          <a:prstGeom prst="rect">
+            <a:avLst/>
+          </a:prstGeom>
+          <a:noFill/>
+          <a:ln/>
+        </p:spPr>
+        <p:txBody>
+          <a:bodyPr wrap="square" lIns="0" tIns="0" rIns="0" bIns="0" rtlCol="0" anchor="ctr"/>
+          <a:lstStyle/>
+          <a:p>
+            <a:pPr indent="0" marL="0">
+              <a:buNone/>
+            </a:pPr>
+            <a:r>
+              <a:rPr lang="en-US" sz="1100" b="1" spc="140" kern="0" dirty="0">
+                <a:solidFill>
+                  <a:srgbClr val="1565C0"/>
+                </a:solidFill>
+                <a:latin typeface="Calibri" pitchFamily="34" charset="0"/>
+                <a:ea typeface="Calibri" pitchFamily="34" charset="-122"/>
+                <a:cs typeface="Calibri" pitchFamily="34" charset="-120"/>
+              </a:rPr>
+              <a:t>TEACHING POINT</a:t>
+            </a:r>
+            <a:endParaRPr lang="en-US" sz="1100" dirty="0"/>
+          </a:p>
+        </p:txBody>
+      </p:sp>
+      <p:sp>
+        <p:nvSpPr>
           <p:cNvPr id="7" name="Text 5"/>
           <p:cNvSpPr/>
           <p:nvPr/>
         </p:nvSpPr>
         <p:spPr>
           <a:xfrm>
-            <a:off x="7439376" y="2578608"/>
-            <a:ext cx="3965936" cy="457200"/>
-          </a:xfrm>
-          <a:prstGeom prst="rect">
-            <a:avLst/>
-          </a:prstGeom>
-          <a:noFill/>
-          <a:ln/>
-        </p:spPr>
-        <p:txBody>
-          <a:bodyPr wrap="square" lIns="0" tIns="0" rIns="0" bIns="0" rtlCol="0" anchor="ctr"/>
-          <a:lstStyle/>
-          <a:p>
-            <a:pPr indent="0" marL="0">
-              <a:buNone/>
-            </a:pPr>
-            <a:r>
-              <a:rPr lang="en-US" sz="1500" b="1" dirty="0">
-                <a:solidFill>
-                  <a:srgbClr val="1565C0"/>
-                </a:solidFill>
-                <a:latin typeface="Calibri" pitchFamily="34" charset="0"/>
-                <a:ea typeface="Calibri" pitchFamily="34" charset="-122"/>
-                <a:cs typeface="Calibri" pitchFamily="34" charset="-120"/>
-              </a:rPr>
-              <a:t>ANSWER  </a:t>
-            </a:r>
-            <a:pPr indent="0" marL="0">
-              <a:buNone/>
-            </a:pPr>
-            <a:r>
-              <a:rPr lang="en-US" sz="1500" b="1" dirty="0">
-                <a:solidFill>
-                  <a:srgbClr val="1B2A38"/>
-                </a:solidFill>
-                <a:latin typeface="Calibri" pitchFamily="34" charset="0"/>
-                <a:ea typeface="Calibri" pitchFamily="34" charset="-122"/>
-                <a:cs typeface="Calibri" pitchFamily="34" charset="-120"/>
-              </a:rPr>
-              <a:t>C — Diarrhea or RTA</a:t>
-            </a:r>
-            <a:endParaRPr lang="en-US" sz="1500" dirty="0"/>
-          </a:p>
-        </p:txBody>
-      </p:sp>
-      <p:sp>
-        <p:nvSpPr>
-          <p:cNvPr id="8" name="Text 6"/>
-          <p:cNvSpPr/>
-          <p:nvPr/>
-        </p:nvSpPr>
-        <p:spPr>
-          <a:xfrm>
-            <a:off x="7439376" y="3127248"/>
-            <a:ext cx="3947648" cy="2377440"/>
+            <a:off x="7660532" y="2121408"/>
+            <a:ext cx="3726491" cy="3291840"/>
           </a:xfrm>
           <a:prstGeom prst="rect">
             <a:avLst/>
@@ -8210,12 +9302,12 @@
           <a:p>
             <a:pPr algn="l" indent="0" marL="0">
               <a:lnSpc>
-                <a:spcPct val="108000"/>
+                <a:spcPct val="110000"/>
               </a:lnSpc>
               <a:buNone/>
             </a:pPr>
             <a:r>
-              <a:rPr lang="en-US" sz="1250" dirty="0">
+              <a:rPr lang="en-US" sz="1350" dirty="0">
                 <a:solidFill>
                   <a:srgbClr val="33444F"/>
                 </a:solidFill>
@@ -8223,15 +9315,15 @@
                 <a:ea typeface="Calibri" pitchFamily="34" charset="-122"/>
                 <a:cs typeface="Calibri" pitchFamily="34" charset="-120"/>
               </a:rPr>
-              <a:t>Bicarbonate loss (GI or renal) is replaced by chloride, producing a normal-gap acidosis. The others are high-gap acidoses.</a:t>
-            </a:r>
-            <a:endParaRPr lang="en-US" sz="1250" dirty="0"/>
-          </a:p>
-        </p:txBody>
-      </p:sp>
-      <p:sp>
-        <p:nvSpPr>
-          <p:cNvPr id="9" name="Text 7"/>
+              <a:t>Normal-gap acidosis: diarrhea vs RTA. Urine pH and the urine anion gap separate GI loss from renal causes.</a:t>
+            </a:r>
+            <a:endParaRPr lang="en-US" sz="1350" dirty="0"/>
+          </a:p>
+        </p:txBody>
+      </p:sp>
+      <p:sp>
+        <p:nvSpPr>
+          <p:cNvPr id="8" name="Text 6"/>
           <p:cNvSpPr/>
           <p:nvPr/>
         </p:nvSpPr>
@@ -8270,7 +9362,7 @@
       </p:sp>
       <p:sp>
         <p:nvSpPr>
-          <p:cNvPr id="10" name="Text 8"/>
+          <p:cNvPr id="9" name="Text 7"/>
           <p:cNvSpPr/>
           <p:nvPr/>
         </p:nvSpPr>
@@ -8831,7 +9923,7 @@
                 <a:ea typeface="Calibri" pitchFamily="34" charset="-122"/>
                 <a:cs typeface="Calibri" pitchFamily="34" charset="-120"/>
               </a:rPr>
-              <a:t>Electrolyte and acid-base interpretation is pure pattern recognition once you have a system. The laboratory adds the gaps — anion and osmolal — that turn a number panel into a diagnosis.</a:t>
+              <a:t>Electrolyte and acid-base interpretation is pattern recognition once you have a system. The laboratory adds the gaps — anion and osmolal — that turn a number panel into a diagnosis.</a:t>
             </a:r>
             <a:endParaRPr lang="en-US" sz="1450" dirty="0"/>
           </a:p>
@@ -9000,7 +10092,7 @@
     <p:bg>
       <p:bgPr>
         <a:solidFill>
-          <a:srgbClr val="0A2A45"/>
+          <a:srgbClr val="FFFFFF"/>
         </a:solidFill>
       </p:bgPr>
     </p:bg>
@@ -9027,7 +10119,7 @@
         <p:spPr>
           <a:xfrm>
             <a:off x="566928" y="329184"/>
-            <a:ext cx="10058400" cy="310896"/>
+            <a:ext cx="10515600" cy="310896"/>
           </a:xfrm>
           <a:prstGeom prst="rect">
             <a:avLst/>
@@ -9039,7 +10131,7 @@
           <a:bodyPr wrap="square" lIns="0" tIns="0" rIns="0" bIns="0" rtlCol="0" anchor="ctr"/>
           <a:lstStyle/>
           <a:p>
-            <a:pPr indent="0" marL="0">
+            <a:pPr algn="l" indent="0" marL="0">
               <a:buNone/>
             </a:pPr>
             <a:r>
@@ -9051,7 +10143,7 @@
                 <a:ea typeface="Calibri" pitchFamily="34" charset="-122"/>
                 <a:cs typeface="Calibri" pitchFamily="34" charset="-120"/>
               </a:rPr>
-              <a:t>CLINICAL CHEMISTRY</a:t>
+              <a:t>CLINICAL CHEMISTRY   ·   BOARD REVIEW  ·  Q1</a:t>
             </a:r>
             <a:endParaRPr lang="en-US" sz="1100" dirty="0"/>
           </a:p>
@@ -9065,8 +10157,8 @@
         </p:nvSpPr>
         <p:spPr>
           <a:xfrm>
-            <a:off x="566928" y="676656"/>
-            <a:ext cx="10972800" cy="749808"/>
+            <a:off x="566928" y="713232"/>
+            <a:ext cx="11064240" cy="749808"/>
           </a:xfrm>
           <a:prstGeom prst="rect">
             <a:avLst/>
@@ -9078,62 +10170,206 @@
           <a:bodyPr wrap="square" lIns="0" tIns="0" rIns="0" bIns="0" rtlCol="0" anchor="ctr"/>
           <a:lstStyle/>
           <a:p>
-            <a:pPr indent="0" marL="0">
-              <a:buNone/>
-            </a:pPr>
-            <a:r>
-              <a:rPr lang="en-US" sz="3000" b="1" dirty="0">
-                <a:solidFill>
-                  <a:srgbClr val="FFFFFF"/>
-                </a:solidFill>
-                <a:latin typeface="Calibri" pitchFamily="34" charset="0"/>
-                <a:ea typeface="Calibri" pitchFamily="34" charset="-122"/>
-                <a:cs typeface="Calibri" pitchFamily="34" charset="-120"/>
-              </a:rPr>
-              <a:t>Key Take-Home Points</a:t>
-            </a:r>
-            <a:endParaRPr lang="en-US" sz="3000" dirty="0"/>
-          </a:p>
-        </p:txBody>
-      </p:sp>
-      <p:sp>
-        <p:nvSpPr>
-          <p:cNvPr id="4" name="Shape 2"/>
-          <p:cNvSpPr/>
-          <p:nvPr/>
-        </p:nvSpPr>
-        <p:spPr>
-          <a:xfrm>
-            <a:off x="566928" y="1517904"/>
-            <a:ext cx="11057839" cy="841248"/>
+            <a:pPr algn="l" indent="0" marL="0">
+              <a:buNone/>
+            </a:pPr>
+            <a:r>
+              <a:rPr lang="en-US" sz="2600" b="1" dirty="0">
+                <a:solidFill>
+                  <a:srgbClr val="0E3A5F"/>
+                </a:solidFill>
+                <a:latin typeface="Calibri" pitchFamily="34" charset="0"/>
+                <a:ea typeface="Calibri" pitchFamily="34" charset="-122"/>
+                <a:cs typeface="Calibri" pitchFamily="34" charset="-120"/>
+              </a:rPr>
+              <a:t>Board-Style Review</a:t>
+            </a:r>
+            <a:endParaRPr lang="en-US" sz="2600" dirty="0"/>
+          </a:p>
+        </p:txBody>
+      </p:sp>
+      <p:sp>
+        <p:nvSpPr>
+          <p:cNvPr id="4" name="Text 2"/>
+          <p:cNvSpPr/>
+          <p:nvPr/>
+        </p:nvSpPr>
+        <p:spPr>
+          <a:xfrm>
+            <a:off x="566928" y="1417320"/>
+            <a:ext cx="11057839" cy="914400"/>
+          </a:xfrm>
+          <a:prstGeom prst="rect">
+            <a:avLst/>
+          </a:prstGeom>
+          <a:noFill/>
+          <a:ln/>
+        </p:spPr>
+        <p:txBody>
+          <a:bodyPr wrap="square" lIns="0" tIns="0" rIns="0" bIns="0" rtlCol="0" anchor="t"/>
+          <a:lstStyle/>
+          <a:p>
+            <a:pPr algn="l" indent="0" marL="0">
+              <a:lnSpc>
+                <a:spcPct val="105000"/>
+              </a:lnSpc>
+              <a:buNone/>
+            </a:pPr>
+            <a:r>
+              <a:rPr lang="en-US" sz="1450" b="1" dirty="0">
+                <a:solidFill>
+                  <a:srgbClr val="1B2A38"/>
+                </a:solidFill>
+                <a:latin typeface="Calibri" pitchFamily="34" charset="0"/>
+                <a:ea typeface="Calibri" pitchFamily="34" charset="-122"/>
+                <a:cs typeface="Calibri" pitchFamily="34" charset="-120"/>
+              </a:rPr>
+              <a:t>Metabolic acidosis with HCO₃ 12 and PaCO₂ 38 (Winter’s predicts 24–28). This indicates:</a:t>
+            </a:r>
+            <a:endParaRPr lang="en-US" sz="1450" dirty="0"/>
+          </a:p>
+        </p:txBody>
+      </p:sp>
+      <p:sp>
+        <p:nvSpPr>
+          <p:cNvPr id="5" name="Text 3"/>
+          <p:cNvSpPr/>
+          <p:nvPr/>
+        </p:nvSpPr>
+        <p:spPr>
+          <a:xfrm>
+            <a:off x="658368" y="2395728"/>
+            <a:ext cx="6192390" cy="3017520"/>
+          </a:xfrm>
+          <a:prstGeom prst="rect">
+            <a:avLst/>
+          </a:prstGeom>
+          <a:noFill/>
+          <a:ln/>
+        </p:spPr>
+        <p:txBody>
+          <a:bodyPr wrap="square" lIns="0" tIns="0" rIns="0" bIns="0" rtlCol="0" anchor="t"/>
+          <a:lstStyle/>
+          <a:p>
+            <a:pPr algn="l" indent="0" marL="0">
+              <a:spcAft>
+                <a:spcPts val="600"/>
+              </a:spcAft>
+              <a:buNone/>
+            </a:pPr>
+            <a:r>
+              <a:rPr lang="en-US" sz="1350" dirty="0">
+                <a:solidFill>
+                  <a:srgbClr val="33444F"/>
+                </a:solidFill>
+                <a:latin typeface="Calibri" pitchFamily="34" charset="0"/>
+                <a:ea typeface="Calibri" pitchFamily="34" charset="-122"/>
+                <a:cs typeface="Calibri" pitchFamily="34" charset="-120"/>
+              </a:rPr>
+              <a:t>A. Appropriate compensation</a:t>
+            </a:r>
+            <a:endParaRPr lang="en-US" sz="1350" dirty="0"/>
+          </a:p>
+          <a:p>
+            <a:pPr algn="l" indent="0" marL="0">
+              <a:spcAft>
+                <a:spcPts val="600"/>
+              </a:spcAft>
+              <a:buNone/>
+            </a:pPr>
+            <a:r>
+              <a:rPr lang="en-US" sz="1350" b="1" dirty="0">
+                <a:solidFill>
+                  <a:srgbClr val="0D4A92"/>
+                </a:solidFill>
+                <a:latin typeface="Calibri" pitchFamily="34" charset="0"/>
+                <a:ea typeface="Calibri" pitchFamily="34" charset="-122"/>
+                <a:cs typeface="Calibri" pitchFamily="34" charset="-120"/>
+              </a:rPr>
+              <a:t>B. Concurrent respiratory acidosis (inadequate compensation)</a:t>
+            </a:r>
+            <a:endParaRPr lang="en-US" sz="1350" dirty="0"/>
+          </a:p>
+          <a:p>
+            <a:pPr algn="l" indent="0" marL="0">
+              <a:spcAft>
+                <a:spcPts val="600"/>
+              </a:spcAft>
+              <a:buNone/>
+            </a:pPr>
+            <a:r>
+              <a:rPr lang="en-US" sz="1350" dirty="0">
+                <a:solidFill>
+                  <a:srgbClr val="33444F"/>
+                </a:solidFill>
+                <a:latin typeface="Calibri" pitchFamily="34" charset="0"/>
+                <a:ea typeface="Calibri" pitchFamily="34" charset="-122"/>
+                <a:cs typeface="Calibri" pitchFamily="34" charset="-120"/>
+              </a:rPr>
+              <a:t>C. Concurrent respiratory alkalosis</a:t>
+            </a:r>
+            <a:endParaRPr lang="en-US" sz="1350" dirty="0"/>
+          </a:p>
+          <a:p>
+            <a:pPr algn="l" indent="0" marL="0">
+              <a:spcAft>
+                <a:spcPts val="600"/>
+              </a:spcAft>
+              <a:buNone/>
+            </a:pPr>
+            <a:r>
+              <a:rPr lang="en-US" sz="1350" dirty="0">
+                <a:solidFill>
+                  <a:srgbClr val="33444F"/>
+                </a:solidFill>
+                <a:latin typeface="Calibri" pitchFamily="34" charset="0"/>
+                <a:ea typeface="Calibri" pitchFamily="34" charset="-122"/>
+                <a:cs typeface="Calibri" pitchFamily="34" charset="-120"/>
+              </a:rPr>
+              <a:t>D. Metabolic alkalosis</a:t>
+            </a:r>
+            <a:endParaRPr lang="en-US" sz="1350" dirty="0"/>
+          </a:p>
+          <a:p>
+            <a:pPr algn="l" indent="0" marL="0">
+              <a:spcAft>
+                <a:spcPts val="600"/>
+              </a:spcAft>
+              <a:buNone/>
+            </a:pPr>
+            <a:r>
+              <a:rPr lang="en-US" sz="1350" dirty="0">
+                <a:solidFill>
+                  <a:srgbClr val="33444F"/>
+                </a:solidFill>
+                <a:latin typeface="Calibri" pitchFamily="34" charset="0"/>
+                <a:ea typeface="Calibri" pitchFamily="34" charset="-122"/>
+                <a:cs typeface="Calibri" pitchFamily="34" charset="-120"/>
+              </a:rPr>
+              <a:t>E. No disorder</a:t>
+            </a:r>
+            <a:endParaRPr lang="en-US" sz="1350" dirty="0"/>
+          </a:p>
+        </p:txBody>
+      </p:sp>
+      <p:sp>
+        <p:nvSpPr>
+          <p:cNvPr id="6" name="Shape 4"/>
+          <p:cNvSpPr/>
+          <p:nvPr/>
+        </p:nvSpPr>
+        <p:spPr>
+          <a:xfrm>
+            <a:off x="7201632" y="2395728"/>
+            <a:ext cx="4423136" cy="3246120"/>
           </a:xfrm>
           <a:prstGeom prst="roundRect">
             <a:avLst>
-              <a:gd name="adj" fmla="val 7609"/>
+              <a:gd name="adj" fmla="val 2535"/>
             </a:avLst>
           </a:prstGeom>
           <a:solidFill>
-            <a:srgbClr val="143651"/>
-          </a:solidFill>
-          <a:ln/>
-        </p:spPr>
-      </p:sp>
-      <p:sp>
-        <p:nvSpPr>
-          <p:cNvPr id="5" name="Shape 3"/>
-          <p:cNvSpPr/>
-          <p:nvPr/>
-        </p:nvSpPr>
-        <p:spPr>
-          <a:xfrm>
-            <a:off x="749808" y="1755648"/>
-            <a:ext cx="365760" cy="365760"/>
-          </a:xfrm>
-          <a:prstGeom prst="ellipse">
-            <a:avLst/>
-          </a:prstGeom>
-          <a:solidFill>
-            <a:srgbClr val="1565C0"/>
+            <a:srgbClr val="E7EFFA"/>
           </a:solidFill>
           <a:ln/>
           <a:effectLst>
@@ -9147,14 +10383,14 @@
       </p:sp>
       <p:sp>
         <p:nvSpPr>
-          <p:cNvPr id="6" name="Text 4"/>
-          <p:cNvSpPr/>
-          <p:nvPr/>
-        </p:nvSpPr>
-        <p:spPr>
-          <a:xfrm>
-            <a:off x="749808" y="1755648"/>
-            <a:ext cx="365760" cy="365760"/>
+          <p:cNvPr id="7" name="Text 5"/>
+          <p:cNvSpPr/>
+          <p:nvPr/>
+        </p:nvSpPr>
+        <p:spPr>
+          <a:xfrm>
+            <a:off x="7439376" y="2578608"/>
+            <a:ext cx="3965936" cy="457200"/>
           </a:xfrm>
           <a:prstGeom prst="rect">
             <a:avLst/>
@@ -9166,19 +10402,33 @@
           <a:bodyPr wrap="square" lIns="0" tIns="0" rIns="0" bIns="0" rtlCol="0" anchor="ctr"/>
           <a:lstStyle/>
           <a:p>
-            <a:pPr algn="ctr" indent="0" marL="0">
+            <a:pPr indent="0" marL="0">
               <a:buNone/>
             </a:pPr>
             <a:r>
               <a:rPr lang="en-US" sz="1500" b="1" dirty="0">
                 <a:solidFill>
-                  <a:srgbClr val="FFFFFF"/>
-                </a:solidFill>
-                <a:latin typeface="Calibri" pitchFamily="34" charset="0"/>
-                <a:ea typeface="Calibri" pitchFamily="34" charset="-122"/>
-                <a:cs typeface="Calibri" pitchFamily="34" charset="-120"/>
-              </a:rPr>
-              <a:t>1</a:t>
+                  <a:srgbClr val="1565C0"/>
+                </a:solidFill>
+                <a:latin typeface="Calibri" pitchFamily="34" charset="0"/>
+                <a:ea typeface="Calibri" pitchFamily="34" charset="-122"/>
+                <a:cs typeface="Calibri" pitchFamily="34" charset="-120"/>
+              </a:rPr>
+              <a:t>ANSWER  </a:t>
+            </a:r>
+            <a:pPr indent="0" marL="0">
+              <a:buNone/>
+            </a:pPr>
+            <a:r>
+              <a:rPr lang="en-US" sz="1500" b="1" dirty="0">
+                <a:solidFill>
+                  <a:srgbClr val="1B2A38"/>
+                </a:solidFill>
+                <a:latin typeface="Calibri" pitchFamily="34" charset="0"/>
+                <a:ea typeface="Calibri" pitchFamily="34" charset="-122"/>
+                <a:cs typeface="Calibri" pitchFamily="34" charset="-120"/>
+              </a:rPr>
+              <a:t>B — Concurrent respiratory acidosis</a:t>
             </a:r>
             <a:endParaRPr lang="en-US" sz="1500" dirty="0"/>
           </a:p>
@@ -9186,14 +10436,56 @@
       </p:sp>
       <p:sp>
         <p:nvSpPr>
-          <p:cNvPr id="7" name="Text 5"/>
-          <p:cNvSpPr/>
-          <p:nvPr/>
-        </p:nvSpPr>
-        <p:spPr>
-          <a:xfrm>
-            <a:off x="1280160" y="1517904"/>
-            <a:ext cx="10143439" cy="841248"/>
+          <p:cNvPr id="8" name="Text 6"/>
+          <p:cNvSpPr/>
+          <p:nvPr/>
+        </p:nvSpPr>
+        <p:spPr>
+          <a:xfrm>
+            <a:off x="7439376" y="3127248"/>
+            <a:ext cx="3947648" cy="2377440"/>
+          </a:xfrm>
+          <a:prstGeom prst="rect">
+            <a:avLst/>
+          </a:prstGeom>
+          <a:noFill/>
+          <a:ln/>
+        </p:spPr>
+        <p:txBody>
+          <a:bodyPr wrap="square" lIns="0" tIns="0" rIns="0" bIns="0" rtlCol="0" anchor="t"/>
+          <a:lstStyle/>
+          <a:p>
+            <a:pPr algn="l" indent="0" marL="0">
+              <a:lnSpc>
+                <a:spcPct val="108000"/>
+              </a:lnSpc>
+              <a:buNone/>
+            </a:pPr>
+            <a:r>
+              <a:rPr lang="en-US" sz="1250" dirty="0">
+                <a:solidFill>
+                  <a:srgbClr val="33444F"/>
+                </a:solidFill>
+                <a:latin typeface="Calibri" pitchFamily="34" charset="0"/>
+                <a:ea typeface="Calibri" pitchFamily="34" charset="-122"/>
+                <a:cs typeface="Calibri" pitchFamily="34" charset="-120"/>
+              </a:rPr>
+              <a:t>Actual PaCO₂ (38) exceeds predicted (24–28) — inadequate respiratory compensation means a superimposed respiratory acidosis.</a:t>
+            </a:r>
+            <a:endParaRPr lang="en-US" sz="1250" dirty="0"/>
+          </a:p>
+        </p:txBody>
+      </p:sp>
+      <p:sp>
+        <p:nvSpPr>
+          <p:cNvPr id="9" name="Text 7"/>
+          <p:cNvSpPr/>
+          <p:nvPr/>
+        </p:nvSpPr>
+        <p:spPr>
+          <a:xfrm>
+            <a:off x="566928" y="6473952"/>
+            <a:ext cx="7772400" cy="274320"/>
           </a:xfrm>
           <a:prstGeom prst="rect">
             <a:avLst/>
@@ -9209,68 +10501,19 @@
               <a:buNone/>
             </a:pPr>
             <a:r>
-              <a:rPr lang="en-US" sz="1350" dirty="0">
-                <a:solidFill>
-                  <a:srgbClr val="E7EEF4"/>
-                </a:solidFill>
-                <a:latin typeface="Calibri" pitchFamily="34" charset="0"/>
-                <a:ea typeface="Calibri" pitchFamily="34" charset="-122"/>
-                <a:cs typeface="Calibri" pitchFamily="34" charset="-120"/>
-              </a:rPr>
-              <a:t>Sodium disorders are water problems — interpret with osmolality, glucose, and volume status.</a:t>
-            </a:r>
-            <a:endParaRPr lang="en-US" sz="1350" dirty="0"/>
-          </a:p>
-        </p:txBody>
-      </p:sp>
-      <p:sp>
-        <p:nvSpPr>
-          <p:cNvPr id="8" name="Shape 6"/>
-          <p:cNvSpPr/>
-          <p:nvPr/>
-        </p:nvSpPr>
-        <p:spPr>
-          <a:xfrm>
-            <a:off x="566928" y="2505456"/>
-            <a:ext cx="11057839" cy="841248"/>
-          </a:xfrm>
-          <a:prstGeom prst="roundRect">
-            <a:avLst>
-              <a:gd name="adj" fmla="val 7609"/>
-            </a:avLst>
-          </a:prstGeom>
-          <a:solidFill>
-            <a:srgbClr val="143651"/>
-          </a:solidFill>
-          <a:ln/>
-        </p:spPr>
-      </p:sp>
-      <p:sp>
-        <p:nvSpPr>
-          <p:cNvPr id="9" name="Shape 7"/>
-          <p:cNvSpPr/>
-          <p:nvPr/>
-        </p:nvSpPr>
-        <p:spPr>
-          <a:xfrm>
-            <a:off x="749808" y="2743200"/>
-            <a:ext cx="365760" cy="365760"/>
-          </a:xfrm>
-          <a:prstGeom prst="ellipse">
-            <a:avLst/>
-          </a:prstGeom>
-          <a:solidFill>
-            <a:srgbClr val="1565C0"/>
-          </a:solidFill>
-          <a:ln/>
-          <a:effectLst>
-            <a:outerShdw sx="100000" sy="100000" kx="0" ky="0" algn="bl" rotWithShape="0" blurRad="88900" dist="25400" dir="5400000">
-              <a:srgbClr val="22303C">
-                <a:alpha val="12000"/>
-              </a:srgbClr>
-            </a:outerShdw>
-          </a:effectLst>
-        </p:spPr>
+              <a:rPr lang="en-US" sz="850" dirty="0">
+                <a:solidFill>
+                  <a:srgbClr val="9AA8B4"/>
+                </a:solidFill>
+                <a:latin typeface="Calibri" pitchFamily="34" charset="0"/>
+                <a:ea typeface="Calibri" pitchFamily="34" charset="-122"/>
+                <a:cs typeface="Calibri" pitchFamily="34" charset="-120"/>
+              </a:rPr>
+              <a:t>Makassed General Hospital  ·  Department of Laboratory Medicine</a:t>
+            </a:r>
+            <a:endParaRPr lang="en-US" sz="850" dirty="0"/>
+          </a:p>
+        </p:txBody>
       </p:sp>
       <p:sp>
         <p:nvSpPr>
@@ -9280,8 +10523,8 @@
         </p:nvSpPr>
         <p:spPr>
           <a:xfrm>
-            <a:off x="749808" y="2743200"/>
-            <a:ext cx="365760" cy="365760"/>
+            <a:off x="9814255" y="6473952"/>
+            <a:ext cx="1828800" cy="274320"/>
           </a:xfrm>
           <a:prstGeom prst="rect">
             <a:avLst/>
@@ -9293,504 +10536,34 @@
           <a:bodyPr wrap="square" lIns="0" tIns="0" rIns="0" bIns="0" rtlCol="0" anchor="ctr"/>
           <a:lstStyle/>
           <a:p>
-            <a:pPr algn="ctr" indent="0" marL="0">
-              <a:buNone/>
-            </a:pPr>
-            <a:r>
-              <a:rPr lang="en-US" sz="1500" b="1" dirty="0">
-                <a:solidFill>
-                  <a:srgbClr val="FFFFFF"/>
-                </a:solidFill>
-                <a:latin typeface="Calibri" pitchFamily="34" charset="0"/>
-                <a:ea typeface="Calibri" pitchFamily="34" charset="-122"/>
-                <a:cs typeface="Calibri" pitchFamily="34" charset="-120"/>
-              </a:rPr>
-              <a:t>2</a:t>
-            </a:r>
-            <a:endParaRPr lang="en-US" sz="1500" dirty="0"/>
-          </a:p>
-        </p:txBody>
-      </p:sp>
-      <p:sp>
-        <p:nvSpPr>
-          <p:cNvPr id="11" name="Text 9"/>
-          <p:cNvSpPr/>
-          <p:nvPr/>
-        </p:nvSpPr>
-        <p:spPr>
-          <a:xfrm>
-            <a:off x="1280160" y="2505456"/>
-            <a:ext cx="10143439" cy="841248"/>
-          </a:xfrm>
-          <a:prstGeom prst="rect">
-            <a:avLst/>
-          </a:prstGeom>
-          <a:noFill/>
-          <a:ln/>
-        </p:spPr>
-        <p:txBody>
-          <a:bodyPr wrap="square" lIns="0" tIns="0" rIns="0" bIns="0" rtlCol="0" anchor="ctr"/>
-          <a:lstStyle/>
-          <a:p>
-            <a:pPr algn="l" indent="0" marL="0">
-              <a:buNone/>
-            </a:pPr>
-            <a:r>
-              <a:rPr lang="en-US" sz="1350" dirty="0">
-                <a:solidFill>
-                  <a:srgbClr val="E7EEF4"/>
-                </a:solidFill>
-                <a:latin typeface="Calibri" pitchFamily="34" charset="0"/>
-                <a:ea typeface="Calibri" pitchFamily="34" charset="-122"/>
-                <a:cs typeface="Calibri" pitchFamily="34" charset="-120"/>
-              </a:rPr>
-              <a:t>Pseudohyponatremia (lipemia/paraprotein) shows discordant indirect vs direct ISE; trust the direct method.</a:t>
-            </a:r>
-            <a:endParaRPr lang="en-US" sz="1350" dirty="0"/>
-          </a:p>
-        </p:txBody>
-      </p:sp>
-      <p:sp>
-        <p:nvSpPr>
-          <p:cNvPr id="12" name="Shape 10"/>
-          <p:cNvSpPr/>
-          <p:nvPr/>
-        </p:nvSpPr>
-        <p:spPr>
-          <a:xfrm>
-            <a:off x="566928" y="3493008"/>
-            <a:ext cx="11057839" cy="841248"/>
-          </a:xfrm>
-          <a:prstGeom prst="roundRect">
-            <a:avLst>
-              <a:gd name="adj" fmla="val 7609"/>
-            </a:avLst>
-          </a:prstGeom>
-          <a:solidFill>
-            <a:srgbClr val="143651"/>
-          </a:solidFill>
-          <a:ln/>
-        </p:spPr>
-      </p:sp>
-      <p:sp>
-        <p:nvSpPr>
-          <p:cNvPr id="13" name="Shape 11"/>
-          <p:cNvSpPr/>
-          <p:nvPr/>
-        </p:nvSpPr>
-        <p:spPr>
-          <a:xfrm>
-            <a:off x="749808" y="3730752"/>
-            <a:ext cx="365760" cy="365760"/>
-          </a:xfrm>
-          <a:prstGeom prst="ellipse">
-            <a:avLst/>
-          </a:prstGeom>
-          <a:solidFill>
-            <a:srgbClr val="1565C0"/>
-          </a:solidFill>
-          <a:ln/>
-          <a:effectLst>
-            <a:outerShdw sx="100000" sy="100000" kx="0" ky="0" algn="bl" rotWithShape="0" blurRad="88900" dist="25400" dir="5400000">
-              <a:srgbClr val="22303C">
-                <a:alpha val="12000"/>
-              </a:srgbClr>
-            </a:outerShdw>
-          </a:effectLst>
-        </p:spPr>
-      </p:sp>
-      <p:sp>
-        <p:nvSpPr>
-          <p:cNvPr id="14" name="Text 12"/>
-          <p:cNvSpPr/>
-          <p:nvPr/>
-        </p:nvSpPr>
-        <p:spPr>
-          <a:xfrm>
-            <a:off x="749808" y="3730752"/>
-            <a:ext cx="365760" cy="365760"/>
-          </a:xfrm>
-          <a:prstGeom prst="rect">
-            <a:avLst/>
-          </a:prstGeom>
-          <a:noFill/>
-          <a:ln/>
-        </p:spPr>
-        <p:txBody>
-          <a:bodyPr wrap="square" lIns="0" tIns="0" rIns="0" bIns="0" rtlCol="0" anchor="ctr"/>
-          <a:lstStyle/>
-          <a:p>
-            <a:pPr algn="ctr" indent="0" marL="0">
-              <a:buNone/>
-            </a:pPr>
-            <a:r>
-              <a:rPr lang="en-US" sz="1500" b="1" dirty="0">
-                <a:solidFill>
-                  <a:srgbClr val="FFFFFF"/>
-                </a:solidFill>
-                <a:latin typeface="Calibri" pitchFamily="34" charset="0"/>
-                <a:ea typeface="Calibri" pitchFamily="34" charset="-122"/>
-                <a:cs typeface="Calibri" pitchFamily="34" charset="-120"/>
-              </a:rPr>
-              <a:t>3</a:t>
-            </a:r>
-            <a:endParaRPr lang="en-US" sz="1500" dirty="0"/>
-          </a:p>
-        </p:txBody>
-      </p:sp>
-      <p:sp>
-        <p:nvSpPr>
-          <p:cNvPr id="15" name="Text 13"/>
-          <p:cNvSpPr/>
-          <p:nvPr/>
-        </p:nvSpPr>
-        <p:spPr>
-          <a:xfrm>
-            <a:off x="1280160" y="3493008"/>
-            <a:ext cx="10143439" cy="841248"/>
-          </a:xfrm>
-          <a:prstGeom prst="rect">
-            <a:avLst/>
-          </a:prstGeom>
-          <a:noFill/>
-          <a:ln/>
-        </p:spPr>
-        <p:txBody>
-          <a:bodyPr wrap="square" lIns="0" tIns="0" rIns="0" bIns="0" rtlCol="0" anchor="ctr"/>
-          <a:lstStyle/>
-          <a:p>
-            <a:pPr algn="l" indent="0" marL="0">
-              <a:buNone/>
-            </a:pPr>
-            <a:r>
-              <a:rPr lang="en-US" sz="1350" dirty="0">
-                <a:solidFill>
-                  <a:srgbClr val="E7EEF4"/>
-                </a:solidFill>
-                <a:latin typeface="Calibri" pitchFamily="34" charset="0"/>
-                <a:ea typeface="Calibri" pitchFamily="34" charset="-122"/>
-                <a:cs typeface="Calibri" pitchFamily="34" charset="-120"/>
-              </a:rPr>
-              <a:t>Work acid-base in order: pH → primary → anion gap → compensation → delta-delta.</a:t>
-            </a:r>
-            <a:endParaRPr lang="en-US" sz="1350" dirty="0"/>
-          </a:p>
-        </p:txBody>
-      </p:sp>
-      <p:sp>
-        <p:nvSpPr>
-          <p:cNvPr id="16" name="Shape 14"/>
-          <p:cNvSpPr/>
-          <p:nvPr/>
-        </p:nvSpPr>
-        <p:spPr>
-          <a:xfrm>
-            <a:off x="566928" y="4480560"/>
-            <a:ext cx="11057839" cy="841248"/>
-          </a:xfrm>
-          <a:prstGeom prst="roundRect">
-            <a:avLst>
-              <a:gd name="adj" fmla="val 7609"/>
-            </a:avLst>
-          </a:prstGeom>
-          <a:solidFill>
-            <a:srgbClr val="143651"/>
-          </a:solidFill>
-          <a:ln/>
-        </p:spPr>
-      </p:sp>
-      <p:sp>
-        <p:nvSpPr>
-          <p:cNvPr id="17" name="Shape 15"/>
-          <p:cNvSpPr/>
-          <p:nvPr/>
-        </p:nvSpPr>
-        <p:spPr>
-          <a:xfrm>
-            <a:off x="749808" y="4718304"/>
-            <a:ext cx="365760" cy="365760"/>
-          </a:xfrm>
-          <a:prstGeom prst="ellipse">
-            <a:avLst/>
-          </a:prstGeom>
-          <a:solidFill>
-            <a:srgbClr val="1565C0"/>
-          </a:solidFill>
-          <a:ln/>
-          <a:effectLst>
-            <a:outerShdw sx="100000" sy="100000" kx="0" ky="0" algn="bl" rotWithShape="0" blurRad="88900" dist="25400" dir="5400000">
-              <a:srgbClr val="22303C">
-                <a:alpha val="12000"/>
-              </a:srgbClr>
-            </a:outerShdw>
-          </a:effectLst>
-        </p:spPr>
-      </p:sp>
-      <p:sp>
-        <p:nvSpPr>
-          <p:cNvPr id="18" name="Text 16"/>
-          <p:cNvSpPr/>
-          <p:nvPr/>
-        </p:nvSpPr>
-        <p:spPr>
-          <a:xfrm>
-            <a:off x="749808" y="4718304"/>
-            <a:ext cx="365760" cy="365760"/>
-          </a:xfrm>
-          <a:prstGeom prst="rect">
-            <a:avLst/>
-          </a:prstGeom>
-          <a:noFill/>
-          <a:ln/>
-        </p:spPr>
-        <p:txBody>
-          <a:bodyPr wrap="square" lIns="0" tIns="0" rIns="0" bIns="0" rtlCol="0" anchor="ctr"/>
-          <a:lstStyle/>
-          <a:p>
-            <a:pPr algn="ctr" indent="0" marL="0">
-              <a:buNone/>
-            </a:pPr>
-            <a:r>
-              <a:rPr lang="en-US" sz="1500" b="1" dirty="0">
-                <a:solidFill>
-                  <a:srgbClr val="FFFFFF"/>
-                </a:solidFill>
-                <a:latin typeface="Calibri" pitchFamily="34" charset="0"/>
-                <a:ea typeface="Calibri" pitchFamily="34" charset="-122"/>
-                <a:cs typeface="Calibri" pitchFamily="34" charset="-120"/>
-              </a:rPr>
-              <a:t>4</a:t>
-            </a:r>
-            <a:endParaRPr lang="en-US" sz="1500" dirty="0"/>
-          </a:p>
-        </p:txBody>
-      </p:sp>
-      <p:sp>
-        <p:nvSpPr>
-          <p:cNvPr id="19" name="Text 17"/>
-          <p:cNvSpPr/>
-          <p:nvPr/>
-        </p:nvSpPr>
-        <p:spPr>
-          <a:xfrm>
-            <a:off x="1280160" y="4480560"/>
-            <a:ext cx="10143439" cy="841248"/>
-          </a:xfrm>
-          <a:prstGeom prst="rect">
-            <a:avLst/>
-          </a:prstGeom>
-          <a:noFill/>
-          <a:ln/>
-        </p:spPr>
-        <p:txBody>
-          <a:bodyPr wrap="square" lIns="0" tIns="0" rIns="0" bIns="0" rtlCol="0" anchor="ctr"/>
-          <a:lstStyle/>
-          <a:p>
-            <a:pPr algn="l" indent="0" marL="0">
-              <a:buNone/>
-            </a:pPr>
-            <a:r>
-              <a:rPr lang="en-US" sz="1350" dirty="0">
-                <a:solidFill>
-                  <a:srgbClr val="E7EEF4"/>
-                </a:solidFill>
-                <a:latin typeface="Calibri" pitchFamily="34" charset="0"/>
-                <a:ea typeface="Calibri" pitchFamily="34" charset="-122"/>
-                <a:cs typeface="Calibri" pitchFamily="34" charset="-120"/>
-              </a:rPr>
-              <a:t>An elevated osmolal gap (with later anion gap) flags toxic alcohols; ethanol is the commonest cause.</a:t>
-            </a:r>
-            <a:endParaRPr lang="en-US" sz="1350" dirty="0"/>
-          </a:p>
-        </p:txBody>
-      </p:sp>
-      <p:sp>
-        <p:nvSpPr>
-          <p:cNvPr id="20" name="Shape 18"/>
-          <p:cNvSpPr/>
-          <p:nvPr/>
-        </p:nvSpPr>
-        <p:spPr>
-          <a:xfrm>
-            <a:off x="566928" y="5468112"/>
-            <a:ext cx="11057839" cy="841248"/>
-          </a:xfrm>
-          <a:prstGeom prst="roundRect">
-            <a:avLst>
-              <a:gd name="adj" fmla="val 7609"/>
-            </a:avLst>
-          </a:prstGeom>
-          <a:solidFill>
-            <a:srgbClr val="143651"/>
-          </a:solidFill>
-          <a:ln/>
-        </p:spPr>
-      </p:sp>
-      <p:sp>
-        <p:nvSpPr>
-          <p:cNvPr id="21" name="Shape 19"/>
-          <p:cNvSpPr/>
-          <p:nvPr/>
-        </p:nvSpPr>
-        <p:spPr>
-          <a:xfrm>
-            <a:off x="749808" y="5705856"/>
-            <a:ext cx="365760" cy="365760"/>
-          </a:xfrm>
-          <a:prstGeom prst="ellipse">
-            <a:avLst/>
-          </a:prstGeom>
-          <a:solidFill>
-            <a:srgbClr val="1565C0"/>
-          </a:solidFill>
-          <a:ln/>
-          <a:effectLst>
-            <a:outerShdw sx="100000" sy="100000" kx="0" ky="0" algn="bl" rotWithShape="0" blurRad="88900" dist="25400" dir="5400000">
-              <a:srgbClr val="22303C">
-                <a:alpha val="12000"/>
-              </a:srgbClr>
-            </a:outerShdw>
-          </a:effectLst>
-        </p:spPr>
-      </p:sp>
-      <p:sp>
-        <p:nvSpPr>
-          <p:cNvPr id="22" name="Text 20"/>
-          <p:cNvSpPr/>
-          <p:nvPr/>
-        </p:nvSpPr>
-        <p:spPr>
-          <a:xfrm>
-            <a:off x="749808" y="5705856"/>
-            <a:ext cx="365760" cy="365760"/>
-          </a:xfrm>
-          <a:prstGeom prst="rect">
-            <a:avLst/>
-          </a:prstGeom>
-          <a:noFill/>
-          <a:ln/>
-        </p:spPr>
-        <p:txBody>
-          <a:bodyPr wrap="square" lIns="0" tIns="0" rIns="0" bIns="0" rtlCol="0" anchor="ctr"/>
-          <a:lstStyle/>
-          <a:p>
-            <a:pPr algn="ctr" indent="0" marL="0">
-              <a:buNone/>
-            </a:pPr>
-            <a:r>
-              <a:rPr lang="en-US" sz="1500" b="1" dirty="0">
-                <a:solidFill>
-                  <a:srgbClr val="FFFFFF"/>
-                </a:solidFill>
-                <a:latin typeface="Calibri" pitchFamily="34" charset="0"/>
-                <a:ea typeface="Calibri" pitchFamily="34" charset="-122"/>
-                <a:cs typeface="Calibri" pitchFamily="34" charset="-120"/>
-              </a:rPr>
-              <a:t>5</a:t>
-            </a:r>
-            <a:endParaRPr lang="en-US" sz="1500" dirty="0"/>
-          </a:p>
-        </p:txBody>
-      </p:sp>
-      <p:sp>
-        <p:nvSpPr>
-          <p:cNvPr id="23" name="Text 21"/>
-          <p:cNvSpPr/>
-          <p:nvPr/>
-        </p:nvSpPr>
-        <p:spPr>
-          <a:xfrm>
-            <a:off x="1280160" y="5468112"/>
-            <a:ext cx="10143439" cy="841248"/>
-          </a:xfrm>
-          <a:prstGeom prst="rect">
-            <a:avLst/>
-          </a:prstGeom>
-          <a:noFill/>
-          <a:ln/>
-        </p:spPr>
-        <p:txBody>
-          <a:bodyPr wrap="square" lIns="0" tIns="0" rIns="0" bIns="0" rtlCol="0" anchor="ctr"/>
-          <a:lstStyle/>
-          <a:p>
-            <a:pPr algn="l" indent="0" marL="0">
-              <a:buNone/>
-            </a:pPr>
-            <a:r>
-              <a:rPr lang="en-US" sz="1350" dirty="0">
-                <a:solidFill>
-                  <a:srgbClr val="E7EEF4"/>
-                </a:solidFill>
-                <a:latin typeface="Calibri" pitchFamily="34" charset="0"/>
-                <a:ea typeface="Calibri" pitchFamily="34" charset="-122"/>
-                <a:cs typeface="Calibri" pitchFamily="34" charset="-120"/>
-              </a:rPr>
-              <a:t>Deviation from predicted compensation reveals a mixed disorder.</a:t>
-            </a:r>
-            <a:endParaRPr lang="en-US" sz="1350" dirty="0"/>
-          </a:p>
-        </p:txBody>
-      </p:sp>
-      <p:sp>
-        <p:nvSpPr>
-          <p:cNvPr id="24" name="Text 22"/>
-          <p:cNvSpPr/>
-          <p:nvPr/>
-        </p:nvSpPr>
-        <p:spPr>
-          <a:xfrm>
-            <a:off x="566928" y="6473952"/>
-            <a:ext cx="8229600" cy="274320"/>
-          </a:xfrm>
-          <a:prstGeom prst="rect">
-            <a:avLst/>
-          </a:prstGeom>
-          <a:noFill/>
-          <a:ln/>
-        </p:spPr>
-        <p:txBody>
-          <a:bodyPr wrap="square" lIns="0" tIns="0" rIns="0" bIns="0" rtlCol="0" anchor="ctr"/>
-          <a:lstStyle/>
-          <a:p>
-            <a:pPr indent="0" marL="0">
+            <a:pPr algn="r" indent="0" marL="0">
               <a:buNone/>
             </a:pPr>
             <a:r>
               <a:rPr lang="en-US" sz="850" dirty="0">
                 <a:solidFill>
-                  <a:srgbClr val="5E7488"/>
-                </a:solidFill>
-                <a:latin typeface="Calibri" pitchFamily="34" charset="0"/>
-                <a:ea typeface="Calibri" pitchFamily="34" charset="-122"/>
-                <a:cs typeface="Calibri" pitchFamily="34" charset="-120"/>
-              </a:rPr>
-              <a:t>Makassed General Hospital  ·  Department of Laboratory Medicine</a:t>
-            </a:r>
-            <a:endParaRPr lang="en-US" sz="850" dirty="0"/>
-          </a:p>
-        </p:txBody>
-      </p:sp>
-      <p:sp>
-        <p:nvSpPr>
-          <p:cNvPr id="25" name="Text 23"/>
-          <p:cNvSpPr/>
-          <p:nvPr/>
-        </p:nvSpPr>
-        <p:spPr>
-          <a:xfrm>
-            <a:off x="11002975" y="6473952"/>
-            <a:ext cx="640080" cy="274320"/>
-          </a:xfrm>
-          <a:prstGeom prst="rect">
-            <a:avLst/>
-          </a:prstGeom>
-          <a:noFill/>
-          <a:ln/>
-        </p:spPr>
-        <p:txBody>
-          <a:bodyPr wrap="square" lIns="0" tIns="0" rIns="0" bIns="0" rtlCol="0" anchor="ctr"/>
-          <a:lstStyle/>
-          <a:p>
+                  <a:srgbClr val="9AA8B4"/>
+                </a:solidFill>
+                <a:latin typeface="Calibri" pitchFamily="34" charset="0"/>
+                <a:ea typeface="Calibri" pitchFamily="34" charset="-122"/>
+                <a:cs typeface="Calibri" pitchFamily="34" charset="-120"/>
+              </a:rPr>
+              <a:t>CP Lecture Series</a:t>
+            </a:r>
+            <a:pPr algn="r" indent="0" marL="0">
+              <a:buNone/>
+            </a:pPr>
+            <a:r>
+              <a:rPr lang="en-US" sz="850" dirty="0">
+                <a:solidFill>
+                  <a:srgbClr val="DCE4EC"/>
+                </a:solidFill>
+                <a:latin typeface="Calibri" pitchFamily="34" charset="0"/>
+                <a:ea typeface="Calibri" pitchFamily="34" charset="-122"/>
+                <a:cs typeface="Calibri" pitchFamily="34" charset="-120"/>
+              </a:rPr>
+              <a:t>   ·   </a:t>
+            </a:r>
             <a:pPr algn="r" indent="0" marL="0">
               <a:buNone/>
             </a:pPr>
@@ -9874,6 +10647,2341 @@
                 <a:ea typeface="Calibri" pitchFamily="34" charset="-122"/>
                 <a:cs typeface="Calibri" pitchFamily="34" charset="-120"/>
               </a:rPr>
+              <a:t>CLINICAL CHEMISTRY   ·   BOARD REVIEW  ·  Q2</a:t>
+            </a:r>
+            <a:endParaRPr lang="en-US" sz="1100" dirty="0"/>
+          </a:p>
+        </p:txBody>
+      </p:sp>
+      <p:sp>
+        <p:nvSpPr>
+          <p:cNvPr id="3" name="Text 1"/>
+          <p:cNvSpPr/>
+          <p:nvPr/>
+        </p:nvSpPr>
+        <p:spPr>
+          <a:xfrm>
+            <a:off x="566928" y="713232"/>
+            <a:ext cx="11064240" cy="749808"/>
+          </a:xfrm>
+          <a:prstGeom prst="rect">
+            <a:avLst/>
+          </a:prstGeom>
+          <a:noFill/>
+          <a:ln/>
+        </p:spPr>
+        <p:txBody>
+          <a:bodyPr wrap="square" lIns="0" tIns="0" rIns="0" bIns="0" rtlCol="0" anchor="ctr"/>
+          <a:lstStyle/>
+          <a:p>
+            <a:pPr algn="l" indent="0" marL="0">
+              <a:buNone/>
+            </a:pPr>
+            <a:r>
+              <a:rPr lang="en-US" sz="2600" b="1" dirty="0">
+                <a:solidFill>
+                  <a:srgbClr val="0E3A5F"/>
+                </a:solidFill>
+                <a:latin typeface="Calibri" pitchFamily="34" charset="0"/>
+                <a:ea typeface="Calibri" pitchFamily="34" charset="-122"/>
+                <a:cs typeface="Calibri" pitchFamily="34" charset="-120"/>
+              </a:rPr>
+              <a:t>Board-Style Review</a:t>
+            </a:r>
+            <a:endParaRPr lang="en-US" sz="2600" dirty="0"/>
+          </a:p>
+        </p:txBody>
+      </p:sp>
+      <p:sp>
+        <p:nvSpPr>
+          <p:cNvPr id="4" name="Text 2"/>
+          <p:cNvSpPr/>
+          <p:nvPr/>
+        </p:nvSpPr>
+        <p:spPr>
+          <a:xfrm>
+            <a:off x="566928" y="1417320"/>
+            <a:ext cx="11057839" cy="914400"/>
+          </a:xfrm>
+          <a:prstGeom prst="rect">
+            <a:avLst/>
+          </a:prstGeom>
+          <a:noFill/>
+          <a:ln/>
+        </p:spPr>
+        <p:txBody>
+          <a:bodyPr wrap="square" lIns="0" tIns="0" rIns="0" bIns="0" rtlCol="0" anchor="t"/>
+          <a:lstStyle/>
+          <a:p>
+            <a:pPr algn="l" indent="0" marL="0">
+              <a:lnSpc>
+                <a:spcPct val="105000"/>
+              </a:lnSpc>
+              <a:buNone/>
+            </a:pPr>
+            <a:r>
+              <a:rPr lang="en-US" sz="1450" b="1" dirty="0">
+                <a:solidFill>
+                  <a:srgbClr val="1B2A38"/>
+                </a:solidFill>
+                <a:latin typeface="Calibri" pitchFamily="34" charset="0"/>
+                <a:ea typeface="Calibri" pitchFamily="34" charset="-122"/>
+                <a:cs typeface="Calibri" pitchFamily="34" charset="-120"/>
+              </a:rPr>
+              <a:t>Which finding most specifically suggests a toxic alcohol ingestion EARLY?</a:t>
+            </a:r>
+            <a:endParaRPr lang="en-US" sz="1450" dirty="0"/>
+          </a:p>
+        </p:txBody>
+      </p:sp>
+      <p:sp>
+        <p:nvSpPr>
+          <p:cNvPr id="5" name="Text 3"/>
+          <p:cNvSpPr/>
+          <p:nvPr/>
+        </p:nvSpPr>
+        <p:spPr>
+          <a:xfrm>
+            <a:off x="658368" y="2395728"/>
+            <a:ext cx="6192390" cy="3017520"/>
+          </a:xfrm>
+          <a:prstGeom prst="rect">
+            <a:avLst/>
+          </a:prstGeom>
+          <a:noFill/>
+          <a:ln/>
+        </p:spPr>
+        <p:txBody>
+          <a:bodyPr wrap="square" lIns="0" tIns="0" rIns="0" bIns="0" rtlCol="0" anchor="t"/>
+          <a:lstStyle/>
+          <a:p>
+            <a:pPr algn="l" indent="0" marL="0">
+              <a:spcAft>
+                <a:spcPts val="600"/>
+              </a:spcAft>
+              <a:buNone/>
+            </a:pPr>
+            <a:r>
+              <a:rPr lang="en-US" sz="1350" dirty="0">
+                <a:solidFill>
+                  <a:srgbClr val="33444F"/>
+                </a:solidFill>
+                <a:latin typeface="Calibri" pitchFamily="34" charset="0"/>
+                <a:ea typeface="Calibri" pitchFamily="34" charset="-122"/>
+                <a:cs typeface="Calibri" pitchFamily="34" charset="-120"/>
+              </a:rPr>
+              <a:t>A. High anion gap</a:t>
+            </a:r>
+            <a:endParaRPr lang="en-US" sz="1350" dirty="0"/>
+          </a:p>
+          <a:p>
+            <a:pPr algn="l" indent="0" marL="0">
+              <a:spcAft>
+                <a:spcPts val="600"/>
+              </a:spcAft>
+              <a:buNone/>
+            </a:pPr>
+            <a:r>
+              <a:rPr lang="en-US" sz="1350" b="1" dirty="0">
+                <a:solidFill>
+                  <a:srgbClr val="0D4A92"/>
+                </a:solidFill>
+                <a:latin typeface="Calibri" pitchFamily="34" charset="0"/>
+                <a:ea typeface="Calibri" pitchFamily="34" charset="-122"/>
+                <a:cs typeface="Calibri" pitchFamily="34" charset="-120"/>
+              </a:rPr>
+              <a:t>B. Elevated osmolal gap</a:t>
+            </a:r>
+            <a:endParaRPr lang="en-US" sz="1350" dirty="0"/>
+          </a:p>
+          <a:p>
+            <a:pPr algn="l" indent="0" marL="0">
+              <a:spcAft>
+                <a:spcPts val="600"/>
+              </a:spcAft>
+              <a:buNone/>
+            </a:pPr>
+            <a:r>
+              <a:rPr lang="en-US" sz="1350" dirty="0">
+                <a:solidFill>
+                  <a:srgbClr val="33444F"/>
+                </a:solidFill>
+                <a:latin typeface="Calibri" pitchFamily="34" charset="0"/>
+                <a:ea typeface="Calibri" pitchFamily="34" charset="-122"/>
+                <a:cs typeface="Calibri" pitchFamily="34" charset="-120"/>
+              </a:rPr>
+              <a:t>C. Low bicarbonate</a:t>
+            </a:r>
+            <a:endParaRPr lang="en-US" sz="1350" dirty="0"/>
+          </a:p>
+          <a:p>
+            <a:pPr algn="l" indent="0" marL="0">
+              <a:spcAft>
+                <a:spcPts val="600"/>
+              </a:spcAft>
+              <a:buNone/>
+            </a:pPr>
+            <a:r>
+              <a:rPr lang="en-US" sz="1350" dirty="0">
+                <a:solidFill>
+                  <a:srgbClr val="33444F"/>
+                </a:solidFill>
+                <a:latin typeface="Calibri" pitchFamily="34" charset="0"/>
+                <a:ea typeface="Calibri" pitchFamily="34" charset="-122"/>
+                <a:cs typeface="Calibri" pitchFamily="34" charset="-120"/>
+              </a:rPr>
+              <a:t>D. High lactate</a:t>
+            </a:r>
+            <a:endParaRPr lang="en-US" sz="1350" dirty="0"/>
+          </a:p>
+          <a:p>
+            <a:pPr algn="l" indent="0" marL="0">
+              <a:spcAft>
+                <a:spcPts val="600"/>
+              </a:spcAft>
+              <a:buNone/>
+            </a:pPr>
+            <a:r>
+              <a:rPr lang="en-US" sz="1350" dirty="0">
+                <a:solidFill>
+                  <a:srgbClr val="33444F"/>
+                </a:solidFill>
+                <a:latin typeface="Calibri" pitchFamily="34" charset="0"/>
+                <a:ea typeface="Calibri" pitchFamily="34" charset="-122"/>
+                <a:cs typeface="Calibri" pitchFamily="34" charset="-120"/>
+              </a:rPr>
+              <a:t>E. Ketonuria</a:t>
+            </a:r>
+            <a:endParaRPr lang="en-US" sz="1350" dirty="0"/>
+          </a:p>
+        </p:txBody>
+      </p:sp>
+      <p:sp>
+        <p:nvSpPr>
+          <p:cNvPr id="6" name="Shape 4"/>
+          <p:cNvSpPr/>
+          <p:nvPr/>
+        </p:nvSpPr>
+        <p:spPr>
+          <a:xfrm>
+            <a:off x="7201632" y="2395728"/>
+            <a:ext cx="4423136" cy="3246120"/>
+          </a:xfrm>
+          <a:prstGeom prst="roundRect">
+            <a:avLst>
+              <a:gd name="adj" fmla="val 2535"/>
+            </a:avLst>
+          </a:prstGeom>
+          <a:solidFill>
+            <a:srgbClr val="E7EFFA"/>
+          </a:solidFill>
+          <a:ln/>
+          <a:effectLst>
+            <a:outerShdw sx="100000" sy="100000" kx="0" ky="0" algn="bl" rotWithShape="0" blurRad="88900" dist="25400" dir="5400000">
+              <a:srgbClr val="22303C">
+                <a:alpha val="12000"/>
+              </a:srgbClr>
+            </a:outerShdw>
+          </a:effectLst>
+        </p:spPr>
+      </p:sp>
+      <p:sp>
+        <p:nvSpPr>
+          <p:cNvPr id="7" name="Text 5"/>
+          <p:cNvSpPr/>
+          <p:nvPr/>
+        </p:nvSpPr>
+        <p:spPr>
+          <a:xfrm>
+            <a:off x="7439376" y="2578608"/>
+            <a:ext cx="3965936" cy="457200"/>
+          </a:xfrm>
+          <a:prstGeom prst="rect">
+            <a:avLst/>
+          </a:prstGeom>
+          <a:noFill/>
+          <a:ln/>
+        </p:spPr>
+        <p:txBody>
+          <a:bodyPr wrap="square" lIns="0" tIns="0" rIns="0" bIns="0" rtlCol="0" anchor="ctr"/>
+          <a:lstStyle/>
+          <a:p>
+            <a:pPr indent="0" marL="0">
+              <a:buNone/>
+            </a:pPr>
+            <a:r>
+              <a:rPr lang="en-US" sz="1500" b="1" dirty="0">
+                <a:solidFill>
+                  <a:srgbClr val="1565C0"/>
+                </a:solidFill>
+                <a:latin typeface="Calibri" pitchFamily="34" charset="0"/>
+                <a:ea typeface="Calibri" pitchFamily="34" charset="-122"/>
+                <a:cs typeface="Calibri" pitchFamily="34" charset="-120"/>
+              </a:rPr>
+              <a:t>ANSWER  </a:t>
+            </a:r>
+            <a:pPr indent="0" marL="0">
+              <a:buNone/>
+            </a:pPr>
+            <a:r>
+              <a:rPr lang="en-US" sz="1500" b="1" dirty="0">
+                <a:solidFill>
+                  <a:srgbClr val="1B2A38"/>
+                </a:solidFill>
+                <a:latin typeface="Calibri" pitchFamily="34" charset="0"/>
+                <a:ea typeface="Calibri" pitchFamily="34" charset="-122"/>
+                <a:cs typeface="Calibri" pitchFamily="34" charset="-120"/>
+              </a:rPr>
+              <a:t>B — Elevated osmolal gap</a:t>
+            </a:r>
+            <a:endParaRPr lang="en-US" sz="1500" dirty="0"/>
+          </a:p>
+        </p:txBody>
+      </p:sp>
+      <p:sp>
+        <p:nvSpPr>
+          <p:cNvPr id="8" name="Text 6"/>
+          <p:cNvSpPr/>
+          <p:nvPr/>
+        </p:nvSpPr>
+        <p:spPr>
+          <a:xfrm>
+            <a:off x="7439376" y="3127248"/>
+            <a:ext cx="3947648" cy="2377440"/>
+          </a:xfrm>
+          <a:prstGeom prst="rect">
+            <a:avLst/>
+          </a:prstGeom>
+          <a:noFill/>
+          <a:ln/>
+        </p:spPr>
+        <p:txBody>
+          <a:bodyPr wrap="square" lIns="0" tIns="0" rIns="0" bIns="0" rtlCol="0" anchor="t"/>
+          <a:lstStyle/>
+          <a:p>
+            <a:pPr algn="l" indent="0" marL="0">
+              <a:lnSpc>
+                <a:spcPct val="108000"/>
+              </a:lnSpc>
+              <a:buNone/>
+            </a:pPr>
+            <a:r>
+              <a:rPr lang="en-US" sz="1250" dirty="0">
+                <a:solidFill>
+                  <a:srgbClr val="33444F"/>
+                </a:solidFill>
+                <a:latin typeface="Calibri" pitchFamily="34" charset="0"/>
+                <a:ea typeface="Calibri" pitchFamily="34" charset="-122"/>
+                <a:cs typeface="Calibri" pitchFamily="34" charset="-120"/>
+              </a:rPr>
+              <a:t>The parent alcohol is osmotically active, raising the osmolal gap early; the anion gap rises later as it is metabolized.</a:t>
+            </a:r>
+            <a:endParaRPr lang="en-US" sz="1250" dirty="0"/>
+          </a:p>
+        </p:txBody>
+      </p:sp>
+      <p:sp>
+        <p:nvSpPr>
+          <p:cNvPr id="9" name="Text 7"/>
+          <p:cNvSpPr/>
+          <p:nvPr/>
+        </p:nvSpPr>
+        <p:spPr>
+          <a:xfrm>
+            <a:off x="566928" y="6473952"/>
+            <a:ext cx="7772400" cy="274320"/>
+          </a:xfrm>
+          <a:prstGeom prst="rect">
+            <a:avLst/>
+          </a:prstGeom>
+          <a:noFill/>
+          <a:ln/>
+        </p:spPr>
+        <p:txBody>
+          <a:bodyPr wrap="square" lIns="0" tIns="0" rIns="0" bIns="0" rtlCol="0" anchor="ctr"/>
+          <a:lstStyle/>
+          <a:p>
+            <a:pPr algn="l" indent="0" marL="0">
+              <a:buNone/>
+            </a:pPr>
+            <a:r>
+              <a:rPr lang="en-US" sz="850" dirty="0">
+                <a:solidFill>
+                  <a:srgbClr val="9AA8B4"/>
+                </a:solidFill>
+                <a:latin typeface="Calibri" pitchFamily="34" charset="0"/>
+                <a:ea typeface="Calibri" pitchFamily="34" charset="-122"/>
+                <a:cs typeface="Calibri" pitchFamily="34" charset="-120"/>
+              </a:rPr>
+              <a:t>Makassed General Hospital  ·  Department of Laboratory Medicine</a:t>
+            </a:r>
+            <a:endParaRPr lang="en-US" sz="850" dirty="0"/>
+          </a:p>
+        </p:txBody>
+      </p:sp>
+      <p:sp>
+        <p:nvSpPr>
+          <p:cNvPr id="10" name="Text 8"/>
+          <p:cNvSpPr/>
+          <p:nvPr/>
+        </p:nvSpPr>
+        <p:spPr>
+          <a:xfrm>
+            <a:off x="9814255" y="6473952"/>
+            <a:ext cx="1828800" cy="274320"/>
+          </a:xfrm>
+          <a:prstGeom prst="rect">
+            <a:avLst/>
+          </a:prstGeom>
+          <a:noFill/>
+          <a:ln/>
+        </p:spPr>
+        <p:txBody>
+          <a:bodyPr wrap="square" lIns="0" tIns="0" rIns="0" bIns="0" rtlCol="0" anchor="ctr"/>
+          <a:lstStyle/>
+          <a:p>
+            <a:pPr algn="r" indent="0" marL="0">
+              <a:buNone/>
+            </a:pPr>
+            <a:r>
+              <a:rPr lang="en-US" sz="850" dirty="0">
+                <a:solidFill>
+                  <a:srgbClr val="9AA8B4"/>
+                </a:solidFill>
+                <a:latin typeface="Calibri" pitchFamily="34" charset="0"/>
+                <a:ea typeface="Calibri" pitchFamily="34" charset="-122"/>
+                <a:cs typeface="Calibri" pitchFamily="34" charset="-120"/>
+              </a:rPr>
+              <a:t>CP Lecture Series</a:t>
+            </a:r>
+            <a:pPr algn="r" indent="0" marL="0">
+              <a:buNone/>
+            </a:pPr>
+            <a:r>
+              <a:rPr lang="en-US" sz="850" dirty="0">
+                <a:solidFill>
+                  <a:srgbClr val="DCE4EC"/>
+                </a:solidFill>
+                <a:latin typeface="Calibri" pitchFamily="34" charset="0"/>
+                <a:ea typeface="Calibri" pitchFamily="34" charset="-122"/>
+                <a:cs typeface="Calibri" pitchFamily="34" charset="-120"/>
+              </a:rPr>
+              <a:t>   ·   </a:t>
+            </a:r>
+            <a:pPr algn="r" indent="0" marL="0">
+              <a:buNone/>
+            </a:pPr>
+            <a:r>
+              <a:rPr lang="en-US" sz="850" b="1" dirty="0">
+                <a:solidFill>
+                  <a:srgbClr val="1565C0"/>
+                </a:solidFill>
+                <a:latin typeface="Calibri" pitchFamily="34" charset="0"/>
+                <a:ea typeface="Calibri" pitchFamily="34" charset="-122"/>
+                <a:cs typeface="Calibri" pitchFamily="34" charset="-120"/>
+              </a:rPr>
+              <a:t>18</a:t>
+            </a:r>
+            <a:endParaRPr lang="en-US" sz="850" dirty="0"/>
+          </a:p>
+        </p:txBody>
+      </p:sp>
+    </p:spTree>
+  </p:cSld>
+  <p:clrMapOvr>
+    <a:masterClrMapping/>
+  </p:clrMapOvr>
+</p:sld>
+</file>
+
+<file path=ppt/slides/slide22.xml><?xml version="1.0" encoding="utf-8"?>
+<p:sld xmlns:a="http://schemas.openxmlformats.org/drawingml/2006/main" xmlns:r="http://schemas.openxmlformats.org/officeDocument/2006/relationships" xmlns:p="http://schemas.openxmlformats.org/presentationml/2006/main">
+  <p:cSld name="Slide 22">
+    <p:bg>
+      <p:bgPr>
+        <a:solidFill>
+          <a:srgbClr val="FFFFFF"/>
+        </a:solidFill>
+      </p:bgPr>
+    </p:bg>
+    <p:spTree>
+      <p:nvGrpSpPr>
+        <p:cNvPr id="1" name=""/>
+        <p:cNvGrpSpPr/>
+        <p:nvPr/>
+      </p:nvGrpSpPr>
+      <p:grpSpPr>
+        <a:xfrm>
+          <a:off x="0" y="0"/>
+          <a:ext cx="0" cy="0"/>
+          <a:chOff x="0" y="0"/>
+          <a:chExt cx="0" cy="0"/>
+        </a:xfrm>
+      </p:grpSpPr>
+      <p:sp>
+        <p:nvSpPr>
+          <p:cNvPr id="2" name="Text 0"/>
+          <p:cNvSpPr/>
+          <p:nvPr/>
+        </p:nvSpPr>
+        <p:spPr>
+          <a:xfrm>
+            <a:off x="566928" y="329184"/>
+            <a:ext cx="10515600" cy="310896"/>
+          </a:xfrm>
+          <a:prstGeom prst="rect">
+            <a:avLst/>
+          </a:prstGeom>
+          <a:noFill/>
+          <a:ln/>
+        </p:spPr>
+        <p:txBody>
+          <a:bodyPr wrap="square" lIns="0" tIns="0" rIns="0" bIns="0" rtlCol="0" anchor="ctr"/>
+          <a:lstStyle/>
+          <a:p>
+            <a:pPr algn="l" indent="0" marL="0">
+              <a:buNone/>
+            </a:pPr>
+            <a:r>
+              <a:rPr lang="en-US" sz="1100" b="1" spc="150" kern="0" dirty="0">
+                <a:solidFill>
+                  <a:srgbClr val="1565C0"/>
+                </a:solidFill>
+                <a:latin typeface="Calibri" pitchFamily="34" charset="0"/>
+                <a:ea typeface="Calibri" pitchFamily="34" charset="-122"/>
+                <a:cs typeface="Calibri" pitchFamily="34" charset="-120"/>
+              </a:rPr>
+              <a:t>CLINICAL CHEMISTRY   ·   BOARD REVIEW  ·  Q3</a:t>
+            </a:r>
+            <a:endParaRPr lang="en-US" sz="1100" dirty="0"/>
+          </a:p>
+        </p:txBody>
+      </p:sp>
+      <p:sp>
+        <p:nvSpPr>
+          <p:cNvPr id="3" name="Text 1"/>
+          <p:cNvSpPr/>
+          <p:nvPr/>
+        </p:nvSpPr>
+        <p:spPr>
+          <a:xfrm>
+            <a:off x="566928" y="713232"/>
+            <a:ext cx="11064240" cy="749808"/>
+          </a:xfrm>
+          <a:prstGeom prst="rect">
+            <a:avLst/>
+          </a:prstGeom>
+          <a:noFill/>
+          <a:ln/>
+        </p:spPr>
+        <p:txBody>
+          <a:bodyPr wrap="square" lIns="0" tIns="0" rIns="0" bIns="0" rtlCol="0" anchor="ctr"/>
+          <a:lstStyle/>
+          <a:p>
+            <a:pPr algn="l" indent="0" marL="0">
+              <a:buNone/>
+            </a:pPr>
+            <a:r>
+              <a:rPr lang="en-US" sz="2600" b="1" dirty="0">
+                <a:solidFill>
+                  <a:srgbClr val="0E3A5F"/>
+                </a:solidFill>
+                <a:latin typeface="Calibri" pitchFamily="34" charset="0"/>
+                <a:ea typeface="Calibri" pitchFamily="34" charset="-122"/>
+                <a:cs typeface="Calibri" pitchFamily="34" charset="-120"/>
+              </a:rPr>
+              <a:t>Board-Style Review</a:t>
+            </a:r>
+            <a:endParaRPr lang="en-US" sz="2600" dirty="0"/>
+          </a:p>
+        </p:txBody>
+      </p:sp>
+      <p:sp>
+        <p:nvSpPr>
+          <p:cNvPr id="4" name="Text 2"/>
+          <p:cNvSpPr/>
+          <p:nvPr/>
+        </p:nvSpPr>
+        <p:spPr>
+          <a:xfrm>
+            <a:off x="566928" y="1417320"/>
+            <a:ext cx="11057839" cy="914400"/>
+          </a:xfrm>
+          <a:prstGeom prst="rect">
+            <a:avLst/>
+          </a:prstGeom>
+          <a:noFill/>
+          <a:ln/>
+        </p:spPr>
+        <p:txBody>
+          <a:bodyPr wrap="square" lIns="0" tIns="0" rIns="0" bIns="0" rtlCol="0" anchor="t"/>
+          <a:lstStyle/>
+          <a:p>
+            <a:pPr algn="l" indent="0" marL="0">
+              <a:lnSpc>
+                <a:spcPct val="105000"/>
+              </a:lnSpc>
+              <a:buNone/>
+            </a:pPr>
+            <a:r>
+              <a:rPr lang="en-US" sz="1450" b="1" dirty="0">
+                <a:solidFill>
+                  <a:srgbClr val="1B2A38"/>
+                </a:solidFill>
+                <a:latin typeface="Calibri" pitchFamily="34" charset="0"/>
+                <a:ea typeface="Calibri" pitchFamily="34" charset="-122"/>
+                <a:cs typeface="Calibri" pitchFamily="34" charset="-120"/>
+              </a:rPr>
+              <a:t>A normal anion gap metabolic acidosis with hyperkalemia and urine pH &amp;lt; 5.5 suggests:</a:t>
+            </a:r>
+            <a:endParaRPr lang="en-US" sz="1450" dirty="0"/>
+          </a:p>
+        </p:txBody>
+      </p:sp>
+      <p:sp>
+        <p:nvSpPr>
+          <p:cNvPr id="5" name="Text 3"/>
+          <p:cNvSpPr/>
+          <p:nvPr/>
+        </p:nvSpPr>
+        <p:spPr>
+          <a:xfrm>
+            <a:off x="658368" y="2395728"/>
+            <a:ext cx="6192390" cy="3017520"/>
+          </a:xfrm>
+          <a:prstGeom prst="rect">
+            <a:avLst/>
+          </a:prstGeom>
+          <a:noFill/>
+          <a:ln/>
+        </p:spPr>
+        <p:txBody>
+          <a:bodyPr wrap="square" lIns="0" tIns="0" rIns="0" bIns="0" rtlCol="0" anchor="t"/>
+          <a:lstStyle/>
+          <a:p>
+            <a:pPr algn="l" indent="0" marL="0">
+              <a:spcAft>
+                <a:spcPts val="600"/>
+              </a:spcAft>
+              <a:buNone/>
+            </a:pPr>
+            <a:r>
+              <a:rPr lang="en-US" sz="1350" dirty="0">
+                <a:solidFill>
+                  <a:srgbClr val="33444F"/>
+                </a:solidFill>
+                <a:latin typeface="Calibri" pitchFamily="34" charset="0"/>
+                <a:ea typeface="Calibri" pitchFamily="34" charset="-122"/>
+                <a:cs typeface="Calibri" pitchFamily="34" charset="-120"/>
+              </a:rPr>
+              <a:t>A. Type 1 (distal) RTA</a:t>
+            </a:r>
+            <a:endParaRPr lang="en-US" sz="1350" dirty="0"/>
+          </a:p>
+          <a:p>
+            <a:pPr algn="l" indent="0" marL="0">
+              <a:spcAft>
+                <a:spcPts val="600"/>
+              </a:spcAft>
+              <a:buNone/>
+            </a:pPr>
+            <a:r>
+              <a:rPr lang="en-US" sz="1350" dirty="0">
+                <a:solidFill>
+                  <a:srgbClr val="33444F"/>
+                </a:solidFill>
+                <a:latin typeface="Calibri" pitchFamily="34" charset="0"/>
+                <a:ea typeface="Calibri" pitchFamily="34" charset="-122"/>
+                <a:cs typeface="Calibri" pitchFamily="34" charset="-120"/>
+              </a:rPr>
+              <a:t>B. Type 2 (proximal) RTA</a:t>
+            </a:r>
+            <a:endParaRPr lang="en-US" sz="1350" dirty="0"/>
+          </a:p>
+          <a:p>
+            <a:pPr algn="l" indent="0" marL="0">
+              <a:spcAft>
+                <a:spcPts val="600"/>
+              </a:spcAft>
+              <a:buNone/>
+            </a:pPr>
+            <a:r>
+              <a:rPr lang="en-US" sz="1350" b="1" dirty="0">
+                <a:solidFill>
+                  <a:srgbClr val="0D4A92"/>
+                </a:solidFill>
+                <a:latin typeface="Calibri" pitchFamily="34" charset="0"/>
+                <a:ea typeface="Calibri" pitchFamily="34" charset="-122"/>
+                <a:cs typeface="Calibri" pitchFamily="34" charset="-120"/>
+              </a:rPr>
+              <a:t>C. Type 4 RTA</a:t>
+            </a:r>
+            <a:endParaRPr lang="en-US" sz="1350" dirty="0"/>
+          </a:p>
+          <a:p>
+            <a:pPr algn="l" indent="0" marL="0">
+              <a:spcAft>
+                <a:spcPts val="600"/>
+              </a:spcAft>
+              <a:buNone/>
+            </a:pPr>
+            <a:r>
+              <a:rPr lang="en-US" sz="1350" dirty="0">
+                <a:solidFill>
+                  <a:srgbClr val="33444F"/>
+                </a:solidFill>
+                <a:latin typeface="Calibri" pitchFamily="34" charset="0"/>
+                <a:ea typeface="Calibri" pitchFamily="34" charset="-122"/>
+                <a:cs typeface="Calibri" pitchFamily="34" charset="-120"/>
+              </a:rPr>
+              <a:t>D. Diabetic ketoacidosis</a:t>
+            </a:r>
+            <a:endParaRPr lang="en-US" sz="1350" dirty="0"/>
+          </a:p>
+          <a:p>
+            <a:pPr algn="l" indent="0" marL="0">
+              <a:spcAft>
+                <a:spcPts val="600"/>
+              </a:spcAft>
+              <a:buNone/>
+            </a:pPr>
+            <a:r>
+              <a:rPr lang="en-US" sz="1350" dirty="0">
+                <a:solidFill>
+                  <a:srgbClr val="33444F"/>
+                </a:solidFill>
+                <a:latin typeface="Calibri" pitchFamily="34" charset="0"/>
+                <a:ea typeface="Calibri" pitchFamily="34" charset="-122"/>
+                <a:cs typeface="Calibri" pitchFamily="34" charset="-120"/>
+              </a:rPr>
+              <a:t>E. Lactic acidosis</a:t>
+            </a:r>
+            <a:endParaRPr lang="en-US" sz="1350" dirty="0"/>
+          </a:p>
+        </p:txBody>
+      </p:sp>
+      <p:sp>
+        <p:nvSpPr>
+          <p:cNvPr id="6" name="Shape 4"/>
+          <p:cNvSpPr/>
+          <p:nvPr/>
+        </p:nvSpPr>
+        <p:spPr>
+          <a:xfrm>
+            <a:off x="7201632" y="2395728"/>
+            <a:ext cx="4423136" cy="3246120"/>
+          </a:xfrm>
+          <a:prstGeom prst="roundRect">
+            <a:avLst>
+              <a:gd name="adj" fmla="val 2535"/>
+            </a:avLst>
+          </a:prstGeom>
+          <a:solidFill>
+            <a:srgbClr val="E7EFFA"/>
+          </a:solidFill>
+          <a:ln/>
+          <a:effectLst>
+            <a:outerShdw sx="100000" sy="100000" kx="0" ky="0" algn="bl" rotWithShape="0" blurRad="88900" dist="25400" dir="5400000">
+              <a:srgbClr val="22303C">
+                <a:alpha val="12000"/>
+              </a:srgbClr>
+            </a:outerShdw>
+          </a:effectLst>
+        </p:spPr>
+      </p:sp>
+      <p:sp>
+        <p:nvSpPr>
+          <p:cNvPr id="7" name="Text 5"/>
+          <p:cNvSpPr/>
+          <p:nvPr/>
+        </p:nvSpPr>
+        <p:spPr>
+          <a:xfrm>
+            <a:off x="7439376" y="2578608"/>
+            <a:ext cx="3965936" cy="457200"/>
+          </a:xfrm>
+          <a:prstGeom prst="rect">
+            <a:avLst/>
+          </a:prstGeom>
+          <a:noFill/>
+          <a:ln/>
+        </p:spPr>
+        <p:txBody>
+          <a:bodyPr wrap="square" lIns="0" tIns="0" rIns="0" bIns="0" rtlCol="0" anchor="ctr"/>
+          <a:lstStyle/>
+          <a:p>
+            <a:pPr indent="0" marL="0">
+              <a:buNone/>
+            </a:pPr>
+            <a:r>
+              <a:rPr lang="en-US" sz="1500" b="1" dirty="0">
+                <a:solidFill>
+                  <a:srgbClr val="1565C0"/>
+                </a:solidFill>
+                <a:latin typeface="Calibri" pitchFamily="34" charset="0"/>
+                <a:ea typeface="Calibri" pitchFamily="34" charset="-122"/>
+                <a:cs typeface="Calibri" pitchFamily="34" charset="-120"/>
+              </a:rPr>
+              <a:t>ANSWER  </a:t>
+            </a:r>
+            <a:pPr indent="0" marL="0">
+              <a:buNone/>
+            </a:pPr>
+            <a:r>
+              <a:rPr lang="en-US" sz="1500" b="1" dirty="0">
+                <a:solidFill>
+                  <a:srgbClr val="1B2A38"/>
+                </a:solidFill>
+                <a:latin typeface="Calibri" pitchFamily="34" charset="0"/>
+                <a:ea typeface="Calibri" pitchFamily="34" charset="-122"/>
+                <a:cs typeface="Calibri" pitchFamily="34" charset="-120"/>
+              </a:rPr>
+              <a:t>C — Type 4 RTA</a:t>
+            </a:r>
+            <a:endParaRPr lang="en-US" sz="1500" dirty="0"/>
+          </a:p>
+        </p:txBody>
+      </p:sp>
+      <p:sp>
+        <p:nvSpPr>
+          <p:cNvPr id="8" name="Text 6"/>
+          <p:cNvSpPr/>
+          <p:nvPr/>
+        </p:nvSpPr>
+        <p:spPr>
+          <a:xfrm>
+            <a:off x="7439376" y="3127248"/>
+            <a:ext cx="3947648" cy="2377440"/>
+          </a:xfrm>
+          <a:prstGeom prst="rect">
+            <a:avLst/>
+          </a:prstGeom>
+          <a:noFill/>
+          <a:ln/>
+        </p:spPr>
+        <p:txBody>
+          <a:bodyPr wrap="square" lIns="0" tIns="0" rIns="0" bIns="0" rtlCol="0" anchor="t"/>
+          <a:lstStyle/>
+          <a:p>
+            <a:pPr algn="l" indent="0" marL="0">
+              <a:lnSpc>
+                <a:spcPct val="108000"/>
+              </a:lnSpc>
+              <a:buNone/>
+            </a:pPr>
+            <a:r>
+              <a:rPr lang="en-US" sz="1250" dirty="0">
+                <a:solidFill>
+                  <a:srgbClr val="33444F"/>
+                </a:solidFill>
+                <a:latin typeface="Calibri" pitchFamily="34" charset="0"/>
+                <a:ea typeface="Calibri" pitchFamily="34" charset="-122"/>
+                <a:cs typeface="Calibri" pitchFamily="34" charset="-120"/>
+              </a:rPr>
+              <a:t>Type 4 RTA (aldosterone deficiency/resistance) causes hyperkalemic normal-gap acidosis with an acid urine; common in diabetic nephropathy.</a:t>
+            </a:r>
+            <a:endParaRPr lang="en-US" sz="1250" dirty="0"/>
+          </a:p>
+        </p:txBody>
+      </p:sp>
+      <p:sp>
+        <p:nvSpPr>
+          <p:cNvPr id="9" name="Text 7"/>
+          <p:cNvSpPr/>
+          <p:nvPr/>
+        </p:nvSpPr>
+        <p:spPr>
+          <a:xfrm>
+            <a:off x="566928" y="6473952"/>
+            <a:ext cx="7772400" cy="274320"/>
+          </a:xfrm>
+          <a:prstGeom prst="rect">
+            <a:avLst/>
+          </a:prstGeom>
+          <a:noFill/>
+          <a:ln/>
+        </p:spPr>
+        <p:txBody>
+          <a:bodyPr wrap="square" lIns="0" tIns="0" rIns="0" bIns="0" rtlCol="0" anchor="ctr"/>
+          <a:lstStyle/>
+          <a:p>
+            <a:pPr algn="l" indent="0" marL="0">
+              <a:buNone/>
+            </a:pPr>
+            <a:r>
+              <a:rPr lang="en-US" sz="850" dirty="0">
+                <a:solidFill>
+                  <a:srgbClr val="9AA8B4"/>
+                </a:solidFill>
+                <a:latin typeface="Calibri" pitchFamily="34" charset="0"/>
+                <a:ea typeface="Calibri" pitchFamily="34" charset="-122"/>
+                <a:cs typeface="Calibri" pitchFamily="34" charset="-120"/>
+              </a:rPr>
+              <a:t>Makassed General Hospital  ·  Department of Laboratory Medicine</a:t>
+            </a:r>
+            <a:endParaRPr lang="en-US" sz="850" dirty="0"/>
+          </a:p>
+        </p:txBody>
+      </p:sp>
+      <p:sp>
+        <p:nvSpPr>
+          <p:cNvPr id="10" name="Text 8"/>
+          <p:cNvSpPr/>
+          <p:nvPr/>
+        </p:nvSpPr>
+        <p:spPr>
+          <a:xfrm>
+            <a:off x="9814255" y="6473952"/>
+            <a:ext cx="1828800" cy="274320"/>
+          </a:xfrm>
+          <a:prstGeom prst="rect">
+            <a:avLst/>
+          </a:prstGeom>
+          <a:noFill/>
+          <a:ln/>
+        </p:spPr>
+        <p:txBody>
+          <a:bodyPr wrap="square" lIns="0" tIns="0" rIns="0" bIns="0" rtlCol="0" anchor="ctr"/>
+          <a:lstStyle/>
+          <a:p>
+            <a:pPr algn="r" indent="0" marL="0">
+              <a:buNone/>
+            </a:pPr>
+            <a:r>
+              <a:rPr lang="en-US" sz="850" dirty="0">
+                <a:solidFill>
+                  <a:srgbClr val="9AA8B4"/>
+                </a:solidFill>
+                <a:latin typeface="Calibri" pitchFamily="34" charset="0"/>
+                <a:ea typeface="Calibri" pitchFamily="34" charset="-122"/>
+                <a:cs typeface="Calibri" pitchFamily="34" charset="-120"/>
+              </a:rPr>
+              <a:t>CP Lecture Series</a:t>
+            </a:r>
+            <a:pPr algn="r" indent="0" marL="0">
+              <a:buNone/>
+            </a:pPr>
+            <a:r>
+              <a:rPr lang="en-US" sz="850" dirty="0">
+                <a:solidFill>
+                  <a:srgbClr val="DCE4EC"/>
+                </a:solidFill>
+                <a:latin typeface="Calibri" pitchFamily="34" charset="0"/>
+                <a:ea typeface="Calibri" pitchFamily="34" charset="-122"/>
+                <a:cs typeface="Calibri" pitchFamily="34" charset="-120"/>
+              </a:rPr>
+              <a:t>   ·   </a:t>
+            </a:r>
+            <a:pPr algn="r" indent="0" marL="0">
+              <a:buNone/>
+            </a:pPr>
+            <a:r>
+              <a:rPr lang="en-US" sz="850" b="1" dirty="0">
+                <a:solidFill>
+                  <a:srgbClr val="1565C0"/>
+                </a:solidFill>
+                <a:latin typeface="Calibri" pitchFamily="34" charset="0"/>
+                <a:ea typeface="Calibri" pitchFamily="34" charset="-122"/>
+                <a:cs typeface="Calibri" pitchFamily="34" charset="-120"/>
+              </a:rPr>
+              <a:t>19</a:t>
+            </a:r>
+            <a:endParaRPr lang="en-US" sz="850" dirty="0"/>
+          </a:p>
+        </p:txBody>
+      </p:sp>
+    </p:spTree>
+  </p:cSld>
+  <p:clrMapOvr>
+    <a:masterClrMapping/>
+  </p:clrMapOvr>
+</p:sld>
+</file>
+
+<file path=ppt/slides/slide23.xml><?xml version="1.0" encoding="utf-8"?>
+<p:sld xmlns:a="http://schemas.openxmlformats.org/drawingml/2006/main" xmlns:r="http://schemas.openxmlformats.org/officeDocument/2006/relationships" xmlns:p="http://schemas.openxmlformats.org/presentationml/2006/main">
+  <p:cSld name="Slide 23">
+    <p:bg>
+      <p:bgPr>
+        <a:solidFill>
+          <a:srgbClr val="FFFFFF"/>
+        </a:solidFill>
+      </p:bgPr>
+    </p:bg>
+    <p:spTree>
+      <p:nvGrpSpPr>
+        <p:cNvPr id="1" name=""/>
+        <p:cNvGrpSpPr/>
+        <p:nvPr/>
+      </p:nvGrpSpPr>
+      <p:grpSpPr>
+        <a:xfrm>
+          <a:off x="0" y="0"/>
+          <a:ext cx="0" cy="0"/>
+          <a:chOff x="0" y="0"/>
+          <a:chExt cx="0" cy="0"/>
+        </a:xfrm>
+      </p:grpSpPr>
+      <p:sp>
+        <p:nvSpPr>
+          <p:cNvPr id="2" name="Text 0"/>
+          <p:cNvSpPr/>
+          <p:nvPr/>
+        </p:nvSpPr>
+        <p:spPr>
+          <a:xfrm>
+            <a:off x="566928" y="329184"/>
+            <a:ext cx="10515600" cy="310896"/>
+          </a:xfrm>
+          <a:prstGeom prst="rect">
+            <a:avLst/>
+          </a:prstGeom>
+          <a:noFill/>
+          <a:ln/>
+        </p:spPr>
+        <p:txBody>
+          <a:bodyPr wrap="square" lIns="0" tIns="0" rIns="0" bIns="0" rtlCol="0" anchor="ctr"/>
+          <a:lstStyle/>
+          <a:p>
+            <a:pPr algn="l" indent="0" marL="0">
+              <a:buNone/>
+            </a:pPr>
+            <a:r>
+              <a:rPr lang="en-US" sz="1100" b="1" spc="150" kern="0" dirty="0">
+                <a:solidFill>
+                  <a:srgbClr val="1565C0"/>
+                </a:solidFill>
+                <a:latin typeface="Calibri" pitchFamily="34" charset="0"/>
+                <a:ea typeface="Calibri" pitchFamily="34" charset="-122"/>
+                <a:cs typeface="Calibri" pitchFamily="34" charset="-120"/>
+              </a:rPr>
+              <a:t>CLINICAL CHEMISTRY   ·   BOARD REVIEW  ·  Q4</a:t>
+            </a:r>
+            <a:endParaRPr lang="en-US" sz="1100" dirty="0"/>
+          </a:p>
+        </p:txBody>
+      </p:sp>
+      <p:sp>
+        <p:nvSpPr>
+          <p:cNvPr id="3" name="Text 1"/>
+          <p:cNvSpPr/>
+          <p:nvPr/>
+        </p:nvSpPr>
+        <p:spPr>
+          <a:xfrm>
+            <a:off x="566928" y="713232"/>
+            <a:ext cx="11064240" cy="749808"/>
+          </a:xfrm>
+          <a:prstGeom prst="rect">
+            <a:avLst/>
+          </a:prstGeom>
+          <a:noFill/>
+          <a:ln/>
+        </p:spPr>
+        <p:txBody>
+          <a:bodyPr wrap="square" lIns="0" tIns="0" rIns="0" bIns="0" rtlCol="0" anchor="ctr"/>
+          <a:lstStyle/>
+          <a:p>
+            <a:pPr algn="l" indent="0" marL="0">
+              <a:buNone/>
+            </a:pPr>
+            <a:r>
+              <a:rPr lang="en-US" sz="2600" b="1" dirty="0">
+                <a:solidFill>
+                  <a:srgbClr val="0E3A5F"/>
+                </a:solidFill>
+                <a:latin typeface="Calibri" pitchFamily="34" charset="0"/>
+                <a:ea typeface="Calibri" pitchFamily="34" charset="-122"/>
+                <a:cs typeface="Calibri" pitchFamily="34" charset="-120"/>
+              </a:rPr>
+              <a:t>Board-Style Review</a:t>
+            </a:r>
+            <a:endParaRPr lang="en-US" sz="2600" dirty="0"/>
+          </a:p>
+        </p:txBody>
+      </p:sp>
+      <p:sp>
+        <p:nvSpPr>
+          <p:cNvPr id="4" name="Text 2"/>
+          <p:cNvSpPr/>
+          <p:nvPr/>
+        </p:nvSpPr>
+        <p:spPr>
+          <a:xfrm>
+            <a:off x="566928" y="1417320"/>
+            <a:ext cx="11057839" cy="914400"/>
+          </a:xfrm>
+          <a:prstGeom prst="rect">
+            <a:avLst/>
+          </a:prstGeom>
+          <a:noFill/>
+          <a:ln/>
+        </p:spPr>
+        <p:txBody>
+          <a:bodyPr wrap="square" lIns="0" tIns="0" rIns="0" bIns="0" rtlCol="0" anchor="t"/>
+          <a:lstStyle/>
+          <a:p>
+            <a:pPr algn="l" indent="0" marL="0">
+              <a:lnSpc>
+                <a:spcPct val="105000"/>
+              </a:lnSpc>
+              <a:buNone/>
+            </a:pPr>
+            <a:r>
+              <a:rPr lang="en-US" sz="1450" b="1" dirty="0">
+                <a:solidFill>
+                  <a:srgbClr val="1B2A38"/>
+                </a:solidFill>
+                <a:latin typeface="Calibri" pitchFamily="34" charset="0"/>
+                <a:ea typeface="Calibri" pitchFamily="34" charset="-122"/>
+                <a:cs typeface="Calibri" pitchFamily="34" charset="-120"/>
+              </a:rPr>
+              <a:t>A patient’s measured serum sodium is low but corrected sodium (for glucose of 44 mmol/L) is normal. This is:</a:t>
+            </a:r>
+            <a:endParaRPr lang="en-US" sz="1450" dirty="0"/>
+          </a:p>
+        </p:txBody>
+      </p:sp>
+      <p:sp>
+        <p:nvSpPr>
+          <p:cNvPr id="5" name="Text 3"/>
+          <p:cNvSpPr/>
+          <p:nvPr/>
+        </p:nvSpPr>
+        <p:spPr>
+          <a:xfrm>
+            <a:off x="658368" y="2395728"/>
+            <a:ext cx="6192390" cy="3017520"/>
+          </a:xfrm>
+          <a:prstGeom prst="rect">
+            <a:avLst/>
+          </a:prstGeom>
+          <a:noFill/>
+          <a:ln/>
+        </p:spPr>
+        <p:txBody>
+          <a:bodyPr wrap="square" lIns="0" tIns="0" rIns="0" bIns="0" rtlCol="0" anchor="t"/>
+          <a:lstStyle/>
+          <a:p>
+            <a:pPr algn="l" indent="0" marL="0">
+              <a:spcAft>
+                <a:spcPts val="600"/>
+              </a:spcAft>
+              <a:buNone/>
+            </a:pPr>
+            <a:r>
+              <a:rPr lang="en-US" sz="1350" dirty="0">
+                <a:solidFill>
+                  <a:srgbClr val="33444F"/>
+                </a:solidFill>
+                <a:latin typeface="Calibri" pitchFamily="34" charset="0"/>
+                <a:ea typeface="Calibri" pitchFamily="34" charset="-122"/>
+                <a:cs typeface="Calibri" pitchFamily="34" charset="-120"/>
+              </a:rPr>
+              <a:t>A. Pseudohyponatremia</a:t>
+            </a:r>
+            <a:endParaRPr lang="en-US" sz="1350" dirty="0"/>
+          </a:p>
+          <a:p>
+            <a:pPr algn="l" indent="0" marL="0">
+              <a:spcAft>
+                <a:spcPts val="600"/>
+              </a:spcAft>
+              <a:buNone/>
+            </a:pPr>
+            <a:r>
+              <a:rPr lang="en-US" sz="1350" b="1" dirty="0">
+                <a:solidFill>
+                  <a:srgbClr val="0D4A92"/>
+                </a:solidFill>
+                <a:latin typeface="Calibri" pitchFamily="34" charset="0"/>
+                <a:ea typeface="Calibri" pitchFamily="34" charset="-122"/>
+                <a:cs typeface="Calibri" pitchFamily="34" charset="-120"/>
+              </a:rPr>
+              <a:t>B. Translocational (hyperglycemic) hyponatremia</a:t>
+            </a:r>
+            <a:endParaRPr lang="en-US" sz="1350" dirty="0"/>
+          </a:p>
+          <a:p>
+            <a:pPr algn="l" indent="0" marL="0">
+              <a:spcAft>
+                <a:spcPts val="600"/>
+              </a:spcAft>
+              <a:buNone/>
+            </a:pPr>
+            <a:r>
+              <a:rPr lang="en-US" sz="1350" dirty="0">
+                <a:solidFill>
+                  <a:srgbClr val="33444F"/>
+                </a:solidFill>
+                <a:latin typeface="Calibri" pitchFamily="34" charset="0"/>
+                <a:ea typeface="Calibri" pitchFamily="34" charset="-122"/>
+                <a:cs typeface="Calibri" pitchFamily="34" charset="-120"/>
+              </a:rPr>
+              <a:t>C. SIADH</a:t>
+            </a:r>
+            <a:endParaRPr lang="en-US" sz="1350" dirty="0"/>
+          </a:p>
+          <a:p>
+            <a:pPr algn="l" indent="0" marL="0">
+              <a:spcAft>
+                <a:spcPts val="600"/>
+              </a:spcAft>
+              <a:buNone/>
+            </a:pPr>
+            <a:r>
+              <a:rPr lang="en-US" sz="1350" dirty="0">
+                <a:solidFill>
+                  <a:srgbClr val="33444F"/>
+                </a:solidFill>
+                <a:latin typeface="Calibri" pitchFamily="34" charset="0"/>
+                <a:ea typeface="Calibri" pitchFamily="34" charset="-122"/>
+                <a:cs typeface="Calibri" pitchFamily="34" charset="-120"/>
+              </a:rPr>
+              <a:t>D. Diabetes insipidus</a:t>
+            </a:r>
+            <a:endParaRPr lang="en-US" sz="1350" dirty="0"/>
+          </a:p>
+          <a:p>
+            <a:pPr algn="l" indent="0" marL="0">
+              <a:spcAft>
+                <a:spcPts val="600"/>
+              </a:spcAft>
+              <a:buNone/>
+            </a:pPr>
+            <a:r>
+              <a:rPr lang="en-US" sz="1350" dirty="0">
+                <a:solidFill>
+                  <a:srgbClr val="33444F"/>
+                </a:solidFill>
+                <a:latin typeface="Calibri" pitchFamily="34" charset="0"/>
+                <a:ea typeface="Calibri" pitchFamily="34" charset="-122"/>
+                <a:cs typeface="Calibri" pitchFamily="34" charset="-120"/>
+              </a:rPr>
+              <a:t>E. True hypotonic hyponatremia</a:t>
+            </a:r>
+            <a:endParaRPr lang="en-US" sz="1350" dirty="0"/>
+          </a:p>
+        </p:txBody>
+      </p:sp>
+      <p:sp>
+        <p:nvSpPr>
+          <p:cNvPr id="6" name="Shape 4"/>
+          <p:cNvSpPr/>
+          <p:nvPr/>
+        </p:nvSpPr>
+        <p:spPr>
+          <a:xfrm>
+            <a:off x="7201632" y="2395728"/>
+            <a:ext cx="4423136" cy="3246120"/>
+          </a:xfrm>
+          <a:prstGeom prst="roundRect">
+            <a:avLst>
+              <a:gd name="adj" fmla="val 2535"/>
+            </a:avLst>
+          </a:prstGeom>
+          <a:solidFill>
+            <a:srgbClr val="E7EFFA"/>
+          </a:solidFill>
+          <a:ln/>
+          <a:effectLst>
+            <a:outerShdw sx="100000" sy="100000" kx="0" ky="0" algn="bl" rotWithShape="0" blurRad="88900" dist="25400" dir="5400000">
+              <a:srgbClr val="22303C">
+                <a:alpha val="12000"/>
+              </a:srgbClr>
+            </a:outerShdw>
+          </a:effectLst>
+        </p:spPr>
+      </p:sp>
+      <p:sp>
+        <p:nvSpPr>
+          <p:cNvPr id="7" name="Text 5"/>
+          <p:cNvSpPr/>
+          <p:nvPr/>
+        </p:nvSpPr>
+        <p:spPr>
+          <a:xfrm>
+            <a:off x="7439376" y="2578608"/>
+            <a:ext cx="3965936" cy="457200"/>
+          </a:xfrm>
+          <a:prstGeom prst="rect">
+            <a:avLst/>
+          </a:prstGeom>
+          <a:noFill/>
+          <a:ln/>
+        </p:spPr>
+        <p:txBody>
+          <a:bodyPr wrap="square" lIns="0" tIns="0" rIns="0" bIns="0" rtlCol="0" anchor="ctr"/>
+          <a:lstStyle/>
+          <a:p>
+            <a:pPr indent="0" marL="0">
+              <a:buNone/>
+            </a:pPr>
+            <a:r>
+              <a:rPr lang="en-US" sz="1500" b="1" dirty="0">
+                <a:solidFill>
+                  <a:srgbClr val="1565C0"/>
+                </a:solidFill>
+                <a:latin typeface="Calibri" pitchFamily="34" charset="0"/>
+                <a:ea typeface="Calibri" pitchFamily="34" charset="-122"/>
+                <a:cs typeface="Calibri" pitchFamily="34" charset="-120"/>
+              </a:rPr>
+              <a:t>ANSWER  </a:t>
+            </a:r>
+            <a:pPr indent="0" marL="0">
+              <a:buNone/>
+            </a:pPr>
+            <a:r>
+              <a:rPr lang="en-US" sz="1500" b="1" dirty="0">
+                <a:solidFill>
+                  <a:srgbClr val="1B2A38"/>
+                </a:solidFill>
+                <a:latin typeface="Calibri" pitchFamily="34" charset="0"/>
+                <a:ea typeface="Calibri" pitchFamily="34" charset="-122"/>
+                <a:cs typeface="Calibri" pitchFamily="34" charset="-120"/>
+              </a:rPr>
+              <a:t>B — Translocational hyponatremia</a:t>
+            </a:r>
+            <a:endParaRPr lang="en-US" sz="1500" dirty="0"/>
+          </a:p>
+        </p:txBody>
+      </p:sp>
+      <p:sp>
+        <p:nvSpPr>
+          <p:cNvPr id="8" name="Text 6"/>
+          <p:cNvSpPr/>
+          <p:nvPr/>
+        </p:nvSpPr>
+        <p:spPr>
+          <a:xfrm>
+            <a:off x="7439376" y="3127248"/>
+            <a:ext cx="3947648" cy="2377440"/>
+          </a:xfrm>
+          <a:prstGeom prst="rect">
+            <a:avLst/>
+          </a:prstGeom>
+          <a:noFill/>
+          <a:ln/>
+        </p:spPr>
+        <p:txBody>
+          <a:bodyPr wrap="square" lIns="0" tIns="0" rIns="0" bIns="0" rtlCol="0" anchor="t"/>
+          <a:lstStyle/>
+          <a:p>
+            <a:pPr algn="l" indent="0" marL="0">
+              <a:lnSpc>
+                <a:spcPct val="108000"/>
+              </a:lnSpc>
+              <a:buNone/>
+            </a:pPr>
+            <a:r>
+              <a:rPr lang="en-US" sz="1250" dirty="0">
+                <a:solidFill>
+                  <a:srgbClr val="33444F"/>
+                </a:solidFill>
+                <a:latin typeface="Calibri" pitchFamily="34" charset="0"/>
+                <a:ea typeface="Calibri" pitchFamily="34" charset="-122"/>
+                <a:cs typeface="Calibri" pitchFamily="34" charset="-120"/>
+              </a:rPr>
+              <a:t>Hyperglycemia draws water into the vascular space, diluting sodium; correcting for glucose normalizes it. Osmolality is high/normal, not low.</a:t>
+            </a:r>
+            <a:endParaRPr lang="en-US" sz="1250" dirty="0"/>
+          </a:p>
+        </p:txBody>
+      </p:sp>
+      <p:sp>
+        <p:nvSpPr>
+          <p:cNvPr id="9" name="Text 7"/>
+          <p:cNvSpPr/>
+          <p:nvPr/>
+        </p:nvSpPr>
+        <p:spPr>
+          <a:xfrm>
+            <a:off x="566928" y="6473952"/>
+            <a:ext cx="7772400" cy="274320"/>
+          </a:xfrm>
+          <a:prstGeom prst="rect">
+            <a:avLst/>
+          </a:prstGeom>
+          <a:noFill/>
+          <a:ln/>
+        </p:spPr>
+        <p:txBody>
+          <a:bodyPr wrap="square" lIns="0" tIns="0" rIns="0" bIns="0" rtlCol="0" anchor="ctr"/>
+          <a:lstStyle/>
+          <a:p>
+            <a:pPr algn="l" indent="0" marL="0">
+              <a:buNone/>
+            </a:pPr>
+            <a:r>
+              <a:rPr lang="en-US" sz="850" dirty="0">
+                <a:solidFill>
+                  <a:srgbClr val="9AA8B4"/>
+                </a:solidFill>
+                <a:latin typeface="Calibri" pitchFamily="34" charset="0"/>
+                <a:ea typeface="Calibri" pitchFamily="34" charset="-122"/>
+                <a:cs typeface="Calibri" pitchFamily="34" charset="-120"/>
+              </a:rPr>
+              <a:t>Makassed General Hospital  ·  Department of Laboratory Medicine</a:t>
+            </a:r>
+            <a:endParaRPr lang="en-US" sz="850" dirty="0"/>
+          </a:p>
+        </p:txBody>
+      </p:sp>
+      <p:sp>
+        <p:nvSpPr>
+          <p:cNvPr id="10" name="Text 8"/>
+          <p:cNvSpPr/>
+          <p:nvPr/>
+        </p:nvSpPr>
+        <p:spPr>
+          <a:xfrm>
+            <a:off x="9814255" y="6473952"/>
+            <a:ext cx="1828800" cy="274320"/>
+          </a:xfrm>
+          <a:prstGeom prst="rect">
+            <a:avLst/>
+          </a:prstGeom>
+          <a:noFill/>
+          <a:ln/>
+        </p:spPr>
+        <p:txBody>
+          <a:bodyPr wrap="square" lIns="0" tIns="0" rIns="0" bIns="0" rtlCol="0" anchor="ctr"/>
+          <a:lstStyle/>
+          <a:p>
+            <a:pPr algn="r" indent="0" marL="0">
+              <a:buNone/>
+            </a:pPr>
+            <a:r>
+              <a:rPr lang="en-US" sz="850" dirty="0">
+                <a:solidFill>
+                  <a:srgbClr val="9AA8B4"/>
+                </a:solidFill>
+                <a:latin typeface="Calibri" pitchFamily="34" charset="0"/>
+                <a:ea typeface="Calibri" pitchFamily="34" charset="-122"/>
+                <a:cs typeface="Calibri" pitchFamily="34" charset="-120"/>
+              </a:rPr>
+              <a:t>CP Lecture Series</a:t>
+            </a:r>
+            <a:pPr algn="r" indent="0" marL="0">
+              <a:buNone/>
+            </a:pPr>
+            <a:r>
+              <a:rPr lang="en-US" sz="850" dirty="0">
+                <a:solidFill>
+                  <a:srgbClr val="DCE4EC"/>
+                </a:solidFill>
+                <a:latin typeface="Calibri" pitchFamily="34" charset="0"/>
+                <a:ea typeface="Calibri" pitchFamily="34" charset="-122"/>
+                <a:cs typeface="Calibri" pitchFamily="34" charset="-120"/>
+              </a:rPr>
+              <a:t>   ·   </a:t>
+            </a:r>
+            <a:pPr algn="r" indent="0" marL="0">
+              <a:buNone/>
+            </a:pPr>
+            <a:r>
+              <a:rPr lang="en-US" sz="850" b="1" dirty="0">
+                <a:solidFill>
+                  <a:srgbClr val="1565C0"/>
+                </a:solidFill>
+                <a:latin typeface="Calibri" pitchFamily="34" charset="0"/>
+                <a:ea typeface="Calibri" pitchFamily="34" charset="-122"/>
+                <a:cs typeface="Calibri" pitchFamily="34" charset="-120"/>
+              </a:rPr>
+              <a:t>20</a:t>
+            </a:r>
+            <a:endParaRPr lang="en-US" sz="850" dirty="0"/>
+          </a:p>
+        </p:txBody>
+      </p:sp>
+    </p:spTree>
+  </p:cSld>
+  <p:clrMapOvr>
+    <a:masterClrMapping/>
+  </p:clrMapOvr>
+</p:sld>
+</file>
+
+<file path=ppt/slides/slide24.xml><?xml version="1.0" encoding="utf-8"?>
+<p:sld xmlns:a="http://schemas.openxmlformats.org/drawingml/2006/main" xmlns:r="http://schemas.openxmlformats.org/officeDocument/2006/relationships" xmlns:p="http://schemas.openxmlformats.org/presentationml/2006/main">
+  <p:cSld name="Slide 24">
+    <p:bg>
+      <p:bgPr>
+        <a:solidFill>
+          <a:srgbClr val="0A2A45"/>
+        </a:solidFill>
+      </p:bgPr>
+    </p:bg>
+    <p:spTree>
+      <p:nvGrpSpPr>
+        <p:cNvPr id="1" name=""/>
+        <p:cNvGrpSpPr/>
+        <p:nvPr/>
+      </p:nvGrpSpPr>
+      <p:grpSpPr>
+        <a:xfrm>
+          <a:off x="0" y="0"/>
+          <a:ext cx="0" cy="0"/>
+          <a:chOff x="0" y="0"/>
+          <a:chExt cx="0" cy="0"/>
+        </a:xfrm>
+      </p:grpSpPr>
+      <p:sp>
+        <p:nvSpPr>
+          <p:cNvPr id="2" name="Text 0"/>
+          <p:cNvSpPr/>
+          <p:nvPr/>
+        </p:nvSpPr>
+        <p:spPr>
+          <a:xfrm>
+            <a:off x="566928" y="329184"/>
+            <a:ext cx="10058400" cy="310896"/>
+          </a:xfrm>
+          <a:prstGeom prst="rect">
+            <a:avLst/>
+          </a:prstGeom>
+          <a:noFill/>
+          <a:ln/>
+        </p:spPr>
+        <p:txBody>
+          <a:bodyPr wrap="square" lIns="0" tIns="0" rIns="0" bIns="0" rtlCol="0" anchor="ctr"/>
+          <a:lstStyle/>
+          <a:p>
+            <a:pPr indent="0" marL="0">
+              <a:buNone/>
+            </a:pPr>
+            <a:r>
+              <a:rPr lang="en-US" sz="1100" b="1" spc="150" kern="0" dirty="0">
+                <a:solidFill>
+                  <a:srgbClr val="1565C0"/>
+                </a:solidFill>
+                <a:latin typeface="Calibri" pitchFamily="34" charset="0"/>
+                <a:ea typeface="Calibri" pitchFamily="34" charset="-122"/>
+                <a:cs typeface="Calibri" pitchFamily="34" charset="-120"/>
+              </a:rPr>
+              <a:t>CLINICAL CHEMISTRY</a:t>
+            </a:r>
+            <a:endParaRPr lang="en-US" sz="1100" dirty="0"/>
+          </a:p>
+        </p:txBody>
+      </p:sp>
+      <p:sp>
+        <p:nvSpPr>
+          <p:cNvPr id="3" name="Text 1"/>
+          <p:cNvSpPr/>
+          <p:nvPr/>
+        </p:nvSpPr>
+        <p:spPr>
+          <a:xfrm>
+            <a:off x="566928" y="676656"/>
+            <a:ext cx="10972800" cy="749808"/>
+          </a:xfrm>
+          <a:prstGeom prst="rect">
+            <a:avLst/>
+          </a:prstGeom>
+          <a:noFill/>
+          <a:ln/>
+        </p:spPr>
+        <p:txBody>
+          <a:bodyPr wrap="square" lIns="0" tIns="0" rIns="0" bIns="0" rtlCol="0" anchor="ctr"/>
+          <a:lstStyle/>
+          <a:p>
+            <a:pPr indent="0" marL="0">
+              <a:buNone/>
+            </a:pPr>
+            <a:r>
+              <a:rPr lang="en-US" sz="3000" b="1" dirty="0">
+                <a:solidFill>
+                  <a:srgbClr val="FFFFFF"/>
+                </a:solidFill>
+                <a:latin typeface="Calibri" pitchFamily="34" charset="0"/>
+                <a:ea typeface="Calibri" pitchFamily="34" charset="-122"/>
+                <a:cs typeface="Calibri" pitchFamily="34" charset="-120"/>
+              </a:rPr>
+              <a:t>Key Take-Home Points</a:t>
+            </a:r>
+            <a:endParaRPr lang="en-US" sz="3000" dirty="0"/>
+          </a:p>
+        </p:txBody>
+      </p:sp>
+      <p:sp>
+        <p:nvSpPr>
+          <p:cNvPr id="4" name="Shape 2"/>
+          <p:cNvSpPr/>
+          <p:nvPr/>
+        </p:nvSpPr>
+        <p:spPr>
+          <a:xfrm>
+            <a:off x="566928" y="1517904"/>
+            <a:ext cx="11057839" cy="841248"/>
+          </a:xfrm>
+          <a:prstGeom prst="roundRect">
+            <a:avLst>
+              <a:gd name="adj" fmla="val 7609"/>
+            </a:avLst>
+          </a:prstGeom>
+          <a:solidFill>
+            <a:srgbClr val="143651"/>
+          </a:solidFill>
+          <a:ln/>
+        </p:spPr>
+      </p:sp>
+      <p:sp>
+        <p:nvSpPr>
+          <p:cNvPr id="5" name="Shape 3"/>
+          <p:cNvSpPr/>
+          <p:nvPr/>
+        </p:nvSpPr>
+        <p:spPr>
+          <a:xfrm>
+            <a:off x="749808" y="1755648"/>
+            <a:ext cx="365760" cy="365760"/>
+          </a:xfrm>
+          <a:prstGeom prst="ellipse">
+            <a:avLst/>
+          </a:prstGeom>
+          <a:solidFill>
+            <a:srgbClr val="1565C0"/>
+          </a:solidFill>
+          <a:ln/>
+          <a:effectLst>
+            <a:outerShdw sx="100000" sy="100000" kx="0" ky="0" algn="bl" rotWithShape="0" blurRad="88900" dist="25400" dir="5400000">
+              <a:srgbClr val="22303C">
+                <a:alpha val="12000"/>
+              </a:srgbClr>
+            </a:outerShdw>
+          </a:effectLst>
+        </p:spPr>
+      </p:sp>
+      <p:sp>
+        <p:nvSpPr>
+          <p:cNvPr id="6" name="Text 4"/>
+          <p:cNvSpPr/>
+          <p:nvPr/>
+        </p:nvSpPr>
+        <p:spPr>
+          <a:xfrm>
+            <a:off x="749808" y="1755648"/>
+            <a:ext cx="365760" cy="365760"/>
+          </a:xfrm>
+          <a:prstGeom prst="rect">
+            <a:avLst/>
+          </a:prstGeom>
+          <a:noFill/>
+          <a:ln/>
+        </p:spPr>
+        <p:txBody>
+          <a:bodyPr wrap="square" lIns="0" tIns="0" rIns="0" bIns="0" rtlCol="0" anchor="ctr"/>
+          <a:lstStyle/>
+          <a:p>
+            <a:pPr algn="ctr" indent="0" marL="0">
+              <a:buNone/>
+            </a:pPr>
+            <a:r>
+              <a:rPr lang="en-US" sz="1500" b="1" dirty="0">
+                <a:solidFill>
+                  <a:srgbClr val="FFFFFF"/>
+                </a:solidFill>
+                <a:latin typeface="Calibri" pitchFamily="34" charset="0"/>
+                <a:ea typeface="Calibri" pitchFamily="34" charset="-122"/>
+                <a:cs typeface="Calibri" pitchFamily="34" charset="-120"/>
+              </a:rPr>
+              <a:t>1</a:t>
+            </a:r>
+            <a:endParaRPr lang="en-US" sz="1500" dirty="0"/>
+          </a:p>
+        </p:txBody>
+      </p:sp>
+      <p:sp>
+        <p:nvSpPr>
+          <p:cNvPr id="7" name="Text 5"/>
+          <p:cNvSpPr/>
+          <p:nvPr/>
+        </p:nvSpPr>
+        <p:spPr>
+          <a:xfrm>
+            <a:off x="1280160" y="1517904"/>
+            <a:ext cx="10143439" cy="841248"/>
+          </a:xfrm>
+          <a:prstGeom prst="rect">
+            <a:avLst/>
+          </a:prstGeom>
+          <a:noFill/>
+          <a:ln/>
+        </p:spPr>
+        <p:txBody>
+          <a:bodyPr wrap="square" lIns="0" tIns="0" rIns="0" bIns="0" rtlCol="0" anchor="ctr"/>
+          <a:lstStyle/>
+          <a:p>
+            <a:pPr algn="l" indent="0" marL="0">
+              <a:buNone/>
+            </a:pPr>
+            <a:r>
+              <a:rPr lang="en-US" sz="1350" dirty="0">
+                <a:solidFill>
+                  <a:srgbClr val="E7EEF4"/>
+                </a:solidFill>
+                <a:latin typeface="Calibri" pitchFamily="34" charset="0"/>
+                <a:ea typeface="Calibri" pitchFamily="34" charset="-122"/>
+                <a:cs typeface="Calibri" pitchFamily="34" charset="-120"/>
+              </a:rPr>
+              <a:t>Sodium disorders are water problems — interpret with osmolality, glucose, and volume status.</a:t>
+            </a:r>
+            <a:endParaRPr lang="en-US" sz="1350" dirty="0"/>
+          </a:p>
+        </p:txBody>
+      </p:sp>
+      <p:sp>
+        <p:nvSpPr>
+          <p:cNvPr id="8" name="Shape 6"/>
+          <p:cNvSpPr/>
+          <p:nvPr/>
+        </p:nvSpPr>
+        <p:spPr>
+          <a:xfrm>
+            <a:off x="566928" y="2505456"/>
+            <a:ext cx="11057839" cy="841248"/>
+          </a:xfrm>
+          <a:prstGeom prst="roundRect">
+            <a:avLst>
+              <a:gd name="adj" fmla="val 7609"/>
+            </a:avLst>
+          </a:prstGeom>
+          <a:solidFill>
+            <a:srgbClr val="143651"/>
+          </a:solidFill>
+          <a:ln/>
+        </p:spPr>
+      </p:sp>
+      <p:sp>
+        <p:nvSpPr>
+          <p:cNvPr id="9" name="Shape 7"/>
+          <p:cNvSpPr/>
+          <p:nvPr/>
+        </p:nvSpPr>
+        <p:spPr>
+          <a:xfrm>
+            <a:off x="749808" y="2743200"/>
+            <a:ext cx="365760" cy="365760"/>
+          </a:xfrm>
+          <a:prstGeom prst="ellipse">
+            <a:avLst/>
+          </a:prstGeom>
+          <a:solidFill>
+            <a:srgbClr val="1565C0"/>
+          </a:solidFill>
+          <a:ln/>
+          <a:effectLst>
+            <a:outerShdw sx="100000" sy="100000" kx="0" ky="0" algn="bl" rotWithShape="0" blurRad="88900" dist="25400" dir="5400000">
+              <a:srgbClr val="22303C">
+                <a:alpha val="12000"/>
+              </a:srgbClr>
+            </a:outerShdw>
+          </a:effectLst>
+        </p:spPr>
+      </p:sp>
+      <p:sp>
+        <p:nvSpPr>
+          <p:cNvPr id="10" name="Text 8"/>
+          <p:cNvSpPr/>
+          <p:nvPr/>
+        </p:nvSpPr>
+        <p:spPr>
+          <a:xfrm>
+            <a:off x="749808" y="2743200"/>
+            <a:ext cx="365760" cy="365760"/>
+          </a:xfrm>
+          <a:prstGeom prst="rect">
+            <a:avLst/>
+          </a:prstGeom>
+          <a:noFill/>
+          <a:ln/>
+        </p:spPr>
+        <p:txBody>
+          <a:bodyPr wrap="square" lIns="0" tIns="0" rIns="0" bIns="0" rtlCol="0" anchor="ctr"/>
+          <a:lstStyle/>
+          <a:p>
+            <a:pPr algn="ctr" indent="0" marL="0">
+              <a:buNone/>
+            </a:pPr>
+            <a:r>
+              <a:rPr lang="en-US" sz="1500" b="1" dirty="0">
+                <a:solidFill>
+                  <a:srgbClr val="FFFFFF"/>
+                </a:solidFill>
+                <a:latin typeface="Calibri" pitchFamily="34" charset="0"/>
+                <a:ea typeface="Calibri" pitchFamily="34" charset="-122"/>
+                <a:cs typeface="Calibri" pitchFamily="34" charset="-120"/>
+              </a:rPr>
+              <a:t>2</a:t>
+            </a:r>
+            <a:endParaRPr lang="en-US" sz="1500" dirty="0"/>
+          </a:p>
+        </p:txBody>
+      </p:sp>
+      <p:sp>
+        <p:nvSpPr>
+          <p:cNvPr id="11" name="Text 9"/>
+          <p:cNvSpPr/>
+          <p:nvPr/>
+        </p:nvSpPr>
+        <p:spPr>
+          <a:xfrm>
+            <a:off x="1280160" y="2505456"/>
+            <a:ext cx="10143439" cy="841248"/>
+          </a:xfrm>
+          <a:prstGeom prst="rect">
+            <a:avLst/>
+          </a:prstGeom>
+          <a:noFill/>
+          <a:ln/>
+        </p:spPr>
+        <p:txBody>
+          <a:bodyPr wrap="square" lIns="0" tIns="0" rIns="0" bIns="0" rtlCol="0" anchor="ctr"/>
+          <a:lstStyle/>
+          <a:p>
+            <a:pPr algn="l" indent="0" marL="0">
+              <a:buNone/>
+            </a:pPr>
+            <a:r>
+              <a:rPr lang="en-US" sz="1350" dirty="0">
+                <a:solidFill>
+                  <a:srgbClr val="E7EEF4"/>
+                </a:solidFill>
+                <a:latin typeface="Calibri" pitchFamily="34" charset="0"/>
+                <a:ea typeface="Calibri" pitchFamily="34" charset="-122"/>
+                <a:cs typeface="Calibri" pitchFamily="34" charset="-120"/>
+              </a:rPr>
+              <a:t>Pseudohyponatremia (lipemia/paraprotein) shows discordant indirect vs direct ISE; trust the direct method.</a:t>
+            </a:r>
+            <a:endParaRPr lang="en-US" sz="1350" dirty="0"/>
+          </a:p>
+        </p:txBody>
+      </p:sp>
+      <p:sp>
+        <p:nvSpPr>
+          <p:cNvPr id="12" name="Shape 10"/>
+          <p:cNvSpPr/>
+          <p:nvPr/>
+        </p:nvSpPr>
+        <p:spPr>
+          <a:xfrm>
+            <a:off x="566928" y="3493008"/>
+            <a:ext cx="11057839" cy="841248"/>
+          </a:xfrm>
+          <a:prstGeom prst="roundRect">
+            <a:avLst>
+              <a:gd name="adj" fmla="val 7609"/>
+            </a:avLst>
+          </a:prstGeom>
+          <a:solidFill>
+            <a:srgbClr val="143651"/>
+          </a:solidFill>
+          <a:ln/>
+        </p:spPr>
+      </p:sp>
+      <p:sp>
+        <p:nvSpPr>
+          <p:cNvPr id="13" name="Shape 11"/>
+          <p:cNvSpPr/>
+          <p:nvPr/>
+        </p:nvSpPr>
+        <p:spPr>
+          <a:xfrm>
+            <a:off x="749808" y="3730752"/>
+            <a:ext cx="365760" cy="365760"/>
+          </a:xfrm>
+          <a:prstGeom prst="ellipse">
+            <a:avLst/>
+          </a:prstGeom>
+          <a:solidFill>
+            <a:srgbClr val="1565C0"/>
+          </a:solidFill>
+          <a:ln/>
+          <a:effectLst>
+            <a:outerShdw sx="100000" sy="100000" kx="0" ky="0" algn="bl" rotWithShape="0" blurRad="88900" dist="25400" dir="5400000">
+              <a:srgbClr val="22303C">
+                <a:alpha val="12000"/>
+              </a:srgbClr>
+            </a:outerShdw>
+          </a:effectLst>
+        </p:spPr>
+      </p:sp>
+      <p:sp>
+        <p:nvSpPr>
+          <p:cNvPr id="14" name="Text 12"/>
+          <p:cNvSpPr/>
+          <p:nvPr/>
+        </p:nvSpPr>
+        <p:spPr>
+          <a:xfrm>
+            <a:off x="749808" y="3730752"/>
+            <a:ext cx="365760" cy="365760"/>
+          </a:xfrm>
+          <a:prstGeom prst="rect">
+            <a:avLst/>
+          </a:prstGeom>
+          <a:noFill/>
+          <a:ln/>
+        </p:spPr>
+        <p:txBody>
+          <a:bodyPr wrap="square" lIns="0" tIns="0" rIns="0" bIns="0" rtlCol="0" anchor="ctr"/>
+          <a:lstStyle/>
+          <a:p>
+            <a:pPr algn="ctr" indent="0" marL="0">
+              <a:buNone/>
+            </a:pPr>
+            <a:r>
+              <a:rPr lang="en-US" sz="1500" b="1" dirty="0">
+                <a:solidFill>
+                  <a:srgbClr val="FFFFFF"/>
+                </a:solidFill>
+                <a:latin typeface="Calibri" pitchFamily="34" charset="0"/>
+                <a:ea typeface="Calibri" pitchFamily="34" charset="-122"/>
+                <a:cs typeface="Calibri" pitchFamily="34" charset="-120"/>
+              </a:rPr>
+              <a:t>3</a:t>
+            </a:r>
+            <a:endParaRPr lang="en-US" sz="1500" dirty="0"/>
+          </a:p>
+        </p:txBody>
+      </p:sp>
+      <p:sp>
+        <p:nvSpPr>
+          <p:cNvPr id="15" name="Text 13"/>
+          <p:cNvSpPr/>
+          <p:nvPr/>
+        </p:nvSpPr>
+        <p:spPr>
+          <a:xfrm>
+            <a:off x="1280160" y="3493008"/>
+            <a:ext cx="10143439" cy="841248"/>
+          </a:xfrm>
+          <a:prstGeom prst="rect">
+            <a:avLst/>
+          </a:prstGeom>
+          <a:noFill/>
+          <a:ln/>
+        </p:spPr>
+        <p:txBody>
+          <a:bodyPr wrap="square" lIns="0" tIns="0" rIns="0" bIns="0" rtlCol="0" anchor="ctr"/>
+          <a:lstStyle/>
+          <a:p>
+            <a:pPr algn="l" indent="0" marL="0">
+              <a:buNone/>
+            </a:pPr>
+            <a:r>
+              <a:rPr lang="en-US" sz="1350" dirty="0">
+                <a:solidFill>
+                  <a:srgbClr val="E7EEF4"/>
+                </a:solidFill>
+                <a:latin typeface="Calibri" pitchFamily="34" charset="0"/>
+                <a:ea typeface="Calibri" pitchFamily="34" charset="-122"/>
+                <a:cs typeface="Calibri" pitchFamily="34" charset="-120"/>
+              </a:rPr>
+              <a:t>Work acid-base in order: pH → primary → anion gap → compensation → delta-delta.</a:t>
+            </a:r>
+            <a:endParaRPr lang="en-US" sz="1350" dirty="0"/>
+          </a:p>
+        </p:txBody>
+      </p:sp>
+      <p:sp>
+        <p:nvSpPr>
+          <p:cNvPr id="16" name="Shape 14"/>
+          <p:cNvSpPr/>
+          <p:nvPr/>
+        </p:nvSpPr>
+        <p:spPr>
+          <a:xfrm>
+            <a:off x="566928" y="4480560"/>
+            <a:ext cx="11057839" cy="841248"/>
+          </a:xfrm>
+          <a:prstGeom prst="roundRect">
+            <a:avLst>
+              <a:gd name="adj" fmla="val 7609"/>
+            </a:avLst>
+          </a:prstGeom>
+          <a:solidFill>
+            <a:srgbClr val="143651"/>
+          </a:solidFill>
+          <a:ln/>
+        </p:spPr>
+      </p:sp>
+      <p:sp>
+        <p:nvSpPr>
+          <p:cNvPr id="17" name="Shape 15"/>
+          <p:cNvSpPr/>
+          <p:nvPr/>
+        </p:nvSpPr>
+        <p:spPr>
+          <a:xfrm>
+            <a:off x="749808" y="4718304"/>
+            <a:ext cx="365760" cy="365760"/>
+          </a:xfrm>
+          <a:prstGeom prst="ellipse">
+            <a:avLst/>
+          </a:prstGeom>
+          <a:solidFill>
+            <a:srgbClr val="1565C0"/>
+          </a:solidFill>
+          <a:ln/>
+          <a:effectLst>
+            <a:outerShdw sx="100000" sy="100000" kx="0" ky="0" algn="bl" rotWithShape="0" blurRad="88900" dist="25400" dir="5400000">
+              <a:srgbClr val="22303C">
+                <a:alpha val="12000"/>
+              </a:srgbClr>
+            </a:outerShdw>
+          </a:effectLst>
+        </p:spPr>
+      </p:sp>
+      <p:sp>
+        <p:nvSpPr>
+          <p:cNvPr id="18" name="Text 16"/>
+          <p:cNvSpPr/>
+          <p:nvPr/>
+        </p:nvSpPr>
+        <p:spPr>
+          <a:xfrm>
+            <a:off x="749808" y="4718304"/>
+            <a:ext cx="365760" cy="365760"/>
+          </a:xfrm>
+          <a:prstGeom prst="rect">
+            <a:avLst/>
+          </a:prstGeom>
+          <a:noFill/>
+          <a:ln/>
+        </p:spPr>
+        <p:txBody>
+          <a:bodyPr wrap="square" lIns="0" tIns="0" rIns="0" bIns="0" rtlCol="0" anchor="ctr"/>
+          <a:lstStyle/>
+          <a:p>
+            <a:pPr algn="ctr" indent="0" marL="0">
+              <a:buNone/>
+            </a:pPr>
+            <a:r>
+              <a:rPr lang="en-US" sz="1500" b="1" dirty="0">
+                <a:solidFill>
+                  <a:srgbClr val="FFFFFF"/>
+                </a:solidFill>
+                <a:latin typeface="Calibri" pitchFamily="34" charset="0"/>
+                <a:ea typeface="Calibri" pitchFamily="34" charset="-122"/>
+                <a:cs typeface="Calibri" pitchFamily="34" charset="-120"/>
+              </a:rPr>
+              <a:t>4</a:t>
+            </a:r>
+            <a:endParaRPr lang="en-US" sz="1500" dirty="0"/>
+          </a:p>
+        </p:txBody>
+      </p:sp>
+      <p:sp>
+        <p:nvSpPr>
+          <p:cNvPr id="19" name="Text 17"/>
+          <p:cNvSpPr/>
+          <p:nvPr/>
+        </p:nvSpPr>
+        <p:spPr>
+          <a:xfrm>
+            <a:off x="1280160" y="4480560"/>
+            <a:ext cx="10143439" cy="841248"/>
+          </a:xfrm>
+          <a:prstGeom prst="rect">
+            <a:avLst/>
+          </a:prstGeom>
+          <a:noFill/>
+          <a:ln/>
+        </p:spPr>
+        <p:txBody>
+          <a:bodyPr wrap="square" lIns="0" tIns="0" rIns="0" bIns="0" rtlCol="0" anchor="ctr"/>
+          <a:lstStyle/>
+          <a:p>
+            <a:pPr algn="l" indent="0" marL="0">
+              <a:buNone/>
+            </a:pPr>
+            <a:r>
+              <a:rPr lang="en-US" sz="1350" dirty="0">
+                <a:solidFill>
+                  <a:srgbClr val="E7EEF4"/>
+                </a:solidFill>
+                <a:latin typeface="Calibri" pitchFamily="34" charset="0"/>
+                <a:ea typeface="Calibri" pitchFamily="34" charset="-122"/>
+                <a:cs typeface="Calibri" pitchFamily="34" charset="-120"/>
+              </a:rPr>
+              <a:t>An elevated osmolal gap (then anion gap) flags toxic alcohols; ethanol is the commonest cause.</a:t>
+            </a:r>
+            <a:endParaRPr lang="en-US" sz="1350" dirty="0"/>
+          </a:p>
+        </p:txBody>
+      </p:sp>
+      <p:sp>
+        <p:nvSpPr>
+          <p:cNvPr id="20" name="Shape 18"/>
+          <p:cNvSpPr/>
+          <p:nvPr/>
+        </p:nvSpPr>
+        <p:spPr>
+          <a:xfrm>
+            <a:off x="566928" y="5468112"/>
+            <a:ext cx="11057839" cy="841248"/>
+          </a:xfrm>
+          <a:prstGeom prst="roundRect">
+            <a:avLst>
+              <a:gd name="adj" fmla="val 7609"/>
+            </a:avLst>
+          </a:prstGeom>
+          <a:solidFill>
+            <a:srgbClr val="143651"/>
+          </a:solidFill>
+          <a:ln/>
+        </p:spPr>
+      </p:sp>
+      <p:sp>
+        <p:nvSpPr>
+          <p:cNvPr id="21" name="Shape 19"/>
+          <p:cNvSpPr/>
+          <p:nvPr/>
+        </p:nvSpPr>
+        <p:spPr>
+          <a:xfrm>
+            <a:off x="749808" y="5705856"/>
+            <a:ext cx="365760" cy="365760"/>
+          </a:xfrm>
+          <a:prstGeom prst="ellipse">
+            <a:avLst/>
+          </a:prstGeom>
+          <a:solidFill>
+            <a:srgbClr val="1565C0"/>
+          </a:solidFill>
+          <a:ln/>
+          <a:effectLst>
+            <a:outerShdw sx="100000" sy="100000" kx="0" ky="0" algn="bl" rotWithShape="0" blurRad="88900" dist="25400" dir="5400000">
+              <a:srgbClr val="22303C">
+                <a:alpha val="12000"/>
+              </a:srgbClr>
+            </a:outerShdw>
+          </a:effectLst>
+        </p:spPr>
+      </p:sp>
+      <p:sp>
+        <p:nvSpPr>
+          <p:cNvPr id="22" name="Text 20"/>
+          <p:cNvSpPr/>
+          <p:nvPr/>
+        </p:nvSpPr>
+        <p:spPr>
+          <a:xfrm>
+            <a:off x="749808" y="5705856"/>
+            <a:ext cx="365760" cy="365760"/>
+          </a:xfrm>
+          <a:prstGeom prst="rect">
+            <a:avLst/>
+          </a:prstGeom>
+          <a:noFill/>
+          <a:ln/>
+        </p:spPr>
+        <p:txBody>
+          <a:bodyPr wrap="square" lIns="0" tIns="0" rIns="0" bIns="0" rtlCol="0" anchor="ctr"/>
+          <a:lstStyle/>
+          <a:p>
+            <a:pPr algn="ctr" indent="0" marL="0">
+              <a:buNone/>
+            </a:pPr>
+            <a:r>
+              <a:rPr lang="en-US" sz="1500" b="1" dirty="0">
+                <a:solidFill>
+                  <a:srgbClr val="FFFFFF"/>
+                </a:solidFill>
+                <a:latin typeface="Calibri" pitchFamily="34" charset="0"/>
+                <a:ea typeface="Calibri" pitchFamily="34" charset="-122"/>
+                <a:cs typeface="Calibri" pitchFamily="34" charset="-120"/>
+              </a:rPr>
+              <a:t>5</a:t>
+            </a:r>
+            <a:endParaRPr lang="en-US" sz="1500" dirty="0"/>
+          </a:p>
+        </p:txBody>
+      </p:sp>
+      <p:sp>
+        <p:nvSpPr>
+          <p:cNvPr id="23" name="Text 21"/>
+          <p:cNvSpPr/>
+          <p:nvPr/>
+        </p:nvSpPr>
+        <p:spPr>
+          <a:xfrm>
+            <a:off x="1280160" y="5468112"/>
+            <a:ext cx="10143439" cy="841248"/>
+          </a:xfrm>
+          <a:prstGeom prst="rect">
+            <a:avLst/>
+          </a:prstGeom>
+          <a:noFill/>
+          <a:ln/>
+        </p:spPr>
+        <p:txBody>
+          <a:bodyPr wrap="square" lIns="0" tIns="0" rIns="0" bIns="0" rtlCol="0" anchor="ctr"/>
+          <a:lstStyle/>
+          <a:p>
+            <a:pPr algn="l" indent="0" marL="0">
+              <a:buNone/>
+            </a:pPr>
+            <a:r>
+              <a:rPr lang="en-US" sz="1350" dirty="0">
+                <a:solidFill>
+                  <a:srgbClr val="E7EEF4"/>
+                </a:solidFill>
+                <a:latin typeface="Calibri" pitchFamily="34" charset="0"/>
+                <a:ea typeface="Calibri" pitchFamily="34" charset="-122"/>
+                <a:cs typeface="Calibri" pitchFamily="34" charset="-120"/>
+              </a:rPr>
+              <a:t>Normal-gap acidosis: separate diarrhea from RTA by urine pH/anion gap; classify RTAs by potassium and urine pH.</a:t>
+            </a:r>
+            <a:endParaRPr lang="en-US" sz="1350" dirty="0"/>
+          </a:p>
+        </p:txBody>
+      </p:sp>
+      <p:sp>
+        <p:nvSpPr>
+          <p:cNvPr id="24" name="Text 22"/>
+          <p:cNvSpPr/>
+          <p:nvPr/>
+        </p:nvSpPr>
+        <p:spPr>
+          <a:xfrm>
+            <a:off x="566928" y="6473952"/>
+            <a:ext cx="8229600" cy="274320"/>
+          </a:xfrm>
+          <a:prstGeom prst="rect">
+            <a:avLst/>
+          </a:prstGeom>
+          <a:noFill/>
+          <a:ln/>
+        </p:spPr>
+        <p:txBody>
+          <a:bodyPr wrap="square" lIns="0" tIns="0" rIns="0" bIns="0" rtlCol="0" anchor="ctr"/>
+          <a:lstStyle/>
+          <a:p>
+            <a:pPr indent="0" marL="0">
+              <a:buNone/>
+            </a:pPr>
+            <a:r>
+              <a:rPr lang="en-US" sz="850" dirty="0">
+                <a:solidFill>
+                  <a:srgbClr val="5E7488"/>
+                </a:solidFill>
+                <a:latin typeface="Calibri" pitchFamily="34" charset="0"/>
+                <a:ea typeface="Calibri" pitchFamily="34" charset="-122"/>
+                <a:cs typeface="Calibri" pitchFamily="34" charset="-120"/>
+              </a:rPr>
+              <a:t>Makassed General Hospital  ·  Department of Laboratory Medicine</a:t>
+            </a:r>
+            <a:endParaRPr lang="en-US" sz="850" dirty="0"/>
+          </a:p>
+        </p:txBody>
+      </p:sp>
+      <p:sp>
+        <p:nvSpPr>
+          <p:cNvPr id="25" name="Text 23"/>
+          <p:cNvSpPr/>
+          <p:nvPr/>
+        </p:nvSpPr>
+        <p:spPr>
+          <a:xfrm>
+            <a:off x="11002975" y="6473952"/>
+            <a:ext cx="640080" cy="274320"/>
+          </a:xfrm>
+          <a:prstGeom prst="rect">
+            <a:avLst/>
+          </a:prstGeom>
+          <a:noFill/>
+          <a:ln/>
+        </p:spPr>
+        <p:txBody>
+          <a:bodyPr wrap="square" lIns="0" tIns="0" rIns="0" bIns="0" rtlCol="0" anchor="ctr"/>
+          <a:lstStyle/>
+          <a:p>
+            <a:pPr algn="r" indent="0" marL="0">
+              <a:buNone/>
+            </a:pPr>
+            <a:r>
+              <a:rPr lang="en-US" sz="850" b="1" dirty="0">
+                <a:solidFill>
+                  <a:srgbClr val="1565C0"/>
+                </a:solidFill>
+                <a:latin typeface="Calibri" pitchFamily="34" charset="0"/>
+                <a:ea typeface="Calibri" pitchFamily="34" charset="-122"/>
+                <a:cs typeface="Calibri" pitchFamily="34" charset="-120"/>
+              </a:rPr>
+              <a:t>21</a:t>
+            </a:r>
+            <a:endParaRPr lang="en-US" sz="850" dirty="0"/>
+          </a:p>
+        </p:txBody>
+      </p:sp>
+    </p:spTree>
+  </p:cSld>
+  <p:clrMapOvr>
+    <a:masterClrMapping/>
+  </p:clrMapOvr>
+</p:sld>
+</file>
+
+<file path=ppt/slides/slide25.xml><?xml version="1.0" encoding="utf-8"?>
+<p:sld xmlns:a="http://schemas.openxmlformats.org/drawingml/2006/main" xmlns:r="http://schemas.openxmlformats.org/officeDocument/2006/relationships" xmlns:p="http://schemas.openxmlformats.org/presentationml/2006/main">
+  <p:cSld name="Slide 25">
+    <p:bg>
+      <p:bgPr>
+        <a:solidFill>
+          <a:srgbClr val="FFFFFF"/>
+        </a:solidFill>
+      </p:bgPr>
+    </p:bg>
+    <p:spTree>
+      <p:nvGrpSpPr>
+        <p:cNvPr id="1" name=""/>
+        <p:cNvGrpSpPr/>
+        <p:nvPr/>
+      </p:nvGrpSpPr>
+      <p:grpSpPr>
+        <a:xfrm>
+          <a:off x="0" y="0"/>
+          <a:ext cx="0" cy="0"/>
+          <a:chOff x="0" y="0"/>
+          <a:chExt cx="0" cy="0"/>
+        </a:xfrm>
+      </p:grpSpPr>
+      <p:sp>
+        <p:nvSpPr>
+          <p:cNvPr id="2" name="Text 0"/>
+          <p:cNvSpPr/>
+          <p:nvPr/>
+        </p:nvSpPr>
+        <p:spPr>
+          <a:xfrm>
+            <a:off x="566928" y="329184"/>
+            <a:ext cx="10515600" cy="310896"/>
+          </a:xfrm>
+          <a:prstGeom prst="rect">
+            <a:avLst/>
+          </a:prstGeom>
+          <a:noFill/>
+          <a:ln/>
+        </p:spPr>
+        <p:txBody>
+          <a:bodyPr wrap="square" lIns="0" tIns="0" rIns="0" bIns="0" rtlCol="0" anchor="ctr"/>
+          <a:lstStyle/>
+          <a:p>
+            <a:pPr algn="l" indent="0" marL="0">
+              <a:buNone/>
+            </a:pPr>
+            <a:r>
+              <a:rPr lang="en-US" sz="1100" b="1" spc="150" kern="0" dirty="0">
+                <a:solidFill>
+                  <a:srgbClr val="1565C0"/>
+                </a:solidFill>
+                <a:latin typeface="Calibri" pitchFamily="34" charset="0"/>
+                <a:ea typeface="Calibri" pitchFamily="34" charset="-122"/>
+                <a:cs typeface="Calibri" pitchFamily="34" charset="-120"/>
+              </a:rPr>
               <a:t>CLINICAL CHEMISTRY   ·   REFERENCES &amp; FURTHER READING</a:t>
             </a:r>
             <a:endParaRPr lang="en-US" sz="1100" dirty="0"/>
@@ -9955,7 +13063,7 @@
                 <a:ea typeface="Calibri" pitchFamily="34" charset="-122"/>
                 <a:cs typeface="Calibri" pitchFamily="34" charset="-120"/>
               </a:rPr>
-              <a:t>1.   Rifai N, et al. Tietz Textbook of Clinical Chemistry and Molecular Diagnostics, 6th ed. Elsevier, 2018.</a:t>
+              <a:t>1.   Rifai N, et al. Tietz Textbook of Clinical Chemistry, 6th ed. Elsevier, 2018.</a:t>
             </a:r>
             <a:endParaRPr lang="en-US" sz="1150" dirty="0"/>
           </a:p>
@@ -9975,7 +13083,7 @@
                 <a:ea typeface="Calibri" pitchFamily="34" charset="-122"/>
                 <a:cs typeface="Calibri" pitchFamily="34" charset="-120"/>
               </a:rPr>
-              <a:t>2.   Berend K, et al. Physiological approach to assessment of acid-base disturbances. N Engl J Med. 2014;371:1434-1445.</a:t>
+              <a:t>2.   Berend K, et al. Physiological approach to acid-base disturbances. N Engl J Med. 2014;371:1434-1445.</a:t>
             </a:r>
             <a:endParaRPr lang="en-US" sz="1150" dirty="0"/>
           </a:p>
@@ -10121,7 +13229,7 @@
                 <a:ea typeface="Calibri" pitchFamily="34" charset="-122"/>
                 <a:cs typeface="Calibri" pitchFamily="34" charset="-120"/>
               </a:rPr>
-              <a:t>18</a:t>
+              <a:t>22</a:t>
             </a:r>
             <a:endParaRPr lang="en-US" sz="850" dirty="0"/>
           </a:p>
@@ -10365,7 +13473,7 @@
                 <a:ea typeface="Calibri" pitchFamily="34" charset="-122"/>
                 <a:cs typeface="Calibri" pitchFamily="34" charset="-120"/>
               </a:rPr>
-              <a:t>Approach hypo- and hypernatremia using tonicity.</a:t>
+              <a:t>Approach hypo- and hypernatremia using tonicity and volume status.</a:t>
             </a:r>
             <a:endParaRPr lang="en-US" sz="1350" dirty="0"/>
           </a:p>
@@ -10499,7 +13607,7 @@
                 <a:ea typeface="Calibri" pitchFamily="34" charset="-122"/>
                 <a:cs typeface="Calibri" pitchFamily="34" charset="-120"/>
               </a:rPr>
-              <a:t>Calculate and interpret the anion gap and the delta-delta.</a:t>
+              <a:t>Distinguish pseudo- and translocational hyponatremia.</a:t>
             </a:r>
             <a:endParaRPr lang="en-US" sz="1350" dirty="0"/>
           </a:p>
@@ -10633,7 +13741,7 @@
                 <a:ea typeface="Calibri" pitchFamily="34" charset="-122"/>
                 <a:cs typeface="Calibri" pitchFamily="34" charset="-120"/>
               </a:rPr>
-              <a:t>Use the osmolal gap to detect toxic alcohols.</a:t>
+              <a:t>Calculate and interpret the anion gap, delta-delta, and osmolal gap.</a:t>
             </a:r>
             <a:endParaRPr lang="en-US" sz="1350" dirty="0"/>
           </a:p>
@@ -10767,7 +13875,7 @@
                 <a:ea typeface="Calibri" pitchFamily="34" charset="-122"/>
                 <a:cs typeface="Calibri" pitchFamily="34" charset="-120"/>
               </a:rPr>
-              <a:t>Apply a stepwise acid-base method and compensation rules.</a:t>
+              <a:t>Apply a stepwise acid-base method and compensation formulas.</a:t>
             </a:r>
             <a:endParaRPr lang="en-US" sz="1350" dirty="0"/>
           </a:p>
@@ -11035,7 +14143,7 @@
                 <a:ea typeface="Calibri" pitchFamily="34" charset="-122"/>
                 <a:cs typeface="Calibri" pitchFamily="34" charset="-120"/>
               </a:rPr>
-              <a:t>Identify pseudohyponatremia and its mechanism.</a:t>
+              <a:t>Classify renal tubular acidoses and high- vs normal-gap acidosis.</a:t>
             </a:r>
             <a:endParaRPr lang="en-US" sz="1350" dirty="0"/>
           </a:p>
@@ -11526,7 +14634,7 @@
                 <a:ea typeface="Calibri" pitchFamily="34" charset="-122"/>
                 <a:cs typeface="Calibri" pitchFamily="34" charset="-120"/>
               </a:rPr>
-              <a:t>The anion &amp; osmolal gaps</a:t>
+              <a:t>The gaps</a:t>
             </a:r>
             <a:pPr algn="l" indent="0" marL="0">
               <a:buNone/>
@@ -11540,7 +14648,7 @@
                 <a:ea typeface="Calibri" pitchFamily="34" charset="-122"/>
                 <a:cs typeface="Calibri" pitchFamily="34" charset="-120"/>
               </a:rPr>
-              <a:t>   —  high-gap acidosis, toxic alcohols</a:t>
+              <a:t>   —  anion, delta-delta, osmolal</a:t>
             </a:r>
             <a:endParaRPr lang="en-US" sz="1400" dirty="0"/>
           </a:p>
@@ -11688,7 +14796,7 @@
                 <a:ea typeface="Calibri" pitchFamily="34" charset="-122"/>
                 <a:cs typeface="Calibri" pitchFamily="34" charset="-120"/>
               </a:rPr>
-              <a:t>   —  primary disorder + compensation</a:t>
+              <a:t>   —  primary + compensation</a:t>
             </a:r>
             <a:endParaRPr lang="en-US" sz="1400" dirty="0"/>
           </a:p>
@@ -11815,7 +14923,7 @@
                 <a:ea typeface="Calibri" pitchFamily="34" charset="-122"/>
                 <a:cs typeface="Calibri" pitchFamily="34" charset="-120"/>
               </a:rPr>
-              <a:t>Mixed disorders</a:t>
+              <a:t>Mixed disorders &amp; RTA</a:t>
             </a:r>
             <a:pPr algn="l" indent="0" marL="0">
               <a:buNone/>
@@ -11829,7 +14937,7 @@
                 <a:ea typeface="Calibri" pitchFamily="34" charset="-122"/>
                 <a:cs typeface="Calibri" pitchFamily="34" charset="-120"/>
               </a:rPr>
-              <a:t>   —  delta-delta and traps</a:t>
+              <a:t>   —  traps and patterns</a:t>
             </a:r>
             <a:endParaRPr lang="en-US" sz="1400" dirty="0"/>
           </a:p>
@@ -11963,7 +15071,7 @@
                 <a:ea typeface="Calibri" pitchFamily="34" charset="-122"/>
                 <a:cs typeface="Calibri" pitchFamily="34" charset="-120"/>
               </a:rPr>
-              <a:t>Cases &amp; board</a:t>
+              <a:t>Cases &amp; board review</a:t>
             </a:r>
             <a:endParaRPr lang="en-US" sz="1400" dirty="0"/>
           </a:p>
@@ -12483,7 +15591,7 @@
                 <a:ea typeface="Calibri" pitchFamily="34" charset="-122"/>
                 <a:cs typeface="Calibri" pitchFamily="34" charset="-120"/>
               </a:rPr>
-              <a:t>First confirm true (hypotonic) hyponatremia by serum osmolality.</a:t>
+              <a:t>First confirm true (hypotonic) hyponatremia with serum osmolality.</a:t>
             </a:r>
             <a:endParaRPr lang="en-US" sz="1250" dirty="0"/>
           </a:p>
@@ -12614,7 +15722,7 @@
                 <a:ea typeface="Calibri" pitchFamily="34" charset="-122"/>
                 <a:cs typeface="Calibri" pitchFamily="34" charset="-120"/>
               </a:rPr>
-              <a:t>PSEUDO- AND TRANSLOCATIONAL</a:t>
+              <a:t>PSEUDO- &amp; TRANSLOCATIONAL</a:t>
             </a:r>
             <a:endParaRPr lang="en-US" sz="1200" dirty="0"/>
           </a:p>
@@ -12657,7 +15765,7 @@
                 <a:ea typeface="Calibri" pitchFamily="34" charset="-122"/>
                 <a:cs typeface="Calibri" pitchFamily="34" charset="-120"/>
               </a:rPr>
-              <a:t>Pseudohyponatremia: severe lipemia or paraproteinemia with INDIRECT ISE (electrolyte excluded by displaced plasma water).</a:t>
+              <a:t>Pseudohyponatremia: severe lipemia/paraproteinemia with INDIRECT ISE.</a:t>
             </a:r>
             <a:endParaRPr lang="en-US" sz="1250" dirty="0"/>
           </a:p>
@@ -12678,7 +15786,7 @@
                 <a:ea typeface="Calibri" pitchFamily="34" charset="-122"/>
                 <a:cs typeface="Calibri" pitchFamily="34" charset="-120"/>
               </a:rPr>
-              <a:t>Direct ISE (blood gas analyzer) is unaffected — a useful cross-check.</a:t>
+              <a:t>Direct ISE (blood gas analyzer) is unaffected — a key cross-check.</a:t>
             </a:r>
             <a:endParaRPr lang="en-US" sz="1250" dirty="0"/>
           </a:p>
@@ -12699,7 +15807,7 @@
                 <a:ea typeface="Calibri" pitchFamily="34" charset="-122"/>
                 <a:cs typeface="Calibri" pitchFamily="34" charset="-120"/>
               </a:rPr>
-              <a:t>Translocational: hyperglycemia draws water out, lowering measured sodium (correct ~2.4 mmol/L per 5.5 mmol/L glucose).</a:t>
+              <a:t>Translocational: hyperglycemia draws water out (correct ~2.4 mmol/L Na per 5.5 mmol/L glucose).</a:t>
             </a:r>
             <a:endParaRPr lang="en-US" sz="1250" dirty="0"/>
           </a:p>
@@ -12720,7 +15828,7 @@
                 <a:ea typeface="Calibri" pitchFamily="34" charset="-122"/>
                 <a:cs typeface="Calibri" pitchFamily="34" charset="-120"/>
               </a:rPr>
-              <a:t>Always interpret sodium with glucose and osmolality.</a:t>
+              <a:t>Interpret sodium with glucose and osmolality.</a:t>
             </a:r>
             <a:endParaRPr lang="en-US" sz="1250" dirty="0"/>
           </a:p>
@@ -13089,7 +16197,7 @@
                 <a:ea typeface="Calibri" pitchFamily="34" charset="-122"/>
                 <a:cs typeface="Calibri" pitchFamily="34" charset="-120"/>
               </a:rPr>
-              <a:t>Osmotic diuresis, GI losses, insensible losses.</a:t>
+              <a:t>Osmotic diuresis, GI and insensible losses.</a:t>
             </a:r>
             <a:endParaRPr lang="en-US" sz="1250" dirty="0"/>
           </a:p>
@@ -13110,7 +16218,7 @@
                 <a:ea typeface="Calibri" pitchFamily="34" charset="-122"/>
                 <a:cs typeface="Calibri" pitchFamily="34" charset="-120"/>
               </a:rPr>
-              <a:t>Urine osmolality distinguishes renal from extrarenal water loss.</a:t>
+              <a:t>Urine osmolality distinguishes renal from extrarenal loss.</a:t>
             </a:r>
             <a:endParaRPr lang="en-US" sz="1250" dirty="0"/>
           </a:p>
@@ -13221,7 +16329,7 @@
                 <a:ea typeface="Calibri" pitchFamily="34" charset="-122"/>
                 <a:cs typeface="Calibri" pitchFamily="34" charset="-120"/>
               </a:rPr>
-              <a:t>Osmolal gap = measured − calculated osmolality (calc = 2×Na + glucose/18 + BUN/2.8).</a:t>
+              <a:t>Osmolal gap = measured − calculated (2×Na + glucose/18 + BUN/2.8).</a:t>
             </a:r>
             <a:endParaRPr lang="en-US" sz="1250" dirty="0"/>
           </a:p>
@@ -13242,7 +16350,7 @@
                 <a:ea typeface="Calibri" pitchFamily="34" charset="-122"/>
                 <a:cs typeface="Calibri" pitchFamily="34" charset="-120"/>
               </a:rPr>
-              <a:t>A large gap (&gt;10) suggests an unmeasured osmole.</a:t>
+              <a:t>A gap &amp;gt; ~10 suggests an unmeasured osmole.</a:t>
             </a:r>
             <a:endParaRPr lang="en-US" sz="1250" dirty="0"/>
           </a:p>
@@ -13263,7 +16371,7 @@
                 <a:ea typeface="Calibri" pitchFamily="34" charset="-122"/>
                 <a:cs typeface="Calibri" pitchFamily="34" charset="-120"/>
               </a:rPr>
-              <a:t>Toxic alcohols (methanol, ethylene glycol) raise the gap early and the anion gap later.</a:t>
+              <a:t>Toxic alcohols (methanol, ethylene glycol) raise the gap early, anion gap later.</a:t>
             </a:r>
             <a:endParaRPr lang="en-US" sz="1250" dirty="0"/>
           </a:p>

--- a/decks/Chem_02_Electrolytes-Osmolality-Acid-Base.pptx
+++ b/decks/Chem_02_Electrolytes-Osmolality-Acid-Base.pptx
@@ -25,9 +25,13 @@
     <p:sldId id="273" r:id="rId19"/>
     <p:sldId id="274" r:id="rId20"/>
     <p:sldId id="275" r:id="rId21"/>
+    <p:sldId id="284" r:id="rId35"/>
     <p:sldId id="276" r:id="rId22"/>
+    <p:sldId id="283" r:id="rId34"/>
     <p:sldId id="277" r:id="rId23"/>
+    <p:sldId id="282" r:id="rId33"/>
     <p:sldId id="278" r:id="rId24"/>
+    <p:sldId id="281" r:id="rId32"/>
     <p:sldId id="279" r:id="rId25"/>
     <p:sldId id="280" r:id="rId26"/>
   </p:sldIdLst>
@@ -3032,6 +3036,10 @@
           </a:solidFill>
           <a:ln/>
         </p:spPr>
+        <p:txBody>
+          <a:bodyPr/>
+          <a:p/>
+        </p:txBody>
       </p:sp>
       <p:sp>
         <p:nvSpPr>
@@ -3054,6 +3062,10 @@
           </a:solidFill>
           <a:ln/>
         </p:spPr>
+        <p:txBody>
+          <a:bodyPr/>
+          <a:p/>
+        </p:txBody>
       </p:sp>
       <p:sp>
         <p:nvSpPr>
@@ -3076,6 +3088,10 @@
           </a:solidFill>
           <a:ln/>
         </p:spPr>
+        <p:txBody>
+          <a:bodyPr/>
+          <a:p/>
+        </p:txBody>
       </p:sp>
       <p:sp>
         <p:nvSpPr>
@@ -3098,6 +3114,10 @@
           </a:solidFill>
           <a:ln/>
         </p:spPr>
+        <p:txBody>
+          <a:bodyPr/>
+          <a:p/>
+        </p:txBody>
       </p:sp>
       <p:sp>
         <p:nvSpPr>
@@ -4830,6 +4850,10 @@
             </a:outerShdw>
           </a:effectLst>
         </p:spPr>
+        <p:txBody>
+          <a:bodyPr/>
+          <a:p/>
+        </p:txBody>
       </p:sp>
       <p:sp>
         <p:nvSpPr>
@@ -5004,6 +5028,10 @@
             </a:outerShdw>
           </a:effectLst>
         </p:spPr>
+        <p:txBody>
+          <a:bodyPr/>
+          <a:p/>
+        </p:txBody>
       </p:sp>
       <p:sp>
         <p:nvSpPr>
@@ -6692,6 +6720,10 @@
           </a:solidFill>
           <a:ln/>
         </p:spPr>
+        <p:txBody>
+          <a:bodyPr/>
+          <a:p/>
+        </p:txBody>
       </p:sp>
       <p:sp>
         <p:nvSpPr>
@@ -6714,6 +6746,10 @@
           </a:solidFill>
           <a:ln/>
         </p:spPr>
+        <p:txBody>
+          <a:bodyPr/>
+          <a:p/>
+        </p:txBody>
       </p:sp>
       <p:sp>
         <p:nvSpPr>
@@ -6970,6 +7006,10 @@
             </a:outerShdw>
           </a:effectLst>
         </p:spPr>
+        <p:txBody>
+          <a:bodyPr/>
+          <a:p/>
+        </p:txBody>
       </p:sp>
       <p:sp>
         <p:nvSpPr>
@@ -7080,6 +7120,10 @@
             </a:outerShdw>
           </a:effectLst>
         </p:spPr>
+        <p:txBody>
+          <a:bodyPr/>
+          <a:p/>
+        </p:txBody>
       </p:sp>
       <p:sp>
         <p:nvSpPr>
@@ -7509,6 +7553,10 @@
             </a:outerShdw>
           </a:effectLst>
         </p:spPr>
+        <p:txBody>
+          <a:bodyPr/>
+          <a:p/>
+        </p:txBody>
       </p:sp>
       <p:sp>
         <p:nvSpPr>
@@ -7835,6 +7883,10 @@
             </a:outerShdw>
           </a:effectLst>
         </p:spPr>
+        <p:txBody>
+          <a:bodyPr/>
+          <a:p/>
+        </p:txBody>
       </p:sp>
       <p:sp>
         <p:nvSpPr>
@@ -7945,6 +7997,10 @@
             </a:outerShdw>
           </a:effectLst>
         </p:spPr>
+        <p:txBody>
+          <a:bodyPr/>
+          <a:p/>
+        </p:txBody>
       </p:sp>
       <p:sp>
         <p:nvSpPr>
@@ -8374,6 +8430,10 @@
             </a:outerShdw>
           </a:effectLst>
         </p:spPr>
+        <p:txBody>
+          <a:bodyPr/>
+          <a:p/>
+        </p:txBody>
       </p:sp>
       <p:sp>
         <p:nvSpPr>
@@ -8700,6 +8760,10 @@
             </a:outerShdw>
           </a:effectLst>
         </p:spPr>
+        <p:txBody>
+          <a:bodyPr/>
+          <a:p/>
+        </p:txBody>
       </p:sp>
       <p:sp>
         <p:nvSpPr>
@@ -8810,6 +8874,10 @@
             </a:outerShdw>
           </a:effectLst>
         </p:spPr>
+        <p:txBody>
+          <a:bodyPr/>
+          <a:p/>
+        </p:txBody>
       </p:sp>
       <p:sp>
         <p:nvSpPr>
@@ -9239,6 +9307,10 @@
             </a:outerShdw>
           </a:effectLst>
         </p:spPr>
+        <p:txBody>
+          <a:bodyPr/>
+          <a:p/>
+        </p:txBody>
       </p:sp>
       <p:sp>
         <p:nvSpPr>
@@ -9565,6 +9637,10 @@
             </a:outerShdw>
           </a:effectLst>
         </p:spPr>
+        <p:txBody>
+          <a:bodyPr/>
+          <a:p/>
+        </p:txBody>
       </p:sp>
       <p:sp>
         <p:nvSpPr>
@@ -9672,6 +9748,10 @@
             </a:outerShdw>
           </a:effectLst>
         </p:spPr>
+        <p:txBody>
+          <a:bodyPr/>
+          <a:p/>
+        </p:txBody>
       </p:sp>
       <p:sp>
         <p:nvSpPr>
@@ -9779,6 +9859,10 @@
             </a:outerShdw>
           </a:effectLst>
         </p:spPr>
+        <p:txBody>
+          <a:bodyPr/>
+          <a:p/>
+        </p:txBody>
       </p:sp>
       <p:sp>
         <p:nvSpPr>
@@ -9886,6 +9970,10 @@
             </a:outerShdw>
           </a:effectLst>
         </p:spPr>
+        <p:txBody>
+          <a:bodyPr/>
+          <a:p/>
+        </p:txBody>
       </p:sp>
       <p:sp>
         <p:nvSpPr>
@@ -10278,9 +10366,9 @@
               <a:buNone/>
             </a:pPr>
             <a:r>
-              <a:rPr lang="en-US" sz="1350" b="1" dirty="0">
-                <a:solidFill>
-                  <a:srgbClr val="0D4A92"/>
+              <a:rPr lang="en-US" sz="1350" b="0" dirty="0">
+                <a:solidFill>
+                  <a:srgbClr val="33444F"/>
                 </a:solidFill>
                 <a:latin typeface="Calibri" pitchFamily="34" charset="0"/>
                 <a:ea typeface="Calibri" pitchFamily="34" charset="-122"/>
@@ -10349,130 +10437,6 @@
               <a:t>E. No disorder</a:t>
             </a:r>
             <a:endParaRPr lang="en-US" sz="1350" dirty="0"/>
-          </a:p>
-        </p:txBody>
-      </p:sp>
-      <p:sp>
-        <p:nvSpPr>
-          <p:cNvPr id="6" name="Shape 4"/>
-          <p:cNvSpPr/>
-          <p:nvPr/>
-        </p:nvSpPr>
-        <p:spPr>
-          <a:xfrm>
-            <a:off x="7201632" y="2395728"/>
-            <a:ext cx="4423136" cy="3246120"/>
-          </a:xfrm>
-          <a:prstGeom prst="roundRect">
-            <a:avLst>
-              <a:gd name="adj" fmla="val 2535"/>
-            </a:avLst>
-          </a:prstGeom>
-          <a:solidFill>
-            <a:srgbClr val="E7EFFA"/>
-          </a:solidFill>
-          <a:ln/>
-          <a:effectLst>
-            <a:outerShdw sx="100000" sy="100000" kx="0" ky="0" algn="bl" rotWithShape="0" blurRad="88900" dist="25400" dir="5400000">
-              <a:srgbClr val="22303C">
-                <a:alpha val="12000"/>
-              </a:srgbClr>
-            </a:outerShdw>
-          </a:effectLst>
-        </p:spPr>
-      </p:sp>
-      <p:sp>
-        <p:nvSpPr>
-          <p:cNvPr id="7" name="Text 5"/>
-          <p:cNvSpPr/>
-          <p:nvPr/>
-        </p:nvSpPr>
-        <p:spPr>
-          <a:xfrm>
-            <a:off x="7439376" y="2578608"/>
-            <a:ext cx="3965936" cy="457200"/>
-          </a:xfrm>
-          <a:prstGeom prst="rect">
-            <a:avLst/>
-          </a:prstGeom>
-          <a:noFill/>
-          <a:ln/>
-        </p:spPr>
-        <p:txBody>
-          <a:bodyPr wrap="square" lIns="0" tIns="0" rIns="0" bIns="0" rtlCol="0" anchor="ctr"/>
-          <a:lstStyle/>
-          <a:p>
-            <a:pPr indent="0" marL="0">
-              <a:buNone/>
-            </a:pPr>
-            <a:r>
-              <a:rPr lang="en-US" sz="1500" b="1" dirty="0">
-                <a:solidFill>
-                  <a:srgbClr val="1565C0"/>
-                </a:solidFill>
-                <a:latin typeface="Calibri" pitchFamily="34" charset="0"/>
-                <a:ea typeface="Calibri" pitchFamily="34" charset="-122"/>
-                <a:cs typeface="Calibri" pitchFamily="34" charset="-120"/>
-              </a:rPr>
-              <a:t>ANSWER  </a:t>
-            </a:r>
-            <a:pPr indent="0" marL="0">
-              <a:buNone/>
-            </a:pPr>
-            <a:r>
-              <a:rPr lang="en-US" sz="1500" b="1" dirty="0">
-                <a:solidFill>
-                  <a:srgbClr val="1B2A38"/>
-                </a:solidFill>
-                <a:latin typeface="Calibri" pitchFamily="34" charset="0"/>
-                <a:ea typeface="Calibri" pitchFamily="34" charset="-122"/>
-                <a:cs typeface="Calibri" pitchFamily="34" charset="-120"/>
-              </a:rPr>
-              <a:t>B — Concurrent respiratory acidosis</a:t>
-            </a:r>
-            <a:endParaRPr lang="en-US" sz="1500" dirty="0"/>
-          </a:p>
-        </p:txBody>
-      </p:sp>
-      <p:sp>
-        <p:nvSpPr>
-          <p:cNvPr id="8" name="Text 6"/>
-          <p:cNvSpPr/>
-          <p:nvPr/>
-        </p:nvSpPr>
-        <p:spPr>
-          <a:xfrm>
-            <a:off x="7439376" y="3127248"/>
-            <a:ext cx="3947648" cy="2377440"/>
-          </a:xfrm>
-          <a:prstGeom prst="rect">
-            <a:avLst/>
-          </a:prstGeom>
-          <a:noFill/>
-          <a:ln/>
-        </p:spPr>
-        <p:txBody>
-          <a:bodyPr wrap="square" lIns="0" tIns="0" rIns="0" bIns="0" rtlCol="0" anchor="t"/>
-          <a:lstStyle/>
-          <a:p>
-            <a:pPr algn="l" indent="0" marL="0">
-              <a:lnSpc>
-                <a:spcPct val="108000"/>
-              </a:lnSpc>
-              <a:buNone/>
-            </a:pPr>
-            <a:r>
-              <a:rPr lang="en-US" sz="1250" dirty="0">
-                <a:solidFill>
-                  <a:srgbClr val="33444F"/>
-                </a:solidFill>
-                <a:latin typeface="Calibri" pitchFamily="34" charset="0"/>
-                <a:ea typeface="Calibri" pitchFamily="34" charset="-122"/>
-                <a:cs typeface="Calibri" pitchFamily="34" charset="-120"/>
-              </a:rPr>
-              <a:t>Actual PaCO₂ (38) exceeds predicted (24–28) — inadequate respiratory compensation means a superimposed respiratory acidosis.</a:t>
-            </a:r>
-            <a:endParaRPr lang="en-US" sz="1250" dirty="0"/>
           </a:p>
         </p:txBody>
       </p:sp>
@@ -10782,9 +10746,9 @@
               <a:buNone/>
             </a:pPr>
             <a:r>
-              <a:rPr lang="en-US" sz="1350" b="1" dirty="0">
-                <a:solidFill>
-                  <a:srgbClr val="0D4A92"/>
+              <a:rPr lang="en-US" sz="1350" b="0" dirty="0">
+                <a:solidFill>
+                  <a:srgbClr val="33444F"/>
                 </a:solidFill>
                 <a:latin typeface="Calibri" pitchFamily="34" charset="0"/>
                 <a:ea typeface="Calibri" pitchFamily="34" charset="-122"/>
@@ -10853,130 +10817,6 @@
               <a:t>E. Ketonuria</a:t>
             </a:r>
             <a:endParaRPr lang="en-US" sz="1350" dirty="0"/>
-          </a:p>
-        </p:txBody>
-      </p:sp>
-      <p:sp>
-        <p:nvSpPr>
-          <p:cNvPr id="6" name="Shape 4"/>
-          <p:cNvSpPr/>
-          <p:nvPr/>
-        </p:nvSpPr>
-        <p:spPr>
-          <a:xfrm>
-            <a:off x="7201632" y="2395728"/>
-            <a:ext cx="4423136" cy="3246120"/>
-          </a:xfrm>
-          <a:prstGeom prst="roundRect">
-            <a:avLst>
-              <a:gd name="adj" fmla="val 2535"/>
-            </a:avLst>
-          </a:prstGeom>
-          <a:solidFill>
-            <a:srgbClr val="E7EFFA"/>
-          </a:solidFill>
-          <a:ln/>
-          <a:effectLst>
-            <a:outerShdw sx="100000" sy="100000" kx="0" ky="0" algn="bl" rotWithShape="0" blurRad="88900" dist="25400" dir="5400000">
-              <a:srgbClr val="22303C">
-                <a:alpha val="12000"/>
-              </a:srgbClr>
-            </a:outerShdw>
-          </a:effectLst>
-        </p:spPr>
-      </p:sp>
-      <p:sp>
-        <p:nvSpPr>
-          <p:cNvPr id="7" name="Text 5"/>
-          <p:cNvSpPr/>
-          <p:nvPr/>
-        </p:nvSpPr>
-        <p:spPr>
-          <a:xfrm>
-            <a:off x="7439376" y="2578608"/>
-            <a:ext cx="3965936" cy="457200"/>
-          </a:xfrm>
-          <a:prstGeom prst="rect">
-            <a:avLst/>
-          </a:prstGeom>
-          <a:noFill/>
-          <a:ln/>
-        </p:spPr>
-        <p:txBody>
-          <a:bodyPr wrap="square" lIns="0" tIns="0" rIns="0" bIns="0" rtlCol="0" anchor="ctr"/>
-          <a:lstStyle/>
-          <a:p>
-            <a:pPr indent="0" marL="0">
-              <a:buNone/>
-            </a:pPr>
-            <a:r>
-              <a:rPr lang="en-US" sz="1500" b="1" dirty="0">
-                <a:solidFill>
-                  <a:srgbClr val="1565C0"/>
-                </a:solidFill>
-                <a:latin typeface="Calibri" pitchFamily="34" charset="0"/>
-                <a:ea typeface="Calibri" pitchFamily="34" charset="-122"/>
-                <a:cs typeface="Calibri" pitchFamily="34" charset="-120"/>
-              </a:rPr>
-              <a:t>ANSWER  </a:t>
-            </a:r>
-            <a:pPr indent="0" marL="0">
-              <a:buNone/>
-            </a:pPr>
-            <a:r>
-              <a:rPr lang="en-US" sz="1500" b="1" dirty="0">
-                <a:solidFill>
-                  <a:srgbClr val="1B2A38"/>
-                </a:solidFill>
-                <a:latin typeface="Calibri" pitchFamily="34" charset="0"/>
-                <a:ea typeface="Calibri" pitchFamily="34" charset="-122"/>
-                <a:cs typeface="Calibri" pitchFamily="34" charset="-120"/>
-              </a:rPr>
-              <a:t>B — Elevated osmolal gap</a:t>
-            </a:r>
-            <a:endParaRPr lang="en-US" sz="1500" dirty="0"/>
-          </a:p>
-        </p:txBody>
-      </p:sp>
-      <p:sp>
-        <p:nvSpPr>
-          <p:cNvPr id="8" name="Text 6"/>
-          <p:cNvSpPr/>
-          <p:nvPr/>
-        </p:nvSpPr>
-        <p:spPr>
-          <a:xfrm>
-            <a:off x="7439376" y="3127248"/>
-            <a:ext cx="3947648" cy="2377440"/>
-          </a:xfrm>
-          <a:prstGeom prst="rect">
-            <a:avLst/>
-          </a:prstGeom>
-          <a:noFill/>
-          <a:ln/>
-        </p:spPr>
-        <p:txBody>
-          <a:bodyPr wrap="square" lIns="0" tIns="0" rIns="0" bIns="0" rtlCol="0" anchor="t"/>
-          <a:lstStyle/>
-          <a:p>
-            <a:pPr algn="l" indent="0" marL="0">
-              <a:lnSpc>
-                <a:spcPct val="108000"/>
-              </a:lnSpc>
-              <a:buNone/>
-            </a:pPr>
-            <a:r>
-              <a:rPr lang="en-US" sz="1250" dirty="0">
-                <a:solidFill>
-                  <a:srgbClr val="33444F"/>
-                </a:solidFill>
-                <a:latin typeface="Calibri" pitchFamily="34" charset="0"/>
-                <a:ea typeface="Calibri" pitchFamily="34" charset="-122"/>
-                <a:cs typeface="Calibri" pitchFamily="34" charset="-120"/>
-              </a:rPr>
-              <a:t>The parent alcohol is osmotically active, raising the osmolal gap early; the anion gap rises later as it is metabolized.</a:t>
-            </a:r>
-            <a:endParaRPr lang="en-US" sz="1250" dirty="0"/>
           </a:p>
         </p:txBody>
       </p:sp>
@@ -11306,9 +11146,9 @@
               <a:buNone/>
             </a:pPr>
             <a:r>
-              <a:rPr lang="en-US" sz="1350" b="1" dirty="0">
-                <a:solidFill>
-                  <a:srgbClr val="0D4A92"/>
+              <a:rPr lang="en-US" sz="1350" b="0" dirty="0">
+                <a:solidFill>
+                  <a:srgbClr val="33444F"/>
                 </a:solidFill>
                 <a:latin typeface="Calibri" pitchFamily="34" charset="0"/>
                 <a:ea typeface="Calibri" pitchFamily="34" charset="-122"/>
@@ -11357,130 +11197,6 @@
               <a:t>E. Lactic acidosis</a:t>
             </a:r>
             <a:endParaRPr lang="en-US" sz="1350" dirty="0"/>
-          </a:p>
-        </p:txBody>
-      </p:sp>
-      <p:sp>
-        <p:nvSpPr>
-          <p:cNvPr id="6" name="Shape 4"/>
-          <p:cNvSpPr/>
-          <p:nvPr/>
-        </p:nvSpPr>
-        <p:spPr>
-          <a:xfrm>
-            <a:off x="7201632" y="2395728"/>
-            <a:ext cx="4423136" cy="3246120"/>
-          </a:xfrm>
-          <a:prstGeom prst="roundRect">
-            <a:avLst>
-              <a:gd name="adj" fmla="val 2535"/>
-            </a:avLst>
-          </a:prstGeom>
-          <a:solidFill>
-            <a:srgbClr val="E7EFFA"/>
-          </a:solidFill>
-          <a:ln/>
-          <a:effectLst>
-            <a:outerShdw sx="100000" sy="100000" kx="0" ky="0" algn="bl" rotWithShape="0" blurRad="88900" dist="25400" dir="5400000">
-              <a:srgbClr val="22303C">
-                <a:alpha val="12000"/>
-              </a:srgbClr>
-            </a:outerShdw>
-          </a:effectLst>
-        </p:spPr>
-      </p:sp>
-      <p:sp>
-        <p:nvSpPr>
-          <p:cNvPr id="7" name="Text 5"/>
-          <p:cNvSpPr/>
-          <p:nvPr/>
-        </p:nvSpPr>
-        <p:spPr>
-          <a:xfrm>
-            <a:off x="7439376" y="2578608"/>
-            <a:ext cx="3965936" cy="457200"/>
-          </a:xfrm>
-          <a:prstGeom prst="rect">
-            <a:avLst/>
-          </a:prstGeom>
-          <a:noFill/>
-          <a:ln/>
-        </p:spPr>
-        <p:txBody>
-          <a:bodyPr wrap="square" lIns="0" tIns="0" rIns="0" bIns="0" rtlCol="0" anchor="ctr"/>
-          <a:lstStyle/>
-          <a:p>
-            <a:pPr indent="0" marL="0">
-              <a:buNone/>
-            </a:pPr>
-            <a:r>
-              <a:rPr lang="en-US" sz="1500" b="1" dirty="0">
-                <a:solidFill>
-                  <a:srgbClr val="1565C0"/>
-                </a:solidFill>
-                <a:latin typeface="Calibri" pitchFamily="34" charset="0"/>
-                <a:ea typeface="Calibri" pitchFamily="34" charset="-122"/>
-                <a:cs typeface="Calibri" pitchFamily="34" charset="-120"/>
-              </a:rPr>
-              <a:t>ANSWER  </a:t>
-            </a:r>
-            <a:pPr indent="0" marL="0">
-              <a:buNone/>
-            </a:pPr>
-            <a:r>
-              <a:rPr lang="en-US" sz="1500" b="1" dirty="0">
-                <a:solidFill>
-                  <a:srgbClr val="1B2A38"/>
-                </a:solidFill>
-                <a:latin typeface="Calibri" pitchFamily="34" charset="0"/>
-                <a:ea typeface="Calibri" pitchFamily="34" charset="-122"/>
-                <a:cs typeface="Calibri" pitchFamily="34" charset="-120"/>
-              </a:rPr>
-              <a:t>C — Type 4 RTA</a:t>
-            </a:r>
-            <a:endParaRPr lang="en-US" sz="1500" dirty="0"/>
-          </a:p>
-        </p:txBody>
-      </p:sp>
-      <p:sp>
-        <p:nvSpPr>
-          <p:cNvPr id="8" name="Text 6"/>
-          <p:cNvSpPr/>
-          <p:nvPr/>
-        </p:nvSpPr>
-        <p:spPr>
-          <a:xfrm>
-            <a:off x="7439376" y="3127248"/>
-            <a:ext cx="3947648" cy="2377440"/>
-          </a:xfrm>
-          <a:prstGeom prst="rect">
-            <a:avLst/>
-          </a:prstGeom>
-          <a:noFill/>
-          <a:ln/>
-        </p:spPr>
-        <p:txBody>
-          <a:bodyPr wrap="square" lIns="0" tIns="0" rIns="0" bIns="0" rtlCol="0" anchor="t"/>
-          <a:lstStyle/>
-          <a:p>
-            <a:pPr algn="l" indent="0" marL="0">
-              <a:lnSpc>
-                <a:spcPct val="108000"/>
-              </a:lnSpc>
-              <a:buNone/>
-            </a:pPr>
-            <a:r>
-              <a:rPr lang="en-US" sz="1250" dirty="0">
-                <a:solidFill>
-                  <a:srgbClr val="33444F"/>
-                </a:solidFill>
-                <a:latin typeface="Calibri" pitchFamily="34" charset="0"/>
-                <a:ea typeface="Calibri" pitchFamily="34" charset="-122"/>
-                <a:cs typeface="Calibri" pitchFamily="34" charset="-120"/>
-              </a:rPr>
-              <a:t>Type 4 RTA (aldosterone deficiency/resistance) causes hyperkalemic normal-gap acidosis with an acid urine; common in diabetic nephropathy.</a:t>
-            </a:r>
-            <a:endParaRPr lang="en-US" sz="1250" dirty="0"/>
           </a:p>
         </p:txBody>
       </p:sp>
@@ -11790,9 +11506,9 @@
               <a:buNone/>
             </a:pPr>
             <a:r>
-              <a:rPr lang="en-US" sz="1350" b="1" dirty="0">
-                <a:solidFill>
-                  <a:srgbClr val="0D4A92"/>
+              <a:rPr lang="en-US" sz="1350" b="0" dirty="0">
+                <a:solidFill>
+                  <a:srgbClr val="33444F"/>
                 </a:solidFill>
                 <a:latin typeface="Calibri" pitchFamily="34" charset="0"/>
                 <a:ea typeface="Calibri" pitchFamily="34" charset="-122"/>
@@ -11861,130 +11577,6 @@
               <a:t>E. True hypotonic hyponatremia</a:t>
             </a:r>
             <a:endParaRPr lang="en-US" sz="1350" dirty="0"/>
-          </a:p>
-        </p:txBody>
-      </p:sp>
-      <p:sp>
-        <p:nvSpPr>
-          <p:cNvPr id="6" name="Shape 4"/>
-          <p:cNvSpPr/>
-          <p:nvPr/>
-        </p:nvSpPr>
-        <p:spPr>
-          <a:xfrm>
-            <a:off x="7201632" y="2395728"/>
-            <a:ext cx="4423136" cy="3246120"/>
-          </a:xfrm>
-          <a:prstGeom prst="roundRect">
-            <a:avLst>
-              <a:gd name="adj" fmla="val 2535"/>
-            </a:avLst>
-          </a:prstGeom>
-          <a:solidFill>
-            <a:srgbClr val="E7EFFA"/>
-          </a:solidFill>
-          <a:ln/>
-          <a:effectLst>
-            <a:outerShdw sx="100000" sy="100000" kx="0" ky="0" algn="bl" rotWithShape="0" blurRad="88900" dist="25400" dir="5400000">
-              <a:srgbClr val="22303C">
-                <a:alpha val="12000"/>
-              </a:srgbClr>
-            </a:outerShdw>
-          </a:effectLst>
-        </p:spPr>
-      </p:sp>
-      <p:sp>
-        <p:nvSpPr>
-          <p:cNvPr id="7" name="Text 5"/>
-          <p:cNvSpPr/>
-          <p:nvPr/>
-        </p:nvSpPr>
-        <p:spPr>
-          <a:xfrm>
-            <a:off x="7439376" y="2578608"/>
-            <a:ext cx="3965936" cy="457200"/>
-          </a:xfrm>
-          <a:prstGeom prst="rect">
-            <a:avLst/>
-          </a:prstGeom>
-          <a:noFill/>
-          <a:ln/>
-        </p:spPr>
-        <p:txBody>
-          <a:bodyPr wrap="square" lIns="0" tIns="0" rIns="0" bIns="0" rtlCol="0" anchor="ctr"/>
-          <a:lstStyle/>
-          <a:p>
-            <a:pPr indent="0" marL="0">
-              <a:buNone/>
-            </a:pPr>
-            <a:r>
-              <a:rPr lang="en-US" sz="1500" b="1" dirty="0">
-                <a:solidFill>
-                  <a:srgbClr val="1565C0"/>
-                </a:solidFill>
-                <a:latin typeface="Calibri" pitchFamily="34" charset="0"/>
-                <a:ea typeface="Calibri" pitchFamily="34" charset="-122"/>
-                <a:cs typeface="Calibri" pitchFamily="34" charset="-120"/>
-              </a:rPr>
-              <a:t>ANSWER  </a:t>
-            </a:r>
-            <a:pPr indent="0" marL="0">
-              <a:buNone/>
-            </a:pPr>
-            <a:r>
-              <a:rPr lang="en-US" sz="1500" b="1" dirty="0">
-                <a:solidFill>
-                  <a:srgbClr val="1B2A38"/>
-                </a:solidFill>
-                <a:latin typeface="Calibri" pitchFamily="34" charset="0"/>
-                <a:ea typeface="Calibri" pitchFamily="34" charset="-122"/>
-                <a:cs typeface="Calibri" pitchFamily="34" charset="-120"/>
-              </a:rPr>
-              <a:t>B — Translocational hyponatremia</a:t>
-            </a:r>
-            <a:endParaRPr lang="en-US" sz="1500" dirty="0"/>
-          </a:p>
-        </p:txBody>
-      </p:sp>
-      <p:sp>
-        <p:nvSpPr>
-          <p:cNvPr id="8" name="Text 6"/>
-          <p:cNvSpPr/>
-          <p:nvPr/>
-        </p:nvSpPr>
-        <p:spPr>
-          <a:xfrm>
-            <a:off x="7439376" y="3127248"/>
-            <a:ext cx="3947648" cy="2377440"/>
-          </a:xfrm>
-          <a:prstGeom prst="rect">
-            <a:avLst/>
-          </a:prstGeom>
-          <a:noFill/>
-          <a:ln/>
-        </p:spPr>
-        <p:txBody>
-          <a:bodyPr wrap="square" lIns="0" tIns="0" rIns="0" bIns="0" rtlCol="0" anchor="t"/>
-          <a:lstStyle/>
-          <a:p>
-            <a:pPr algn="l" indent="0" marL="0">
-              <a:lnSpc>
-                <a:spcPct val="108000"/>
-              </a:lnSpc>
-              <a:buNone/>
-            </a:pPr>
-            <a:r>
-              <a:rPr lang="en-US" sz="1250" dirty="0">
-                <a:solidFill>
-                  <a:srgbClr val="33444F"/>
-                </a:solidFill>
-                <a:latin typeface="Calibri" pitchFamily="34" charset="0"/>
-                <a:ea typeface="Calibri" pitchFamily="34" charset="-122"/>
-                <a:cs typeface="Calibri" pitchFamily="34" charset="-120"/>
-              </a:rPr>
-              <a:t>Hyperglycemia draws water into the vascular space, diluting sodium; correcting for glucose normalizes it. Osmolality is high/normal, not low.</a:t>
-            </a:r>
-            <a:endParaRPr lang="en-US" sz="1250" dirty="0"/>
           </a:p>
         </p:txBody>
       </p:sp>
@@ -12225,6 +11817,10 @@
           </a:solidFill>
           <a:ln/>
         </p:spPr>
+        <p:txBody>
+          <a:bodyPr/>
+          <a:p/>
+        </p:txBody>
       </p:sp>
       <p:sp>
         <p:nvSpPr>
@@ -12252,6 +11848,10 @@
             </a:outerShdw>
           </a:effectLst>
         </p:spPr>
+        <p:txBody>
+          <a:bodyPr/>
+          <a:p/>
+        </p:txBody>
       </p:sp>
       <p:sp>
         <p:nvSpPr>
@@ -12352,6 +11952,10 @@
           </a:solidFill>
           <a:ln/>
         </p:spPr>
+        <p:txBody>
+          <a:bodyPr/>
+          <a:p/>
+        </p:txBody>
       </p:sp>
       <p:sp>
         <p:nvSpPr>
@@ -12379,6 +11983,10 @@
             </a:outerShdw>
           </a:effectLst>
         </p:spPr>
+        <p:txBody>
+          <a:bodyPr/>
+          <a:p/>
+        </p:txBody>
       </p:sp>
       <p:sp>
         <p:nvSpPr>
@@ -12479,6 +12087,10 @@
           </a:solidFill>
           <a:ln/>
         </p:spPr>
+        <p:txBody>
+          <a:bodyPr/>
+          <a:p/>
+        </p:txBody>
       </p:sp>
       <p:sp>
         <p:nvSpPr>
@@ -12506,6 +12118,10 @@
             </a:outerShdw>
           </a:effectLst>
         </p:spPr>
+        <p:txBody>
+          <a:bodyPr/>
+          <a:p/>
+        </p:txBody>
       </p:sp>
       <p:sp>
         <p:nvSpPr>
@@ -12606,6 +12222,10 @@
           </a:solidFill>
           <a:ln/>
         </p:spPr>
+        <p:txBody>
+          <a:bodyPr/>
+          <a:p/>
+        </p:txBody>
       </p:sp>
       <p:sp>
         <p:nvSpPr>
@@ -12633,6 +12253,10 @@
             </a:outerShdw>
           </a:effectLst>
         </p:spPr>
+        <p:txBody>
+          <a:bodyPr/>
+          <a:p/>
+        </p:txBody>
       </p:sp>
       <p:sp>
         <p:nvSpPr>
@@ -12733,6 +12357,10 @@
           </a:solidFill>
           <a:ln/>
         </p:spPr>
+        <p:txBody>
+          <a:bodyPr/>
+          <a:p/>
+        </p:txBody>
       </p:sp>
       <p:sp>
         <p:nvSpPr>
@@ -12760,6 +12388,10 @@
             </a:outerShdw>
           </a:effectLst>
         </p:spPr>
+        <p:txBody>
+          <a:bodyPr/>
+          <a:p/>
+        </p:txBody>
       </p:sp>
       <p:sp>
         <p:nvSpPr>
@@ -13243,6 +12875,1982 @@
 </p:sld>
 </file>
 
+<file path=ppt/slides/slide26.xml><?xml version="1.0" encoding="utf-8"?>
+<p:sld xmlns:a="http://schemas.openxmlformats.org/drawingml/2006/main" xmlns:p="http://schemas.openxmlformats.org/presentationml/2006/main" xmlns:r="http://schemas.openxmlformats.org/officeDocument/2006/relationships">
+  <p:cSld>
+    <p:spTree>
+      <p:nvGrpSpPr>
+        <p:cNvPr id="1" name=""/>
+        <p:cNvGrpSpPr/>
+        <p:nvPr/>
+      </p:nvGrpSpPr>
+      <p:grpSpPr/>
+      <p:sp>
+        <p:nvSpPr>
+          <p:cNvPr id="2" name="Text 0"/>
+          <p:cNvSpPr/>
+          <p:nvPr/>
+        </p:nvSpPr>
+        <p:spPr>
+          <a:xfrm>
+            <a:off x="566928" y="329184"/>
+            <a:ext cx="10515600" cy="310896"/>
+          </a:xfrm>
+          <a:prstGeom prst="rect">
+            <a:avLst/>
+          </a:prstGeom>
+          <a:noFill/>
+          <a:ln/>
+        </p:spPr>
+        <p:txBody>
+          <a:bodyPr wrap="square" lIns="0" tIns="0" rIns="0" bIns="0" rtlCol="0" anchor="ctr"/>
+          <a:lstStyle/>
+          <a:p>
+            <a:pPr algn="l" indent="0" marL="0">
+              <a:buNone/>
+            </a:pPr>
+            <a:r>
+              <a:rPr lang="en-US" sz="1100" b="1" spc="150" kern="0" dirty="0">
+                <a:solidFill>
+                  <a:srgbClr val="1565C0"/>
+                </a:solidFill>
+                <a:latin typeface="Calibri" pitchFamily="34" charset="0"/>
+                <a:ea typeface="Calibri" pitchFamily="34" charset="-122"/>
+                <a:cs typeface="Calibri" pitchFamily="34" charset="-120"/>
+              </a:rPr>
+              <a:t>CLINICAL CHEMISTRY   ·   BOARD REVIEW  ·  Q4</a:t>
+            </a:r>
+            <a:endParaRPr lang="en-US" sz="1100" dirty="0"/>
+          </a:p>
+        </p:txBody>
+      </p:sp>
+      <p:sp>
+        <p:nvSpPr>
+          <p:cNvPr id="3" name="Text 1"/>
+          <p:cNvSpPr/>
+          <p:nvPr/>
+        </p:nvSpPr>
+        <p:spPr>
+          <a:xfrm>
+            <a:off x="566928" y="713232"/>
+            <a:ext cx="11064240" cy="749808"/>
+          </a:xfrm>
+          <a:prstGeom prst="rect">
+            <a:avLst/>
+          </a:prstGeom>
+          <a:noFill/>
+          <a:ln/>
+        </p:spPr>
+        <p:txBody>
+          <a:bodyPr wrap="square" lIns="0" tIns="0" rIns="0" bIns="0" rtlCol="0" anchor="ctr"/>
+          <a:lstStyle/>
+          <a:p>
+            <a:pPr algn="l" indent="0" marL="0">
+              <a:buNone/>
+            </a:pPr>
+            <a:r>
+              <a:rPr lang="en-US" sz="2600" b="1" dirty="0">
+                <a:solidFill>
+                  <a:srgbClr val="0E3A5F"/>
+                </a:solidFill>
+                <a:latin typeface="Calibri" pitchFamily="34" charset="0"/>
+                <a:ea typeface="Calibri" pitchFamily="34" charset="-122"/>
+                <a:cs typeface="Calibri" pitchFamily="34" charset="-120"/>
+              </a:rPr>
+              <a:t>Board-Style Review</a:t>
+            </a:r>
+            <a:endParaRPr lang="en-US" sz="2600" dirty="0"/>
+          </a:p>
+        </p:txBody>
+      </p:sp>
+      <p:sp>
+        <p:nvSpPr>
+          <p:cNvPr id="4" name="Text 2"/>
+          <p:cNvSpPr/>
+          <p:nvPr/>
+        </p:nvSpPr>
+        <p:spPr>
+          <a:xfrm>
+            <a:off x="566928" y="1417320"/>
+            <a:ext cx="11057839" cy="914400"/>
+          </a:xfrm>
+          <a:prstGeom prst="rect">
+            <a:avLst/>
+          </a:prstGeom>
+          <a:noFill/>
+          <a:ln/>
+        </p:spPr>
+        <p:txBody>
+          <a:bodyPr wrap="square" lIns="0" tIns="0" rIns="0" bIns="0" rtlCol="0" anchor="t"/>
+          <a:lstStyle/>
+          <a:p>
+            <a:pPr algn="l" indent="0" marL="0">
+              <a:lnSpc>
+                <a:spcPct val="105000"/>
+              </a:lnSpc>
+              <a:buNone/>
+            </a:pPr>
+            <a:r>
+              <a:rPr lang="en-US" sz="1450" b="1" dirty="0">
+                <a:solidFill>
+                  <a:srgbClr val="1B2A38"/>
+                </a:solidFill>
+                <a:latin typeface="Calibri" pitchFamily="34" charset="0"/>
+                <a:ea typeface="Calibri" pitchFamily="34" charset="-122"/>
+                <a:cs typeface="Calibri" pitchFamily="34" charset="-120"/>
+              </a:rPr>
+              <a:t>A patient’s measured serum sodium is low but corrected sodium (for glucose of 44 mmol/L) is normal. This is:</a:t>
+            </a:r>
+            <a:endParaRPr lang="en-US" sz="1450" dirty="0"/>
+          </a:p>
+        </p:txBody>
+      </p:sp>
+      <p:sp>
+        <p:nvSpPr>
+          <p:cNvPr id="5" name="Text 3"/>
+          <p:cNvSpPr/>
+          <p:nvPr/>
+        </p:nvSpPr>
+        <p:spPr>
+          <a:xfrm>
+            <a:off x="658368" y="2395728"/>
+            <a:ext cx="6192390" cy="3017520"/>
+          </a:xfrm>
+          <a:prstGeom prst="rect">
+            <a:avLst/>
+          </a:prstGeom>
+          <a:noFill/>
+          <a:ln/>
+        </p:spPr>
+        <p:txBody>
+          <a:bodyPr wrap="square" lIns="0" tIns="0" rIns="0" bIns="0" rtlCol="0" anchor="t"/>
+          <a:lstStyle/>
+          <a:p>
+            <a:pPr algn="l" indent="0" marL="0">
+              <a:spcAft>
+                <a:spcPts val="600"/>
+              </a:spcAft>
+              <a:buNone/>
+            </a:pPr>
+            <a:r>
+              <a:rPr lang="en-US" sz="1350" dirty="0">
+                <a:solidFill>
+                  <a:srgbClr val="33444F"/>
+                </a:solidFill>
+                <a:latin typeface="Calibri" pitchFamily="34" charset="0"/>
+                <a:ea typeface="Calibri" pitchFamily="34" charset="-122"/>
+                <a:cs typeface="Calibri" pitchFamily="34" charset="-120"/>
+              </a:rPr>
+              <a:t>A. Pseudohyponatremia</a:t>
+            </a:r>
+            <a:endParaRPr lang="en-US" sz="1350" dirty="0"/>
+          </a:p>
+          <a:p>
+            <a:pPr algn="l" indent="0" marL="0">
+              <a:spcAft>
+                <a:spcPts val="600"/>
+              </a:spcAft>
+              <a:buNone/>
+            </a:pPr>
+            <a:r>
+              <a:rPr lang="en-US" sz="1350" b="1" dirty="0">
+                <a:solidFill>
+                  <a:srgbClr val="0D4A92"/>
+                </a:solidFill>
+                <a:latin typeface="Calibri" pitchFamily="34" charset="0"/>
+                <a:ea typeface="Calibri" pitchFamily="34" charset="-122"/>
+                <a:cs typeface="Calibri" pitchFamily="34" charset="-120"/>
+              </a:rPr>
+              <a:t>B. Translocational (hyperglycemic) hyponatremia</a:t>
+            </a:r>
+            <a:endParaRPr lang="en-US" sz="1350" dirty="0"/>
+          </a:p>
+          <a:p>
+            <a:pPr algn="l" indent="0" marL="0">
+              <a:spcAft>
+                <a:spcPts val="600"/>
+              </a:spcAft>
+              <a:buNone/>
+            </a:pPr>
+            <a:r>
+              <a:rPr lang="en-US" sz="1350" dirty="0">
+                <a:solidFill>
+                  <a:srgbClr val="33444F"/>
+                </a:solidFill>
+                <a:latin typeface="Calibri" pitchFamily="34" charset="0"/>
+                <a:ea typeface="Calibri" pitchFamily="34" charset="-122"/>
+                <a:cs typeface="Calibri" pitchFamily="34" charset="-120"/>
+              </a:rPr>
+              <a:t>C. SIADH</a:t>
+            </a:r>
+            <a:endParaRPr lang="en-US" sz="1350" dirty="0"/>
+          </a:p>
+          <a:p>
+            <a:pPr algn="l" indent="0" marL="0">
+              <a:spcAft>
+                <a:spcPts val="600"/>
+              </a:spcAft>
+              <a:buNone/>
+            </a:pPr>
+            <a:r>
+              <a:rPr lang="en-US" sz="1350" dirty="0">
+                <a:solidFill>
+                  <a:srgbClr val="33444F"/>
+                </a:solidFill>
+                <a:latin typeface="Calibri" pitchFamily="34" charset="0"/>
+                <a:ea typeface="Calibri" pitchFamily="34" charset="-122"/>
+                <a:cs typeface="Calibri" pitchFamily="34" charset="-120"/>
+              </a:rPr>
+              <a:t>D. Diabetes insipidus</a:t>
+            </a:r>
+            <a:endParaRPr lang="en-US" sz="1350" dirty="0"/>
+          </a:p>
+          <a:p>
+            <a:pPr algn="l" indent="0" marL="0">
+              <a:spcAft>
+                <a:spcPts val="600"/>
+              </a:spcAft>
+              <a:buNone/>
+            </a:pPr>
+            <a:r>
+              <a:rPr lang="en-US" sz="1350" dirty="0">
+                <a:solidFill>
+                  <a:srgbClr val="33444F"/>
+                </a:solidFill>
+                <a:latin typeface="Calibri" pitchFamily="34" charset="0"/>
+                <a:ea typeface="Calibri" pitchFamily="34" charset="-122"/>
+                <a:cs typeface="Calibri" pitchFamily="34" charset="-120"/>
+              </a:rPr>
+              <a:t>E. True hypotonic hyponatremia</a:t>
+            </a:r>
+            <a:endParaRPr lang="en-US" sz="1350" dirty="0"/>
+          </a:p>
+        </p:txBody>
+      </p:sp>
+      <p:sp>
+        <p:nvSpPr>
+          <p:cNvPr id="6" name="Shape 4"/>
+          <p:cNvSpPr/>
+          <p:nvPr/>
+        </p:nvSpPr>
+        <p:spPr>
+          <a:xfrm>
+            <a:off x="7201632" y="2395728"/>
+            <a:ext cx="4423136" cy="3246120"/>
+          </a:xfrm>
+          <a:prstGeom prst="roundRect">
+            <a:avLst>
+              <a:gd name="adj" fmla="val 2535"/>
+            </a:avLst>
+          </a:prstGeom>
+          <a:solidFill>
+            <a:srgbClr val="E7EFFA"/>
+          </a:solidFill>
+          <a:ln/>
+          <a:effectLst>
+            <a:outerShdw sx="100000" sy="100000" kx="0" ky="0" algn="bl" rotWithShape="0" blurRad="88900" dist="25400" dir="5400000">
+              <a:srgbClr val="22303C">
+                <a:alpha val="12000"/>
+              </a:srgbClr>
+            </a:outerShdw>
+          </a:effectLst>
+        </p:spPr>
+        <p:txBody>
+          <a:bodyPr/>
+          <a:p/>
+        </p:txBody>
+      </p:sp>
+      <p:sp>
+        <p:nvSpPr>
+          <p:cNvPr id="7" name="Text 5"/>
+          <p:cNvSpPr/>
+          <p:nvPr/>
+        </p:nvSpPr>
+        <p:spPr>
+          <a:xfrm>
+            <a:off x="7439376" y="2578608"/>
+            <a:ext cx="3965936" cy="457200"/>
+          </a:xfrm>
+          <a:prstGeom prst="rect">
+            <a:avLst/>
+          </a:prstGeom>
+          <a:noFill/>
+          <a:ln/>
+        </p:spPr>
+        <p:txBody>
+          <a:bodyPr wrap="square" lIns="0" tIns="0" rIns="0" bIns="0" rtlCol="0" anchor="ctr"/>
+          <a:lstStyle/>
+          <a:p>
+            <a:pPr indent="0" marL="0">
+              <a:buNone/>
+            </a:pPr>
+            <a:r>
+              <a:rPr lang="en-US" sz="1500" b="1" dirty="0">
+                <a:solidFill>
+                  <a:srgbClr val="1565C0"/>
+                </a:solidFill>
+                <a:latin typeface="Calibri" pitchFamily="34" charset="0"/>
+                <a:ea typeface="Calibri" pitchFamily="34" charset="-122"/>
+                <a:cs typeface="Calibri" pitchFamily="34" charset="-120"/>
+              </a:rPr>
+              <a:t>ANSWER  </a:t>
+            </a:r>
+            <a:pPr indent="0" marL="0">
+              <a:buNone/>
+            </a:pPr>
+            <a:r>
+              <a:rPr lang="en-US" sz="1500" b="1" dirty="0">
+                <a:solidFill>
+                  <a:srgbClr val="1B2A38"/>
+                </a:solidFill>
+                <a:latin typeface="Calibri" pitchFamily="34" charset="0"/>
+                <a:ea typeface="Calibri" pitchFamily="34" charset="-122"/>
+                <a:cs typeface="Calibri" pitchFamily="34" charset="-120"/>
+              </a:rPr>
+              <a:t>B — Translocational hyponatremia</a:t>
+            </a:r>
+            <a:endParaRPr lang="en-US" sz="1500" dirty="0"/>
+          </a:p>
+        </p:txBody>
+      </p:sp>
+      <p:sp>
+        <p:nvSpPr>
+          <p:cNvPr id="8" name="Text 6"/>
+          <p:cNvSpPr/>
+          <p:nvPr/>
+        </p:nvSpPr>
+        <p:spPr>
+          <a:xfrm>
+            <a:off x="7439376" y="3127248"/>
+            <a:ext cx="3947648" cy="2377440"/>
+          </a:xfrm>
+          <a:prstGeom prst="rect">
+            <a:avLst/>
+          </a:prstGeom>
+          <a:noFill/>
+          <a:ln/>
+        </p:spPr>
+        <p:txBody>
+          <a:bodyPr wrap="square" lIns="0" tIns="0" rIns="0" bIns="0" rtlCol="0" anchor="t"/>
+          <a:lstStyle/>
+          <a:p>
+            <a:pPr algn="l" indent="0" marL="0">
+              <a:lnSpc>
+                <a:spcPct val="108000"/>
+              </a:lnSpc>
+              <a:buNone/>
+            </a:pPr>
+            <a:r>
+              <a:rPr lang="en-US" sz="1250" dirty="0">
+                <a:solidFill>
+                  <a:srgbClr val="33444F"/>
+                </a:solidFill>
+                <a:latin typeface="Calibri" pitchFamily="34" charset="0"/>
+                <a:ea typeface="Calibri" pitchFamily="34" charset="-122"/>
+                <a:cs typeface="Calibri" pitchFamily="34" charset="-120"/>
+              </a:rPr>
+              <a:t>Hyperglycemia draws water into the vascular space, diluting sodium; correcting for glucose normalizes it. Osmolality is high/normal, not low.</a:t>
+            </a:r>
+            <a:endParaRPr lang="en-US" sz="1250" dirty="0"/>
+          </a:p>
+        </p:txBody>
+      </p:sp>
+      <p:sp>
+        <p:nvSpPr>
+          <p:cNvPr id="9" name="Text 7"/>
+          <p:cNvSpPr/>
+          <p:nvPr/>
+        </p:nvSpPr>
+        <p:spPr>
+          <a:xfrm>
+            <a:off x="566928" y="6473952"/>
+            <a:ext cx="7772400" cy="274320"/>
+          </a:xfrm>
+          <a:prstGeom prst="rect">
+            <a:avLst/>
+          </a:prstGeom>
+          <a:noFill/>
+          <a:ln/>
+        </p:spPr>
+        <p:txBody>
+          <a:bodyPr wrap="square" lIns="0" tIns="0" rIns="0" bIns="0" rtlCol="0" anchor="ctr"/>
+          <a:lstStyle/>
+          <a:p>
+            <a:pPr algn="l" indent="0" marL="0">
+              <a:buNone/>
+            </a:pPr>
+            <a:r>
+              <a:rPr lang="en-US" sz="850" dirty="0">
+                <a:solidFill>
+                  <a:srgbClr val="9AA8B4"/>
+                </a:solidFill>
+                <a:latin typeface="Calibri" pitchFamily="34" charset="0"/>
+                <a:ea typeface="Calibri" pitchFamily="34" charset="-122"/>
+                <a:cs typeface="Calibri" pitchFamily="34" charset="-120"/>
+              </a:rPr>
+              <a:t>Makassed General Hospital  ·  Department of Laboratory Medicine</a:t>
+            </a:r>
+            <a:endParaRPr lang="en-US" sz="850" dirty="0"/>
+          </a:p>
+        </p:txBody>
+      </p:sp>
+      <p:sp>
+        <p:nvSpPr>
+          <p:cNvPr id="10" name="Text 8"/>
+          <p:cNvSpPr/>
+          <p:nvPr/>
+        </p:nvSpPr>
+        <p:spPr>
+          <a:xfrm>
+            <a:off x="9814255" y="6473952"/>
+            <a:ext cx="1828800" cy="274320"/>
+          </a:xfrm>
+          <a:prstGeom prst="rect">
+            <a:avLst/>
+          </a:prstGeom>
+          <a:noFill/>
+          <a:ln/>
+        </p:spPr>
+        <p:txBody>
+          <a:bodyPr wrap="square" lIns="0" tIns="0" rIns="0" bIns="0" rtlCol="0" anchor="ctr"/>
+          <a:lstStyle/>
+          <a:p>
+            <a:pPr algn="r" indent="0" marL="0">
+              <a:buNone/>
+            </a:pPr>
+            <a:r>
+              <a:rPr lang="en-US" sz="850" dirty="0">
+                <a:solidFill>
+                  <a:srgbClr val="9AA8B4"/>
+                </a:solidFill>
+                <a:latin typeface="Calibri" pitchFamily="34" charset="0"/>
+                <a:ea typeface="Calibri" pitchFamily="34" charset="-122"/>
+                <a:cs typeface="Calibri" pitchFamily="34" charset="-120"/>
+              </a:rPr>
+              <a:t>CP Lecture Series</a:t>
+            </a:r>
+            <a:pPr algn="r" indent="0" marL="0">
+              <a:buNone/>
+            </a:pPr>
+            <a:r>
+              <a:rPr lang="en-US" sz="850" dirty="0">
+                <a:solidFill>
+                  <a:srgbClr val="DCE4EC"/>
+                </a:solidFill>
+                <a:latin typeface="Calibri" pitchFamily="34" charset="0"/>
+                <a:ea typeface="Calibri" pitchFamily="34" charset="-122"/>
+                <a:cs typeface="Calibri" pitchFamily="34" charset="-120"/>
+              </a:rPr>
+              <a:t>   ·   </a:t>
+            </a:r>
+            <a:pPr algn="r" indent="0" marL="0">
+              <a:buNone/>
+            </a:pPr>
+            <a:r>
+              <a:rPr lang="en-US" sz="850" b="1" dirty="0">
+                <a:solidFill>
+                  <a:srgbClr val="1565C0"/>
+                </a:solidFill>
+                <a:latin typeface="Calibri" pitchFamily="34" charset="0"/>
+                <a:ea typeface="Calibri" pitchFamily="34" charset="-122"/>
+                <a:cs typeface="Calibri" pitchFamily="34" charset="-120"/>
+              </a:rPr>
+              <a:t>20</a:t>
+            </a:r>
+            <a:endParaRPr lang="en-US" sz="850" dirty="0"/>
+          </a:p>
+        </p:txBody>
+      </p:sp>
+    </p:spTree>
+  </p:cSld>
+  <p:clrMapOvr>
+    <a:masterClrMapping/>
+  </p:clrMapOvr>
+</p:sld>
+</file>
+
+<file path=ppt/slides/slide27.xml><?xml version="1.0" encoding="utf-8"?>
+<p:sld xmlns:a="http://schemas.openxmlformats.org/drawingml/2006/main" xmlns:p="http://schemas.openxmlformats.org/presentationml/2006/main" xmlns:r="http://schemas.openxmlformats.org/officeDocument/2006/relationships">
+  <p:cSld>
+    <p:spTree>
+      <p:nvGrpSpPr>
+        <p:cNvPr id="1" name=""/>
+        <p:cNvGrpSpPr/>
+        <p:nvPr/>
+      </p:nvGrpSpPr>
+      <p:grpSpPr/>
+      <p:sp>
+        <p:nvSpPr>
+          <p:cNvPr id="2" name="Text 0"/>
+          <p:cNvSpPr/>
+          <p:nvPr/>
+        </p:nvSpPr>
+        <p:spPr>
+          <a:xfrm>
+            <a:off x="566928" y="329184"/>
+            <a:ext cx="10515600" cy="310896"/>
+          </a:xfrm>
+          <a:prstGeom prst="rect">
+            <a:avLst/>
+          </a:prstGeom>
+          <a:noFill/>
+          <a:ln/>
+        </p:spPr>
+        <p:txBody>
+          <a:bodyPr wrap="square" lIns="0" tIns="0" rIns="0" bIns="0" rtlCol="0" anchor="ctr"/>
+          <a:lstStyle/>
+          <a:p>
+            <a:pPr algn="l" indent="0" marL="0">
+              <a:buNone/>
+            </a:pPr>
+            <a:r>
+              <a:rPr lang="en-US" sz="1100" b="1" spc="150" kern="0" dirty="0">
+                <a:solidFill>
+                  <a:srgbClr val="1565C0"/>
+                </a:solidFill>
+                <a:latin typeface="Calibri" pitchFamily="34" charset="0"/>
+                <a:ea typeface="Calibri" pitchFamily="34" charset="-122"/>
+                <a:cs typeface="Calibri" pitchFamily="34" charset="-120"/>
+              </a:rPr>
+              <a:t>CLINICAL CHEMISTRY   ·   BOARD REVIEW  ·  Q3</a:t>
+            </a:r>
+            <a:endParaRPr lang="en-US" sz="1100" dirty="0"/>
+          </a:p>
+        </p:txBody>
+      </p:sp>
+      <p:sp>
+        <p:nvSpPr>
+          <p:cNvPr id="3" name="Text 1"/>
+          <p:cNvSpPr/>
+          <p:nvPr/>
+        </p:nvSpPr>
+        <p:spPr>
+          <a:xfrm>
+            <a:off x="566928" y="713232"/>
+            <a:ext cx="11064240" cy="749808"/>
+          </a:xfrm>
+          <a:prstGeom prst="rect">
+            <a:avLst/>
+          </a:prstGeom>
+          <a:noFill/>
+          <a:ln/>
+        </p:spPr>
+        <p:txBody>
+          <a:bodyPr wrap="square" lIns="0" tIns="0" rIns="0" bIns="0" rtlCol="0" anchor="ctr"/>
+          <a:lstStyle/>
+          <a:p>
+            <a:pPr algn="l" indent="0" marL="0">
+              <a:buNone/>
+            </a:pPr>
+            <a:r>
+              <a:rPr lang="en-US" sz="2600" b="1" dirty="0">
+                <a:solidFill>
+                  <a:srgbClr val="0E3A5F"/>
+                </a:solidFill>
+                <a:latin typeface="Calibri" pitchFamily="34" charset="0"/>
+                <a:ea typeface="Calibri" pitchFamily="34" charset="-122"/>
+                <a:cs typeface="Calibri" pitchFamily="34" charset="-120"/>
+              </a:rPr>
+              <a:t>Board-Style Review</a:t>
+            </a:r>
+            <a:endParaRPr lang="en-US" sz="2600" dirty="0"/>
+          </a:p>
+        </p:txBody>
+      </p:sp>
+      <p:sp>
+        <p:nvSpPr>
+          <p:cNvPr id="4" name="Text 2"/>
+          <p:cNvSpPr/>
+          <p:nvPr/>
+        </p:nvSpPr>
+        <p:spPr>
+          <a:xfrm>
+            <a:off x="566928" y="1417320"/>
+            <a:ext cx="11057839" cy="914400"/>
+          </a:xfrm>
+          <a:prstGeom prst="rect">
+            <a:avLst/>
+          </a:prstGeom>
+          <a:noFill/>
+          <a:ln/>
+        </p:spPr>
+        <p:txBody>
+          <a:bodyPr wrap="square" lIns="0" tIns="0" rIns="0" bIns="0" rtlCol="0" anchor="t"/>
+          <a:lstStyle/>
+          <a:p>
+            <a:pPr algn="l" indent="0" marL="0">
+              <a:lnSpc>
+                <a:spcPct val="105000"/>
+              </a:lnSpc>
+              <a:buNone/>
+            </a:pPr>
+            <a:r>
+              <a:rPr lang="en-US" sz="1450" b="1" dirty="0">
+                <a:solidFill>
+                  <a:srgbClr val="1B2A38"/>
+                </a:solidFill>
+                <a:latin typeface="Calibri" pitchFamily="34" charset="0"/>
+                <a:ea typeface="Calibri" pitchFamily="34" charset="-122"/>
+                <a:cs typeface="Calibri" pitchFamily="34" charset="-120"/>
+              </a:rPr>
+              <a:t>A normal anion gap metabolic acidosis with hyperkalemia and urine pH &amp;lt; 5.5 suggests:</a:t>
+            </a:r>
+            <a:endParaRPr lang="en-US" sz="1450" dirty="0"/>
+          </a:p>
+        </p:txBody>
+      </p:sp>
+      <p:sp>
+        <p:nvSpPr>
+          <p:cNvPr id="5" name="Text 3"/>
+          <p:cNvSpPr/>
+          <p:nvPr/>
+        </p:nvSpPr>
+        <p:spPr>
+          <a:xfrm>
+            <a:off x="658368" y="2395728"/>
+            <a:ext cx="6192390" cy="3017520"/>
+          </a:xfrm>
+          <a:prstGeom prst="rect">
+            <a:avLst/>
+          </a:prstGeom>
+          <a:noFill/>
+          <a:ln/>
+        </p:spPr>
+        <p:txBody>
+          <a:bodyPr wrap="square" lIns="0" tIns="0" rIns="0" bIns="0" rtlCol="0" anchor="t"/>
+          <a:lstStyle/>
+          <a:p>
+            <a:pPr algn="l" indent="0" marL="0">
+              <a:spcAft>
+                <a:spcPts val="600"/>
+              </a:spcAft>
+              <a:buNone/>
+            </a:pPr>
+            <a:r>
+              <a:rPr lang="en-US" sz="1350" dirty="0">
+                <a:solidFill>
+                  <a:srgbClr val="33444F"/>
+                </a:solidFill>
+                <a:latin typeface="Calibri" pitchFamily="34" charset="0"/>
+                <a:ea typeface="Calibri" pitchFamily="34" charset="-122"/>
+                <a:cs typeface="Calibri" pitchFamily="34" charset="-120"/>
+              </a:rPr>
+              <a:t>A. Type 1 (distal) RTA</a:t>
+            </a:r>
+            <a:endParaRPr lang="en-US" sz="1350" dirty="0"/>
+          </a:p>
+          <a:p>
+            <a:pPr algn="l" indent="0" marL="0">
+              <a:spcAft>
+                <a:spcPts val="600"/>
+              </a:spcAft>
+              <a:buNone/>
+            </a:pPr>
+            <a:r>
+              <a:rPr lang="en-US" sz="1350" dirty="0">
+                <a:solidFill>
+                  <a:srgbClr val="33444F"/>
+                </a:solidFill>
+                <a:latin typeface="Calibri" pitchFamily="34" charset="0"/>
+                <a:ea typeface="Calibri" pitchFamily="34" charset="-122"/>
+                <a:cs typeface="Calibri" pitchFamily="34" charset="-120"/>
+              </a:rPr>
+              <a:t>B. Type 2 (proximal) RTA</a:t>
+            </a:r>
+            <a:endParaRPr lang="en-US" sz="1350" dirty="0"/>
+          </a:p>
+          <a:p>
+            <a:pPr algn="l" indent="0" marL="0">
+              <a:spcAft>
+                <a:spcPts val="600"/>
+              </a:spcAft>
+              <a:buNone/>
+            </a:pPr>
+            <a:r>
+              <a:rPr lang="en-US" sz="1350" b="1" dirty="0">
+                <a:solidFill>
+                  <a:srgbClr val="0D4A92"/>
+                </a:solidFill>
+                <a:latin typeface="Calibri" pitchFamily="34" charset="0"/>
+                <a:ea typeface="Calibri" pitchFamily="34" charset="-122"/>
+                <a:cs typeface="Calibri" pitchFamily="34" charset="-120"/>
+              </a:rPr>
+              <a:t>C. Type 4 RTA</a:t>
+            </a:r>
+            <a:endParaRPr lang="en-US" sz="1350" dirty="0"/>
+          </a:p>
+          <a:p>
+            <a:pPr algn="l" indent="0" marL="0">
+              <a:spcAft>
+                <a:spcPts val="600"/>
+              </a:spcAft>
+              <a:buNone/>
+            </a:pPr>
+            <a:r>
+              <a:rPr lang="en-US" sz="1350" dirty="0">
+                <a:solidFill>
+                  <a:srgbClr val="33444F"/>
+                </a:solidFill>
+                <a:latin typeface="Calibri" pitchFamily="34" charset="0"/>
+                <a:ea typeface="Calibri" pitchFamily="34" charset="-122"/>
+                <a:cs typeface="Calibri" pitchFamily="34" charset="-120"/>
+              </a:rPr>
+              <a:t>D. Diabetic ketoacidosis</a:t>
+            </a:r>
+            <a:endParaRPr lang="en-US" sz="1350" dirty="0"/>
+          </a:p>
+          <a:p>
+            <a:pPr algn="l" indent="0" marL="0">
+              <a:spcAft>
+                <a:spcPts val="600"/>
+              </a:spcAft>
+              <a:buNone/>
+            </a:pPr>
+            <a:r>
+              <a:rPr lang="en-US" sz="1350" dirty="0">
+                <a:solidFill>
+                  <a:srgbClr val="33444F"/>
+                </a:solidFill>
+                <a:latin typeface="Calibri" pitchFamily="34" charset="0"/>
+                <a:ea typeface="Calibri" pitchFamily="34" charset="-122"/>
+                <a:cs typeface="Calibri" pitchFamily="34" charset="-120"/>
+              </a:rPr>
+              <a:t>E. Lactic acidosis</a:t>
+            </a:r>
+            <a:endParaRPr lang="en-US" sz="1350" dirty="0"/>
+          </a:p>
+        </p:txBody>
+      </p:sp>
+      <p:sp>
+        <p:nvSpPr>
+          <p:cNvPr id="6" name="Shape 4"/>
+          <p:cNvSpPr/>
+          <p:nvPr/>
+        </p:nvSpPr>
+        <p:spPr>
+          <a:xfrm>
+            <a:off x="7201632" y="2395728"/>
+            <a:ext cx="4423136" cy="3246120"/>
+          </a:xfrm>
+          <a:prstGeom prst="roundRect">
+            <a:avLst>
+              <a:gd name="adj" fmla="val 2535"/>
+            </a:avLst>
+          </a:prstGeom>
+          <a:solidFill>
+            <a:srgbClr val="E7EFFA"/>
+          </a:solidFill>
+          <a:ln/>
+          <a:effectLst>
+            <a:outerShdw sx="100000" sy="100000" kx="0" ky="0" algn="bl" rotWithShape="0" blurRad="88900" dist="25400" dir="5400000">
+              <a:srgbClr val="22303C">
+                <a:alpha val="12000"/>
+              </a:srgbClr>
+            </a:outerShdw>
+          </a:effectLst>
+        </p:spPr>
+        <p:txBody>
+          <a:bodyPr/>
+          <a:p/>
+        </p:txBody>
+      </p:sp>
+      <p:sp>
+        <p:nvSpPr>
+          <p:cNvPr id="7" name="Text 5"/>
+          <p:cNvSpPr/>
+          <p:nvPr/>
+        </p:nvSpPr>
+        <p:spPr>
+          <a:xfrm>
+            <a:off x="7439376" y="2578608"/>
+            <a:ext cx="3965936" cy="457200"/>
+          </a:xfrm>
+          <a:prstGeom prst="rect">
+            <a:avLst/>
+          </a:prstGeom>
+          <a:noFill/>
+          <a:ln/>
+        </p:spPr>
+        <p:txBody>
+          <a:bodyPr wrap="square" lIns="0" tIns="0" rIns="0" bIns="0" rtlCol="0" anchor="ctr"/>
+          <a:lstStyle/>
+          <a:p>
+            <a:pPr indent="0" marL="0">
+              <a:buNone/>
+            </a:pPr>
+            <a:r>
+              <a:rPr lang="en-US" sz="1500" b="1" dirty="0">
+                <a:solidFill>
+                  <a:srgbClr val="1565C0"/>
+                </a:solidFill>
+                <a:latin typeface="Calibri" pitchFamily="34" charset="0"/>
+                <a:ea typeface="Calibri" pitchFamily="34" charset="-122"/>
+                <a:cs typeface="Calibri" pitchFamily="34" charset="-120"/>
+              </a:rPr>
+              <a:t>ANSWER  </a:t>
+            </a:r>
+            <a:pPr indent="0" marL="0">
+              <a:buNone/>
+            </a:pPr>
+            <a:r>
+              <a:rPr lang="en-US" sz="1500" b="1" dirty="0">
+                <a:solidFill>
+                  <a:srgbClr val="1B2A38"/>
+                </a:solidFill>
+                <a:latin typeface="Calibri" pitchFamily="34" charset="0"/>
+                <a:ea typeface="Calibri" pitchFamily="34" charset="-122"/>
+                <a:cs typeface="Calibri" pitchFamily="34" charset="-120"/>
+              </a:rPr>
+              <a:t>C — Type 4 RTA</a:t>
+            </a:r>
+            <a:endParaRPr lang="en-US" sz="1500" dirty="0"/>
+          </a:p>
+        </p:txBody>
+      </p:sp>
+      <p:sp>
+        <p:nvSpPr>
+          <p:cNvPr id="8" name="Text 6"/>
+          <p:cNvSpPr/>
+          <p:nvPr/>
+        </p:nvSpPr>
+        <p:spPr>
+          <a:xfrm>
+            <a:off x="7439376" y="3127248"/>
+            <a:ext cx="3947648" cy="2377440"/>
+          </a:xfrm>
+          <a:prstGeom prst="rect">
+            <a:avLst/>
+          </a:prstGeom>
+          <a:noFill/>
+          <a:ln/>
+        </p:spPr>
+        <p:txBody>
+          <a:bodyPr wrap="square" lIns="0" tIns="0" rIns="0" bIns="0" rtlCol="0" anchor="t"/>
+          <a:lstStyle/>
+          <a:p>
+            <a:pPr algn="l" indent="0" marL="0">
+              <a:lnSpc>
+                <a:spcPct val="108000"/>
+              </a:lnSpc>
+              <a:buNone/>
+            </a:pPr>
+            <a:r>
+              <a:rPr lang="en-US" sz="1250" dirty="0">
+                <a:solidFill>
+                  <a:srgbClr val="33444F"/>
+                </a:solidFill>
+                <a:latin typeface="Calibri" pitchFamily="34" charset="0"/>
+                <a:ea typeface="Calibri" pitchFamily="34" charset="-122"/>
+                <a:cs typeface="Calibri" pitchFamily="34" charset="-120"/>
+              </a:rPr>
+              <a:t>Type 4 RTA (aldosterone deficiency/resistance) causes hyperkalemic normal-gap acidosis with an acid urine; common in diabetic nephropathy.</a:t>
+            </a:r>
+            <a:endParaRPr lang="en-US" sz="1250" dirty="0"/>
+          </a:p>
+        </p:txBody>
+      </p:sp>
+      <p:sp>
+        <p:nvSpPr>
+          <p:cNvPr id="9" name="Text 7"/>
+          <p:cNvSpPr/>
+          <p:nvPr/>
+        </p:nvSpPr>
+        <p:spPr>
+          <a:xfrm>
+            <a:off x="566928" y="6473952"/>
+            <a:ext cx="7772400" cy="274320"/>
+          </a:xfrm>
+          <a:prstGeom prst="rect">
+            <a:avLst/>
+          </a:prstGeom>
+          <a:noFill/>
+          <a:ln/>
+        </p:spPr>
+        <p:txBody>
+          <a:bodyPr wrap="square" lIns="0" tIns="0" rIns="0" bIns="0" rtlCol="0" anchor="ctr"/>
+          <a:lstStyle/>
+          <a:p>
+            <a:pPr algn="l" indent="0" marL="0">
+              <a:buNone/>
+            </a:pPr>
+            <a:r>
+              <a:rPr lang="en-US" sz="850" dirty="0">
+                <a:solidFill>
+                  <a:srgbClr val="9AA8B4"/>
+                </a:solidFill>
+                <a:latin typeface="Calibri" pitchFamily="34" charset="0"/>
+                <a:ea typeface="Calibri" pitchFamily="34" charset="-122"/>
+                <a:cs typeface="Calibri" pitchFamily="34" charset="-120"/>
+              </a:rPr>
+              <a:t>Makassed General Hospital  ·  Department of Laboratory Medicine</a:t>
+            </a:r>
+            <a:endParaRPr lang="en-US" sz="850" dirty="0"/>
+          </a:p>
+        </p:txBody>
+      </p:sp>
+      <p:sp>
+        <p:nvSpPr>
+          <p:cNvPr id="10" name="Text 8"/>
+          <p:cNvSpPr/>
+          <p:nvPr/>
+        </p:nvSpPr>
+        <p:spPr>
+          <a:xfrm>
+            <a:off x="9814255" y="6473952"/>
+            <a:ext cx="1828800" cy="274320"/>
+          </a:xfrm>
+          <a:prstGeom prst="rect">
+            <a:avLst/>
+          </a:prstGeom>
+          <a:noFill/>
+          <a:ln/>
+        </p:spPr>
+        <p:txBody>
+          <a:bodyPr wrap="square" lIns="0" tIns="0" rIns="0" bIns="0" rtlCol="0" anchor="ctr"/>
+          <a:lstStyle/>
+          <a:p>
+            <a:pPr algn="r" indent="0" marL="0">
+              <a:buNone/>
+            </a:pPr>
+            <a:r>
+              <a:rPr lang="en-US" sz="850" dirty="0">
+                <a:solidFill>
+                  <a:srgbClr val="9AA8B4"/>
+                </a:solidFill>
+                <a:latin typeface="Calibri" pitchFamily="34" charset="0"/>
+                <a:ea typeface="Calibri" pitchFamily="34" charset="-122"/>
+                <a:cs typeface="Calibri" pitchFamily="34" charset="-120"/>
+              </a:rPr>
+              <a:t>CP Lecture Series</a:t>
+            </a:r>
+            <a:pPr algn="r" indent="0" marL="0">
+              <a:buNone/>
+            </a:pPr>
+            <a:r>
+              <a:rPr lang="en-US" sz="850" dirty="0">
+                <a:solidFill>
+                  <a:srgbClr val="DCE4EC"/>
+                </a:solidFill>
+                <a:latin typeface="Calibri" pitchFamily="34" charset="0"/>
+                <a:ea typeface="Calibri" pitchFamily="34" charset="-122"/>
+                <a:cs typeface="Calibri" pitchFamily="34" charset="-120"/>
+              </a:rPr>
+              <a:t>   ·   </a:t>
+            </a:r>
+            <a:pPr algn="r" indent="0" marL="0">
+              <a:buNone/>
+            </a:pPr>
+            <a:r>
+              <a:rPr lang="en-US" sz="850" b="1" dirty="0">
+                <a:solidFill>
+                  <a:srgbClr val="1565C0"/>
+                </a:solidFill>
+                <a:latin typeface="Calibri" pitchFamily="34" charset="0"/>
+                <a:ea typeface="Calibri" pitchFamily="34" charset="-122"/>
+                <a:cs typeface="Calibri" pitchFamily="34" charset="-120"/>
+              </a:rPr>
+              <a:t>19</a:t>
+            </a:r>
+            <a:endParaRPr lang="en-US" sz="850" dirty="0"/>
+          </a:p>
+        </p:txBody>
+      </p:sp>
+    </p:spTree>
+  </p:cSld>
+  <p:clrMapOvr>
+    <a:masterClrMapping/>
+  </p:clrMapOvr>
+</p:sld>
+</file>
+
+<file path=ppt/slides/slide28.xml><?xml version="1.0" encoding="utf-8"?>
+<p:sld xmlns:a="http://schemas.openxmlformats.org/drawingml/2006/main" xmlns:p="http://schemas.openxmlformats.org/presentationml/2006/main" xmlns:r="http://schemas.openxmlformats.org/officeDocument/2006/relationships">
+  <p:cSld>
+    <p:spTree>
+      <p:nvGrpSpPr>
+        <p:cNvPr id="1" name=""/>
+        <p:cNvGrpSpPr/>
+        <p:nvPr/>
+      </p:nvGrpSpPr>
+      <p:grpSpPr/>
+      <p:sp>
+        <p:nvSpPr>
+          <p:cNvPr id="2" name="Text 0"/>
+          <p:cNvSpPr/>
+          <p:nvPr/>
+        </p:nvSpPr>
+        <p:spPr>
+          <a:xfrm>
+            <a:off x="566928" y="329184"/>
+            <a:ext cx="10515600" cy="310896"/>
+          </a:xfrm>
+          <a:prstGeom prst="rect">
+            <a:avLst/>
+          </a:prstGeom>
+          <a:noFill/>
+          <a:ln/>
+        </p:spPr>
+        <p:txBody>
+          <a:bodyPr wrap="square" lIns="0" tIns="0" rIns="0" bIns="0" rtlCol="0" anchor="ctr"/>
+          <a:lstStyle/>
+          <a:p>
+            <a:pPr algn="l" indent="0" marL="0">
+              <a:buNone/>
+            </a:pPr>
+            <a:r>
+              <a:rPr lang="en-US" sz="1100" b="1" spc="150" kern="0" dirty="0">
+                <a:solidFill>
+                  <a:srgbClr val="1565C0"/>
+                </a:solidFill>
+                <a:latin typeface="Calibri" pitchFamily="34" charset="0"/>
+                <a:ea typeface="Calibri" pitchFamily="34" charset="-122"/>
+                <a:cs typeface="Calibri" pitchFamily="34" charset="-120"/>
+              </a:rPr>
+              <a:t>CLINICAL CHEMISTRY   ·   BOARD REVIEW  ·  Q2</a:t>
+            </a:r>
+            <a:endParaRPr lang="en-US" sz="1100" dirty="0"/>
+          </a:p>
+        </p:txBody>
+      </p:sp>
+      <p:sp>
+        <p:nvSpPr>
+          <p:cNvPr id="3" name="Text 1"/>
+          <p:cNvSpPr/>
+          <p:nvPr/>
+        </p:nvSpPr>
+        <p:spPr>
+          <a:xfrm>
+            <a:off x="566928" y="713232"/>
+            <a:ext cx="11064240" cy="749808"/>
+          </a:xfrm>
+          <a:prstGeom prst="rect">
+            <a:avLst/>
+          </a:prstGeom>
+          <a:noFill/>
+          <a:ln/>
+        </p:spPr>
+        <p:txBody>
+          <a:bodyPr wrap="square" lIns="0" tIns="0" rIns="0" bIns="0" rtlCol="0" anchor="ctr"/>
+          <a:lstStyle/>
+          <a:p>
+            <a:pPr algn="l" indent="0" marL="0">
+              <a:buNone/>
+            </a:pPr>
+            <a:r>
+              <a:rPr lang="en-US" sz="2600" b="1" dirty="0">
+                <a:solidFill>
+                  <a:srgbClr val="0E3A5F"/>
+                </a:solidFill>
+                <a:latin typeface="Calibri" pitchFamily="34" charset="0"/>
+                <a:ea typeface="Calibri" pitchFamily="34" charset="-122"/>
+                <a:cs typeface="Calibri" pitchFamily="34" charset="-120"/>
+              </a:rPr>
+              <a:t>Board-Style Review</a:t>
+            </a:r>
+            <a:endParaRPr lang="en-US" sz="2600" dirty="0"/>
+          </a:p>
+        </p:txBody>
+      </p:sp>
+      <p:sp>
+        <p:nvSpPr>
+          <p:cNvPr id="4" name="Text 2"/>
+          <p:cNvSpPr/>
+          <p:nvPr/>
+        </p:nvSpPr>
+        <p:spPr>
+          <a:xfrm>
+            <a:off x="566928" y="1417320"/>
+            <a:ext cx="11057839" cy="914400"/>
+          </a:xfrm>
+          <a:prstGeom prst="rect">
+            <a:avLst/>
+          </a:prstGeom>
+          <a:noFill/>
+          <a:ln/>
+        </p:spPr>
+        <p:txBody>
+          <a:bodyPr wrap="square" lIns="0" tIns="0" rIns="0" bIns="0" rtlCol="0" anchor="t"/>
+          <a:lstStyle/>
+          <a:p>
+            <a:pPr algn="l" indent="0" marL="0">
+              <a:lnSpc>
+                <a:spcPct val="105000"/>
+              </a:lnSpc>
+              <a:buNone/>
+            </a:pPr>
+            <a:r>
+              <a:rPr lang="en-US" sz="1450" b="1" dirty="0">
+                <a:solidFill>
+                  <a:srgbClr val="1B2A38"/>
+                </a:solidFill>
+                <a:latin typeface="Calibri" pitchFamily="34" charset="0"/>
+                <a:ea typeface="Calibri" pitchFamily="34" charset="-122"/>
+                <a:cs typeface="Calibri" pitchFamily="34" charset="-120"/>
+              </a:rPr>
+              <a:t>Which finding most specifically suggests a toxic alcohol ingestion EARLY?</a:t>
+            </a:r>
+            <a:endParaRPr lang="en-US" sz="1450" dirty="0"/>
+          </a:p>
+        </p:txBody>
+      </p:sp>
+      <p:sp>
+        <p:nvSpPr>
+          <p:cNvPr id="5" name="Text 3"/>
+          <p:cNvSpPr/>
+          <p:nvPr/>
+        </p:nvSpPr>
+        <p:spPr>
+          <a:xfrm>
+            <a:off x="658368" y="2395728"/>
+            <a:ext cx="6192390" cy="3017520"/>
+          </a:xfrm>
+          <a:prstGeom prst="rect">
+            <a:avLst/>
+          </a:prstGeom>
+          <a:noFill/>
+          <a:ln/>
+        </p:spPr>
+        <p:txBody>
+          <a:bodyPr wrap="square" lIns="0" tIns="0" rIns="0" bIns="0" rtlCol="0" anchor="t"/>
+          <a:lstStyle/>
+          <a:p>
+            <a:pPr algn="l" indent="0" marL="0">
+              <a:spcAft>
+                <a:spcPts val="600"/>
+              </a:spcAft>
+              <a:buNone/>
+            </a:pPr>
+            <a:r>
+              <a:rPr lang="en-US" sz="1350" dirty="0">
+                <a:solidFill>
+                  <a:srgbClr val="33444F"/>
+                </a:solidFill>
+                <a:latin typeface="Calibri" pitchFamily="34" charset="0"/>
+                <a:ea typeface="Calibri" pitchFamily="34" charset="-122"/>
+                <a:cs typeface="Calibri" pitchFamily="34" charset="-120"/>
+              </a:rPr>
+              <a:t>A. High anion gap</a:t>
+            </a:r>
+            <a:endParaRPr lang="en-US" sz="1350" dirty="0"/>
+          </a:p>
+          <a:p>
+            <a:pPr algn="l" indent="0" marL="0">
+              <a:spcAft>
+                <a:spcPts val="600"/>
+              </a:spcAft>
+              <a:buNone/>
+            </a:pPr>
+            <a:r>
+              <a:rPr lang="en-US" sz="1350" b="1" dirty="0">
+                <a:solidFill>
+                  <a:srgbClr val="0D4A92"/>
+                </a:solidFill>
+                <a:latin typeface="Calibri" pitchFamily="34" charset="0"/>
+                <a:ea typeface="Calibri" pitchFamily="34" charset="-122"/>
+                <a:cs typeface="Calibri" pitchFamily="34" charset="-120"/>
+              </a:rPr>
+              <a:t>B. Elevated osmolal gap</a:t>
+            </a:r>
+            <a:endParaRPr lang="en-US" sz="1350" dirty="0"/>
+          </a:p>
+          <a:p>
+            <a:pPr algn="l" indent="0" marL="0">
+              <a:spcAft>
+                <a:spcPts val="600"/>
+              </a:spcAft>
+              <a:buNone/>
+            </a:pPr>
+            <a:r>
+              <a:rPr lang="en-US" sz="1350" dirty="0">
+                <a:solidFill>
+                  <a:srgbClr val="33444F"/>
+                </a:solidFill>
+                <a:latin typeface="Calibri" pitchFamily="34" charset="0"/>
+                <a:ea typeface="Calibri" pitchFamily="34" charset="-122"/>
+                <a:cs typeface="Calibri" pitchFamily="34" charset="-120"/>
+              </a:rPr>
+              <a:t>C. Low bicarbonate</a:t>
+            </a:r>
+            <a:endParaRPr lang="en-US" sz="1350" dirty="0"/>
+          </a:p>
+          <a:p>
+            <a:pPr algn="l" indent="0" marL="0">
+              <a:spcAft>
+                <a:spcPts val="600"/>
+              </a:spcAft>
+              <a:buNone/>
+            </a:pPr>
+            <a:r>
+              <a:rPr lang="en-US" sz="1350" dirty="0">
+                <a:solidFill>
+                  <a:srgbClr val="33444F"/>
+                </a:solidFill>
+                <a:latin typeface="Calibri" pitchFamily="34" charset="0"/>
+                <a:ea typeface="Calibri" pitchFamily="34" charset="-122"/>
+                <a:cs typeface="Calibri" pitchFamily="34" charset="-120"/>
+              </a:rPr>
+              <a:t>D. High lactate</a:t>
+            </a:r>
+            <a:endParaRPr lang="en-US" sz="1350" dirty="0"/>
+          </a:p>
+          <a:p>
+            <a:pPr algn="l" indent="0" marL="0">
+              <a:spcAft>
+                <a:spcPts val="600"/>
+              </a:spcAft>
+              <a:buNone/>
+            </a:pPr>
+            <a:r>
+              <a:rPr lang="en-US" sz="1350" dirty="0">
+                <a:solidFill>
+                  <a:srgbClr val="33444F"/>
+                </a:solidFill>
+                <a:latin typeface="Calibri" pitchFamily="34" charset="0"/>
+                <a:ea typeface="Calibri" pitchFamily="34" charset="-122"/>
+                <a:cs typeface="Calibri" pitchFamily="34" charset="-120"/>
+              </a:rPr>
+              <a:t>E. Ketonuria</a:t>
+            </a:r>
+            <a:endParaRPr lang="en-US" sz="1350" dirty="0"/>
+          </a:p>
+        </p:txBody>
+      </p:sp>
+      <p:sp>
+        <p:nvSpPr>
+          <p:cNvPr id="6" name="Shape 4"/>
+          <p:cNvSpPr/>
+          <p:nvPr/>
+        </p:nvSpPr>
+        <p:spPr>
+          <a:xfrm>
+            <a:off x="7201632" y="2395728"/>
+            <a:ext cx="4423136" cy="3246120"/>
+          </a:xfrm>
+          <a:prstGeom prst="roundRect">
+            <a:avLst>
+              <a:gd name="adj" fmla="val 2535"/>
+            </a:avLst>
+          </a:prstGeom>
+          <a:solidFill>
+            <a:srgbClr val="E7EFFA"/>
+          </a:solidFill>
+          <a:ln/>
+          <a:effectLst>
+            <a:outerShdw sx="100000" sy="100000" kx="0" ky="0" algn="bl" rotWithShape="0" blurRad="88900" dist="25400" dir="5400000">
+              <a:srgbClr val="22303C">
+                <a:alpha val="12000"/>
+              </a:srgbClr>
+            </a:outerShdw>
+          </a:effectLst>
+        </p:spPr>
+        <p:txBody>
+          <a:bodyPr/>
+          <a:p/>
+        </p:txBody>
+      </p:sp>
+      <p:sp>
+        <p:nvSpPr>
+          <p:cNvPr id="7" name="Text 5"/>
+          <p:cNvSpPr/>
+          <p:nvPr/>
+        </p:nvSpPr>
+        <p:spPr>
+          <a:xfrm>
+            <a:off x="7439376" y="2578608"/>
+            <a:ext cx="3965936" cy="457200"/>
+          </a:xfrm>
+          <a:prstGeom prst="rect">
+            <a:avLst/>
+          </a:prstGeom>
+          <a:noFill/>
+          <a:ln/>
+        </p:spPr>
+        <p:txBody>
+          <a:bodyPr wrap="square" lIns="0" tIns="0" rIns="0" bIns="0" rtlCol="0" anchor="ctr"/>
+          <a:lstStyle/>
+          <a:p>
+            <a:pPr indent="0" marL="0">
+              <a:buNone/>
+            </a:pPr>
+            <a:r>
+              <a:rPr lang="en-US" sz="1500" b="1" dirty="0">
+                <a:solidFill>
+                  <a:srgbClr val="1565C0"/>
+                </a:solidFill>
+                <a:latin typeface="Calibri" pitchFamily="34" charset="0"/>
+                <a:ea typeface="Calibri" pitchFamily="34" charset="-122"/>
+                <a:cs typeface="Calibri" pitchFamily="34" charset="-120"/>
+              </a:rPr>
+              <a:t>ANSWER  </a:t>
+            </a:r>
+            <a:pPr indent="0" marL="0">
+              <a:buNone/>
+            </a:pPr>
+            <a:r>
+              <a:rPr lang="en-US" sz="1500" b="1" dirty="0">
+                <a:solidFill>
+                  <a:srgbClr val="1B2A38"/>
+                </a:solidFill>
+                <a:latin typeface="Calibri" pitchFamily="34" charset="0"/>
+                <a:ea typeface="Calibri" pitchFamily="34" charset="-122"/>
+                <a:cs typeface="Calibri" pitchFamily="34" charset="-120"/>
+              </a:rPr>
+              <a:t>B — Elevated osmolal gap</a:t>
+            </a:r>
+            <a:endParaRPr lang="en-US" sz="1500" dirty="0"/>
+          </a:p>
+        </p:txBody>
+      </p:sp>
+      <p:sp>
+        <p:nvSpPr>
+          <p:cNvPr id="8" name="Text 6"/>
+          <p:cNvSpPr/>
+          <p:nvPr/>
+        </p:nvSpPr>
+        <p:spPr>
+          <a:xfrm>
+            <a:off x="7439376" y="3127248"/>
+            <a:ext cx="3947648" cy="2377440"/>
+          </a:xfrm>
+          <a:prstGeom prst="rect">
+            <a:avLst/>
+          </a:prstGeom>
+          <a:noFill/>
+          <a:ln/>
+        </p:spPr>
+        <p:txBody>
+          <a:bodyPr wrap="square" lIns="0" tIns="0" rIns="0" bIns="0" rtlCol="0" anchor="t"/>
+          <a:lstStyle/>
+          <a:p>
+            <a:pPr algn="l" indent="0" marL="0">
+              <a:lnSpc>
+                <a:spcPct val="108000"/>
+              </a:lnSpc>
+              <a:buNone/>
+            </a:pPr>
+            <a:r>
+              <a:rPr lang="en-US" sz="1250" dirty="0">
+                <a:solidFill>
+                  <a:srgbClr val="33444F"/>
+                </a:solidFill>
+                <a:latin typeface="Calibri" pitchFamily="34" charset="0"/>
+                <a:ea typeface="Calibri" pitchFamily="34" charset="-122"/>
+                <a:cs typeface="Calibri" pitchFamily="34" charset="-120"/>
+              </a:rPr>
+              <a:t>The parent alcohol is osmotically active, raising the osmolal gap early; the anion gap rises later as it is metabolized.</a:t>
+            </a:r>
+            <a:endParaRPr lang="en-US" sz="1250" dirty="0"/>
+          </a:p>
+        </p:txBody>
+      </p:sp>
+      <p:sp>
+        <p:nvSpPr>
+          <p:cNvPr id="9" name="Text 7"/>
+          <p:cNvSpPr/>
+          <p:nvPr/>
+        </p:nvSpPr>
+        <p:spPr>
+          <a:xfrm>
+            <a:off x="566928" y="6473952"/>
+            <a:ext cx="7772400" cy="274320"/>
+          </a:xfrm>
+          <a:prstGeom prst="rect">
+            <a:avLst/>
+          </a:prstGeom>
+          <a:noFill/>
+          <a:ln/>
+        </p:spPr>
+        <p:txBody>
+          <a:bodyPr wrap="square" lIns="0" tIns="0" rIns="0" bIns="0" rtlCol="0" anchor="ctr"/>
+          <a:lstStyle/>
+          <a:p>
+            <a:pPr algn="l" indent="0" marL="0">
+              <a:buNone/>
+            </a:pPr>
+            <a:r>
+              <a:rPr lang="en-US" sz="850" dirty="0">
+                <a:solidFill>
+                  <a:srgbClr val="9AA8B4"/>
+                </a:solidFill>
+                <a:latin typeface="Calibri" pitchFamily="34" charset="0"/>
+                <a:ea typeface="Calibri" pitchFamily="34" charset="-122"/>
+                <a:cs typeface="Calibri" pitchFamily="34" charset="-120"/>
+              </a:rPr>
+              <a:t>Makassed General Hospital  ·  Department of Laboratory Medicine</a:t>
+            </a:r>
+            <a:endParaRPr lang="en-US" sz="850" dirty="0"/>
+          </a:p>
+        </p:txBody>
+      </p:sp>
+      <p:sp>
+        <p:nvSpPr>
+          <p:cNvPr id="10" name="Text 8"/>
+          <p:cNvSpPr/>
+          <p:nvPr/>
+        </p:nvSpPr>
+        <p:spPr>
+          <a:xfrm>
+            <a:off x="9814255" y="6473952"/>
+            <a:ext cx="1828800" cy="274320"/>
+          </a:xfrm>
+          <a:prstGeom prst="rect">
+            <a:avLst/>
+          </a:prstGeom>
+          <a:noFill/>
+          <a:ln/>
+        </p:spPr>
+        <p:txBody>
+          <a:bodyPr wrap="square" lIns="0" tIns="0" rIns="0" bIns="0" rtlCol="0" anchor="ctr"/>
+          <a:lstStyle/>
+          <a:p>
+            <a:pPr algn="r" indent="0" marL="0">
+              <a:buNone/>
+            </a:pPr>
+            <a:r>
+              <a:rPr lang="en-US" sz="850" dirty="0">
+                <a:solidFill>
+                  <a:srgbClr val="9AA8B4"/>
+                </a:solidFill>
+                <a:latin typeface="Calibri" pitchFamily="34" charset="0"/>
+                <a:ea typeface="Calibri" pitchFamily="34" charset="-122"/>
+                <a:cs typeface="Calibri" pitchFamily="34" charset="-120"/>
+              </a:rPr>
+              <a:t>CP Lecture Series</a:t>
+            </a:r>
+            <a:pPr algn="r" indent="0" marL="0">
+              <a:buNone/>
+            </a:pPr>
+            <a:r>
+              <a:rPr lang="en-US" sz="850" dirty="0">
+                <a:solidFill>
+                  <a:srgbClr val="DCE4EC"/>
+                </a:solidFill>
+                <a:latin typeface="Calibri" pitchFamily="34" charset="0"/>
+                <a:ea typeface="Calibri" pitchFamily="34" charset="-122"/>
+                <a:cs typeface="Calibri" pitchFamily="34" charset="-120"/>
+              </a:rPr>
+              <a:t>   ·   </a:t>
+            </a:r>
+            <a:pPr algn="r" indent="0" marL="0">
+              <a:buNone/>
+            </a:pPr>
+            <a:r>
+              <a:rPr lang="en-US" sz="850" b="1" dirty="0">
+                <a:solidFill>
+                  <a:srgbClr val="1565C0"/>
+                </a:solidFill>
+                <a:latin typeface="Calibri" pitchFamily="34" charset="0"/>
+                <a:ea typeface="Calibri" pitchFamily="34" charset="-122"/>
+                <a:cs typeface="Calibri" pitchFamily="34" charset="-120"/>
+              </a:rPr>
+              <a:t>18</a:t>
+            </a:r>
+            <a:endParaRPr lang="en-US" sz="850" dirty="0"/>
+          </a:p>
+        </p:txBody>
+      </p:sp>
+    </p:spTree>
+  </p:cSld>
+  <p:clrMapOvr>
+    <a:masterClrMapping/>
+  </p:clrMapOvr>
+</p:sld>
+</file>
+
+<file path=ppt/slides/slide29.xml><?xml version="1.0" encoding="utf-8"?>
+<p:sld xmlns:a="http://schemas.openxmlformats.org/drawingml/2006/main" xmlns:p="http://schemas.openxmlformats.org/presentationml/2006/main" xmlns:r="http://schemas.openxmlformats.org/officeDocument/2006/relationships">
+  <p:cSld>
+    <p:spTree>
+      <p:nvGrpSpPr>
+        <p:cNvPr id="1" name=""/>
+        <p:cNvGrpSpPr/>
+        <p:nvPr/>
+      </p:nvGrpSpPr>
+      <p:grpSpPr/>
+      <p:sp>
+        <p:nvSpPr>
+          <p:cNvPr id="2" name="Text 0"/>
+          <p:cNvSpPr/>
+          <p:nvPr/>
+        </p:nvSpPr>
+        <p:spPr>
+          <a:xfrm>
+            <a:off x="566928" y="329184"/>
+            <a:ext cx="10515600" cy="310896"/>
+          </a:xfrm>
+          <a:prstGeom prst="rect">
+            <a:avLst/>
+          </a:prstGeom>
+          <a:noFill/>
+          <a:ln/>
+        </p:spPr>
+        <p:txBody>
+          <a:bodyPr wrap="square" lIns="0" tIns="0" rIns="0" bIns="0" rtlCol="0" anchor="ctr"/>
+          <a:lstStyle/>
+          <a:p>
+            <a:pPr algn="l" indent="0" marL="0">
+              <a:buNone/>
+            </a:pPr>
+            <a:r>
+              <a:rPr lang="en-US" sz="1100" b="1" spc="150" kern="0" dirty="0">
+                <a:solidFill>
+                  <a:srgbClr val="1565C0"/>
+                </a:solidFill>
+                <a:latin typeface="Calibri" pitchFamily="34" charset="0"/>
+                <a:ea typeface="Calibri" pitchFamily="34" charset="-122"/>
+                <a:cs typeface="Calibri" pitchFamily="34" charset="-120"/>
+              </a:rPr>
+              <a:t>CLINICAL CHEMISTRY   ·   BOARD REVIEW  ·  Q1</a:t>
+            </a:r>
+            <a:endParaRPr lang="en-US" sz="1100" dirty="0"/>
+          </a:p>
+        </p:txBody>
+      </p:sp>
+      <p:sp>
+        <p:nvSpPr>
+          <p:cNvPr id="3" name="Text 1"/>
+          <p:cNvSpPr/>
+          <p:nvPr/>
+        </p:nvSpPr>
+        <p:spPr>
+          <a:xfrm>
+            <a:off x="566928" y="713232"/>
+            <a:ext cx="11064240" cy="749808"/>
+          </a:xfrm>
+          <a:prstGeom prst="rect">
+            <a:avLst/>
+          </a:prstGeom>
+          <a:noFill/>
+          <a:ln/>
+        </p:spPr>
+        <p:txBody>
+          <a:bodyPr wrap="square" lIns="0" tIns="0" rIns="0" bIns="0" rtlCol="0" anchor="ctr"/>
+          <a:lstStyle/>
+          <a:p>
+            <a:pPr algn="l" indent="0" marL="0">
+              <a:buNone/>
+            </a:pPr>
+            <a:r>
+              <a:rPr lang="en-US" sz="2600" b="1" dirty="0">
+                <a:solidFill>
+                  <a:srgbClr val="0E3A5F"/>
+                </a:solidFill>
+                <a:latin typeface="Calibri" pitchFamily="34" charset="0"/>
+                <a:ea typeface="Calibri" pitchFamily="34" charset="-122"/>
+                <a:cs typeface="Calibri" pitchFamily="34" charset="-120"/>
+              </a:rPr>
+              <a:t>Board-Style Review</a:t>
+            </a:r>
+            <a:endParaRPr lang="en-US" sz="2600" dirty="0"/>
+          </a:p>
+        </p:txBody>
+      </p:sp>
+      <p:sp>
+        <p:nvSpPr>
+          <p:cNvPr id="4" name="Text 2"/>
+          <p:cNvSpPr/>
+          <p:nvPr/>
+        </p:nvSpPr>
+        <p:spPr>
+          <a:xfrm>
+            <a:off x="566928" y="1417320"/>
+            <a:ext cx="11057839" cy="914400"/>
+          </a:xfrm>
+          <a:prstGeom prst="rect">
+            <a:avLst/>
+          </a:prstGeom>
+          <a:noFill/>
+          <a:ln/>
+        </p:spPr>
+        <p:txBody>
+          <a:bodyPr wrap="square" lIns="0" tIns="0" rIns="0" bIns="0" rtlCol="0" anchor="t"/>
+          <a:lstStyle/>
+          <a:p>
+            <a:pPr algn="l" indent="0" marL="0">
+              <a:lnSpc>
+                <a:spcPct val="105000"/>
+              </a:lnSpc>
+              <a:buNone/>
+            </a:pPr>
+            <a:r>
+              <a:rPr lang="en-US" sz="1450" b="1" dirty="0">
+                <a:solidFill>
+                  <a:srgbClr val="1B2A38"/>
+                </a:solidFill>
+                <a:latin typeface="Calibri" pitchFamily="34" charset="0"/>
+                <a:ea typeface="Calibri" pitchFamily="34" charset="-122"/>
+                <a:cs typeface="Calibri" pitchFamily="34" charset="-120"/>
+              </a:rPr>
+              <a:t>Metabolic acidosis with HCO₃ 12 and PaCO₂ 38 (Winter’s predicts 24–28). This indicates:</a:t>
+            </a:r>
+            <a:endParaRPr lang="en-US" sz="1450" dirty="0"/>
+          </a:p>
+        </p:txBody>
+      </p:sp>
+      <p:sp>
+        <p:nvSpPr>
+          <p:cNvPr id="5" name="Text 3"/>
+          <p:cNvSpPr/>
+          <p:nvPr/>
+        </p:nvSpPr>
+        <p:spPr>
+          <a:xfrm>
+            <a:off x="658368" y="2395728"/>
+            <a:ext cx="6192390" cy="3017520"/>
+          </a:xfrm>
+          <a:prstGeom prst="rect">
+            <a:avLst/>
+          </a:prstGeom>
+          <a:noFill/>
+          <a:ln/>
+        </p:spPr>
+        <p:txBody>
+          <a:bodyPr wrap="square" lIns="0" tIns="0" rIns="0" bIns="0" rtlCol="0" anchor="t"/>
+          <a:lstStyle/>
+          <a:p>
+            <a:pPr algn="l" indent="0" marL="0">
+              <a:spcAft>
+                <a:spcPts val="600"/>
+              </a:spcAft>
+              <a:buNone/>
+            </a:pPr>
+            <a:r>
+              <a:rPr lang="en-US" sz="1350" dirty="0">
+                <a:solidFill>
+                  <a:srgbClr val="33444F"/>
+                </a:solidFill>
+                <a:latin typeface="Calibri" pitchFamily="34" charset="0"/>
+                <a:ea typeface="Calibri" pitchFamily="34" charset="-122"/>
+                <a:cs typeface="Calibri" pitchFamily="34" charset="-120"/>
+              </a:rPr>
+              <a:t>A. Appropriate compensation</a:t>
+            </a:r>
+            <a:endParaRPr lang="en-US" sz="1350" dirty="0"/>
+          </a:p>
+          <a:p>
+            <a:pPr algn="l" indent="0" marL="0">
+              <a:spcAft>
+                <a:spcPts val="600"/>
+              </a:spcAft>
+              <a:buNone/>
+            </a:pPr>
+            <a:r>
+              <a:rPr lang="en-US" sz="1350" b="1" dirty="0">
+                <a:solidFill>
+                  <a:srgbClr val="0D4A92"/>
+                </a:solidFill>
+                <a:latin typeface="Calibri" pitchFamily="34" charset="0"/>
+                <a:ea typeface="Calibri" pitchFamily="34" charset="-122"/>
+                <a:cs typeface="Calibri" pitchFamily="34" charset="-120"/>
+              </a:rPr>
+              <a:t>B. Concurrent respiratory acidosis (inadequate compensation)</a:t>
+            </a:r>
+            <a:endParaRPr lang="en-US" sz="1350" dirty="0"/>
+          </a:p>
+          <a:p>
+            <a:pPr algn="l" indent="0" marL="0">
+              <a:spcAft>
+                <a:spcPts val="600"/>
+              </a:spcAft>
+              <a:buNone/>
+            </a:pPr>
+            <a:r>
+              <a:rPr lang="en-US" sz="1350" dirty="0">
+                <a:solidFill>
+                  <a:srgbClr val="33444F"/>
+                </a:solidFill>
+                <a:latin typeface="Calibri" pitchFamily="34" charset="0"/>
+                <a:ea typeface="Calibri" pitchFamily="34" charset="-122"/>
+                <a:cs typeface="Calibri" pitchFamily="34" charset="-120"/>
+              </a:rPr>
+              <a:t>C. Concurrent respiratory alkalosis</a:t>
+            </a:r>
+            <a:endParaRPr lang="en-US" sz="1350" dirty="0"/>
+          </a:p>
+          <a:p>
+            <a:pPr algn="l" indent="0" marL="0">
+              <a:spcAft>
+                <a:spcPts val="600"/>
+              </a:spcAft>
+              <a:buNone/>
+            </a:pPr>
+            <a:r>
+              <a:rPr lang="en-US" sz="1350" dirty="0">
+                <a:solidFill>
+                  <a:srgbClr val="33444F"/>
+                </a:solidFill>
+                <a:latin typeface="Calibri" pitchFamily="34" charset="0"/>
+                <a:ea typeface="Calibri" pitchFamily="34" charset="-122"/>
+                <a:cs typeface="Calibri" pitchFamily="34" charset="-120"/>
+              </a:rPr>
+              <a:t>D. Metabolic alkalosis</a:t>
+            </a:r>
+            <a:endParaRPr lang="en-US" sz="1350" dirty="0"/>
+          </a:p>
+          <a:p>
+            <a:pPr algn="l" indent="0" marL="0">
+              <a:spcAft>
+                <a:spcPts val="600"/>
+              </a:spcAft>
+              <a:buNone/>
+            </a:pPr>
+            <a:r>
+              <a:rPr lang="en-US" sz="1350" dirty="0">
+                <a:solidFill>
+                  <a:srgbClr val="33444F"/>
+                </a:solidFill>
+                <a:latin typeface="Calibri" pitchFamily="34" charset="0"/>
+                <a:ea typeface="Calibri" pitchFamily="34" charset="-122"/>
+                <a:cs typeface="Calibri" pitchFamily="34" charset="-120"/>
+              </a:rPr>
+              <a:t>E. No disorder</a:t>
+            </a:r>
+            <a:endParaRPr lang="en-US" sz="1350" dirty="0"/>
+          </a:p>
+        </p:txBody>
+      </p:sp>
+      <p:sp>
+        <p:nvSpPr>
+          <p:cNvPr id="6" name="Shape 4"/>
+          <p:cNvSpPr/>
+          <p:nvPr/>
+        </p:nvSpPr>
+        <p:spPr>
+          <a:xfrm>
+            <a:off x="7201632" y="2395728"/>
+            <a:ext cx="4423136" cy="3246120"/>
+          </a:xfrm>
+          <a:prstGeom prst="roundRect">
+            <a:avLst>
+              <a:gd name="adj" fmla="val 2535"/>
+            </a:avLst>
+          </a:prstGeom>
+          <a:solidFill>
+            <a:srgbClr val="E7EFFA"/>
+          </a:solidFill>
+          <a:ln/>
+          <a:effectLst>
+            <a:outerShdw sx="100000" sy="100000" kx="0" ky="0" algn="bl" rotWithShape="0" blurRad="88900" dist="25400" dir="5400000">
+              <a:srgbClr val="22303C">
+                <a:alpha val="12000"/>
+              </a:srgbClr>
+            </a:outerShdw>
+          </a:effectLst>
+        </p:spPr>
+        <p:txBody>
+          <a:bodyPr/>
+          <a:p/>
+        </p:txBody>
+      </p:sp>
+      <p:sp>
+        <p:nvSpPr>
+          <p:cNvPr id="7" name="Text 5"/>
+          <p:cNvSpPr/>
+          <p:nvPr/>
+        </p:nvSpPr>
+        <p:spPr>
+          <a:xfrm>
+            <a:off x="7439376" y="2578608"/>
+            <a:ext cx="3965936" cy="457200"/>
+          </a:xfrm>
+          <a:prstGeom prst="rect">
+            <a:avLst/>
+          </a:prstGeom>
+          <a:noFill/>
+          <a:ln/>
+        </p:spPr>
+        <p:txBody>
+          <a:bodyPr wrap="square" lIns="0" tIns="0" rIns="0" bIns="0" rtlCol="0" anchor="ctr"/>
+          <a:lstStyle/>
+          <a:p>
+            <a:pPr indent="0" marL="0">
+              <a:buNone/>
+            </a:pPr>
+            <a:r>
+              <a:rPr lang="en-US" sz="1500" b="1" dirty="0">
+                <a:solidFill>
+                  <a:srgbClr val="1565C0"/>
+                </a:solidFill>
+                <a:latin typeface="Calibri" pitchFamily="34" charset="0"/>
+                <a:ea typeface="Calibri" pitchFamily="34" charset="-122"/>
+                <a:cs typeface="Calibri" pitchFamily="34" charset="-120"/>
+              </a:rPr>
+              <a:t>ANSWER  </a:t>
+            </a:r>
+            <a:pPr indent="0" marL="0">
+              <a:buNone/>
+            </a:pPr>
+            <a:r>
+              <a:rPr lang="en-US" sz="1500" b="1" dirty="0">
+                <a:solidFill>
+                  <a:srgbClr val="1B2A38"/>
+                </a:solidFill>
+                <a:latin typeface="Calibri" pitchFamily="34" charset="0"/>
+                <a:ea typeface="Calibri" pitchFamily="34" charset="-122"/>
+                <a:cs typeface="Calibri" pitchFamily="34" charset="-120"/>
+              </a:rPr>
+              <a:t>B — Concurrent respiratory acidosis</a:t>
+            </a:r>
+            <a:endParaRPr lang="en-US" sz="1500" dirty="0"/>
+          </a:p>
+        </p:txBody>
+      </p:sp>
+      <p:sp>
+        <p:nvSpPr>
+          <p:cNvPr id="8" name="Text 6"/>
+          <p:cNvSpPr/>
+          <p:nvPr/>
+        </p:nvSpPr>
+        <p:spPr>
+          <a:xfrm>
+            <a:off x="7439376" y="3127248"/>
+            <a:ext cx="3947648" cy="2377440"/>
+          </a:xfrm>
+          <a:prstGeom prst="rect">
+            <a:avLst/>
+          </a:prstGeom>
+          <a:noFill/>
+          <a:ln/>
+        </p:spPr>
+        <p:txBody>
+          <a:bodyPr wrap="square" lIns="0" tIns="0" rIns="0" bIns="0" rtlCol="0" anchor="t"/>
+          <a:lstStyle/>
+          <a:p>
+            <a:pPr algn="l" indent="0" marL="0">
+              <a:lnSpc>
+                <a:spcPct val="108000"/>
+              </a:lnSpc>
+              <a:buNone/>
+            </a:pPr>
+            <a:r>
+              <a:rPr lang="en-US" sz="1250" dirty="0">
+                <a:solidFill>
+                  <a:srgbClr val="33444F"/>
+                </a:solidFill>
+                <a:latin typeface="Calibri" pitchFamily="34" charset="0"/>
+                <a:ea typeface="Calibri" pitchFamily="34" charset="-122"/>
+                <a:cs typeface="Calibri" pitchFamily="34" charset="-120"/>
+              </a:rPr>
+              <a:t>Actual PaCO₂ (38) exceeds predicted (24–28) — inadequate respiratory compensation means a superimposed respiratory acidosis.</a:t>
+            </a:r>
+            <a:endParaRPr lang="en-US" sz="1250" dirty="0"/>
+          </a:p>
+        </p:txBody>
+      </p:sp>
+      <p:sp>
+        <p:nvSpPr>
+          <p:cNvPr id="9" name="Text 7"/>
+          <p:cNvSpPr/>
+          <p:nvPr/>
+        </p:nvSpPr>
+        <p:spPr>
+          <a:xfrm>
+            <a:off x="566928" y="6473952"/>
+            <a:ext cx="7772400" cy="274320"/>
+          </a:xfrm>
+          <a:prstGeom prst="rect">
+            <a:avLst/>
+          </a:prstGeom>
+          <a:noFill/>
+          <a:ln/>
+        </p:spPr>
+        <p:txBody>
+          <a:bodyPr wrap="square" lIns="0" tIns="0" rIns="0" bIns="0" rtlCol="0" anchor="ctr"/>
+          <a:lstStyle/>
+          <a:p>
+            <a:pPr algn="l" indent="0" marL="0">
+              <a:buNone/>
+            </a:pPr>
+            <a:r>
+              <a:rPr lang="en-US" sz="850" dirty="0">
+                <a:solidFill>
+                  <a:srgbClr val="9AA8B4"/>
+                </a:solidFill>
+                <a:latin typeface="Calibri" pitchFamily="34" charset="0"/>
+                <a:ea typeface="Calibri" pitchFamily="34" charset="-122"/>
+                <a:cs typeface="Calibri" pitchFamily="34" charset="-120"/>
+              </a:rPr>
+              <a:t>Makassed General Hospital  ·  Department of Laboratory Medicine</a:t>
+            </a:r>
+            <a:endParaRPr lang="en-US" sz="850" dirty="0"/>
+          </a:p>
+        </p:txBody>
+      </p:sp>
+      <p:sp>
+        <p:nvSpPr>
+          <p:cNvPr id="10" name="Text 8"/>
+          <p:cNvSpPr/>
+          <p:nvPr/>
+        </p:nvSpPr>
+        <p:spPr>
+          <a:xfrm>
+            <a:off x="9814255" y="6473952"/>
+            <a:ext cx="1828800" cy="274320"/>
+          </a:xfrm>
+          <a:prstGeom prst="rect">
+            <a:avLst/>
+          </a:prstGeom>
+          <a:noFill/>
+          <a:ln/>
+        </p:spPr>
+        <p:txBody>
+          <a:bodyPr wrap="square" lIns="0" tIns="0" rIns="0" bIns="0" rtlCol="0" anchor="ctr"/>
+          <a:lstStyle/>
+          <a:p>
+            <a:pPr algn="r" indent="0" marL="0">
+              <a:buNone/>
+            </a:pPr>
+            <a:r>
+              <a:rPr lang="en-US" sz="850" dirty="0">
+                <a:solidFill>
+                  <a:srgbClr val="9AA8B4"/>
+                </a:solidFill>
+                <a:latin typeface="Calibri" pitchFamily="34" charset="0"/>
+                <a:ea typeface="Calibri" pitchFamily="34" charset="-122"/>
+                <a:cs typeface="Calibri" pitchFamily="34" charset="-120"/>
+              </a:rPr>
+              <a:t>CP Lecture Series</a:t>
+            </a:r>
+            <a:pPr algn="r" indent="0" marL="0">
+              <a:buNone/>
+            </a:pPr>
+            <a:r>
+              <a:rPr lang="en-US" sz="850" dirty="0">
+                <a:solidFill>
+                  <a:srgbClr val="DCE4EC"/>
+                </a:solidFill>
+                <a:latin typeface="Calibri" pitchFamily="34" charset="0"/>
+                <a:ea typeface="Calibri" pitchFamily="34" charset="-122"/>
+                <a:cs typeface="Calibri" pitchFamily="34" charset="-120"/>
+              </a:rPr>
+              <a:t>   ·   </a:t>
+            </a:r>
+            <a:pPr algn="r" indent="0" marL="0">
+              <a:buNone/>
+            </a:pPr>
+            <a:r>
+              <a:rPr lang="en-US" sz="850" b="1" dirty="0">
+                <a:solidFill>
+                  <a:srgbClr val="1565C0"/>
+                </a:solidFill>
+                <a:latin typeface="Calibri" pitchFamily="34" charset="0"/>
+                <a:ea typeface="Calibri" pitchFamily="34" charset="-122"/>
+                <a:cs typeface="Calibri" pitchFamily="34" charset="-120"/>
+              </a:rPr>
+              <a:t>17</a:t>
+            </a:r>
+            <a:endParaRPr lang="en-US" sz="850" dirty="0"/>
+          </a:p>
+        </p:txBody>
+      </p:sp>
+    </p:spTree>
+  </p:cSld>
+  <p:clrMapOvr>
+    <a:masterClrMapping/>
+  </p:clrMapOvr>
+</p:sld>
+</file>
+
 <file path=ppt/slides/slide3.xml><?xml version="1.0" encoding="utf-8"?>
 <p:sld xmlns:a="http://schemas.openxmlformats.org/drawingml/2006/main" xmlns:r="http://schemas.openxmlformats.org/officeDocument/2006/relationships" xmlns:p="http://schemas.openxmlformats.org/presentationml/2006/main">
   <p:cSld name="Slide 3">
@@ -13373,6 +14981,10 @@
             </a:outerShdw>
           </a:effectLst>
         </p:spPr>
+        <p:txBody>
+          <a:bodyPr/>
+          <a:p/>
+        </p:txBody>
       </p:sp>
       <p:sp>
         <p:nvSpPr>
@@ -13400,6 +15012,10 @@
             </a:outerShdw>
           </a:effectLst>
         </p:spPr>
+        <p:txBody>
+          <a:bodyPr/>
+          <a:p/>
+        </p:txBody>
       </p:sp>
       <p:sp>
         <p:nvSpPr>
@@ -13507,6 +15123,10 @@
             </a:outerShdw>
           </a:effectLst>
         </p:spPr>
+        <p:txBody>
+          <a:bodyPr/>
+          <a:p/>
+        </p:txBody>
       </p:sp>
       <p:sp>
         <p:nvSpPr>
@@ -13534,6 +15154,10 @@
             </a:outerShdw>
           </a:effectLst>
         </p:spPr>
+        <p:txBody>
+          <a:bodyPr/>
+          <a:p/>
+        </p:txBody>
       </p:sp>
       <p:sp>
         <p:nvSpPr>
@@ -13641,6 +15265,10 @@
             </a:outerShdw>
           </a:effectLst>
         </p:spPr>
+        <p:txBody>
+          <a:bodyPr/>
+          <a:p/>
+        </p:txBody>
       </p:sp>
       <p:sp>
         <p:nvSpPr>
@@ -13668,6 +15296,10 @@
             </a:outerShdw>
           </a:effectLst>
         </p:spPr>
+        <p:txBody>
+          <a:bodyPr/>
+          <a:p/>
+        </p:txBody>
       </p:sp>
       <p:sp>
         <p:nvSpPr>
@@ -13775,6 +15407,10 @@
             </a:outerShdw>
           </a:effectLst>
         </p:spPr>
+        <p:txBody>
+          <a:bodyPr/>
+          <a:p/>
+        </p:txBody>
       </p:sp>
       <p:sp>
         <p:nvSpPr>
@@ -13802,6 +15438,10 @@
             </a:outerShdw>
           </a:effectLst>
         </p:spPr>
+        <p:txBody>
+          <a:bodyPr/>
+          <a:p/>
+        </p:txBody>
       </p:sp>
       <p:sp>
         <p:nvSpPr>
@@ -13909,6 +15549,10 @@
             </a:outerShdw>
           </a:effectLst>
         </p:spPr>
+        <p:txBody>
+          <a:bodyPr/>
+          <a:p/>
+        </p:txBody>
       </p:sp>
       <p:sp>
         <p:nvSpPr>
@@ -13936,6 +15580,10 @@
             </a:outerShdw>
           </a:effectLst>
         </p:spPr>
+        <p:txBody>
+          <a:bodyPr/>
+          <a:p/>
+        </p:txBody>
       </p:sp>
       <p:sp>
         <p:nvSpPr>
@@ -14043,6 +15691,10 @@
             </a:outerShdw>
           </a:effectLst>
         </p:spPr>
+        <p:txBody>
+          <a:bodyPr/>
+          <a:p/>
+        </p:txBody>
       </p:sp>
       <p:sp>
         <p:nvSpPr>
@@ -14070,6 +15722,10 @@
             </a:outerShdw>
           </a:effectLst>
         </p:spPr>
+        <p:txBody>
+          <a:bodyPr/>
+          <a:p/>
+        </p:txBody>
       </p:sp>
       <p:sp>
         <p:nvSpPr>
@@ -14393,6 +16049,10 @@
             </a:outerShdw>
           </a:effectLst>
         </p:spPr>
+        <p:txBody>
+          <a:bodyPr/>
+          <a:p/>
+        </p:txBody>
       </p:sp>
       <p:sp>
         <p:nvSpPr>
@@ -14420,6 +16080,10 @@
             </a:outerShdw>
           </a:effectLst>
         </p:spPr>
+        <p:txBody>
+          <a:bodyPr/>
+          <a:p/>
+        </p:txBody>
       </p:sp>
       <p:sp>
         <p:nvSpPr>
@@ -14534,6 +16198,10 @@
           </a:solidFill>
           <a:ln/>
         </p:spPr>
+        <p:txBody>
+          <a:bodyPr/>
+          <a:p/>
+        </p:txBody>
       </p:sp>
       <p:sp>
         <p:nvSpPr>
@@ -14561,6 +16229,10 @@
             </a:outerShdw>
           </a:effectLst>
         </p:spPr>
+        <p:txBody>
+          <a:bodyPr/>
+          <a:p/>
+        </p:txBody>
       </p:sp>
       <p:sp>
         <p:nvSpPr>
@@ -14682,6 +16354,10 @@
             </a:outerShdw>
           </a:effectLst>
         </p:spPr>
+        <p:txBody>
+          <a:bodyPr/>
+          <a:p/>
+        </p:txBody>
       </p:sp>
       <p:sp>
         <p:nvSpPr>
@@ -14709,6 +16385,10 @@
             </a:outerShdw>
           </a:effectLst>
         </p:spPr>
+        <p:txBody>
+          <a:bodyPr/>
+          <a:p/>
+        </p:txBody>
       </p:sp>
       <p:sp>
         <p:nvSpPr>
@@ -14823,6 +16503,10 @@
           </a:solidFill>
           <a:ln/>
         </p:spPr>
+        <p:txBody>
+          <a:bodyPr/>
+          <a:p/>
+        </p:txBody>
       </p:sp>
       <p:sp>
         <p:nvSpPr>
@@ -14850,6 +16534,10 @@
             </a:outerShdw>
           </a:effectLst>
         </p:spPr>
+        <p:txBody>
+          <a:bodyPr/>
+          <a:p/>
+        </p:txBody>
       </p:sp>
       <p:sp>
         <p:nvSpPr>
@@ -14971,6 +16659,10 @@
             </a:outerShdw>
           </a:effectLst>
         </p:spPr>
+        <p:txBody>
+          <a:bodyPr/>
+          <a:p/>
+        </p:txBody>
       </p:sp>
       <p:sp>
         <p:nvSpPr>
@@ -14998,6 +16690,10 @@
             </a:outerShdw>
           </a:effectLst>
         </p:spPr>
+        <p:txBody>
+          <a:bodyPr/>
+          <a:p/>
+        </p:txBody>
       </p:sp>
       <p:sp>
         <p:nvSpPr>
@@ -15236,6 +16932,10 @@
           </a:solidFill>
           <a:ln/>
         </p:spPr>
+        <p:txBody>
+          <a:bodyPr/>
+          <a:p/>
+        </p:txBody>
       </p:sp>
       <p:sp>
         <p:nvSpPr>
@@ -15258,6 +16958,10 @@
           </a:solidFill>
           <a:ln/>
         </p:spPr>
+        <p:txBody>
+          <a:bodyPr/>
+          <a:p/>
+        </p:txBody>
       </p:sp>
       <p:sp>
         <p:nvSpPr>
@@ -15514,6 +17218,10 @@
             </a:outerShdw>
           </a:effectLst>
         </p:spPr>
+        <p:txBody>
+          <a:bodyPr/>
+          <a:p/>
+        </p:txBody>
       </p:sp>
       <p:sp>
         <p:nvSpPr>
@@ -15688,6 +17396,10 @@
             </a:outerShdw>
           </a:effectLst>
         </p:spPr>
+        <p:txBody>
+          <a:bodyPr/>
+          <a:p/>
+        </p:txBody>
       </p:sp>
       <p:sp>
         <p:nvSpPr>
@@ -16078,6 +17790,10 @@
             </a:outerShdw>
           </a:effectLst>
         </p:spPr>
+        <p:txBody>
+          <a:bodyPr/>
+          <a:p/>
+        </p:txBody>
       </p:sp>
       <p:sp>
         <p:nvSpPr>
@@ -16252,6 +17968,10 @@
             </a:outerShdw>
           </a:effectLst>
         </p:spPr>
+        <p:txBody>
+          <a:bodyPr/>
+          <a:p/>
+        </p:txBody>
       </p:sp>
       <p:sp>
         <p:nvSpPr>
@@ -16557,6 +18277,10 @@
           </a:solidFill>
           <a:ln/>
         </p:spPr>
+        <p:txBody>
+          <a:bodyPr/>
+          <a:p/>
+        </p:txBody>
       </p:sp>
       <p:sp>
         <p:nvSpPr>
@@ -16579,6 +18303,10 @@
           </a:solidFill>
           <a:ln/>
         </p:spPr>
+        <p:txBody>
+          <a:bodyPr/>
+          <a:p/>
+        </p:txBody>
       </p:sp>
       <p:sp>
         <p:nvSpPr>
@@ -16840,6 +18568,10 @@
             </a:outerShdw>
           </a:effectLst>
         </p:spPr>
+        <p:txBody>
+          <a:bodyPr/>
+          <a:p/>
+        </p:txBody>
       </p:sp>
       <p:pic>
         <p:nvPicPr>
